--- a/output/wordlabs-gram-3day.pptx
+++ b/output/wordlabs-gram-3day.pptx
@@ -6071,7 +6071,7 @@
                 <a:ea typeface="Calibri" pitchFamily="34" charset="-122"/>
                 <a:cs typeface="Calibri" pitchFamily="34" charset="-120"/>
               </a:rPr>
-              <a:t> to explain the </a:t>
+              <a:t> to explain your </a:t>
             </a:r>
             <a:pPr algn="l" indent="0" marL="0">
               <a:buNone/>
@@ -6088,7 +6088,7 @@
                 <a:ea typeface="Calibri" pitchFamily="34" charset="-122"/>
                 <a:cs typeface="Calibri" pitchFamily="34" charset="-120"/>
               </a:rPr>
-              <a:t>anagram</a:t>
+              <a:t>program</a:t>
             </a:r>
             <a:pPr algn="l" indent="0" marL="0">
               <a:buNone/>
@@ -6102,7 +6102,7 @@
                 <a:ea typeface="Calibri" pitchFamily="34" charset="-122"/>
                 <a:cs typeface="Calibri" pitchFamily="34" charset="-120"/>
               </a:rPr>
-              <a:t> puzzle you solved?</a:t>
+              <a:t> to the class?</a:t>
             </a:r>
             <a:endParaRPr lang="en-US" sz="1800" dirty="0"/>
           </a:p>
@@ -6385,7 +6385,7 @@
                 <a:ea typeface="Trebuchet MS" pitchFamily="34" charset="-122"/>
                 <a:cs typeface="Trebuchet MS" pitchFamily="34" charset="-120"/>
               </a:rPr>
-              <a:t>anagram</a:t>
+              <a:t>program</a:t>
             </a:r>
             <a:endParaRPr lang="en-US" sz="1400" dirty="0"/>
           </a:p>
@@ -11468,7 +11468,7 @@
                 <a:ea typeface="Trebuchet MS" pitchFamily="34" charset="-122"/>
                 <a:cs typeface="Trebuchet MS" pitchFamily="34" charset="-120"/>
               </a:rPr>
-              <a:t>anagram</a:t>
+              <a:t>program</a:t>
             </a:r>
             <a:endParaRPr lang="en-US" sz="2800" dirty="0"/>
           </a:p>
@@ -12295,7 +12295,7 @@
                 <a:ea typeface="Trebuchet MS" pitchFamily="34" charset="-122"/>
                 <a:cs typeface="Trebuchet MS" pitchFamily="34" charset="-120"/>
               </a:rPr>
-              <a:t>anagram</a:t>
+              <a:t>program</a:t>
             </a:r>
             <a:endParaRPr lang="en-US" sz="2800" dirty="0"/>
           </a:p>
@@ -12434,7 +12434,7 @@
                 <a:ea typeface="Trebuchet MS" pitchFamily="34" charset="-122"/>
                 <a:cs typeface="Trebuchet MS" pitchFamily="34" charset="-120"/>
               </a:rPr>
-              <a:t>ana</a:t>
+              <a:t>pro</a:t>
             </a:r>
             <a:endParaRPr lang="en-US" sz="1300" dirty="0"/>
           </a:p>
@@ -12473,7 +12473,7 @@
                 <a:ea typeface="Calibri" pitchFamily="34" charset="-122"/>
                 <a:cs typeface="Calibri" pitchFamily="34" charset="-120"/>
               </a:rPr>
-              <a:t>again, back, up</a:t>
+              <a:t>before, forward</a:t>
             </a:r>
             <a:endParaRPr lang="en-US" sz="850" dirty="0"/>
           </a:p>
@@ -12585,7 +12585,7 @@
                 <a:ea typeface="Calibri" pitchFamily="34" charset="-122"/>
                 <a:cs typeface="Calibri" pitchFamily="34" charset="-120"/>
               </a:rPr>
-              <a:t>written, drawn</a:t>
+              <a:t>written, recorded</a:t>
             </a:r>
             <a:endParaRPr lang="en-US" sz="850" dirty="0"/>
           </a:p>
@@ -13280,7 +13280,7 @@
                 <a:ea typeface="Trebuchet MS" pitchFamily="34" charset="-122"/>
                 <a:cs typeface="Trebuchet MS" pitchFamily="34" charset="-120"/>
               </a:rPr>
-              <a:t>anagram</a:t>
+              <a:t>program</a:t>
             </a:r>
             <a:endParaRPr lang="en-US" sz="2800" dirty="0"/>
           </a:p>
@@ -13419,7 +13419,7 @@
                 <a:ea typeface="Trebuchet MS" pitchFamily="34" charset="-122"/>
                 <a:cs typeface="Trebuchet MS" pitchFamily="34" charset="-120"/>
               </a:rPr>
-              <a:t>ana</a:t>
+              <a:t>pro</a:t>
             </a:r>
             <a:endParaRPr lang="en-US" sz="1300" dirty="0"/>
           </a:p>
@@ -13458,7 +13458,7 @@
                 <a:ea typeface="Calibri" pitchFamily="34" charset="-122"/>
                 <a:cs typeface="Calibri" pitchFamily="34" charset="-120"/>
               </a:rPr>
-              <a:t>again, back, up</a:t>
+              <a:t>before, forward</a:t>
             </a:r>
             <a:endParaRPr lang="en-US" sz="850" dirty="0"/>
           </a:p>
@@ -13570,7 +13570,7 @@
                 <a:ea typeface="Calibri" pitchFamily="34" charset="-122"/>
                 <a:cs typeface="Calibri" pitchFamily="34" charset="-120"/>
               </a:rPr>
-              <a:t>written, drawn</a:t>
+              <a:t>written, recorded</a:t>
             </a:r>
             <a:endParaRPr lang="en-US" sz="850" dirty="0"/>
           </a:p>
@@ -13677,7 +13677,7 @@
         </p:nvSpPr>
         <p:spPr>
           <a:xfrm>
-            <a:off x="2313432" y="3364992"/>
+            <a:off x="2999232" y="3364992"/>
             <a:ext cx="1645920" cy="475488"/>
           </a:xfrm>
           <a:prstGeom prst="rect">
@@ -13704,7 +13704,7 @@
         </p:nvSpPr>
         <p:spPr>
           <a:xfrm>
-            <a:off x="2313432" y="3364992"/>
+            <a:off x="2999232" y="3364992"/>
             <a:ext cx="1645920" cy="475488"/>
           </a:xfrm>
           <a:prstGeom prst="rect">
@@ -13729,7 +13729,7 @@
                 <a:ea typeface="Trebuchet MS" pitchFamily="34" charset="-122"/>
                 <a:cs typeface="Trebuchet MS" pitchFamily="34" charset="-120"/>
               </a:rPr>
-              <a:t>an</a:t>
+              <a:t>pro</a:t>
             </a:r>
             <a:endParaRPr lang="en-US" sz="1400" dirty="0"/>
           </a:p>
@@ -13743,8 +13743,8 @@
         </p:nvSpPr>
         <p:spPr>
           <a:xfrm>
-            <a:off x="3959352" y="3364992"/>
-            <a:ext cx="411480" cy="475488"/>
+            <a:off x="4645152" y="3364992"/>
+            <a:ext cx="1097280" cy="475488"/>
           </a:xfrm>
           <a:prstGeom prst="rect">
             <a:avLst/>
@@ -13782,7 +13782,7 @@
         </p:nvSpPr>
         <p:spPr>
           <a:xfrm>
-            <a:off x="4370832" y="3364992"/>
+            <a:off x="5742432" y="3364992"/>
             <a:ext cx="1645920" cy="475488"/>
           </a:xfrm>
           <a:prstGeom prst="rect">
@@ -13809,7 +13809,7 @@
         </p:nvSpPr>
         <p:spPr>
           <a:xfrm>
-            <a:off x="4370832" y="3364992"/>
+            <a:off x="5742432" y="3364992"/>
             <a:ext cx="1645920" cy="475488"/>
           </a:xfrm>
           <a:prstGeom prst="rect">
@@ -13834,7 +13834,7 @@
                 <a:ea typeface="Trebuchet MS" pitchFamily="34" charset="-122"/>
                 <a:cs typeface="Trebuchet MS" pitchFamily="34" charset="-120"/>
               </a:rPr>
-              <a:t>a</a:t>
+              <a:t>gram</a:t>
             </a:r>
             <a:endParaRPr lang="en-US" sz="1400" dirty="0"/>
           </a:p>
@@ -13842,119 +13842,80 @@
       </p:sp>
       <p:sp>
         <p:nvSpPr>
-          <p:cNvPr id="30" name="Text 28"/>
-          <p:cNvSpPr/>
-          <p:nvPr/>
-        </p:nvSpPr>
-        <p:spPr>
-          <a:xfrm>
-            <a:off x="6016752" y="3364992"/>
-            <a:ext cx="411480" cy="475488"/>
-          </a:xfrm>
-          <a:prstGeom prst="rect">
-            <a:avLst/>
-          </a:prstGeom>
-          <a:noFill/>
-          <a:ln/>
-        </p:spPr>
-        <p:txBody>
-          <a:bodyPr wrap="square" lIns="0" tIns="0" rIns="0" bIns="0" rtlCol="0" anchor="ctr"/>
-          <a:lstStyle/>
-          <a:p>
-            <a:pPr algn="ctr" indent="0" marL="0">
-              <a:buNone/>
-            </a:pPr>
-            <a:r>
-              <a:rPr lang="en-US" sz="1600" b="1" dirty="0">
-                <a:solidFill>
-                  <a:srgbClr val="0D9488"/>
+          <p:cNvPr id="30" name="Shape 28"/>
+          <p:cNvSpPr/>
+          <p:nvPr/>
+        </p:nvSpPr>
+        <p:spPr>
+          <a:xfrm>
+            <a:off x="365760" y="4096512"/>
+            <a:ext cx="1371600" cy="804672"/>
+          </a:xfrm>
+          <a:prstGeom prst="rect">
+            <a:avLst>
+              <a:gd name="adj" fmla="val 6818"/>
+            </a:avLst>
+          </a:prstGeom>
+          <a:solidFill>
+            <a:srgbClr val="E2E8F0"/>
+          </a:solidFill>
+          <a:ln w="12700">
+            <a:solidFill>
+              <a:srgbClr val="E2E8F0"/>
+            </a:solidFill>
+            <a:prstDash val="solid"/>
+          </a:ln>
+        </p:spPr>
+      </p:sp>
+      <p:sp>
+        <p:nvSpPr>
+          <p:cNvPr id="31" name="Text 29"/>
+          <p:cNvSpPr/>
+          <p:nvPr/>
+        </p:nvSpPr>
+        <p:spPr>
+          <a:xfrm>
+            <a:off x="365760" y="4096512"/>
+            <a:ext cx="1371600" cy="804672"/>
+          </a:xfrm>
+          <a:prstGeom prst="rect">
+            <a:avLst/>
+          </a:prstGeom>
+          <a:noFill/>
+          <a:ln/>
+        </p:spPr>
+        <p:txBody>
+          <a:bodyPr wrap="square" lIns="0" tIns="0" rIns="0" bIns="0" rtlCol="0" anchor="ctr"/>
+          <a:lstStyle/>
+          <a:p>
+            <a:pPr algn="ctr" indent="0" marL="0">
+              <a:buNone/>
+            </a:pPr>
+            <a:r>
+              <a:rPr lang="en-US" sz="1100" b="1" dirty="0">
+                <a:solidFill>
+                  <a:srgbClr val="475569"/>
                 </a:solidFill>
                 <a:latin typeface="Trebuchet MS" pitchFamily="34" charset="0"/>
                 <a:ea typeface="Trebuchet MS" pitchFamily="34" charset="-122"/>
                 <a:cs typeface="Trebuchet MS" pitchFamily="34" charset="-120"/>
               </a:rPr>
-              <a:t>·</a:t>
-            </a:r>
-            <a:endParaRPr lang="en-US" sz="1600" dirty="0"/>
-          </a:p>
-        </p:txBody>
-      </p:sp>
-      <p:sp>
-        <p:nvSpPr>
-          <p:cNvPr id="31" name="Shape 29"/>
-          <p:cNvSpPr/>
-          <p:nvPr/>
-        </p:nvSpPr>
-        <p:spPr>
-          <a:xfrm>
-            <a:off x="6428232" y="3364992"/>
-            <a:ext cx="1645920" cy="475488"/>
-          </a:xfrm>
-          <a:prstGeom prst="rect">
-            <a:avLst>
-              <a:gd name="adj" fmla="val 9615"/>
-            </a:avLst>
-          </a:prstGeom>
-          <a:solidFill>
-            <a:srgbClr val="FFFFFF"/>
-          </a:solidFill>
-          <a:ln w="12700">
-            <a:solidFill>
-              <a:srgbClr val="0D9488"/>
-            </a:solidFill>
-            <a:prstDash val="solid"/>
-          </a:ln>
-        </p:spPr>
-      </p:sp>
-      <p:sp>
-        <p:nvSpPr>
-          <p:cNvPr id="32" name="Text 30"/>
-          <p:cNvSpPr/>
-          <p:nvPr/>
-        </p:nvSpPr>
-        <p:spPr>
-          <a:xfrm>
-            <a:off x="6428232" y="3364992"/>
-            <a:ext cx="1645920" cy="475488"/>
-          </a:xfrm>
-          <a:prstGeom prst="rect">
-            <a:avLst/>
-          </a:prstGeom>
-          <a:noFill/>
-          <a:ln/>
-        </p:spPr>
-        <p:txBody>
-          <a:bodyPr wrap="square" lIns="0" tIns="0" rIns="0" bIns="0" rtlCol="0" anchor="ctr"/>
-          <a:lstStyle/>
-          <a:p>
-            <a:pPr algn="ctr" indent="0" marL="0">
-              <a:buNone/>
-            </a:pPr>
-            <a:r>
-              <a:rPr lang="en-US" sz="1400" b="1" dirty="0">
-                <a:solidFill>
-                  <a:srgbClr val="0D9488"/>
-                </a:solidFill>
-                <a:latin typeface="Trebuchet MS" pitchFamily="34" charset="0"/>
-                <a:ea typeface="Trebuchet MS" pitchFamily="34" charset="-122"/>
-                <a:cs typeface="Trebuchet MS" pitchFamily="34" charset="-120"/>
-              </a:rPr>
-              <a:t>gram</a:t>
-            </a:r>
-            <a:endParaRPr lang="en-US" sz="1400" dirty="0"/>
-          </a:p>
-        </p:txBody>
-      </p:sp>
-      <p:sp>
-        <p:nvSpPr>
-          <p:cNvPr id="33" name="Shape 31"/>
-          <p:cNvSpPr/>
-          <p:nvPr/>
-        </p:nvSpPr>
-        <p:spPr>
-          <a:xfrm>
-            <a:off x="365760" y="4096512"/>
-            <a:ext cx="1371600" cy="804672"/>
+              <a:t>Phonemes</a:t>
+            </a:r>
+            <a:endParaRPr lang="en-US" sz="1100" dirty="0"/>
+          </a:p>
+        </p:txBody>
+      </p:sp>
+      <p:sp>
+        <p:nvSpPr>
+          <p:cNvPr id="32" name="Shape 30"/>
+          <p:cNvSpPr/>
+          <p:nvPr/>
+        </p:nvSpPr>
+        <p:spPr>
+          <a:xfrm>
+            <a:off x="1874520" y="4096512"/>
+            <a:ext cx="6903720" cy="804672"/>
           </a:xfrm>
           <a:prstGeom prst="rect">
             <a:avLst>
@@ -13962,85 +13923,19 @@
             </a:avLst>
           </a:prstGeom>
           <a:solidFill>
-            <a:srgbClr val="E2E8F0"/>
+            <a:srgbClr val="F8FAFC"/>
           </a:solidFill>
           <a:ln w="12700">
             <a:solidFill>
               <a:srgbClr val="E2E8F0"/>
             </a:solidFill>
-            <a:prstDash val="solid"/>
-          </a:ln>
-        </p:spPr>
-      </p:sp>
-      <p:sp>
-        <p:nvSpPr>
-          <p:cNvPr id="34" name="Text 32"/>
-          <p:cNvSpPr/>
-          <p:nvPr/>
-        </p:nvSpPr>
-        <p:spPr>
-          <a:xfrm>
-            <a:off x="365760" y="4096512"/>
-            <a:ext cx="1371600" cy="804672"/>
-          </a:xfrm>
-          <a:prstGeom prst="rect">
-            <a:avLst/>
-          </a:prstGeom>
-          <a:noFill/>
-          <a:ln/>
-        </p:spPr>
-        <p:txBody>
-          <a:bodyPr wrap="square" lIns="0" tIns="0" rIns="0" bIns="0" rtlCol="0" anchor="ctr"/>
-          <a:lstStyle/>
-          <a:p>
-            <a:pPr algn="ctr" indent="0" marL="0">
-              <a:buNone/>
-            </a:pPr>
-            <a:r>
-              <a:rPr lang="en-US" sz="1100" b="1" dirty="0">
-                <a:solidFill>
-                  <a:srgbClr val="475569"/>
-                </a:solidFill>
-                <a:latin typeface="Trebuchet MS" pitchFamily="34" charset="0"/>
-                <a:ea typeface="Trebuchet MS" pitchFamily="34" charset="-122"/>
-                <a:cs typeface="Trebuchet MS" pitchFamily="34" charset="-120"/>
-              </a:rPr>
-              <a:t>Phonemes</a:t>
-            </a:r>
-            <a:endParaRPr lang="en-US" sz="1100" dirty="0"/>
-          </a:p>
-        </p:txBody>
-      </p:sp>
-      <p:sp>
-        <p:nvSpPr>
-          <p:cNvPr id="35" name="Shape 33"/>
-          <p:cNvSpPr/>
-          <p:nvPr/>
-        </p:nvSpPr>
-        <p:spPr>
-          <a:xfrm>
-            <a:off x="1874520" y="4096512"/>
-            <a:ext cx="6903720" cy="804672"/>
-          </a:xfrm>
-          <a:prstGeom prst="rect">
-            <a:avLst>
-              <a:gd name="adj" fmla="val 6818"/>
-            </a:avLst>
-          </a:prstGeom>
-          <a:solidFill>
-            <a:srgbClr val="F8FAFC"/>
-          </a:solidFill>
-          <a:ln w="12700">
-            <a:solidFill>
-              <a:srgbClr val="E2E8F0"/>
-            </a:solidFill>
             <a:prstDash val="dash"/>
           </a:ln>
         </p:spPr>
       </p:sp>
       <p:sp>
         <p:nvSpPr>
-          <p:cNvPr id="36" name="Text 34"/>
+          <p:cNvPr id="33" name="Text 31"/>
           <p:cNvSpPr/>
           <p:nvPr/>
         </p:nvSpPr>
@@ -14767,7 +14662,7 @@
                 <a:ea typeface="Trebuchet MS" pitchFamily="34" charset="-122"/>
                 <a:cs typeface="Trebuchet MS" pitchFamily="34" charset="-120"/>
               </a:rPr>
-              <a:t>anagram</a:t>
+              <a:t>program</a:t>
             </a:r>
             <a:endParaRPr lang="en-US" sz="2800" dirty="0"/>
           </a:p>
@@ -14906,7 +14801,7 @@
                 <a:ea typeface="Trebuchet MS" pitchFamily="34" charset="-122"/>
                 <a:cs typeface="Trebuchet MS" pitchFamily="34" charset="-120"/>
               </a:rPr>
-              <a:t>ana</a:t>
+              <a:t>pro</a:t>
             </a:r>
             <a:endParaRPr lang="en-US" sz="1300" dirty="0"/>
           </a:p>
@@ -14945,7 +14840,7 @@
                 <a:ea typeface="Calibri" pitchFamily="34" charset="-122"/>
                 <a:cs typeface="Calibri" pitchFamily="34" charset="-120"/>
               </a:rPr>
-              <a:t>again, back, up</a:t>
+              <a:t>before, forward</a:t>
             </a:r>
             <a:endParaRPr lang="en-US" sz="850" dirty="0"/>
           </a:p>
@@ -15057,7 +14952,7 @@
                 <a:ea typeface="Calibri" pitchFamily="34" charset="-122"/>
                 <a:cs typeface="Calibri" pitchFamily="34" charset="-120"/>
               </a:rPr>
-              <a:t>written, drawn</a:t>
+              <a:t>written, recorded</a:t>
             </a:r>
             <a:endParaRPr lang="en-US" sz="850" dirty="0"/>
           </a:p>
@@ -15164,7 +15059,7 @@
         </p:nvSpPr>
         <p:spPr>
           <a:xfrm>
-            <a:off x="2313432" y="3364992"/>
+            <a:off x="2999232" y="3364992"/>
             <a:ext cx="1645920" cy="475488"/>
           </a:xfrm>
           <a:prstGeom prst="rect">
@@ -15191,7 +15086,7 @@
         </p:nvSpPr>
         <p:spPr>
           <a:xfrm>
-            <a:off x="2313432" y="3364992"/>
+            <a:off x="2999232" y="3364992"/>
             <a:ext cx="1645920" cy="475488"/>
           </a:xfrm>
           <a:prstGeom prst="rect">
@@ -15216,7 +15111,7 @@
                 <a:ea typeface="Trebuchet MS" pitchFamily="34" charset="-122"/>
                 <a:cs typeface="Trebuchet MS" pitchFamily="34" charset="-120"/>
               </a:rPr>
-              <a:t>an</a:t>
+              <a:t>pro</a:t>
             </a:r>
             <a:endParaRPr lang="en-US" sz="1400" dirty="0"/>
           </a:p>
@@ -15230,8 +15125,8 @@
         </p:nvSpPr>
         <p:spPr>
           <a:xfrm>
-            <a:off x="3959352" y="3364992"/>
-            <a:ext cx="411480" cy="475488"/>
+            <a:off x="4645152" y="3364992"/>
+            <a:ext cx="1097280" cy="475488"/>
           </a:xfrm>
           <a:prstGeom prst="rect">
             <a:avLst/>
@@ -15269,7 +15164,7 @@
         </p:nvSpPr>
         <p:spPr>
           <a:xfrm>
-            <a:off x="4370832" y="3364992"/>
+            <a:off x="5742432" y="3364992"/>
             <a:ext cx="1645920" cy="475488"/>
           </a:xfrm>
           <a:prstGeom prst="rect">
@@ -15296,7 +15191,7 @@
         </p:nvSpPr>
         <p:spPr>
           <a:xfrm>
-            <a:off x="4370832" y="3364992"/>
+            <a:off x="5742432" y="3364992"/>
             <a:ext cx="1645920" cy="475488"/>
           </a:xfrm>
           <a:prstGeom prst="rect">
@@ -15321,7 +15216,7 @@
                 <a:ea typeface="Trebuchet MS" pitchFamily="34" charset="-122"/>
                 <a:cs typeface="Trebuchet MS" pitchFamily="34" charset="-120"/>
               </a:rPr>
-              <a:t>a</a:t>
+              <a:t>gram</a:t>
             </a:r>
             <a:endParaRPr lang="en-US" sz="1400" dirty="0"/>
           </a:p>
@@ -15329,211 +15224,238 @@
       </p:sp>
       <p:sp>
         <p:nvSpPr>
-          <p:cNvPr id="30" name="Text 28"/>
-          <p:cNvSpPr/>
-          <p:nvPr/>
-        </p:nvSpPr>
-        <p:spPr>
-          <a:xfrm>
-            <a:off x="6016752" y="3364992"/>
-            <a:ext cx="411480" cy="475488"/>
-          </a:xfrm>
-          <a:prstGeom prst="rect">
-            <a:avLst/>
-          </a:prstGeom>
-          <a:noFill/>
-          <a:ln/>
-        </p:spPr>
-        <p:txBody>
-          <a:bodyPr wrap="square" lIns="0" tIns="0" rIns="0" bIns="0" rtlCol="0" anchor="ctr"/>
-          <a:lstStyle/>
-          <a:p>
-            <a:pPr algn="ctr" indent="0" marL="0">
-              <a:buNone/>
-            </a:pPr>
-            <a:r>
-              <a:rPr lang="en-US" sz="1600" b="1" dirty="0">
-                <a:solidFill>
-                  <a:srgbClr val="0D9488"/>
+          <p:cNvPr id="30" name="Shape 28"/>
+          <p:cNvSpPr/>
+          <p:nvPr/>
+        </p:nvSpPr>
+        <p:spPr>
+          <a:xfrm>
+            <a:off x="365760" y="4096512"/>
+            <a:ext cx="1371600" cy="804672"/>
+          </a:xfrm>
+          <a:prstGeom prst="rect">
+            <a:avLst>
+              <a:gd name="adj" fmla="val 6818"/>
+            </a:avLst>
+          </a:prstGeom>
+          <a:solidFill>
+            <a:srgbClr val="E2E8F0"/>
+          </a:solidFill>
+          <a:ln w="12700">
+            <a:solidFill>
+              <a:srgbClr val="E2E8F0"/>
+            </a:solidFill>
+            <a:prstDash val="solid"/>
+          </a:ln>
+        </p:spPr>
+      </p:sp>
+      <p:sp>
+        <p:nvSpPr>
+          <p:cNvPr id="31" name="Text 29"/>
+          <p:cNvSpPr/>
+          <p:nvPr/>
+        </p:nvSpPr>
+        <p:spPr>
+          <a:xfrm>
+            <a:off x="365760" y="4096512"/>
+            <a:ext cx="1371600" cy="804672"/>
+          </a:xfrm>
+          <a:prstGeom prst="rect">
+            <a:avLst/>
+          </a:prstGeom>
+          <a:noFill/>
+          <a:ln/>
+        </p:spPr>
+        <p:txBody>
+          <a:bodyPr wrap="square" lIns="0" tIns="0" rIns="0" bIns="0" rtlCol="0" anchor="ctr"/>
+          <a:lstStyle/>
+          <a:p>
+            <a:pPr algn="ctr" indent="0" marL="0">
+              <a:buNone/>
+            </a:pPr>
+            <a:r>
+              <a:rPr lang="en-US" sz="1100" b="1" dirty="0">
+                <a:solidFill>
+                  <a:srgbClr val="475569"/>
                 </a:solidFill>
                 <a:latin typeface="Trebuchet MS" pitchFamily="34" charset="0"/>
                 <a:ea typeface="Trebuchet MS" pitchFamily="34" charset="-122"/>
                 <a:cs typeface="Trebuchet MS" pitchFamily="34" charset="-120"/>
               </a:rPr>
-              <a:t>·</a:t>
-            </a:r>
-            <a:endParaRPr lang="en-US" sz="1600" dirty="0"/>
-          </a:p>
-        </p:txBody>
-      </p:sp>
-      <p:sp>
-        <p:nvSpPr>
-          <p:cNvPr id="31" name="Shape 29"/>
-          <p:cNvSpPr/>
-          <p:nvPr/>
-        </p:nvSpPr>
-        <p:spPr>
-          <a:xfrm>
-            <a:off x="6428232" y="3364992"/>
-            <a:ext cx="1645920" cy="475488"/>
+              <a:t>Phonemes</a:t>
+            </a:r>
+            <a:endParaRPr lang="en-US" sz="1100" dirty="0"/>
+          </a:p>
+        </p:txBody>
+      </p:sp>
+      <p:sp>
+        <p:nvSpPr>
+          <p:cNvPr id="32" name="Shape 30"/>
+          <p:cNvSpPr/>
+          <p:nvPr/>
+        </p:nvSpPr>
+        <p:spPr>
+          <a:xfrm>
+            <a:off x="1874520" y="4096512"/>
+            <a:ext cx="6903720" cy="658368"/>
           </a:xfrm>
           <a:prstGeom prst="rect">
             <a:avLst>
-              <a:gd name="adj" fmla="val 9615"/>
+              <a:gd name="adj" fmla="val 8333"/>
             </a:avLst>
           </a:prstGeom>
           <a:solidFill>
+            <a:srgbClr val="FCE7F3"/>
+          </a:solidFill>
+          <a:ln w="12700">
+            <a:solidFill>
+              <a:srgbClr val="DB2777"/>
+            </a:solidFill>
+            <a:prstDash val="solid"/>
+          </a:ln>
+        </p:spPr>
+      </p:sp>
+      <p:sp>
+        <p:nvSpPr>
+          <p:cNvPr id="33" name="Shape 31"/>
+          <p:cNvSpPr/>
+          <p:nvPr/>
+        </p:nvSpPr>
+        <p:spPr>
+          <a:xfrm>
+            <a:off x="2427732" y="4169664"/>
+            <a:ext cx="685800" cy="475488"/>
+          </a:xfrm>
+          <a:prstGeom prst="rect">
+            <a:avLst>
+              <a:gd name="adj" fmla="val 7692"/>
+            </a:avLst>
+          </a:prstGeom>
+          <a:solidFill>
             <a:srgbClr val="FFFFFF"/>
           </a:solidFill>
           <a:ln w="12700">
             <a:solidFill>
-              <a:srgbClr val="0D9488"/>
-            </a:solidFill>
-            <a:prstDash val="solid"/>
-          </a:ln>
-        </p:spPr>
-      </p:sp>
-      <p:sp>
-        <p:nvSpPr>
-          <p:cNvPr id="32" name="Text 30"/>
-          <p:cNvSpPr/>
-          <p:nvPr/>
-        </p:nvSpPr>
-        <p:spPr>
-          <a:xfrm>
-            <a:off x="6428232" y="3364992"/>
-            <a:ext cx="1645920" cy="475488"/>
-          </a:xfrm>
-          <a:prstGeom prst="rect">
-            <a:avLst/>
-          </a:prstGeom>
-          <a:noFill/>
-          <a:ln/>
-        </p:spPr>
-        <p:txBody>
-          <a:bodyPr wrap="square" lIns="0" tIns="0" rIns="0" bIns="0" rtlCol="0" anchor="ctr"/>
-          <a:lstStyle/>
-          <a:p>
-            <a:pPr algn="ctr" indent="0" marL="0">
-              <a:buNone/>
-            </a:pPr>
-            <a:r>
-              <a:rPr lang="en-US" sz="1400" b="1" dirty="0">
-                <a:solidFill>
-                  <a:srgbClr val="0D9488"/>
+              <a:srgbClr val="DB2777"/>
+            </a:solidFill>
+            <a:prstDash val="solid"/>
+          </a:ln>
+        </p:spPr>
+      </p:sp>
+      <p:sp>
+        <p:nvSpPr>
+          <p:cNvPr id="34" name="Text 32"/>
+          <p:cNvSpPr/>
+          <p:nvPr/>
+        </p:nvSpPr>
+        <p:spPr>
+          <a:xfrm>
+            <a:off x="2427732" y="4169664"/>
+            <a:ext cx="685800" cy="475488"/>
+          </a:xfrm>
+          <a:prstGeom prst="rect">
+            <a:avLst/>
+          </a:prstGeom>
+          <a:noFill/>
+          <a:ln/>
+        </p:spPr>
+        <p:txBody>
+          <a:bodyPr wrap="square" lIns="0" tIns="0" rIns="0" bIns="0" rtlCol="0" anchor="ctr"/>
+          <a:lstStyle/>
+          <a:p>
+            <a:pPr algn="ctr" indent="0" marL="0">
+              <a:buNone/>
+            </a:pPr>
+            <a:r>
+              <a:rPr lang="en-US" sz="900" b="1" dirty="0">
+                <a:solidFill>
+                  <a:srgbClr val="9D174D"/>
                 </a:solidFill>
                 <a:latin typeface="Trebuchet MS" pitchFamily="34" charset="0"/>
                 <a:ea typeface="Trebuchet MS" pitchFamily="34" charset="-122"/>
                 <a:cs typeface="Trebuchet MS" pitchFamily="34" charset="-120"/>
               </a:rPr>
-              <a:t>gram</a:t>
-            </a:r>
-            <a:endParaRPr lang="en-US" sz="1400" dirty="0"/>
-          </a:p>
-        </p:txBody>
-      </p:sp>
-      <p:sp>
-        <p:nvSpPr>
-          <p:cNvPr id="33" name="Shape 31"/>
-          <p:cNvSpPr/>
-          <p:nvPr/>
-        </p:nvSpPr>
-        <p:spPr>
-          <a:xfrm>
-            <a:off x="365760" y="4096512"/>
-            <a:ext cx="1371600" cy="804672"/>
+              <a:t>pr</a:t>
+            </a:r>
+            <a:endParaRPr lang="en-US" sz="900" dirty="0"/>
+          </a:p>
+        </p:txBody>
+      </p:sp>
+      <p:sp>
+        <p:nvSpPr>
+          <p:cNvPr id="35" name="Shape 33"/>
+          <p:cNvSpPr/>
+          <p:nvPr/>
+        </p:nvSpPr>
+        <p:spPr>
+          <a:xfrm>
+            <a:off x="3639312" y="4169664"/>
+            <a:ext cx="685800" cy="475488"/>
           </a:xfrm>
           <a:prstGeom prst="rect">
             <a:avLst>
-              <a:gd name="adj" fmla="val 6818"/>
+              <a:gd name="adj" fmla="val 7692"/>
             </a:avLst>
           </a:prstGeom>
           <a:solidFill>
-            <a:srgbClr val="E2E8F0"/>
-          </a:solidFill>
-          <a:ln w="12700">
-            <a:solidFill>
-              <a:srgbClr val="E2E8F0"/>
-            </a:solidFill>
-            <a:prstDash val="solid"/>
-          </a:ln>
-        </p:spPr>
-      </p:sp>
-      <p:sp>
-        <p:nvSpPr>
-          <p:cNvPr id="34" name="Text 32"/>
-          <p:cNvSpPr/>
-          <p:nvPr/>
-        </p:nvSpPr>
-        <p:spPr>
-          <a:xfrm>
-            <a:off x="365760" y="4096512"/>
-            <a:ext cx="1371600" cy="804672"/>
-          </a:xfrm>
-          <a:prstGeom prst="rect">
-            <a:avLst/>
-          </a:prstGeom>
-          <a:noFill/>
-          <a:ln/>
-        </p:spPr>
-        <p:txBody>
-          <a:bodyPr wrap="square" lIns="0" tIns="0" rIns="0" bIns="0" rtlCol="0" anchor="ctr"/>
-          <a:lstStyle/>
-          <a:p>
-            <a:pPr algn="ctr" indent="0" marL="0">
-              <a:buNone/>
-            </a:pPr>
-            <a:r>
-              <a:rPr lang="en-US" sz="1100" b="1" dirty="0">
-                <a:solidFill>
-                  <a:srgbClr val="475569"/>
+            <a:srgbClr val="FFFFFF"/>
+          </a:solidFill>
+          <a:ln w="12700">
+            <a:solidFill>
+              <a:srgbClr val="DB2777"/>
+            </a:solidFill>
+            <a:prstDash val="solid"/>
+          </a:ln>
+        </p:spPr>
+      </p:sp>
+      <p:sp>
+        <p:nvSpPr>
+          <p:cNvPr id="36" name="Text 34"/>
+          <p:cNvSpPr/>
+          <p:nvPr/>
+        </p:nvSpPr>
+        <p:spPr>
+          <a:xfrm>
+            <a:off x="3639312" y="4169664"/>
+            <a:ext cx="685800" cy="475488"/>
+          </a:xfrm>
+          <a:prstGeom prst="rect">
+            <a:avLst/>
+          </a:prstGeom>
+          <a:noFill/>
+          <a:ln/>
+        </p:spPr>
+        <p:txBody>
+          <a:bodyPr wrap="square" lIns="0" tIns="0" rIns="0" bIns="0" rtlCol="0" anchor="ctr"/>
+          <a:lstStyle/>
+          <a:p>
+            <a:pPr algn="ctr" indent="0" marL="0">
+              <a:buNone/>
+            </a:pPr>
+            <a:r>
+              <a:rPr lang="en-US" sz="900" b="1" dirty="0">
+                <a:solidFill>
+                  <a:srgbClr val="9D174D"/>
                 </a:solidFill>
                 <a:latin typeface="Trebuchet MS" pitchFamily="34" charset="0"/>
                 <a:ea typeface="Trebuchet MS" pitchFamily="34" charset="-122"/>
                 <a:cs typeface="Trebuchet MS" pitchFamily="34" charset="-120"/>
               </a:rPr>
-              <a:t>Phonemes</a:t>
-            </a:r>
-            <a:endParaRPr lang="en-US" sz="1100" dirty="0"/>
-          </a:p>
-        </p:txBody>
-      </p:sp>
-      <p:sp>
-        <p:nvSpPr>
-          <p:cNvPr id="35" name="Shape 33"/>
-          <p:cNvSpPr/>
-          <p:nvPr/>
-        </p:nvSpPr>
-        <p:spPr>
-          <a:xfrm>
-            <a:off x="1874520" y="4096512"/>
-            <a:ext cx="6903720" cy="658368"/>
-          </a:xfrm>
-          <a:prstGeom prst="rect">
-            <a:avLst>
-              <a:gd name="adj" fmla="val 8333"/>
-            </a:avLst>
-          </a:prstGeom>
-          <a:solidFill>
-            <a:srgbClr val="FCE7F3"/>
-          </a:solidFill>
-          <a:ln w="12700">
-            <a:solidFill>
-              <a:srgbClr val="DB2777"/>
-            </a:solidFill>
-            <a:prstDash val="solid"/>
-          </a:ln>
-        </p:spPr>
-      </p:sp>
-      <p:sp>
-        <p:nvSpPr>
-          <p:cNvPr id="36" name="Shape 34"/>
-          <p:cNvSpPr/>
-          <p:nvPr/>
-        </p:nvSpPr>
-        <p:spPr>
-          <a:xfrm>
-            <a:off x="2254649" y="4169664"/>
+              <a:t>o</a:t>
+            </a:r>
+            <a:endParaRPr lang="en-US" sz="900" dirty="0"/>
+          </a:p>
+        </p:txBody>
+      </p:sp>
+      <p:sp>
+        <p:nvSpPr>
+          <p:cNvPr id="37" name="Shape 35"/>
+          <p:cNvSpPr/>
+          <p:nvPr/>
+        </p:nvSpPr>
+        <p:spPr>
+          <a:xfrm>
+            <a:off x="4850892" y="4169664"/>
             <a:ext cx="685800" cy="475488"/>
           </a:xfrm>
           <a:prstGeom prst="rect">
@@ -15554,13 +15476,13 @@
       </p:sp>
       <p:sp>
         <p:nvSpPr>
-          <p:cNvPr id="37" name="Text 35"/>
-          <p:cNvSpPr/>
-          <p:nvPr/>
-        </p:nvSpPr>
-        <p:spPr>
-          <a:xfrm>
-            <a:off x="2254649" y="4169664"/>
+          <p:cNvPr id="38" name="Text 36"/>
+          <p:cNvSpPr/>
+          <p:nvPr/>
+        </p:nvSpPr>
+        <p:spPr>
+          <a:xfrm>
+            <a:off x="4850892" y="4169664"/>
             <a:ext cx="685800" cy="475488"/>
           </a:xfrm>
           <a:prstGeom prst="rect">
@@ -15585,7 +15507,7 @@
                 <a:ea typeface="Trebuchet MS" pitchFamily="34" charset="-122"/>
                 <a:cs typeface="Trebuchet MS" pitchFamily="34" charset="-120"/>
               </a:rPr>
-              <a:t>a</a:t>
+              <a:t>gr</a:t>
             </a:r>
             <a:endParaRPr lang="en-US" sz="900" dirty="0"/>
           </a:p>
@@ -15593,13 +15515,13 @@
       </p:sp>
       <p:sp>
         <p:nvSpPr>
-          <p:cNvPr id="38" name="Shape 36"/>
-          <p:cNvSpPr/>
-          <p:nvPr/>
-        </p:nvSpPr>
-        <p:spPr>
-          <a:xfrm>
-            <a:off x="3293146" y="4169664"/>
+          <p:cNvPr id="39" name="Shape 37"/>
+          <p:cNvSpPr/>
+          <p:nvPr/>
+        </p:nvSpPr>
+        <p:spPr>
+          <a:xfrm>
+            <a:off x="6062472" y="4169664"/>
             <a:ext cx="685800" cy="475488"/>
           </a:xfrm>
           <a:prstGeom prst="rect">
@@ -15620,13 +15542,13 @@
       </p:sp>
       <p:sp>
         <p:nvSpPr>
-          <p:cNvPr id="39" name="Text 37"/>
-          <p:cNvSpPr/>
-          <p:nvPr/>
-        </p:nvSpPr>
-        <p:spPr>
-          <a:xfrm>
-            <a:off x="3293146" y="4169664"/>
+          <p:cNvPr id="40" name="Text 38"/>
+          <p:cNvSpPr/>
+          <p:nvPr/>
+        </p:nvSpPr>
+        <p:spPr>
+          <a:xfrm>
+            <a:off x="6062472" y="4169664"/>
             <a:ext cx="685800" cy="475488"/>
           </a:xfrm>
           <a:prstGeom prst="rect">
@@ -15651,7 +15573,7 @@
                 <a:ea typeface="Trebuchet MS" pitchFamily="34" charset="-122"/>
                 <a:cs typeface="Trebuchet MS" pitchFamily="34" charset="-120"/>
               </a:rPr>
-              <a:t>n</a:t>
+              <a:t>a</a:t>
             </a:r>
             <a:endParaRPr lang="en-US" sz="900" dirty="0"/>
           </a:p>
@@ -15659,13 +15581,13 @@
       </p:sp>
       <p:sp>
         <p:nvSpPr>
-          <p:cNvPr id="40" name="Shape 38"/>
-          <p:cNvSpPr/>
-          <p:nvPr/>
-        </p:nvSpPr>
-        <p:spPr>
-          <a:xfrm>
-            <a:off x="4331643" y="4169664"/>
+          <p:cNvPr id="41" name="Shape 39"/>
+          <p:cNvSpPr/>
+          <p:nvPr/>
+        </p:nvSpPr>
+        <p:spPr>
+          <a:xfrm>
+            <a:off x="7274052" y="4169664"/>
             <a:ext cx="685800" cy="475488"/>
           </a:xfrm>
           <a:prstGeom prst="rect">
@@ -15686,211 +15608,13 @@
       </p:sp>
       <p:sp>
         <p:nvSpPr>
-          <p:cNvPr id="41" name="Text 39"/>
-          <p:cNvSpPr/>
-          <p:nvPr/>
-        </p:nvSpPr>
-        <p:spPr>
-          <a:xfrm>
-            <a:off x="4331643" y="4169664"/>
-            <a:ext cx="685800" cy="475488"/>
-          </a:xfrm>
-          <a:prstGeom prst="rect">
-            <a:avLst/>
-          </a:prstGeom>
-          <a:noFill/>
-          <a:ln/>
-        </p:spPr>
-        <p:txBody>
-          <a:bodyPr wrap="square" lIns="0" tIns="0" rIns="0" bIns="0" rtlCol="0" anchor="ctr"/>
-          <a:lstStyle/>
-          <a:p>
-            <a:pPr algn="ctr" indent="0" marL="0">
-              <a:buNone/>
-            </a:pPr>
-            <a:r>
-              <a:rPr lang="en-US" sz="900" b="1" dirty="0">
-                <a:solidFill>
-                  <a:srgbClr val="9D174D"/>
-                </a:solidFill>
-                <a:latin typeface="Trebuchet MS" pitchFamily="34" charset="0"/>
-                <a:ea typeface="Trebuchet MS" pitchFamily="34" charset="-122"/>
-                <a:cs typeface="Trebuchet MS" pitchFamily="34" charset="-120"/>
-              </a:rPr>
-              <a:t>a</a:t>
-            </a:r>
-            <a:endParaRPr lang="en-US" sz="900" dirty="0"/>
-          </a:p>
-        </p:txBody>
-      </p:sp>
-      <p:sp>
-        <p:nvSpPr>
-          <p:cNvPr id="42" name="Shape 40"/>
-          <p:cNvSpPr/>
-          <p:nvPr/>
-        </p:nvSpPr>
-        <p:spPr>
-          <a:xfrm>
-            <a:off x="5370141" y="4169664"/>
-            <a:ext cx="685800" cy="475488"/>
-          </a:xfrm>
-          <a:prstGeom prst="rect">
-            <a:avLst>
-              <a:gd name="adj" fmla="val 7692"/>
-            </a:avLst>
-          </a:prstGeom>
-          <a:solidFill>
-            <a:srgbClr val="FFFFFF"/>
-          </a:solidFill>
-          <a:ln w="12700">
-            <a:solidFill>
-              <a:srgbClr val="DB2777"/>
-            </a:solidFill>
-            <a:prstDash val="solid"/>
-          </a:ln>
-        </p:spPr>
-      </p:sp>
-      <p:sp>
-        <p:nvSpPr>
-          <p:cNvPr id="43" name="Text 41"/>
-          <p:cNvSpPr/>
-          <p:nvPr/>
-        </p:nvSpPr>
-        <p:spPr>
-          <a:xfrm>
-            <a:off x="5370141" y="4169664"/>
-            <a:ext cx="685800" cy="475488"/>
-          </a:xfrm>
-          <a:prstGeom prst="rect">
-            <a:avLst/>
-          </a:prstGeom>
-          <a:noFill/>
-          <a:ln/>
-        </p:spPr>
-        <p:txBody>
-          <a:bodyPr wrap="square" lIns="0" tIns="0" rIns="0" bIns="0" rtlCol="0" anchor="ctr"/>
-          <a:lstStyle/>
-          <a:p>
-            <a:pPr algn="ctr" indent="0" marL="0">
-              <a:buNone/>
-            </a:pPr>
-            <a:r>
-              <a:rPr lang="en-US" sz="900" b="1" dirty="0">
-                <a:solidFill>
-                  <a:srgbClr val="9D174D"/>
-                </a:solidFill>
-                <a:latin typeface="Trebuchet MS" pitchFamily="34" charset="0"/>
-                <a:ea typeface="Trebuchet MS" pitchFamily="34" charset="-122"/>
-                <a:cs typeface="Trebuchet MS" pitchFamily="34" charset="-120"/>
-              </a:rPr>
-              <a:t>gr</a:t>
-            </a:r>
-            <a:endParaRPr lang="en-US" sz="900" dirty="0"/>
-          </a:p>
-        </p:txBody>
-      </p:sp>
-      <p:sp>
-        <p:nvSpPr>
-          <p:cNvPr id="44" name="Shape 42"/>
-          <p:cNvSpPr/>
-          <p:nvPr/>
-        </p:nvSpPr>
-        <p:spPr>
-          <a:xfrm>
-            <a:off x="6408638" y="4169664"/>
-            <a:ext cx="685800" cy="475488"/>
-          </a:xfrm>
-          <a:prstGeom prst="rect">
-            <a:avLst>
-              <a:gd name="adj" fmla="val 7692"/>
-            </a:avLst>
-          </a:prstGeom>
-          <a:solidFill>
-            <a:srgbClr val="FFFFFF"/>
-          </a:solidFill>
-          <a:ln w="12700">
-            <a:solidFill>
-              <a:srgbClr val="DB2777"/>
-            </a:solidFill>
-            <a:prstDash val="solid"/>
-          </a:ln>
-        </p:spPr>
-      </p:sp>
-      <p:sp>
-        <p:nvSpPr>
-          <p:cNvPr id="45" name="Text 43"/>
-          <p:cNvSpPr/>
-          <p:nvPr/>
-        </p:nvSpPr>
-        <p:spPr>
-          <a:xfrm>
-            <a:off x="6408638" y="4169664"/>
-            <a:ext cx="685800" cy="475488"/>
-          </a:xfrm>
-          <a:prstGeom prst="rect">
-            <a:avLst/>
-          </a:prstGeom>
-          <a:noFill/>
-          <a:ln/>
-        </p:spPr>
-        <p:txBody>
-          <a:bodyPr wrap="square" lIns="0" tIns="0" rIns="0" bIns="0" rtlCol="0" anchor="ctr"/>
-          <a:lstStyle/>
-          <a:p>
-            <a:pPr algn="ctr" indent="0" marL="0">
-              <a:buNone/>
-            </a:pPr>
-            <a:r>
-              <a:rPr lang="en-US" sz="900" b="1" dirty="0">
-                <a:solidFill>
-                  <a:srgbClr val="9D174D"/>
-                </a:solidFill>
-                <a:latin typeface="Trebuchet MS" pitchFamily="34" charset="0"/>
-                <a:ea typeface="Trebuchet MS" pitchFamily="34" charset="-122"/>
-                <a:cs typeface="Trebuchet MS" pitchFamily="34" charset="-120"/>
-              </a:rPr>
-              <a:t>a</a:t>
-            </a:r>
-            <a:endParaRPr lang="en-US" sz="900" dirty="0"/>
-          </a:p>
-        </p:txBody>
-      </p:sp>
-      <p:sp>
-        <p:nvSpPr>
-          <p:cNvPr id="46" name="Shape 44"/>
-          <p:cNvSpPr/>
-          <p:nvPr/>
-        </p:nvSpPr>
-        <p:spPr>
-          <a:xfrm>
-            <a:off x="7447135" y="4169664"/>
-            <a:ext cx="685800" cy="475488"/>
-          </a:xfrm>
-          <a:prstGeom prst="rect">
-            <a:avLst>
-              <a:gd name="adj" fmla="val 7692"/>
-            </a:avLst>
-          </a:prstGeom>
-          <a:solidFill>
-            <a:srgbClr val="FFFFFF"/>
-          </a:solidFill>
-          <a:ln w="12700">
-            <a:solidFill>
-              <a:srgbClr val="DB2777"/>
-            </a:solidFill>
-            <a:prstDash val="solid"/>
-          </a:ln>
-        </p:spPr>
-      </p:sp>
-      <p:sp>
-        <p:nvSpPr>
-          <p:cNvPr id="47" name="Text 45"/>
-          <p:cNvSpPr/>
-          <p:nvPr/>
-        </p:nvSpPr>
-        <p:spPr>
-          <a:xfrm>
-            <a:off x="7447135" y="4169664"/>
+          <p:cNvPr id="42" name="Text 40"/>
+          <p:cNvSpPr/>
+          <p:nvPr/>
+        </p:nvSpPr>
+        <p:spPr>
+          <a:xfrm>
+            <a:off x="7274052" y="4169664"/>
             <a:ext cx="685800" cy="475488"/>
           </a:xfrm>
           <a:prstGeom prst="rect">
@@ -17272,7 +16996,7 @@
                 <a:ea typeface="Calibri" pitchFamily="34" charset="-122"/>
                 <a:cs typeface="Calibri" pitchFamily="34" charset="-120"/>
               </a:rPr>
-              <a:t>, </a:t>
+              <a:t> on the card showed a </a:t>
             </a:r>
             <a:pPr algn="l" indent="0" marL="0">
               <a:buNone/>
@@ -17289,7 +17013,7 @@
                 <a:ea typeface="Calibri" pitchFamily="34" charset="-122"/>
                 <a:cs typeface="Calibri" pitchFamily="34" charset="-120"/>
               </a:rPr>
-              <a:t>diagram</a:t>
+              <a:t>monogram</a:t>
             </a:r>
             <a:pPr algn="l" indent="0" marL="0">
               <a:buNone/>
@@ -17303,7 +17027,7 @@
                 <a:ea typeface="Calibri" pitchFamily="34" charset="-122"/>
                 <a:cs typeface="Calibri" pitchFamily="34" charset="-120"/>
               </a:rPr>
-              <a:t>, and </a:t>
+              <a:t>, and the </a:t>
             </a:r>
             <a:pPr algn="l" indent="0" marL="0">
               <a:buNone/>
@@ -17320,7 +17044,7 @@
                 <a:ea typeface="Calibri" pitchFamily="34" charset="-122"/>
                 <a:cs typeface="Calibri" pitchFamily="34" charset="-120"/>
               </a:rPr>
-              <a:t>pictogram</a:t>
+              <a:t>telegram</a:t>
             </a:r>
             <a:pPr algn="l" indent="0" marL="0">
               <a:buNone/>
@@ -17334,7 +17058,7 @@
                 <a:ea typeface="Calibri" pitchFamily="34" charset="-122"/>
                 <a:cs typeface="Calibri" pitchFamily="34" charset="-120"/>
               </a:rPr>
-              <a:t> were all displayed at the science exhibition.</a:t>
+              <a:t> confirmed the order.</a:t>
             </a:r>
             <a:endParaRPr lang="en-US" sz="1800" dirty="0"/>
           </a:p>
@@ -17617,7 +17341,7 @@
                 <a:ea typeface="Trebuchet MS" pitchFamily="34" charset="-122"/>
                 <a:cs typeface="Trebuchet MS" pitchFamily="34" charset="-120"/>
               </a:rPr>
-              <a:t>diagram</a:t>
+              <a:t>monogram</a:t>
             </a:r>
             <a:endParaRPr lang="en-US" sz="1400" dirty="0"/>
           </a:p>
@@ -17745,7 +17469,7 @@
                 <a:ea typeface="Trebuchet MS" pitchFamily="34" charset="-122"/>
                 <a:cs typeface="Trebuchet MS" pitchFamily="34" charset="-120"/>
               </a:rPr>
-              <a:t>pictogram</a:t>
+              <a:t>telegram</a:t>
             </a:r>
             <a:endParaRPr lang="en-US" sz="1400" dirty="0"/>
           </a:p>
@@ -19332,7 +19056,7 @@
                 <a:ea typeface="Calibri" pitchFamily="34" charset="-122"/>
                 <a:cs typeface="Calibri" pitchFamily="34" charset="-120"/>
               </a:rPr>
-              <a:t>written, drawn</a:t>
+              <a:t>written, drawn, recorded</a:t>
             </a:r>
             <a:endParaRPr lang="en-US" sz="850" dirty="0"/>
           </a:p>
@@ -20317,7 +20041,7 @@
                 <a:ea typeface="Calibri" pitchFamily="34" charset="-122"/>
                 <a:cs typeface="Calibri" pitchFamily="34" charset="-120"/>
               </a:rPr>
-              <a:t>written, drawn</a:t>
+              <a:t>written, drawn, recorded</a:t>
             </a:r>
             <a:endParaRPr lang="en-US" sz="850" dirty="0"/>
           </a:p>
@@ -20476,7 +20200,7 @@
                 <a:ea typeface="Trebuchet MS" pitchFamily="34" charset="-122"/>
                 <a:cs typeface="Trebuchet MS" pitchFamily="34" charset="-120"/>
               </a:rPr>
-              <a:t>hol</a:t>
+              <a:t>ho</a:t>
             </a:r>
             <a:endParaRPr lang="en-US" sz="1400" dirty="0"/>
           </a:p>
@@ -20581,7 +20305,7 @@
                 <a:ea typeface="Trebuchet MS" pitchFamily="34" charset="-122"/>
                 <a:cs typeface="Trebuchet MS" pitchFamily="34" charset="-120"/>
               </a:rPr>
-              <a:t>o</a:t>
+              <a:t>lo</a:t>
             </a:r>
             <a:endParaRPr lang="en-US" sz="1400" dirty="0"/>
           </a:p>
@@ -21539,7 +21263,7 @@
                 <a:ea typeface="Calibri" pitchFamily="34" charset="-122"/>
                 <a:cs typeface="Calibri" pitchFamily="34" charset="-120"/>
               </a:rPr>
-              <a:t>written, drawn</a:t>
+              <a:t>written, drawn, recorded</a:t>
             </a:r>
             <a:endParaRPr lang="en-US" sz="850" dirty="0"/>
           </a:p>
@@ -21698,7 +21422,7 @@
                 <a:ea typeface="Trebuchet MS" pitchFamily="34" charset="-122"/>
                 <a:cs typeface="Trebuchet MS" pitchFamily="34" charset="-120"/>
               </a:rPr>
-              <a:t>hol</a:t>
+              <a:t>ho</a:t>
             </a:r>
             <a:endParaRPr lang="en-US" sz="1400" dirty="0"/>
           </a:p>
@@ -21803,7 +21527,7 @@
                 <a:ea typeface="Trebuchet MS" pitchFamily="34" charset="-122"/>
                 <a:cs typeface="Trebuchet MS" pitchFamily="34" charset="-120"/>
               </a:rPr>
-              <a:t>o</a:t>
+              <a:t>lo</a:t>
             </a:r>
             <a:endParaRPr lang="en-US" sz="1400" dirty="0"/>
           </a:p>
@@ -22894,7 +22618,7 @@
                 <a:ea typeface="Trebuchet MS" pitchFamily="34" charset="-122"/>
                 <a:cs typeface="Trebuchet MS" pitchFamily="34" charset="-120"/>
               </a:rPr>
-              <a:t>diagram</a:t>
+              <a:t>monogram</a:t>
             </a:r>
             <a:endParaRPr lang="en-US" sz="2800" dirty="0"/>
           </a:p>
@@ -23721,7 +23445,7 @@
                 <a:ea typeface="Trebuchet MS" pitchFamily="34" charset="-122"/>
                 <a:cs typeface="Trebuchet MS" pitchFamily="34" charset="-120"/>
               </a:rPr>
-              <a:t>diagram</a:t>
+              <a:t>monogram</a:t>
             </a:r>
             <a:endParaRPr lang="en-US" sz="2800" dirty="0"/>
           </a:p>
@@ -23860,7 +23584,7 @@
                 <a:ea typeface="Trebuchet MS" pitchFamily="34" charset="-122"/>
                 <a:cs typeface="Trebuchet MS" pitchFamily="34" charset="-120"/>
               </a:rPr>
-              <a:t>dia</a:t>
+              <a:t>mono</a:t>
             </a:r>
             <a:endParaRPr lang="en-US" sz="1300" dirty="0"/>
           </a:p>
@@ -23899,7 +23623,7 @@
                 <a:ea typeface="Calibri" pitchFamily="34" charset="-122"/>
                 <a:cs typeface="Calibri" pitchFamily="34" charset="-120"/>
               </a:rPr>
-              <a:t>through, across</a:t>
+              <a:t>one, single</a:t>
             </a:r>
             <a:endParaRPr lang="en-US" sz="850" dirty="0"/>
           </a:p>
@@ -24011,7 +23735,7 @@
                 <a:ea typeface="Calibri" pitchFamily="34" charset="-122"/>
                 <a:cs typeface="Calibri" pitchFamily="34" charset="-120"/>
               </a:rPr>
-              <a:t>written, drawn</a:t>
+              <a:t>written, drawn, recorded</a:t>
             </a:r>
             <a:endParaRPr lang="en-US" sz="850" dirty="0"/>
           </a:p>
@@ -25425,7 +25149,7 @@
                 <a:ea typeface="Trebuchet MS" pitchFamily="34" charset="-122"/>
                 <a:cs typeface="Trebuchet MS" pitchFamily="34" charset="-120"/>
               </a:rPr>
-              <a:t>diagram</a:t>
+              <a:t>monogram</a:t>
             </a:r>
             <a:endParaRPr lang="en-US" sz="2800" dirty="0"/>
           </a:p>
@@ -25564,7 +25288,7 @@
                 <a:ea typeface="Trebuchet MS" pitchFamily="34" charset="-122"/>
                 <a:cs typeface="Trebuchet MS" pitchFamily="34" charset="-120"/>
               </a:rPr>
-              <a:t>dia</a:t>
+              <a:t>mono</a:t>
             </a:r>
             <a:endParaRPr lang="en-US" sz="1300" dirty="0"/>
           </a:p>
@@ -25603,7 +25327,7 @@
                 <a:ea typeface="Calibri" pitchFamily="34" charset="-122"/>
                 <a:cs typeface="Calibri" pitchFamily="34" charset="-120"/>
               </a:rPr>
-              <a:t>through, across</a:t>
+              <a:t>one, single</a:t>
             </a:r>
             <a:endParaRPr lang="en-US" sz="850" dirty="0"/>
           </a:p>
@@ -25715,7 +25439,7 @@
                 <a:ea typeface="Calibri" pitchFamily="34" charset="-122"/>
                 <a:cs typeface="Calibri" pitchFamily="34" charset="-120"/>
               </a:rPr>
-              <a:t>written, drawn</a:t>
+              <a:t>written, drawn, recorded</a:t>
             </a:r>
             <a:endParaRPr lang="en-US" sz="850" dirty="0"/>
           </a:p>
@@ -25874,7 +25598,7 @@
                 <a:ea typeface="Trebuchet MS" pitchFamily="34" charset="-122"/>
                 <a:cs typeface="Trebuchet MS" pitchFamily="34" charset="-120"/>
               </a:rPr>
-              <a:t>di</a:t>
+              <a:t>mo</a:t>
             </a:r>
             <a:endParaRPr lang="en-US" sz="1400" dirty="0"/>
           </a:p>
@@ -25979,7 +25703,7 @@
                 <a:ea typeface="Trebuchet MS" pitchFamily="34" charset="-122"/>
                 <a:cs typeface="Trebuchet MS" pitchFamily="34" charset="-120"/>
               </a:rPr>
-              <a:t>a</a:t>
+              <a:t>no</a:t>
             </a:r>
             <a:endParaRPr lang="en-US" sz="1400" dirty="0"/>
           </a:p>
@@ -26647,7 +26371,7 @@
                 <a:ea typeface="Trebuchet MS" pitchFamily="34" charset="-122"/>
                 <a:cs typeface="Trebuchet MS" pitchFamily="34" charset="-120"/>
               </a:rPr>
-              <a:t>diagram</a:t>
+              <a:t>monogram</a:t>
             </a:r>
             <a:endParaRPr lang="en-US" sz="2800" dirty="0"/>
           </a:p>
@@ -26786,7 +26510,7 @@
                 <a:ea typeface="Trebuchet MS" pitchFamily="34" charset="-122"/>
                 <a:cs typeface="Trebuchet MS" pitchFamily="34" charset="-120"/>
               </a:rPr>
-              <a:t>dia</a:t>
+              <a:t>mono</a:t>
             </a:r>
             <a:endParaRPr lang="en-US" sz="1300" dirty="0"/>
           </a:p>
@@ -26825,7 +26549,7 @@
                 <a:ea typeface="Calibri" pitchFamily="34" charset="-122"/>
                 <a:cs typeface="Calibri" pitchFamily="34" charset="-120"/>
               </a:rPr>
-              <a:t>through, across</a:t>
+              <a:t>one, single</a:t>
             </a:r>
             <a:endParaRPr lang="en-US" sz="850" dirty="0"/>
           </a:p>
@@ -26937,7 +26661,7 @@
                 <a:ea typeface="Calibri" pitchFamily="34" charset="-122"/>
                 <a:cs typeface="Calibri" pitchFamily="34" charset="-120"/>
               </a:rPr>
-              <a:t>written, drawn</a:t>
+              <a:t>written, drawn, recorded</a:t>
             </a:r>
             <a:endParaRPr lang="en-US" sz="850" dirty="0"/>
           </a:p>
@@ -27096,7 +26820,7 @@
                 <a:ea typeface="Trebuchet MS" pitchFamily="34" charset="-122"/>
                 <a:cs typeface="Trebuchet MS" pitchFamily="34" charset="-120"/>
               </a:rPr>
-              <a:t>di</a:t>
+              <a:t>mo</a:t>
             </a:r>
             <a:endParaRPr lang="en-US" sz="1400" dirty="0"/>
           </a:p>
@@ -27201,7 +26925,7 @@
                 <a:ea typeface="Trebuchet MS" pitchFamily="34" charset="-122"/>
                 <a:cs typeface="Trebuchet MS" pitchFamily="34" charset="-120"/>
               </a:rPr>
-              <a:t>a</a:t>
+              <a:t>no</a:t>
             </a:r>
             <a:endParaRPr lang="en-US" sz="1400" dirty="0"/>
           </a:p>
@@ -27413,7 +27137,7 @@
         </p:nvSpPr>
         <p:spPr>
           <a:xfrm>
-            <a:off x="2254649" y="4169664"/>
+            <a:off x="2124837" y="4169664"/>
             <a:ext cx="685800" cy="475488"/>
           </a:xfrm>
           <a:prstGeom prst="rect">
@@ -27440,7 +27164,7 @@
         </p:nvSpPr>
         <p:spPr>
           <a:xfrm>
-            <a:off x="2254649" y="4169664"/>
+            <a:off x="2124837" y="4169664"/>
             <a:ext cx="685800" cy="475488"/>
           </a:xfrm>
           <a:prstGeom prst="rect">
@@ -27465,7 +27189,7 @@
                 <a:ea typeface="Trebuchet MS" pitchFamily="34" charset="-122"/>
                 <a:cs typeface="Trebuchet MS" pitchFamily="34" charset="-120"/>
               </a:rPr>
-              <a:t>d</a:t>
+              <a:t>m</a:t>
             </a:r>
             <a:endParaRPr lang="en-US" sz="900" dirty="0"/>
           </a:p>
@@ -27479,7 +27203,7 @@
         </p:nvSpPr>
         <p:spPr>
           <a:xfrm>
-            <a:off x="3293146" y="4169664"/>
+            <a:off x="3033522" y="4169664"/>
             <a:ext cx="685800" cy="475488"/>
           </a:xfrm>
           <a:prstGeom prst="rect">
@@ -27506,7 +27230,7 @@
         </p:nvSpPr>
         <p:spPr>
           <a:xfrm>
-            <a:off x="3293146" y="4169664"/>
+            <a:off x="3033522" y="4169664"/>
             <a:ext cx="685800" cy="475488"/>
           </a:xfrm>
           <a:prstGeom prst="rect">
@@ -27531,7 +27255,7 @@
                 <a:ea typeface="Trebuchet MS" pitchFamily="34" charset="-122"/>
                 <a:cs typeface="Trebuchet MS" pitchFamily="34" charset="-120"/>
               </a:rPr>
-              <a:t>i</a:t>
+              <a:t>o</a:t>
             </a:r>
             <a:endParaRPr lang="en-US" sz="900" dirty="0"/>
           </a:p>
@@ -27545,7 +27269,7 @@
         </p:nvSpPr>
         <p:spPr>
           <a:xfrm>
-            <a:off x="4331643" y="4169664"/>
+            <a:off x="3942207" y="4169664"/>
             <a:ext cx="685800" cy="475488"/>
           </a:xfrm>
           <a:prstGeom prst="rect">
@@ -27572,7 +27296,7 @@
         </p:nvSpPr>
         <p:spPr>
           <a:xfrm>
-            <a:off x="4331643" y="4169664"/>
+            <a:off x="3942207" y="4169664"/>
             <a:ext cx="685800" cy="475488"/>
           </a:xfrm>
           <a:prstGeom prst="rect">
@@ -27597,7 +27321,7 @@
                 <a:ea typeface="Trebuchet MS" pitchFamily="34" charset="-122"/>
                 <a:cs typeface="Trebuchet MS" pitchFamily="34" charset="-120"/>
               </a:rPr>
-              <a:t>a</a:t>
+              <a:t>n</a:t>
             </a:r>
             <a:endParaRPr lang="en-US" sz="900" dirty="0"/>
           </a:p>
@@ -27611,7 +27335,7 @@
         </p:nvSpPr>
         <p:spPr>
           <a:xfrm>
-            <a:off x="5370141" y="4169664"/>
+            <a:off x="4850892" y="4169664"/>
             <a:ext cx="685800" cy="475488"/>
           </a:xfrm>
           <a:prstGeom prst="rect">
@@ -27638,7 +27362,7 @@
         </p:nvSpPr>
         <p:spPr>
           <a:xfrm>
-            <a:off x="5370141" y="4169664"/>
+            <a:off x="4850892" y="4169664"/>
             <a:ext cx="685800" cy="475488"/>
           </a:xfrm>
           <a:prstGeom prst="rect">
@@ -27663,7 +27387,7 @@
                 <a:ea typeface="Trebuchet MS" pitchFamily="34" charset="-122"/>
                 <a:cs typeface="Trebuchet MS" pitchFamily="34" charset="-120"/>
               </a:rPr>
-              <a:t>gr</a:t>
+              <a:t>o</a:t>
             </a:r>
             <a:endParaRPr lang="en-US" sz="900" dirty="0"/>
           </a:p>
@@ -27677,7 +27401,7 @@
         </p:nvSpPr>
         <p:spPr>
           <a:xfrm>
-            <a:off x="6408638" y="4169664"/>
+            <a:off x="5759577" y="4169664"/>
             <a:ext cx="685800" cy="475488"/>
           </a:xfrm>
           <a:prstGeom prst="rect">
@@ -27704,7 +27428,7 @@
         </p:nvSpPr>
         <p:spPr>
           <a:xfrm>
-            <a:off x="6408638" y="4169664"/>
+            <a:off x="5759577" y="4169664"/>
             <a:ext cx="685800" cy="475488"/>
           </a:xfrm>
           <a:prstGeom prst="rect">
@@ -27729,7 +27453,7 @@
                 <a:ea typeface="Trebuchet MS" pitchFamily="34" charset="-122"/>
                 <a:cs typeface="Trebuchet MS" pitchFamily="34" charset="-120"/>
               </a:rPr>
-              <a:t>a</a:t>
+              <a:t>gr</a:t>
             </a:r>
             <a:endParaRPr lang="en-US" sz="900" dirty="0"/>
           </a:p>
@@ -27743,7 +27467,7 @@
         </p:nvSpPr>
         <p:spPr>
           <a:xfrm>
-            <a:off x="7447135" y="4169664"/>
+            <a:off x="6668262" y="4169664"/>
             <a:ext cx="685800" cy="475488"/>
           </a:xfrm>
           <a:prstGeom prst="rect">
@@ -27770,7 +27494,73 @@
         </p:nvSpPr>
         <p:spPr>
           <a:xfrm>
-            <a:off x="7447135" y="4169664"/>
+            <a:off x="6668262" y="4169664"/>
+            <a:ext cx="685800" cy="475488"/>
+          </a:xfrm>
+          <a:prstGeom prst="rect">
+            <a:avLst/>
+          </a:prstGeom>
+          <a:noFill/>
+          <a:ln/>
+        </p:spPr>
+        <p:txBody>
+          <a:bodyPr wrap="square" lIns="0" tIns="0" rIns="0" bIns="0" rtlCol="0" anchor="ctr"/>
+          <a:lstStyle/>
+          <a:p>
+            <a:pPr algn="ctr" indent="0" marL="0">
+              <a:buNone/>
+            </a:pPr>
+            <a:r>
+              <a:rPr lang="en-US" sz="900" b="1" dirty="0">
+                <a:solidFill>
+                  <a:srgbClr val="9D174D"/>
+                </a:solidFill>
+                <a:latin typeface="Trebuchet MS" pitchFamily="34" charset="0"/>
+                <a:ea typeface="Trebuchet MS" pitchFamily="34" charset="-122"/>
+                <a:cs typeface="Trebuchet MS" pitchFamily="34" charset="-120"/>
+              </a:rPr>
+              <a:t>a</a:t>
+            </a:r>
+            <a:endParaRPr lang="en-US" sz="900" dirty="0"/>
+          </a:p>
+        </p:txBody>
+      </p:sp>
+      <p:sp>
+        <p:nvSpPr>
+          <p:cNvPr id="48" name="Shape 46"/>
+          <p:cNvSpPr/>
+          <p:nvPr/>
+        </p:nvSpPr>
+        <p:spPr>
+          <a:xfrm>
+            <a:off x="7576947" y="4169664"/>
+            <a:ext cx="685800" cy="475488"/>
+          </a:xfrm>
+          <a:prstGeom prst="rect">
+            <a:avLst>
+              <a:gd name="adj" fmla="val 7692"/>
+            </a:avLst>
+          </a:prstGeom>
+          <a:solidFill>
+            <a:srgbClr val="FFFFFF"/>
+          </a:solidFill>
+          <a:ln w="12700">
+            <a:solidFill>
+              <a:srgbClr val="DB2777"/>
+            </a:solidFill>
+            <a:prstDash val="solid"/>
+          </a:ln>
+        </p:spPr>
+      </p:sp>
+      <p:sp>
+        <p:nvSpPr>
+          <p:cNvPr id="49" name="Text 47"/>
+          <p:cNvSpPr/>
+          <p:nvPr/>
+        </p:nvSpPr>
+        <p:spPr>
+          <a:xfrm>
+            <a:off x="7576947" y="4169664"/>
             <a:ext cx="685800" cy="475488"/>
           </a:xfrm>
           <a:prstGeom prst="rect">
@@ -28226,7 +28016,7 @@
                 <a:ea typeface="Trebuchet MS" pitchFamily="34" charset="-122"/>
                 <a:cs typeface="Trebuchet MS" pitchFamily="34" charset="-120"/>
               </a:rPr>
-              <a:t>pictogram</a:t>
+              <a:t>telegram</a:t>
             </a:r>
             <a:endParaRPr lang="en-US" sz="2800" dirty="0"/>
           </a:p>
@@ -29053,7 +28843,7 @@
                 <a:ea typeface="Trebuchet MS" pitchFamily="34" charset="-122"/>
                 <a:cs typeface="Trebuchet MS" pitchFamily="34" charset="-120"/>
               </a:rPr>
-              <a:t>pictogram</a:t>
+              <a:t>telegram</a:t>
             </a:r>
             <a:endParaRPr lang="en-US" sz="2800" dirty="0"/>
           </a:p>
@@ -29192,7 +28982,7 @@
                 <a:ea typeface="Trebuchet MS" pitchFamily="34" charset="-122"/>
                 <a:cs typeface="Trebuchet MS" pitchFamily="34" charset="-120"/>
               </a:rPr>
-              <a:t>picto</a:t>
+              <a:t>tele</a:t>
             </a:r>
             <a:endParaRPr lang="en-US" sz="1300" dirty="0"/>
           </a:p>
@@ -29231,7 +29021,7 @@
                 <a:ea typeface="Calibri" pitchFamily="34" charset="-122"/>
                 <a:cs typeface="Calibri" pitchFamily="34" charset="-120"/>
               </a:rPr>
-              <a:t>picture, painted</a:t>
+              <a:t>far, distant</a:t>
             </a:r>
             <a:endParaRPr lang="en-US" sz="850" dirty="0"/>
           </a:p>
@@ -29343,7 +29133,7 @@
                 <a:ea typeface="Calibri" pitchFamily="34" charset="-122"/>
                 <a:cs typeface="Calibri" pitchFamily="34" charset="-120"/>
               </a:rPr>
-              <a:t>written, drawn</a:t>
+              <a:t>written, drawn, recorded</a:t>
             </a:r>
             <a:endParaRPr lang="en-US" sz="850" dirty="0"/>
           </a:p>
@@ -30038,7 +29828,7 @@
                 <a:ea typeface="Trebuchet MS" pitchFamily="34" charset="-122"/>
                 <a:cs typeface="Trebuchet MS" pitchFamily="34" charset="-120"/>
               </a:rPr>
-              <a:t>pictogram</a:t>
+              <a:t>telegram</a:t>
             </a:r>
             <a:endParaRPr lang="en-US" sz="2800" dirty="0"/>
           </a:p>
@@ -30177,7 +29967,7 @@
                 <a:ea typeface="Trebuchet MS" pitchFamily="34" charset="-122"/>
                 <a:cs typeface="Trebuchet MS" pitchFamily="34" charset="-120"/>
               </a:rPr>
-              <a:t>picto</a:t>
+              <a:t>tele</a:t>
             </a:r>
             <a:endParaRPr lang="en-US" sz="1300" dirty="0"/>
           </a:p>
@@ -30216,7 +30006,7 @@
                 <a:ea typeface="Calibri" pitchFamily="34" charset="-122"/>
                 <a:cs typeface="Calibri" pitchFamily="34" charset="-120"/>
               </a:rPr>
-              <a:t>picture, painted</a:t>
+              <a:t>far, distant</a:t>
             </a:r>
             <a:endParaRPr lang="en-US" sz="850" dirty="0"/>
           </a:p>
@@ -30328,7 +30118,7 @@
                 <a:ea typeface="Calibri" pitchFamily="34" charset="-122"/>
                 <a:cs typeface="Calibri" pitchFamily="34" charset="-120"/>
               </a:rPr>
-              <a:t>written, drawn</a:t>
+              <a:t>written, drawn, recorded</a:t>
             </a:r>
             <a:endParaRPr lang="en-US" sz="850" dirty="0"/>
           </a:p>
@@ -30487,7 +30277,7 @@
                 <a:ea typeface="Trebuchet MS" pitchFamily="34" charset="-122"/>
                 <a:cs typeface="Trebuchet MS" pitchFamily="34" charset="-120"/>
               </a:rPr>
-              <a:t>pic</a:t>
+              <a:t>te</a:t>
             </a:r>
             <a:endParaRPr lang="en-US" sz="1400" dirty="0"/>
           </a:p>
@@ -30592,7 +30382,7 @@
                 <a:ea typeface="Trebuchet MS" pitchFamily="34" charset="-122"/>
                 <a:cs typeface="Trebuchet MS" pitchFamily="34" charset="-120"/>
               </a:rPr>
-              <a:t>to</a:t>
+              <a:t>le</a:t>
             </a:r>
             <a:endParaRPr lang="en-US" sz="1400" dirty="0"/>
           </a:p>
@@ -31260,7 +31050,7 @@
                 <a:ea typeface="Trebuchet MS" pitchFamily="34" charset="-122"/>
                 <a:cs typeface="Trebuchet MS" pitchFamily="34" charset="-120"/>
               </a:rPr>
-              <a:t>pictogram</a:t>
+              <a:t>telegram</a:t>
             </a:r>
             <a:endParaRPr lang="en-US" sz="2800" dirty="0"/>
           </a:p>
@@ -31399,7 +31189,7 @@
                 <a:ea typeface="Trebuchet MS" pitchFamily="34" charset="-122"/>
                 <a:cs typeface="Trebuchet MS" pitchFamily="34" charset="-120"/>
               </a:rPr>
-              <a:t>picto</a:t>
+              <a:t>tele</a:t>
             </a:r>
             <a:endParaRPr lang="en-US" sz="1300" dirty="0"/>
           </a:p>
@@ -31438,7 +31228,7 @@
                 <a:ea typeface="Calibri" pitchFamily="34" charset="-122"/>
                 <a:cs typeface="Calibri" pitchFamily="34" charset="-120"/>
               </a:rPr>
-              <a:t>picture, painted</a:t>
+              <a:t>far, distant</a:t>
             </a:r>
             <a:endParaRPr lang="en-US" sz="850" dirty="0"/>
           </a:p>
@@ -31550,7 +31340,7 @@
                 <a:ea typeface="Calibri" pitchFamily="34" charset="-122"/>
                 <a:cs typeface="Calibri" pitchFamily="34" charset="-120"/>
               </a:rPr>
-              <a:t>written, drawn</a:t>
+              <a:t>written, drawn, recorded</a:t>
             </a:r>
             <a:endParaRPr lang="en-US" sz="850" dirty="0"/>
           </a:p>
@@ -31709,7 +31499,7 @@
                 <a:ea typeface="Trebuchet MS" pitchFamily="34" charset="-122"/>
                 <a:cs typeface="Trebuchet MS" pitchFamily="34" charset="-120"/>
               </a:rPr>
-              <a:t>pic</a:t>
+              <a:t>te</a:t>
             </a:r>
             <a:endParaRPr lang="en-US" sz="1400" dirty="0"/>
           </a:p>
@@ -31814,7 +31604,7 @@
                 <a:ea typeface="Trebuchet MS" pitchFamily="34" charset="-122"/>
                 <a:cs typeface="Trebuchet MS" pitchFamily="34" charset="-120"/>
               </a:rPr>
-              <a:t>to</a:t>
+              <a:t>le</a:t>
             </a:r>
             <a:endParaRPr lang="en-US" sz="1400" dirty="0"/>
           </a:p>
@@ -32000,11 +31790,11 @@
         <p:spPr>
           <a:xfrm>
             <a:off x="1874520" y="4096512"/>
-            <a:ext cx="6903720" cy="804672"/>
+            <a:ext cx="6903720" cy="658368"/>
           </a:xfrm>
           <a:prstGeom prst="rect">
             <a:avLst>
-              <a:gd name="adj" fmla="val 6818"/>
+              <a:gd name="adj" fmla="val 8333"/>
             </a:avLst>
           </a:prstGeom>
           <a:solidFill>
@@ -32026,12 +31816,12 @@
         </p:nvSpPr>
         <p:spPr>
           <a:xfrm>
-            <a:off x="2023872" y="4169664"/>
-            <a:ext cx="685800" cy="384048"/>
+            <a:off x="2124837" y="4169664"/>
+            <a:ext cx="685800" cy="475488"/>
           </a:xfrm>
           <a:prstGeom prst="rect">
             <a:avLst>
-              <a:gd name="adj" fmla="val 9524"/>
+              <a:gd name="adj" fmla="val 7692"/>
             </a:avLst>
           </a:prstGeom>
           <a:solidFill>
@@ -32053,8 +31843,8 @@
         </p:nvSpPr>
         <p:spPr>
           <a:xfrm>
-            <a:off x="2023872" y="4169664"/>
-            <a:ext cx="685800" cy="384048"/>
+            <a:off x="2124837" y="4169664"/>
+            <a:ext cx="685800" cy="475488"/>
           </a:xfrm>
           <a:prstGeom prst="rect">
             <a:avLst/>
@@ -32078,7 +31868,7 @@
                 <a:ea typeface="Trebuchet MS" pitchFamily="34" charset="-122"/>
                 <a:cs typeface="Trebuchet MS" pitchFamily="34" charset="-120"/>
               </a:rPr>
-              <a:t>p</a:t>
+              <a:t>t</a:t>
             </a:r>
             <a:endParaRPr lang="en-US" sz="900" dirty="0"/>
           </a:p>
@@ -32092,12 +31882,12 @@
         </p:nvSpPr>
         <p:spPr>
           <a:xfrm>
-            <a:off x="2831592" y="4169664"/>
-            <a:ext cx="685800" cy="384048"/>
+            <a:off x="3033522" y="4169664"/>
+            <a:ext cx="685800" cy="475488"/>
           </a:xfrm>
           <a:prstGeom prst="rect">
             <a:avLst>
-              <a:gd name="adj" fmla="val 9524"/>
+              <a:gd name="adj" fmla="val 7692"/>
             </a:avLst>
           </a:prstGeom>
           <a:solidFill>
@@ -32119,8 +31909,8 @@
         </p:nvSpPr>
         <p:spPr>
           <a:xfrm>
-            <a:off x="2831592" y="4169664"/>
-            <a:ext cx="685800" cy="384048"/>
+            <a:off x="3033522" y="4169664"/>
+            <a:ext cx="685800" cy="475488"/>
           </a:xfrm>
           <a:prstGeom prst="rect">
             <a:avLst/>
@@ -32144,7 +31934,7 @@
                 <a:ea typeface="Trebuchet MS" pitchFamily="34" charset="-122"/>
                 <a:cs typeface="Trebuchet MS" pitchFamily="34" charset="-120"/>
               </a:rPr>
-              <a:t>i</a:t>
+              <a:t>e</a:t>
             </a:r>
             <a:endParaRPr lang="en-US" sz="900" dirty="0"/>
           </a:p>
@@ -32158,12 +31948,12 @@
         </p:nvSpPr>
         <p:spPr>
           <a:xfrm>
-            <a:off x="3639312" y="4169664"/>
-            <a:ext cx="685800" cy="384048"/>
+            <a:off x="3942207" y="4169664"/>
+            <a:ext cx="685800" cy="475488"/>
           </a:xfrm>
           <a:prstGeom prst="rect">
             <a:avLst>
-              <a:gd name="adj" fmla="val 9524"/>
+              <a:gd name="adj" fmla="val 7692"/>
             </a:avLst>
           </a:prstGeom>
           <a:solidFill>
@@ -32185,8 +31975,8 @@
         </p:nvSpPr>
         <p:spPr>
           <a:xfrm>
-            <a:off x="3639312" y="4169664"/>
-            <a:ext cx="685800" cy="384048"/>
+            <a:off x="3942207" y="4169664"/>
+            <a:ext cx="685800" cy="475488"/>
           </a:xfrm>
           <a:prstGeom prst="rect">
             <a:avLst/>
@@ -32210,7 +32000,7 @@
                 <a:ea typeface="Trebuchet MS" pitchFamily="34" charset="-122"/>
                 <a:cs typeface="Trebuchet MS" pitchFamily="34" charset="-120"/>
               </a:rPr>
-              <a:t>c</a:t>
+              <a:t>l</a:t>
             </a:r>
             <a:endParaRPr lang="en-US" sz="900" dirty="0"/>
           </a:p>
@@ -32218,57 +32008,18 @@
       </p:sp>
       <p:sp>
         <p:nvSpPr>
-          <p:cNvPr id="42" name="Text 40"/>
-          <p:cNvSpPr/>
-          <p:nvPr/>
-        </p:nvSpPr>
-        <p:spPr>
-          <a:xfrm>
-            <a:off x="3639312" y="4572000"/>
-            <a:ext cx="685800" cy="219456"/>
-          </a:xfrm>
-          <a:prstGeom prst="rect">
-            <a:avLst/>
-          </a:prstGeom>
-          <a:noFill/>
-          <a:ln/>
-        </p:spPr>
-        <p:txBody>
-          <a:bodyPr wrap="square" lIns="0" tIns="0" rIns="0" bIns="0" rtlCol="0" anchor="t"/>
-          <a:lstStyle/>
-          <a:p>
-            <a:pPr algn="ctr" indent="0" marL="0">
-              <a:buNone/>
-            </a:pPr>
-            <a:r>
-              <a:rPr lang="en-US" sz="750" i="1" dirty="0">
-                <a:solidFill>
-                  <a:srgbClr val="94A3B8"/>
-                </a:solidFill>
-                <a:latin typeface="Calibri" pitchFamily="34" charset="0"/>
-                <a:ea typeface="Calibri" pitchFamily="34" charset="-122"/>
-                <a:cs typeface="Calibri" pitchFamily="34" charset="-120"/>
-              </a:rPr>
-              <a:t>/k/</a:t>
-            </a:r>
-            <a:endParaRPr lang="en-US" sz="750" dirty="0"/>
-          </a:p>
-        </p:txBody>
-      </p:sp>
-      <p:sp>
-        <p:nvSpPr>
-          <p:cNvPr id="43" name="Shape 41"/>
-          <p:cNvSpPr/>
-          <p:nvPr/>
-        </p:nvSpPr>
-        <p:spPr>
-          <a:xfrm>
-            <a:off x="4447032" y="4169664"/>
-            <a:ext cx="685800" cy="384048"/>
+          <p:cNvPr id="42" name="Shape 40"/>
+          <p:cNvSpPr/>
+          <p:nvPr/>
+        </p:nvSpPr>
+        <p:spPr>
+          <a:xfrm>
+            <a:off x="4850892" y="4169664"/>
+            <a:ext cx="685800" cy="475488"/>
           </a:xfrm>
           <a:prstGeom prst="rect">
             <a:avLst>
-              <a:gd name="adj" fmla="val 9524"/>
+              <a:gd name="adj" fmla="val 7692"/>
             </a:avLst>
           </a:prstGeom>
           <a:solidFill>
@@ -32284,14 +32035,14 @@
       </p:sp>
       <p:sp>
         <p:nvSpPr>
-          <p:cNvPr id="44" name="Text 42"/>
-          <p:cNvSpPr/>
-          <p:nvPr/>
-        </p:nvSpPr>
-        <p:spPr>
-          <a:xfrm>
-            <a:off x="4447032" y="4169664"/>
-            <a:ext cx="685800" cy="384048"/>
+          <p:cNvPr id="43" name="Text 41"/>
+          <p:cNvSpPr/>
+          <p:nvPr/>
+        </p:nvSpPr>
+        <p:spPr>
+          <a:xfrm>
+            <a:off x="4850892" y="4169664"/>
+            <a:ext cx="685800" cy="475488"/>
           </a:xfrm>
           <a:prstGeom prst="rect">
             <a:avLst/>
@@ -32315,7 +32066,7 @@
                 <a:ea typeface="Trebuchet MS" pitchFamily="34" charset="-122"/>
                 <a:cs typeface="Trebuchet MS" pitchFamily="34" charset="-120"/>
               </a:rPr>
-              <a:t>t</a:t>
+              <a:t>e</a:t>
             </a:r>
             <a:endParaRPr lang="en-US" sz="900" dirty="0"/>
           </a:p>
@@ -32323,18 +32074,18 @@
       </p:sp>
       <p:sp>
         <p:nvSpPr>
-          <p:cNvPr id="45" name="Shape 43"/>
-          <p:cNvSpPr/>
-          <p:nvPr/>
-        </p:nvSpPr>
-        <p:spPr>
-          <a:xfrm>
-            <a:off x="5254752" y="4169664"/>
-            <a:ext cx="685800" cy="384048"/>
+          <p:cNvPr id="44" name="Shape 42"/>
+          <p:cNvSpPr/>
+          <p:nvPr/>
+        </p:nvSpPr>
+        <p:spPr>
+          <a:xfrm>
+            <a:off x="5759577" y="4169664"/>
+            <a:ext cx="685800" cy="475488"/>
           </a:xfrm>
           <a:prstGeom prst="rect">
             <a:avLst>
-              <a:gd name="adj" fmla="val 9524"/>
+              <a:gd name="adj" fmla="val 7692"/>
             </a:avLst>
           </a:prstGeom>
           <a:solidFill>
@@ -32350,14 +32101,14 @@
       </p:sp>
       <p:sp>
         <p:nvSpPr>
-          <p:cNvPr id="46" name="Text 44"/>
-          <p:cNvSpPr/>
-          <p:nvPr/>
-        </p:nvSpPr>
-        <p:spPr>
-          <a:xfrm>
-            <a:off x="5254752" y="4169664"/>
-            <a:ext cx="685800" cy="384048"/>
+          <p:cNvPr id="45" name="Text 43"/>
+          <p:cNvSpPr/>
+          <p:nvPr/>
+        </p:nvSpPr>
+        <p:spPr>
+          <a:xfrm>
+            <a:off x="5759577" y="4169664"/>
+            <a:ext cx="685800" cy="475488"/>
           </a:xfrm>
           <a:prstGeom prst="rect">
             <a:avLst/>
@@ -32381,7 +32132,7 @@
                 <a:ea typeface="Trebuchet MS" pitchFamily="34" charset="-122"/>
                 <a:cs typeface="Trebuchet MS" pitchFamily="34" charset="-120"/>
               </a:rPr>
-              <a:t>o</a:t>
+              <a:t>gr</a:t>
             </a:r>
             <a:endParaRPr lang="en-US" sz="900" dirty="0"/>
           </a:p>
@@ -32389,18 +32140,18 @@
       </p:sp>
       <p:sp>
         <p:nvSpPr>
-          <p:cNvPr id="47" name="Shape 45"/>
-          <p:cNvSpPr/>
-          <p:nvPr/>
-        </p:nvSpPr>
-        <p:spPr>
-          <a:xfrm>
-            <a:off x="6062472" y="4169664"/>
-            <a:ext cx="685800" cy="384048"/>
+          <p:cNvPr id="46" name="Shape 44"/>
+          <p:cNvSpPr/>
+          <p:nvPr/>
+        </p:nvSpPr>
+        <p:spPr>
+          <a:xfrm>
+            <a:off x="6668262" y="4169664"/>
+            <a:ext cx="685800" cy="475488"/>
           </a:xfrm>
           <a:prstGeom prst="rect">
             <a:avLst>
-              <a:gd name="adj" fmla="val 9524"/>
+              <a:gd name="adj" fmla="val 7692"/>
             </a:avLst>
           </a:prstGeom>
           <a:solidFill>
@@ -32416,14 +32167,14 @@
       </p:sp>
       <p:sp>
         <p:nvSpPr>
-          <p:cNvPr id="48" name="Text 46"/>
-          <p:cNvSpPr/>
-          <p:nvPr/>
-        </p:nvSpPr>
-        <p:spPr>
-          <a:xfrm>
-            <a:off x="6062472" y="4169664"/>
-            <a:ext cx="685800" cy="384048"/>
+          <p:cNvPr id="47" name="Text 45"/>
+          <p:cNvSpPr/>
+          <p:nvPr/>
+        </p:nvSpPr>
+        <p:spPr>
+          <a:xfrm>
+            <a:off x="6668262" y="4169664"/>
+            <a:ext cx="685800" cy="475488"/>
           </a:xfrm>
           <a:prstGeom prst="rect">
             <a:avLst/>
@@ -32447,7 +32198,7 @@
                 <a:ea typeface="Trebuchet MS" pitchFamily="34" charset="-122"/>
                 <a:cs typeface="Trebuchet MS" pitchFamily="34" charset="-120"/>
               </a:rPr>
-              <a:t>gr</a:t>
+              <a:t>a</a:t>
             </a:r>
             <a:endParaRPr lang="en-US" sz="900" dirty="0"/>
           </a:p>
@@ -32455,18 +32206,18 @@
       </p:sp>
       <p:sp>
         <p:nvSpPr>
-          <p:cNvPr id="49" name="Shape 47"/>
-          <p:cNvSpPr/>
-          <p:nvPr/>
-        </p:nvSpPr>
-        <p:spPr>
-          <a:xfrm>
-            <a:off x="6870192" y="4169664"/>
-            <a:ext cx="685800" cy="384048"/>
+          <p:cNvPr id="48" name="Shape 46"/>
+          <p:cNvSpPr/>
+          <p:nvPr/>
+        </p:nvSpPr>
+        <p:spPr>
+          <a:xfrm>
+            <a:off x="7576947" y="4169664"/>
+            <a:ext cx="685800" cy="475488"/>
           </a:xfrm>
           <a:prstGeom prst="rect">
             <a:avLst>
-              <a:gd name="adj" fmla="val 9524"/>
+              <a:gd name="adj" fmla="val 7692"/>
             </a:avLst>
           </a:prstGeom>
           <a:solidFill>
@@ -32482,80 +32233,14 @@
       </p:sp>
       <p:sp>
         <p:nvSpPr>
-          <p:cNvPr id="50" name="Text 48"/>
-          <p:cNvSpPr/>
-          <p:nvPr/>
-        </p:nvSpPr>
-        <p:spPr>
-          <a:xfrm>
-            <a:off x="6870192" y="4169664"/>
-            <a:ext cx="685800" cy="384048"/>
-          </a:xfrm>
-          <a:prstGeom prst="rect">
-            <a:avLst/>
-          </a:prstGeom>
-          <a:noFill/>
-          <a:ln/>
-        </p:spPr>
-        <p:txBody>
-          <a:bodyPr wrap="square" lIns="0" tIns="0" rIns="0" bIns="0" rtlCol="0" anchor="ctr"/>
-          <a:lstStyle/>
-          <a:p>
-            <a:pPr algn="ctr" indent="0" marL="0">
-              <a:buNone/>
-            </a:pPr>
-            <a:r>
-              <a:rPr lang="en-US" sz="900" b="1" dirty="0">
-                <a:solidFill>
-                  <a:srgbClr val="9D174D"/>
-                </a:solidFill>
-                <a:latin typeface="Trebuchet MS" pitchFamily="34" charset="0"/>
-                <a:ea typeface="Trebuchet MS" pitchFamily="34" charset="-122"/>
-                <a:cs typeface="Trebuchet MS" pitchFamily="34" charset="-120"/>
-              </a:rPr>
-              <a:t>a</a:t>
-            </a:r>
-            <a:endParaRPr lang="en-US" sz="900" dirty="0"/>
-          </a:p>
-        </p:txBody>
-      </p:sp>
-      <p:sp>
-        <p:nvSpPr>
-          <p:cNvPr id="51" name="Shape 49"/>
-          <p:cNvSpPr/>
-          <p:nvPr/>
-        </p:nvSpPr>
-        <p:spPr>
-          <a:xfrm>
-            <a:off x="7677912" y="4169664"/>
-            <a:ext cx="685800" cy="384048"/>
-          </a:xfrm>
-          <a:prstGeom prst="rect">
-            <a:avLst>
-              <a:gd name="adj" fmla="val 9524"/>
-            </a:avLst>
-          </a:prstGeom>
-          <a:solidFill>
-            <a:srgbClr val="FFFFFF"/>
-          </a:solidFill>
-          <a:ln w="12700">
-            <a:solidFill>
-              <a:srgbClr val="DB2777"/>
-            </a:solidFill>
-            <a:prstDash val="solid"/>
-          </a:ln>
-        </p:spPr>
-      </p:sp>
-      <p:sp>
-        <p:nvSpPr>
-          <p:cNvPr id="52" name="Text 50"/>
-          <p:cNvSpPr/>
-          <p:nvPr/>
-        </p:nvSpPr>
-        <p:spPr>
-          <a:xfrm>
-            <a:off x="7677912" y="4169664"/>
-            <a:ext cx="685800" cy="384048"/>
+          <p:cNvPr id="49" name="Text 47"/>
+          <p:cNvSpPr/>
+          <p:nvPr/>
+        </p:nvSpPr>
+        <p:spPr>
+          <a:xfrm>
+            <a:off x="7576947" y="4169664"/>
+            <a:ext cx="685800" cy="475488"/>
           </a:xfrm>
           <a:prstGeom prst="rect">
             <a:avLst/>
@@ -34533,7 +34218,7 @@
                 <a:ea typeface="Trebuchet MS" pitchFamily="34" charset="-122"/>
                 <a:cs typeface="Trebuchet MS" pitchFamily="34" charset="-120"/>
               </a:rPr>
-              <a:t>mono-</a:t>
+              <a:t>dia-</a:t>
             </a:r>
             <a:endParaRPr lang="en-US" sz="1300" dirty="0"/>
           </a:p>
@@ -34622,7 +34307,7 @@
                 <a:ea typeface="Trebuchet MS" pitchFamily="34" charset="-122"/>
                 <a:cs typeface="Trebuchet MS" pitchFamily="34" charset="-120"/>
               </a:rPr>
-              <a:t>-me</a:t>
+              <a:t>-mar</a:t>
             </a:r>
             <a:endParaRPr lang="en-US" sz="1300" dirty="0"/>
           </a:p>
@@ -34686,7 +34371,7 @@
                 <a:ea typeface="Trebuchet MS" pitchFamily="34" charset="-122"/>
                 <a:cs typeface="Trebuchet MS" pitchFamily="34" charset="-120"/>
               </a:rPr>
-              <a:t>dia-</a:t>
+              <a:t>pro-</a:t>
             </a:r>
             <a:endParaRPr lang="en-US" sz="1300" dirty="0"/>
           </a:p>
@@ -34775,7 +34460,7 @@
                 <a:ea typeface="Trebuchet MS" pitchFamily="34" charset="-122"/>
                 <a:cs typeface="Trebuchet MS" pitchFamily="34" charset="-120"/>
               </a:rPr>
-              <a:t>-mar</a:t>
+              <a:t>-ming</a:t>
             </a:r>
             <a:endParaRPr lang="en-US" sz="1300" dirty="0"/>
           </a:p>
@@ -34839,7 +34524,7 @@
                 <a:ea typeface="Trebuchet MS" pitchFamily="34" charset="-122"/>
                 <a:cs typeface="Trebuchet MS" pitchFamily="34" charset="-120"/>
               </a:rPr>
-              <a:t>holo-</a:t>
+              <a:t>mono-</a:t>
             </a:r>
             <a:endParaRPr lang="en-US" sz="1300" dirty="0"/>
           </a:p>
@@ -34928,7 +34613,7 @@
                 <a:ea typeface="Trebuchet MS" pitchFamily="34" charset="-122"/>
                 <a:cs typeface="Trebuchet MS" pitchFamily="34" charset="-120"/>
               </a:rPr>
-              <a:t>-ming</a:t>
+              <a:t>-med</a:t>
             </a:r>
             <a:endParaRPr lang="en-US" sz="1300" dirty="0"/>
           </a:p>
@@ -34992,7 +34677,7 @@
                 <a:ea typeface="Trebuchet MS" pitchFamily="34" charset="-122"/>
                 <a:cs typeface="Trebuchet MS" pitchFamily="34" charset="-120"/>
               </a:rPr>
-              <a:t>pro-</a:t>
+              <a:t>holo-</a:t>
             </a:r>
             <a:endParaRPr lang="en-US" sz="1300" dirty="0"/>
           </a:p>
@@ -35081,7 +34766,7 @@
                 <a:ea typeface="Trebuchet MS" pitchFamily="34" charset="-122"/>
                 <a:cs typeface="Trebuchet MS" pitchFamily="34" charset="-120"/>
               </a:rPr>
-              <a:t>-med</a:t>
+              <a:t>-matical</a:t>
             </a:r>
             <a:endParaRPr lang="en-US" sz="1300" dirty="0"/>
           </a:p>
@@ -35318,7 +35003,7 @@
                 <a:ea typeface="Trebuchet MS" pitchFamily="34" charset="-122"/>
                 <a:cs typeface="Trebuchet MS" pitchFamily="34" charset="-120"/>
               </a:rPr>
-              <a:t>programme</a:t>
+              <a:t>program</a:t>
             </a:r>
             <a:endParaRPr lang="en-US" sz="1200" dirty="0"/>
           </a:p>
@@ -35648,7 +35333,7 @@
                 <a:ea typeface="Trebuchet MS" pitchFamily="34" charset="-122"/>
                 <a:cs typeface="Trebuchet MS" pitchFamily="34" charset="-120"/>
               </a:rPr>
-              <a:t>pictogram</a:t>
+              <a:t>cardiogram</a:t>
             </a:r>
             <a:endParaRPr lang="en-US" sz="1200" dirty="0"/>
           </a:p>
@@ -36836,7 +36521,7 @@
                 <a:ea typeface="Calibri" pitchFamily="34" charset="-122"/>
                 <a:cs typeface="Calibri" pitchFamily="34" charset="-120"/>
               </a:rPr>
-              <a:t>1.  The root 'gram' comes from Greek and means written or recorded.</a:t>
+              <a:t>1.  An anagram is made by rearranging the letters of another word.</a:t>
             </a:r>
             <a:endParaRPr lang="en-US" sz="1300" dirty="0"/>
           </a:p>
@@ -36975,7 +36660,7 @@
                 <a:ea typeface="Calibri" pitchFamily="34" charset="-122"/>
                 <a:cs typeface="Calibri" pitchFamily="34" charset="-120"/>
               </a:rPr>
-              <a:t>2.  A diagram is a type of musical instrument.</a:t>
+              <a:t>2.  A hologram is a flat, two-dimensional picture printed on paper.</a:t>
             </a:r>
             <a:endParaRPr lang="en-US" sz="1300" dirty="0"/>
           </a:p>
@@ -37114,7 +36799,7 @@
                 <a:ea typeface="Calibri" pitchFamily="34" charset="-122"/>
                 <a:cs typeface="Calibri" pitchFamily="34" charset="-120"/>
               </a:rPr>
-              <a:t>3.  An anagram rearranges the letters of a word to make a new word.</a:t>
+              <a:t>3.  The root 'gram' can be found in the word 'telegram'.</a:t>
             </a:r>
             <a:endParaRPr lang="en-US" sz="1300" dirty="0"/>
           </a:p>
@@ -37253,7 +36938,7 @@
                 <a:ea typeface="Calibri" pitchFamily="34" charset="-122"/>
                 <a:cs typeface="Calibri" pitchFamily="34" charset="-120"/>
               </a:rPr>
-              <a:t>4.  A telegram is a message that is written and sent to someone.</a:t>
+              <a:t>4.  The root 'gram' comes from Latin and means 'to speak'.</a:t>
             </a:r>
             <a:endParaRPr lang="en-US" sz="1300" dirty="0"/>
           </a:p>
@@ -37276,11 +36961,11 @@
             </a:avLst>
           </a:prstGeom>
           <a:solidFill>
-            <a:srgbClr val="DCFCE7"/>
-          </a:solidFill>
-          <a:ln w="12700">
-            <a:solidFill>
-              <a:srgbClr val="16A34A"/>
+            <a:srgbClr val="FEE2E2"/>
+          </a:solidFill>
+          <a:ln w="12700">
+            <a:solidFill>
+              <a:srgbClr val="DC2626"/>
             </a:solidFill>
             <a:prstDash val="solid"/>
           </a:ln>
@@ -37313,13 +36998,13 @@
             <a:r>
               <a:rPr lang="en-US" sz="1100" b="1" dirty="0">
                 <a:solidFill>
-                  <a:srgbClr val="16A34A"/>
+                  <a:srgbClr val="DC2626"/>
                 </a:solidFill>
                 <a:latin typeface="Trebuchet MS" pitchFamily="34" charset="0"/>
                 <a:ea typeface="Trebuchet MS" pitchFamily="34" charset="-122"/>
                 <a:cs typeface="Trebuchet MS" pitchFamily="34" charset="-120"/>
               </a:rPr>
-              <a:t>TRUE</a:t>
+              <a:t>FALSE</a:t>
             </a:r>
             <a:endParaRPr lang="en-US" sz="1100" dirty="0"/>
           </a:p>
@@ -37392,7 +37077,7 @@
                 <a:ea typeface="Calibri" pitchFamily="34" charset="-122"/>
                 <a:cs typeface="Calibri" pitchFamily="34" charset="-120"/>
               </a:rPr>
-              <a:t>5.  The root 'gram' comes from Latin and means to speak aloud.</a:t>
+              <a:t>5.  A diagram is a type of drawing or plan that explains something.</a:t>
             </a:r>
             <a:endParaRPr lang="en-US" sz="1300" dirty="0"/>
           </a:p>
@@ -37415,11 +37100,11 @@
             </a:avLst>
           </a:prstGeom>
           <a:solidFill>
-            <a:srgbClr val="FEE2E2"/>
-          </a:solidFill>
-          <a:ln w="12700">
-            <a:solidFill>
-              <a:srgbClr val="DC2626"/>
+            <a:srgbClr val="DCFCE7"/>
+          </a:solidFill>
+          <a:ln w="12700">
+            <a:solidFill>
+              <a:srgbClr val="16A34A"/>
             </a:solidFill>
             <a:prstDash val="solid"/>
           </a:ln>
@@ -37452,13 +37137,13 @@
             <a:r>
               <a:rPr lang="en-US" sz="1100" b="1" dirty="0">
                 <a:solidFill>
-                  <a:srgbClr val="DC2626"/>
+                  <a:srgbClr val="16A34A"/>
                 </a:solidFill>
                 <a:latin typeface="Trebuchet MS" pitchFamily="34" charset="0"/>
                 <a:ea typeface="Trebuchet MS" pitchFamily="34" charset="-122"/>
                 <a:cs typeface="Trebuchet MS" pitchFamily="34" charset="-120"/>
               </a:rPr>
-              <a:t>FALSE</a:t>
+              <a:t>TRUE</a:t>
             </a:r>
             <a:endParaRPr lang="en-US" sz="1100" dirty="0"/>
           </a:p>
@@ -38163,7 +37848,7 @@
                 <a:ea typeface="Trebuchet MS" pitchFamily="34" charset="-122"/>
                 <a:cs typeface="Trebuchet MS" pitchFamily="34" charset="-120"/>
               </a:rPr>
-              <a:t>programme</a:t>
+              <a:t>program</a:t>
             </a:r>
             <a:endParaRPr lang="en-US" sz="1300" dirty="0"/>
           </a:p>
@@ -39212,7 +38897,7 @@
                 <a:ea typeface="Trebuchet MS" pitchFamily="34" charset="-122"/>
                 <a:cs typeface="Trebuchet MS" pitchFamily="34" charset="-120"/>
               </a:rPr>
-              <a:t>mono-</a:t>
+              <a:t>dia-</a:t>
             </a:r>
             <a:endParaRPr lang="en-US" sz="1300" dirty="0"/>
           </a:p>
@@ -39301,7 +38986,7 @@
                 <a:ea typeface="Trebuchet MS" pitchFamily="34" charset="-122"/>
                 <a:cs typeface="Trebuchet MS" pitchFamily="34" charset="-120"/>
               </a:rPr>
-              <a:t>-me</a:t>
+              <a:t>-mar</a:t>
             </a:r>
             <a:endParaRPr lang="en-US" sz="1300" dirty="0"/>
           </a:p>
@@ -39365,7 +39050,7 @@
                 <a:ea typeface="Trebuchet MS" pitchFamily="34" charset="-122"/>
                 <a:cs typeface="Trebuchet MS" pitchFamily="34" charset="-120"/>
               </a:rPr>
-              <a:t>dia-</a:t>
+              <a:t>pro-</a:t>
             </a:r>
             <a:endParaRPr lang="en-US" sz="1300" dirty="0"/>
           </a:p>
@@ -39454,7 +39139,7 @@
                 <a:ea typeface="Trebuchet MS" pitchFamily="34" charset="-122"/>
                 <a:cs typeface="Trebuchet MS" pitchFamily="34" charset="-120"/>
               </a:rPr>
-              <a:t>-mar</a:t>
+              <a:t>-ming</a:t>
             </a:r>
             <a:endParaRPr lang="en-US" sz="1300" dirty="0"/>
           </a:p>
@@ -39518,7 +39203,7 @@
                 <a:ea typeface="Trebuchet MS" pitchFamily="34" charset="-122"/>
                 <a:cs typeface="Trebuchet MS" pitchFamily="34" charset="-120"/>
               </a:rPr>
-              <a:t>holo-</a:t>
+              <a:t>mono-</a:t>
             </a:r>
             <a:endParaRPr lang="en-US" sz="1300" dirty="0"/>
           </a:p>
@@ -39607,7 +39292,7 @@
                 <a:ea typeface="Trebuchet MS" pitchFamily="34" charset="-122"/>
                 <a:cs typeface="Trebuchet MS" pitchFamily="34" charset="-120"/>
               </a:rPr>
-              <a:t>-ming</a:t>
+              <a:t>-med</a:t>
             </a:r>
             <a:endParaRPr lang="en-US" sz="1300" dirty="0"/>
           </a:p>
@@ -39671,7 +39356,7 @@
                 <a:ea typeface="Trebuchet MS" pitchFamily="34" charset="-122"/>
                 <a:cs typeface="Trebuchet MS" pitchFamily="34" charset="-120"/>
               </a:rPr>
-              <a:t>pro-</a:t>
+              <a:t>holo-</a:t>
             </a:r>
             <a:endParaRPr lang="en-US" sz="1300" dirty="0"/>
           </a:p>
@@ -39760,7 +39445,7 @@
                 <a:ea typeface="Trebuchet MS" pitchFamily="34" charset="-122"/>
                 <a:cs typeface="Trebuchet MS" pitchFamily="34" charset="-120"/>
               </a:rPr>
-              <a:t>-med</a:t>
+              <a:t>-matical</a:t>
             </a:r>
             <a:endParaRPr lang="en-US" sz="1300" dirty="0"/>
           </a:p>
@@ -40671,7 +40356,7 @@
                 <a:ea typeface="Calibri" pitchFamily="34" charset="-122"/>
                 <a:cs typeface="Calibri" pitchFamily="34" charset="-120"/>
               </a:rPr>
-              <a:t>The rules about how words are put together to make correct sentences.</a:t>
+              <a:t>The set of rules that explain how words are put together to make sentences.</a:t>
             </a:r>
             <a:endParaRPr lang="en-US" sz="1200" dirty="0"/>
           </a:p>
@@ -40810,7 +40495,7 @@
                 <a:ea typeface="Calibri" pitchFamily="34" charset="-122"/>
                 <a:cs typeface="Calibri" pitchFamily="34" charset="-120"/>
               </a:rPr>
-              <a:t>A plan or schedule of events, or a list of what will happen at a show.</a:t>
+              <a:t>A set of instructions for a computer, or a plan of activities for an event.</a:t>
             </a:r>
             <a:endParaRPr lang="en-US" sz="1200" dirty="0"/>
           </a:p>
@@ -40883,7 +40568,7 @@
                 <a:ea typeface="Trebuchet MS" pitchFamily="34" charset="-122"/>
                 <a:cs typeface="Trebuchet MS" pitchFamily="34" charset="-120"/>
               </a:rPr>
-              <a:t>programme</a:t>
+              <a:t>program</a:t>
             </a:r>
             <a:endParaRPr lang="en-US" sz="1200" dirty="0"/>
           </a:p>
@@ -40949,7 +40634,7 @@
                 <a:ea typeface="Calibri" pitchFamily="34" charset="-122"/>
                 <a:cs typeface="Calibri" pitchFamily="34" charset="-120"/>
               </a:rPr>
-              <a:t>A three-dimensional image made using laser light that looks like it floats in the air.</a:t>
+              <a:t>A 3D image made using lasers that seems to float in the air.</a:t>
             </a:r>
             <a:endParaRPr lang="en-US" sz="1200" dirty="0"/>
           </a:p>
@@ -41088,7 +40773,7 @@
                 <a:ea typeface="Calibri" pitchFamily="34" charset="-122"/>
                 <a:cs typeface="Calibri" pitchFamily="34" charset="-120"/>
               </a:rPr>
-              <a:t>A word made by rearranging all the letters of another word, like 'listen' and 'silent'.</a:t>
+              <a:t>A word made by rearranging the letters of another word, like 'team' and 'mate'.</a:t>
             </a:r>
             <a:endParaRPr lang="en-US" sz="1200" dirty="0"/>
           </a:p>
@@ -41227,7 +40912,7 @@
                 <a:ea typeface="Calibri" pitchFamily="34" charset="-122"/>
                 <a:cs typeface="Calibri" pitchFamily="34" charset="-120"/>
               </a:rPr>
-              <a:t>A design made from someone's initials woven or printed together.</a:t>
+              <a:t>A design made from a person's initials, often used on clothing or stationery.</a:t>
             </a:r>
             <a:endParaRPr lang="en-US" sz="1200" dirty="0"/>
           </a:p>
@@ -41366,7 +41051,7 @@
                 <a:ea typeface="Calibri" pitchFamily="34" charset="-122"/>
                 <a:cs typeface="Calibri" pitchFamily="34" charset="-120"/>
               </a:rPr>
-              <a:t>A written message sent quickly over long distances using electrical signals.</a:t>
+              <a:t>A short message sent quickly over long distances using electrical signals.</a:t>
             </a:r>
             <a:endParaRPr lang="en-US" sz="1200" dirty="0"/>
           </a:p>
@@ -41505,7 +41190,7 @@
                 <a:ea typeface="Calibri" pitchFamily="34" charset="-122"/>
                 <a:cs typeface="Calibri" pitchFamily="34" charset="-120"/>
               </a:rPr>
-              <a:t>A drawing or picture that explains how something works or shows information.</a:t>
+              <a:t>A drawing or plan that explains how something works or what something looks like.</a:t>
             </a:r>
             <a:endParaRPr lang="en-US" sz="1200" dirty="0"/>
           </a:p>
@@ -42164,7 +41849,7 @@
                 <a:ea typeface="Calibri" pitchFamily="34" charset="-122"/>
                 <a:cs typeface="Calibri" pitchFamily="34" charset="-120"/>
               </a:rPr>
-              <a:t>Mia received a telegram from her grandmother who was travelling overseas.</a:t>
+              <a:t>We sent a telegram to our grandparents to let them know we had arrived safely.</a:t>
             </a:r>
             <a:endParaRPr lang="en-US" sz="1500" dirty="0"/>
           </a:p>
@@ -42328,7 +42013,7 @@
                 <a:ea typeface="Calibri" pitchFamily="34" charset="-122"/>
                 <a:cs typeface="Calibri" pitchFamily="34" charset="-120"/>
               </a:rPr>
-              <a:t>We used a pictogram in our maths graph to represent the number of students who walk to school.</a:t>
+              <a:t>The computer program helped the students practise their multiplication facts.</a:t>
             </a:r>
             <a:endParaRPr lang="en-US" sz="1500" dirty="0"/>
           </a:p>

--- a/output/wordlabs-gram-3day.pptx
+++ b/output/wordlabs-gram-3day.pptx
@@ -4240,7 +4240,7 @@
                 <a:ea typeface="Calibri" pitchFamily="34" charset="-122"/>
                 <a:cs typeface="Calibri" pitchFamily="34" charset="-120"/>
               </a:rPr>
-              <a:t>"written, drawn, recorded"</a:t>
+              <a:t>"written; something written"</a:t>
             </a:r>
             <a:endParaRPr lang="en-US" sz="2200" dirty="0"/>
           </a:p>
@@ -4279,7 +4279,7 @@
                 <a:ea typeface="Calibri" pitchFamily="34" charset="-122"/>
                 <a:cs typeface="Calibri" pitchFamily="34" charset="-120"/>
               </a:rPr>
-              <a:t>Origin: Greek: gramma</a:t>
+              <a:t>Origin: Greek root</a:t>
             </a:r>
             <a:endParaRPr lang="en-US" sz="1300" dirty="0"/>
           </a:p>
@@ -5288,7 +5288,7 @@
                 <a:ea typeface="Calibri" pitchFamily="34" charset="-122"/>
                 <a:cs typeface="Calibri" pitchFamily="34" charset="-120"/>
               </a:rPr>
-              <a:t>Word Labs  •  wordlabs.app  •  Root: 'gram' = written, drawn, recorded</a:t>
+              <a:t>Word Labs  •  wordlabs.app  •  Root: 'gram' = written; something written</a:t>
             </a:r>
             <a:endParaRPr lang="en-US" sz="800" dirty="0"/>
           </a:p>
@@ -5928,7 +5928,7 @@
                 <a:ea typeface="Calibri" pitchFamily="34" charset="-122"/>
                 <a:cs typeface="Calibri" pitchFamily="34" charset="-120"/>
               </a:rPr>
-              <a:t>Word Labs  •  wordlabs.app  •  Root: 'gram' = written, drawn, recorded</a:t>
+              <a:t>Word Labs  •  wordlabs.app  •  Root: 'gram' = written; something written</a:t>
             </a:r>
             <a:endParaRPr lang="en-US" sz="800" dirty="0"/>
           </a:p>
@@ -6040,7 +6040,7 @@
                 <a:ea typeface="Calibri" pitchFamily="34" charset="-122"/>
                 <a:cs typeface="Calibri" pitchFamily="34" charset="-120"/>
               </a:rPr>
-              <a:t>Can you draw a </a:t>
+              <a:t>Grandad still has the </a:t>
             </a:r>
             <a:pPr algn="l" indent="0" marL="0">
               <a:buNone/>
@@ -6057,7 +6057,7 @@
                 <a:ea typeface="Calibri" pitchFamily="34" charset="-122"/>
                 <a:cs typeface="Calibri" pitchFamily="34" charset="-120"/>
               </a:rPr>
-              <a:t>diagram</a:t>
+              <a:t>telegram</a:t>
             </a:r>
             <a:pPr algn="l" indent="0" marL="0">
               <a:buNone/>
@@ -6071,7 +6071,7 @@
                 <a:ea typeface="Calibri" pitchFamily="34" charset="-122"/>
                 <a:cs typeface="Calibri" pitchFamily="34" charset="-120"/>
               </a:rPr>
-              <a:t> to explain your </a:t>
+              <a:t> that announced the end of the war. During the war, families anxiously waited for </a:t>
             </a:r>
             <a:pPr algn="l" indent="0" marL="0">
               <a:buNone/>
@@ -6088,7 +6088,7 @@
                 <a:ea typeface="Calibri" pitchFamily="34" charset="-122"/>
                 <a:cs typeface="Calibri" pitchFamily="34" charset="-120"/>
               </a:rPr>
-              <a:t>program</a:t>
+              <a:t>telegrams</a:t>
             </a:r>
             <a:pPr algn="l" indent="0" marL="0">
               <a:buNone/>
@@ -6102,7 +6102,7 @@
                 <a:ea typeface="Calibri" pitchFamily="34" charset="-122"/>
                 <a:cs typeface="Calibri" pitchFamily="34" charset="-120"/>
               </a:rPr>
-              <a:t> to the class?</a:t>
+              <a:t> bringing news of their sons.</a:t>
             </a:r>
             <a:endParaRPr lang="en-US" sz="1800" dirty="0"/>
           </a:p>
@@ -6257,7 +6257,7 @@
                 <a:ea typeface="Trebuchet MS" pitchFamily="34" charset="-122"/>
                 <a:cs typeface="Trebuchet MS" pitchFamily="34" charset="-120"/>
               </a:rPr>
-              <a:t>diagram</a:t>
+              <a:t>telegram</a:t>
             </a:r>
             <a:endParaRPr lang="en-US" sz="1400" dirty="0"/>
           </a:p>
@@ -6385,7 +6385,7 @@
                 <a:ea typeface="Trebuchet MS" pitchFamily="34" charset="-122"/>
                 <a:cs typeface="Trebuchet MS" pitchFamily="34" charset="-120"/>
               </a:rPr>
-              <a:t>program</a:t>
+              <a:t>telegrams</a:t>
             </a:r>
             <a:endParaRPr lang="en-US" sz="1400" dirty="0"/>
           </a:p>
@@ -6716,7 +6716,7 @@
                 <a:ea typeface="Calibri" pitchFamily="34" charset="-122"/>
                 <a:cs typeface="Calibri" pitchFamily="34" charset="-120"/>
               </a:rPr>
-              <a:t>Word Labs  •  wordlabs.app  •  Root: 'gram' = written, drawn, recorded</a:t>
+              <a:t>Word Labs  •  wordlabs.app  •  Root: 'gram' = written; something written</a:t>
             </a:r>
             <a:endParaRPr lang="en-US" sz="800" dirty="0"/>
           </a:p>
@@ -6855,7 +6855,7 @@
                 <a:ea typeface="Trebuchet MS" pitchFamily="34" charset="-122"/>
                 <a:cs typeface="Trebuchet MS" pitchFamily="34" charset="-120"/>
               </a:rPr>
-              <a:t>diagram</a:t>
+              <a:t>telegram</a:t>
             </a:r>
             <a:endParaRPr lang="en-US" sz="2800" dirty="0"/>
           </a:p>
@@ -7543,7 +7543,7 @@
                 <a:ea typeface="Calibri" pitchFamily="34" charset="-122"/>
                 <a:cs typeface="Calibri" pitchFamily="34" charset="-120"/>
               </a:rPr>
-              <a:t>Word Labs  •  wordlabs.app  •  Root: 'gram' = written, drawn, recorded</a:t>
+              <a:t>Word Labs  •  wordlabs.app  •  Root: 'gram' = written; something written</a:t>
             </a:r>
             <a:endParaRPr lang="en-US" sz="800" dirty="0"/>
           </a:p>
@@ -7682,7 +7682,7 @@
                 <a:ea typeface="Trebuchet MS" pitchFamily="34" charset="-122"/>
                 <a:cs typeface="Trebuchet MS" pitchFamily="34" charset="-120"/>
               </a:rPr>
-              <a:t>diagram</a:t>
+              <a:t>telegram</a:t>
             </a:r>
             <a:endParaRPr lang="en-US" sz="2800" dirty="0"/>
           </a:p>
@@ -7821,7 +7821,7 @@
                 <a:ea typeface="Trebuchet MS" pitchFamily="34" charset="-122"/>
                 <a:cs typeface="Trebuchet MS" pitchFamily="34" charset="-120"/>
               </a:rPr>
-              <a:t>dia</a:t>
+              <a:t>tele</a:t>
             </a:r>
             <a:endParaRPr lang="en-US" sz="1300" dirty="0"/>
           </a:p>
@@ -7860,7 +7860,7 @@
                 <a:ea typeface="Calibri" pitchFamily="34" charset="-122"/>
                 <a:cs typeface="Calibri" pitchFamily="34" charset="-120"/>
               </a:rPr>
-              <a:t>through, across</a:t>
+              <a:t>far; at a distance</a:t>
             </a:r>
             <a:endParaRPr lang="en-US" sz="850" dirty="0"/>
           </a:p>
@@ -7972,7 +7972,7 @@
                 <a:ea typeface="Calibri" pitchFamily="34" charset="-122"/>
                 <a:cs typeface="Calibri" pitchFamily="34" charset="-120"/>
               </a:rPr>
-              <a:t>written, drawn</a:t>
+              <a:t>written; something written</a:t>
             </a:r>
             <a:endParaRPr lang="en-US" sz="850" dirty="0"/>
           </a:p>
@@ -8528,7 +8528,7 @@
                 <a:ea typeface="Calibri" pitchFamily="34" charset="-122"/>
                 <a:cs typeface="Calibri" pitchFamily="34" charset="-120"/>
               </a:rPr>
-              <a:t>Word Labs  •  wordlabs.app  •  Root: 'gram' = written, drawn, recorded</a:t>
+              <a:t>Word Labs  •  wordlabs.app  •  Root: 'gram' = written; something written</a:t>
             </a:r>
             <a:endParaRPr lang="en-US" sz="800" dirty="0"/>
           </a:p>
@@ -8667,7 +8667,7 @@
                 <a:ea typeface="Trebuchet MS" pitchFamily="34" charset="-122"/>
                 <a:cs typeface="Trebuchet MS" pitchFamily="34" charset="-120"/>
               </a:rPr>
-              <a:t>diagram</a:t>
+              <a:t>telegram</a:t>
             </a:r>
             <a:endParaRPr lang="en-US" sz="2800" dirty="0"/>
           </a:p>
@@ -8806,7 +8806,7 @@
                 <a:ea typeface="Trebuchet MS" pitchFamily="34" charset="-122"/>
                 <a:cs typeface="Trebuchet MS" pitchFamily="34" charset="-120"/>
               </a:rPr>
-              <a:t>dia</a:t>
+              <a:t>tele</a:t>
             </a:r>
             <a:endParaRPr lang="en-US" sz="1300" dirty="0"/>
           </a:p>
@@ -8845,7 +8845,7 @@
                 <a:ea typeface="Calibri" pitchFamily="34" charset="-122"/>
                 <a:cs typeface="Calibri" pitchFamily="34" charset="-120"/>
               </a:rPr>
-              <a:t>through, across</a:t>
+              <a:t>far; at a distance</a:t>
             </a:r>
             <a:endParaRPr lang="en-US" sz="850" dirty="0"/>
           </a:p>
@@ -8957,7 +8957,7 @@
                 <a:ea typeface="Calibri" pitchFamily="34" charset="-122"/>
                 <a:cs typeface="Calibri" pitchFamily="34" charset="-120"/>
               </a:rPr>
-              <a:t>written, drawn</a:t>
+              <a:t>written; something written</a:t>
             </a:r>
             <a:endParaRPr lang="en-US" sz="850" dirty="0"/>
           </a:p>
@@ -9116,7 +9116,7 @@
                 <a:ea typeface="Trebuchet MS" pitchFamily="34" charset="-122"/>
                 <a:cs typeface="Trebuchet MS" pitchFamily="34" charset="-120"/>
               </a:rPr>
-              <a:t>di</a:t>
+              <a:t>tel</a:t>
             </a:r>
             <a:endParaRPr lang="en-US" sz="1400" dirty="0"/>
           </a:p>
@@ -9221,7 +9221,7 @@
                 <a:ea typeface="Trebuchet MS" pitchFamily="34" charset="-122"/>
                 <a:cs typeface="Trebuchet MS" pitchFamily="34" charset="-120"/>
               </a:rPr>
-              <a:t>a</a:t>
+              <a:t>e</a:t>
             </a:r>
             <a:endParaRPr lang="en-US" sz="1400" dirty="0"/>
           </a:p>
@@ -9750,7 +9750,7 @@
                 <a:ea typeface="Calibri" pitchFamily="34" charset="-122"/>
                 <a:cs typeface="Calibri" pitchFamily="34" charset="-120"/>
               </a:rPr>
-              <a:t>Word Labs  •  wordlabs.app  •  Root: 'gram' = written, drawn, recorded</a:t>
+              <a:t>Word Labs  •  wordlabs.app  •  Root: 'gram' = written; something written</a:t>
             </a:r>
             <a:endParaRPr lang="en-US" sz="800" dirty="0"/>
           </a:p>
@@ -9889,7 +9889,7 @@
                 <a:ea typeface="Trebuchet MS" pitchFamily="34" charset="-122"/>
                 <a:cs typeface="Trebuchet MS" pitchFamily="34" charset="-120"/>
               </a:rPr>
-              <a:t>diagram</a:t>
+              <a:t>telegram</a:t>
             </a:r>
             <a:endParaRPr lang="en-US" sz="2800" dirty="0"/>
           </a:p>
@@ -10028,7 +10028,7 @@
                 <a:ea typeface="Trebuchet MS" pitchFamily="34" charset="-122"/>
                 <a:cs typeface="Trebuchet MS" pitchFamily="34" charset="-120"/>
               </a:rPr>
-              <a:t>dia</a:t>
+              <a:t>tele</a:t>
             </a:r>
             <a:endParaRPr lang="en-US" sz="1300" dirty="0"/>
           </a:p>
@@ -10067,7 +10067,7 @@
                 <a:ea typeface="Calibri" pitchFamily="34" charset="-122"/>
                 <a:cs typeface="Calibri" pitchFamily="34" charset="-120"/>
               </a:rPr>
-              <a:t>through, across</a:t>
+              <a:t>far; at a distance</a:t>
             </a:r>
             <a:endParaRPr lang="en-US" sz="850" dirty="0"/>
           </a:p>
@@ -10179,7 +10179,7 @@
                 <a:ea typeface="Calibri" pitchFamily="34" charset="-122"/>
                 <a:cs typeface="Calibri" pitchFamily="34" charset="-120"/>
               </a:rPr>
-              <a:t>written, drawn</a:t>
+              <a:t>written; something written</a:t>
             </a:r>
             <a:endParaRPr lang="en-US" sz="850" dirty="0"/>
           </a:p>
@@ -10338,7 +10338,7 @@
                 <a:ea typeface="Trebuchet MS" pitchFamily="34" charset="-122"/>
                 <a:cs typeface="Trebuchet MS" pitchFamily="34" charset="-120"/>
               </a:rPr>
-              <a:t>di</a:t>
+              <a:t>tel</a:t>
             </a:r>
             <a:endParaRPr lang="en-US" sz="1400" dirty="0"/>
           </a:p>
@@ -10443,7 +10443,7 @@
                 <a:ea typeface="Trebuchet MS" pitchFamily="34" charset="-122"/>
                 <a:cs typeface="Trebuchet MS" pitchFamily="34" charset="-120"/>
               </a:rPr>
-              <a:t>a</a:t>
+              <a:t>e</a:t>
             </a:r>
             <a:endParaRPr lang="en-US" sz="1400" dirty="0"/>
           </a:p>
@@ -10655,7 +10655,7 @@
         </p:nvSpPr>
         <p:spPr>
           <a:xfrm>
-            <a:off x="2254649" y="4169664"/>
+            <a:off x="2023872" y="4169664"/>
             <a:ext cx="685800" cy="475488"/>
           </a:xfrm>
           <a:prstGeom prst="rect">
@@ -10682,7 +10682,7 @@
         </p:nvSpPr>
         <p:spPr>
           <a:xfrm>
-            <a:off x="2254649" y="4169664"/>
+            <a:off x="2023872" y="4169664"/>
             <a:ext cx="685800" cy="475488"/>
           </a:xfrm>
           <a:prstGeom prst="rect">
@@ -10707,7 +10707,7 @@
                 <a:ea typeface="Trebuchet MS" pitchFamily="34" charset="-122"/>
                 <a:cs typeface="Trebuchet MS" pitchFamily="34" charset="-120"/>
               </a:rPr>
-              <a:t>d</a:t>
+              <a:t>t</a:t>
             </a:r>
             <a:endParaRPr lang="en-US" sz="900" dirty="0"/>
           </a:p>
@@ -10721,7 +10721,7 @@
         </p:nvSpPr>
         <p:spPr>
           <a:xfrm>
-            <a:off x="3293146" y="4169664"/>
+            <a:off x="2831592" y="4169664"/>
             <a:ext cx="685800" cy="475488"/>
           </a:xfrm>
           <a:prstGeom prst="rect">
@@ -10748,7 +10748,7 @@
         </p:nvSpPr>
         <p:spPr>
           <a:xfrm>
-            <a:off x="3293146" y="4169664"/>
+            <a:off x="2831592" y="4169664"/>
             <a:ext cx="685800" cy="475488"/>
           </a:xfrm>
           <a:prstGeom prst="rect">
@@ -10773,7 +10773,7 @@
                 <a:ea typeface="Trebuchet MS" pitchFamily="34" charset="-122"/>
                 <a:cs typeface="Trebuchet MS" pitchFamily="34" charset="-120"/>
               </a:rPr>
-              <a:t>i</a:t>
+              <a:t>e</a:t>
             </a:r>
             <a:endParaRPr lang="en-US" sz="900" dirty="0"/>
           </a:p>
@@ -10787,7 +10787,7 @@
         </p:nvSpPr>
         <p:spPr>
           <a:xfrm>
-            <a:off x="4331643" y="4169664"/>
+            <a:off x="3639312" y="4169664"/>
             <a:ext cx="685800" cy="475488"/>
           </a:xfrm>
           <a:prstGeom prst="rect">
@@ -10814,7 +10814,7 @@
         </p:nvSpPr>
         <p:spPr>
           <a:xfrm>
-            <a:off x="4331643" y="4169664"/>
+            <a:off x="3639312" y="4169664"/>
             <a:ext cx="685800" cy="475488"/>
           </a:xfrm>
           <a:prstGeom prst="rect">
@@ -10839,7 +10839,7 @@
                 <a:ea typeface="Trebuchet MS" pitchFamily="34" charset="-122"/>
                 <a:cs typeface="Trebuchet MS" pitchFamily="34" charset="-120"/>
               </a:rPr>
-              <a:t>a</a:t>
+              <a:t>l</a:t>
             </a:r>
             <a:endParaRPr lang="en-US" sz="900" dirty="0"/>
           </a:p>
@@ -10853,7 +10853,7 @@
         </p:nvSpPr>
         <p:spPr>
           <a:xfrm>
-            <a:off x="5370141" y="4169664"/>
+            <a:off x="4447032" y="4169664"/>
             <a:ext cx="685800" cy="475488"/>
           </a:xfrm>
           <a:prstGeom prst="rect">
@@ -10880,7 +10880,7 @@
         </p:nvSpPr>
         <p:spPr>
           <a:xfrm>
-            <a:off x="5370141" y="4169664"/>
+            <a:off x="4447032" y="4169664"/>
             <a:ext cx="685800" cy="475488"/>
           </a:xfrm>
           <a:prstGeom prst="rect">
@@ -10905,7 +10905,7 @@
                 <a:ea typeface="Trebuchet MS" pitchFamily="34" charset="-122"/>
                 <a:cs typeface="Trebuchet MS" pitchFamily="34" charset="-120"/>
               </a:rPr>
-              <a:t>gr</a:t>
+              <a:t>e</a:t>
             </a:r>
             <a:endParaRPr lang="en-US" sz="900" dirty="0"/>
           </a:p>
@@ -10919,7 +10919,7 @@
         </p:nvSpPr>
         <p:spPr>
           <a:xfrm>
-            <a:off x="6408638" y="4169664"/>
+            <a:off x="5254752" y="4169664"/>
             <a:ext cx="685800" cy="475488"/>
           </a:xfrm>
           <a:prstGeom prst="rect">
@@ -10946,7 +10946,7 @@
         </p:nvSpPr>
         <p:spPr>
           <a:xfrm>
-            <a:off x="6408638" y="4169664"/>
+            <a:off x="5254752" y="4169664"/>
             <a:ext cx="685800" cy="475488"/>
           </a:xfrm>
           <a:prstGeom prst="rect">
@@ -10971,7 +10971,7 @@
                 <a:ea typeface="Trebuchet MS" pitchFamily="34" charset="-122"/>
                 <a:cs typeface="Trebuchet MS" pitchFamily="34" charset="-120"/>
               </a:rPr>
-              <a:t>a</a:t>
+              <a:t>g</a:t>
             </a:r>
             <a:endParaRPr lang="en-US" sz="900" dirty="0"/>
           </a:p>
@@ -10985,7 +10985,7 @@
         </p:nvSpPr>
         <p:spPr>
           <a:xfrm>
-            <a:off x="7447135" y="4169664"/>
+            <a:off x="6062472" y="4169664"/>
             <a:ext cx="685800" cy="475488"/>
           </a:xfrm>
           <a:prstGeom prst="rect">
@@ -11012,7 +11012,139 @@
         </p:nvSpPr>
         <p:spPr>
           <a:xfrm>
-            <a:off x="7447135" y="4169664"/>
+            <a:off x="6062472" y="4169664"/>
+            <a:ext cx="685800" cy="475488"/>
+          </a:xfrm>
+          <a:prstGeom prst="rect">
+            <a:avLst/>
+          </a:prstGeom>
+          <a:noFill/>
+          <a:ln/>
+        </p:spPr>
+        <p:txBody>
+          <a:bodyPr wrap="square" lIns="0" tIns="0" rIns="0" bIns="0" rtlCol="0" anchor="ctr"/>
+          <a:lstStyle/>
+          <a:p>
+            <a:pPr algn="ctr" indent="0" marL="0">
+              <a:buNone/>
+            </a:pPr>
+            <a:r>
+              <a:rPr lang="en-US" sz="900" b="1" dirty="0">
+                <a:solidFill>
+                  <a:srgbClr val="9D174D"/>
+                </a:solidFill>
+                <a:latin typeface="Trebuchet MS" pitchFamily="34" charset="0"/>
+                <a:ea typeface="Trebuchet MS" pitchFamily="34" charset="-122"/>
+                <a:cs typeface="Trebuchet MS" pitchFamily="34" charset="-120"/>
+              </a:rPr>
+              <a:t>r</a:t>
+            </a:r>
+            <a:endParaRPr lang="en-US" sz="900" dirty="0"/>
+          </a:p>
+        </p:txBody>
+      </p:sp>
+      <p:sp>
+        <p:nvSpPr>
+          <p:cNvPr id="48" name="Shape 46"/>
+          <p:cNvSpPr/>
+          <p:nvPr/>
+        </p:nvSpPr>
+        <p:spPr>
+          <a:xfrm>
+            <a:off x="6870192" y="4169664"/>
+            <a:ext cx="685800" cy="475488"/>
+          </a:xfrm>
+          <a:prstGeom prst="rect">
+            <a:avLst>
+              <a:gd name="adj" fmla="val 7692"/>
+            </a:avLst>
+          </a:prstGeom>
+          <a:solidFill>
+            <a:srgbClr val="FFFFFF"/>
+          </a:solidFill>
+          <a:ln w="12700">
+            <a:solidFill>
+              <a:srgbClr val="DB2777"/>
+            </a:solidFill>
+            <a:prstDash val="solid"/>
+          </a:ln>
+        </p:spPr>
+      </p:sp>
+      <p:sp>
+        <p:nvSpPr>
+          <p:cNvPr id="49" name="Text 47"/>
+          <p:cNvSpPr/>
+          <p:nvPr/>
+        </p:nvSpPr>
+        <p:spPr>
+          <a:xfrm>
+            <a:off x="6870192" y="4169664"/>
+            <a:ext cx="685800" cy="475488"/>
+          </a:xfrm>
+          <a:prstGeom prst="rect">
+            <a:avLst/>
+          </a:prstGeom>
+          <a:noFill/>
+          <a:ln/>
+        </p:spPr>
+        <p:txBody>
+          <a:bodyPr wrap="square" lIns="0" tIns="0" rIns="0" bIns="0" rtlCol="0" anchor="ctr"/>
+          <a:lstStyle/>
+          <a:p>
+            <a:pPr algn="ctr" indent="0" marL="0">
+              <a:buNone/>
+            </a:pPr>
+            <a:r>
+              <a:rPr lang="en-US" sz="900" b="1" dirty="0">
+                <a:solidFill>
+                  <a:srgbClr val="9D174D"/>
+                </a:solidFill>
+                <a:latin typeface="Trebuchet MS" pitchFamily="34" charset="0"/>
+                <a:ea typeface="Trebuchet MS" pitchFamily="34" charset="-122"/>
+                <a:cs typeface="Trebuchet MS" pitchFamily="34" charset="-120"/>
+              </a:rPr>
+              <a:t>a</a:t>
+            </a:r>
+            <a:endParaRPr lang="en-US" sz="900" dirty="0"/>
+          </a:p>
+        </p:txBody>
+      </p:sp>
+      <p:sp>
+        <p:nvSpPr>
+          <p:cNvPr id="50" name="Shape 48"/>
+          <p:cNvSpPr/>
+          <p:nvPr/>
+        </p:nvSpPr>
+        <p:spPr>
+          <a:xfrm>
+            <a:off x="7677912" y="4169664"/>
+            <a:ext cx="685800" cy="475488"/>
+          </a:xfrm>
+          <a:prstGeom prst="rect">
+            <a:avLst>
+              <a:gd name="adj" fmla="val 7692"/>
+            </a:avLst>
+          </a:prstGeom>
+          <a:solidFill>
+            <a:srgbClr val="FFFFFF"/>
+          </a:solidFill>
+          <a:ln w="12700">
+            <a:solidFill>
+              <a:srgbClr val="DB2777"/>
+            </a:solidFill>
+            <a:prstDash val="solid"/>
+          </a:ln>
+        </p:spPr>
+      </p:sp>
+      <p:sp>
+        <p:nvSpPr>
+          <p:cNvPr id="51" name="Text 49"/>
+          <p:cNvSpPr/>
+          <p:nvPr/>
+        </p:nvSpPr>
+        <p:spPr>
+          <a:xfrm>
+            <a:off x="7677912" y="4169664"/>
             <a:ext cx="685800" cy="475488"/>
           </a:xfrm>
           <a:prstGeom prst="rect">
@@ -11329,7 +11461,7 @@
                 <a:ea typeface="Calibri" pitchFamily="34" charset="-122"/>
                 <a:cs typeface="Calibri" pitchFamily="34" charset="-120"/>
               </a:rPr>
-              <a:t>Word Labs  •  wordlabs.app  •  Root: 'gram' = written, drawn, recorded</a:t>
+              <a:t>Word Labs  •  wordlabs.app  •  Root: 'gram' = written; something written</a:t>
             </a:r>
             <a:endParaRPr lang="en-US" sz="800" dirty="0"/>
           </a:p>
@@ -11468,7 +11600,7 @@
                 <a:ea typeface="Trebuchet MS" pitchFamily="34" charset="-122"/>
                 <a:cs typeface="Trebuchet MS" pitchFamily="34" charset="-120"/>
               </a:rPr>
-              <a:t>program</a:t>
+              <a:t>telegrams</a:t>
             </a:r>
             <a:endParaRPr lang="en-US" sz="2800" dirty="0"/>
           </a:p>
@@ -12156,7 +12288,7 @@
                 <a:ea typeface="Calibri" pitchFamily="34" charset="-122"/>
                 <a:cs typeface="Calibri" pitchFamily="34" charset="-120"/>
               </a:rPr>
-              <a:t>Word Labs  •  wordlabs.app  •  Root: 'gram' = written, drawn, recorded</a:t>
+              <a:t>Word Labs  •  wordlabs.app  •  Root: 'gram' = written; something written</a:t>
             </a:r>
             <a:endParaRPr lang="en-US" sz="800" dirty="0"/>
           </a:p>
@@ -12295,7 +12427,7 @@
                 <a:ea typeface="Trebuchet MS" pitchFamily="34" charset="-122"/>
                 <a:cs typeface="Trebuchet MS" pitchFamily="34" charset="-120"/>
               </a:rPr>
-              <a:t>program</a:t>
+              <a:t>telegrams</a:t>
             </a:r>
             <a:endParaRPr lang="en-US" sz="2800" dirty="0"/>
           </a:p>
@@ -12375,7 +12507,7 @@
         </p:nvSpPr>
         <p:spPr>
           <a:xfrm>
-            <a:off x="2938272" y="2258568"/>
+            <a:off x="2221992" y="2258568"/>
             <a:ext cx="1828800" cy="292608"/>
           </a:xfrm>
           <a:prstGeom prst="rect">
@@ -12409,7 +12541,7 @@
         </p:nvSpPr>
         <p:spPr>
           <a:xfrm>
-            <a:off x="2938272" y="2258568"/>
+            <a:off x="2221992" y="2258568"/>
             <a:ext cx="1828800" cy="292608"/>
           </a:xfrm>
           <a:prstGeom prst="rect">
@@ -12434,7 +12566,7 @@
                 <a:ea typeface="Trebuchet MS" pitchFamily="34" charset="-122"/>
                 <a:cs typeface="Trebuchet MS" pitchFamily="34" charset="-120"/>
               </a:rPr>
-              <a:t>pro</a:t>
+              <a:t>tele</a:t>
             </a:r>
             <a:endParaRPr lang="en-US" sz="1300" dirty="0"/>
           </a:p>
@@ -12448,7 +12580,7 @@
         </p:nvSpPr>
         <p:spPr>
           <a:xfrm>
-            <a:off x="2938272" y="2569464"/>
+            <a:off x="2221992" y="2569464"/>
             <a:ext cx="1828800" cy="201168"/>
           </a:xfrm>
           <a:prstGeom prst="rect">
@@ -12473,7 +12605,7 @@
                 <a:ea typeface="Calibri" pitchFamily="34" charset="-122"/>
                 <a:cs typeface="Calibri" pitchFamily="34" charset="-120"/>
               </a:rPr>
-              <a:t>before, forward</a:t>
+              <a:t>far; at a distance</a:t>
             </a:r>
             <a:endParaRPr lang="en-US" sz="850" dirty="0"/>
           </a:p>
@@ -12487,7 +12619,7 @@
         </p:nvSpPr>
         <p:spPr>
           <a:xfrm>
-            <a:off x="5803392" y="2258568"/>
+            <a:off x="4370832" y="2258568"/>
             <a:ext cx="1828800" cy="292608"/>
           </a:xfrm>
           <a:prstGeom prst="rect">
@@ -12521,7 +12653,7 @@
         </p:nvSpPr>
         <p:spPr>
           <a:xfrm>
-            <a:off x="5803392" y="2258568"/>
+            <a:off x="4370832" y="2258568"/>
             <a:ext cx="1828800" cy="292608"/>
           </a:xfrm>
           <a:prstGeom prst="rect">
@@ -12560,7 +12692,7 @@
         </p:nvSpPr>
         <p:spPr>
           <a:xfrm>
-            <a:off x="5803392" y="2569464"/>
+            <a:off x="4370832" y="2569464"/>
             <a:ext cx="1828800" cy="201168"/>
           </a:xfrm>
           <a:prstGeom prst="rect">
@@ -12585,7 +12717,7 @@
                 <a:ea typeface="Calibri" pitchFamily="34" charset="-122"/>
                 <a:cs typeface="Calibri" pitchFamily="34" charset="-120"/>
               </a:rPr>
-              <a:t>written, recorded</a:t>
+              <a:t>written; something written</a:t>
             </a:r>
             <a:endParaRPr lang="en-US" sz="850" dirty="0"/>
           </a:p>
@@ -12594,6 +12726,118 @@
       <p:sp>
         <p:nvSpPr>
           <p:cNvPr id="22" name="Shape 20"/>
+          <p:cNvSpPr/>
+          <p:nvPr/>
+        </p:nvSpPr>
+        <p:spPr>
+          <a:xfrm>
+            <a:off x="6519672" y="2258568"/>
+            <a:ext cx="1828800" cy="292608"/>
+          </a:xfrm>
+          <a:prstGeom prst="rect">
+            <a:avLst>
+              <a:gd name="adj" fmla="val 25000"/>
+            </a:avLst>
+          </a:prstGeom>
+          <a:solidFill>
+            <a:srgbClr val="FCE7F3"/>
+          </a:solidFill>
+          <a:ln w="19050">
+            <a:solidFill>
+              <a:srgbClr val="DB2777"/>
+            </a:solidFill>
+            <a:prstDash val="solid"/>
+          </a:ln>
+          <a:effectLst>
+            <a:outerShdw sx="100000" sy="100000" kx="0" ky="0" algn="bl" rotWithShape="0" blurRad="101600" dist="38100" dir="8100000">
+              <a:srgbClr val="000000">
+                <a:alpha val="12000"/>
+              </a:srgbClr>
+            </a:outerShdw>
+          </a:effectLst>
+        </p:spPr>
+      </p:sp>
+      <p:sp>
+        <p:nvSpPr>
+          <p:cNvPr id="23" name="Text 21"/>
+          <p:cNvSpPr/>
+          <p:nvPr/>
+        </p:nvSpPr>
+        <p:spPr>
+          <a:xfrm>
+            <a:off x="6519672" y="2258568"/>
+            <a:ext cx="1828800" cy="292608"/>
+          </a:xfrm>
+          <a:prstGeom prst="rect">
+            <a:avLst/>
+          </a:prstGeom>
+          <a:noFill/>
+          <a:ln/>
+        </p:spPr>
+        <p:txBody>
+          <a:bodyPr wrap="square" lIns="0" tIns="0" rIns="0" bIns="0" rtlCol="0" anchor="ctr"/>
+          <a:lstStyle/>
+          <a:p>
+            <a:pPr algn="ctr" indent="0" marL="0">
+              <a:buNone/>
+            </a:pPr>
+            <a:r>
+              <a:rPr lang="en-US" sz="1300" b="1" dirty="0">
+                <a:solidFill>
+                  <a:srgbClr val="9D174D"/>
+                </a:solidFill>
+                <a:latin typeface="Trebuchet MS" pitchFamily="34" charset="0"/>
+                <a:ea typeface="Trebuchet MS" pitchFamily="34" charset="-122"/>
+                <a:cs typeface="Trebuchet MS" pitchFamily="34" charset="-120"/>
+              </a:rPr>
+              <a:t>s</a:t>
+            </a:r>
+            <a:endParaRPr lang="en-US" sz="1300" dirty="0"/>
+          </a:p>
+        </p:txBody>
+      </p:sp>
+      <p:sp>
+        <p:nvSpPr>
+          <p:cNvPr id="24" name="Text 22"/>
+          <p:cNvSpPr/>
+          <p:nvPr/>
+        </p:nvSpPr>
+        <p:spPr>
+          <a:xfrm>
+            <a:off x="6519672" y="2569464"/>
+            <a:ext cx="1828800" cy="201168"/>
+          </a:xfrm>
+          <a:prstGeom prst="rect">
+            <a:avLst/>
+          </a:prstGeom>
+          <a:noFill/>
+          <a:ln/>
+        </p:spPr>
+        <p:txBody>
+          <a:bodyPr wrap="square" lIns="0" tIns="0" rIns="0" bIns="0" rtlCol="0" anchor="t"/>
+          <a:lstStyle/>
+          <a:p>
+            <a:pPr algn="ctr" indent="0" marL="0">
+              <a:buNone/>
+            </a:pPr>
+            <a:r>
+              <a:rPr lang="en-US" sz="850" dirty="0">
+                <a:solidFill>
+                  <a:srgbClr val="475569"/>
+                </a:solidFill>
+                <a:latin typeface="Calibri" pitchFamily="34" charset="0"/>
+                <a:ea typeface="Calibri" pitchFamily="34" charset="-122"/>
+                <a:cs typeface="Calibri" pitchFamily="34" charset="-120"/>
+              </a:rPr>
+              <a:t>plural or present tense</a:t>
+            </a:r>
+            <a:endParaRPr lang="en-US" sz="850" dirty="0"/>
+          </a:p>
+        </p:txBody>
+      </p:sp>
+      <p:sp>
+        <p:nvSpPr>
+          <p:cNvPr id="25" name="Shape 23"/>
           <p:cNvSpPr/>
           <p:nvPr/>
         </p:nvSpPr>
@@ -12620,7 +12864,7 @@
       </p:sp>
       <p:sp>
         <p:nvSpPr>
-          <p:cNvPr id="23" name="Text 21"/>
+          <p:cNvPr id="26" name="Text 24"/>
           <p:cNvSpPr/>
           <p:nvPr/>
         </p:nvSpPr>
@@ -12659,7 +12903,7 @@
       </p:sp>
       <p:sp>
         <p:nvSpPr>
-          <p:cNvPr id="24" name="Shape 22"/>
+          <p:cNvPr id="27" name="Shape 25"/>
           <p:cNvSpPr/>
           <p:nvPr/>
         </p:nvSpPr>
@@ -12686,7 +12930,7 @@
       </p:sp>
       <p:sp>
         <p:nvSpPr>
-          <p:cNvPr id="25" name="Text 23"/>
+          <p:cNvPr id="28" name="Text 26"/>
           <p:cNvSpPr/>
           <p:nvPr/>
         </p:nvSpPr>
@@ -12725,7 +12969,7 @@
       </p:sp>
       <p:sp>
         <p:nvSpPr>
-          <p:cNvPr id="26" name="Shape 24"/>
+          <p:cNvPr id="29" name="Shape 27"/>
           <p:cNvSpPr/>
           <p:nvPr/>
         </p:nvSpPr>
@@ -12752,7 +12996,7 @@
       </p:sp>
       <p:sp>
         <p:nvSpPr>
-          <p:cNvPr id="27" name="Text 25"/>
+          <p:cNvPr id="30" name="Text 28"/>
           <p:cNvSpPr/>
           <p:nvPr/>
         </p:nvSpPr>
@@ -12791,7 +13035,7 @@
       </p:sp>
       <p:sp>
         <p:nvSpPr>
-          <p:cNvPr id="28" name="Shape 26"/>
+          <p:cNvPr id="31" name="Shape 29"/>
           <p:cNvSpPr/>
           <p:nvPr/>
         </p:nvSpPr>
@@ -12818,7 +13062,7 @@
       </p:sp>
       <p:sp>
         <p:nvSpPr>
-          <p:cNvPr id="29" name="Text 27"/>
+          <p:cNvPr id="32" name="Text 30"/>
           <p:cNvSpPr/>
           <p:nvPr/>
         </p:nvSpPr>
@@ -13141,7 +13385,7 @@
                 <a:ea typeface="Calibri" pitchFamily="34" charset="-122"/>
                 <a:cs typeface="Calibri" pitchFamily="34" charset="-120"/>
               </a:rPr>
-              <a:t>Word Labs  •  wordlabs.app  •  Root: 'gram' = written, drawn, recorded</a:t>
+              <a:t>Word Labs  •  wordlabs.app  •  Root: 'gram' = written; something written</a:t>
             </a:r>
             <a:endParaRPr lang="en-US" sz="800" dirty="0"/>
           </a:p>
@@ -13280,7 +13524,7 @@
                 <a:ea typeface="Trebuchet MS" pitchFamily="34" charset="-122"/>
                 <a:cs typeface="Trebuchet MS" pitchFamily="34" charset="-120"/>
               </a:rPr>
-              <a:t>program</a:t>
+              <a:t>telegrams</a:t>
             </a:r>
             <a:endParaRPr lang="en-US" sz="2800" dirty="0"/>
           </a:p>
@@ -13360,7 +13604,7 @@
         </p:nvSpPr>
         <p:spPr>
           <a:xfrm>
-            <a:off x="2938272" y="2258568"/>
+            <a:off x="2221992" y="2258568"/>
             <a:ext cx="1828800" cy="292608"/>
           </a:xfrm>
           <a:prstGeom prst="rect">
@@ -13394,7 +13638,7 @@
         </p:nvSpPr>
         <p:spPr>
           <a:xfrm>
-            <a:off x="2938272" y="2258568"/>
+            <a:off x="2221992" y="2258568"/>
             <a:ext cx="1828800" cy="292608"/>
           </a:xfrm>
           <a:prstGeom prst="rect">
@@ -13419,7 +13663,7 @@
                 <a:ea typeface="Trebuchet MS" pitchFamily="34" charset="-122"/>
                 <a:cs typeface="Trebuchet MS" pitchFamily="34" charset="-120"/>
               </a:rPr>
-              <a:t>pro</a:t>
+              <a:t>tele</a:t>
             </a:r>
             <a:endParaRPr lang="en-US" sz="1300" dirty="0"/>
           </a:p>
@@ -13433,7 +13677,7 @@
         </p:nvSpPr>
         <p:spPr>
           <a:xfrm>
-            <a:off x="2938272" y="2569464"/>
+            <a:off x="2221992" y="2569464"/>
             <a:ext cx="1828800" cy="201168"/>
           </a:xfrm>
           <a:prstGeom prst="rect">
@@ -13458,7 +13702,7 @@
                 <a:ea typeface="Calibri" pitchFamily="34" charset="-122"/>
                 <a:cs typeface="Calibri" pitchFamily="34" charset="-120"/>
               </a:rPr>
-              <a:t>before, forward</a:t>
+              <a:t>far; at a distance</a:t>
             </a:r>
             <a:endParaRPr lang="en-US" sz="850" dirty="0"/>
           </a:p>
@@ -13472,7 +13716,7 @@
         </p:nvSpPr>
         <p:spPr>
           <a:xfrm>
-            <a:off x="5803392" y="2258568"/>
+            <a:off x="4370832" y="2258568"/>
             <a:ext cx="1828800" cy="292608"/>
           </a:xfrm>
           <a:prstGeom prst="rect">
@@ -13506,7 +13750,7 @@
         </p:nvSpPr>
         <p:spPr>
           <a:xfrm>
-            <a:off x="5803392" y="2258568"/>
+            <a:off x="4370832" y="2258568"/>
             <a:ext cx="1828800" cy="292608"/>
           </a:xfrm>
           <a:prstGeom prst="rect">
@@ -13545,7 +13789,7 @@
         </p:nvSpPr>
         <p:spPr>
           <a:xfrm>
-            <a:off x="5803392" y="2569464"/>
+            <a:off x="4370832" y="2569464"/>
             <a:ext cx="1828800" cy="201168"/>
           </a:xfrm>
           <a:prstGeom prst="rect">
@@ -13570,7 +13814,7 @@
                 <a:ea typeface="Calibri" pitchFamily="34" charset="-122"/>
                 <a:cs typeface="Calibri" pitchFamily="34" charset="-120"/>
               </a:rPr>
-              <a:t>written, recorded</a:t>
+              <a:t>written; something written</a:t>
             </a:r>
             <a:endParaRPr lang="en-US" sz="850" dirty="0"/>
           </a:p>
@@ -13579,6 +13823,118 @@
       <p:sp>
         <p:nvSpPr>
           <p:cNvPr id="22" name="Shape 20"/>
+          <p:cNvSpPr/>
+          <p:nvPr/>
+        </p:nvSpPr>
+        <p:spPr>
+          <a:xfrm>
+            <a:off x="6519672" y="2258568"/>
+            <a:ext cx="1828800" cy="292608"/>
+          </a:xfrm>
+          <a:prstGeom prst="rect">
+            <a:avLst>
+              <a:gd name="adj" fmla="val 25000"/>
+            </a:avLst>
+          </a:prstGeom>
+          <a:solidFill>
+            <a:srgbClr val="FCE7F3"/>
+          </a:solidFill>
+          <a:ln w="19050">
+            <a:solidFill>
+              <a:srgbClr val="DB2777"/>
+            </a:solidFill>
+            <a:prstDash val="solid"/>
+          </a:ln>
+          <a:effectLst>
+            <a:outerShdw sx="100000" sy="100000" kx="0" ky="0" algn="bl" rotWithShape="0" blurRad="101600" dist="38100" dir="8100000">
+              <a:srgbClr val="000000">
+                <a:alpha val="12000"/>
+              </a:srgbClr>
+            </a:outerShdw>
+          </a:effectLst>
+        </p:spPr>
+      </p:sp>
+      <p:sp>
+        <p:nvSpPr>
+          <p:cNvPr id="23" name="Text 21"/>
+          <p:cNvSpPr/>
+          <p:nvPr/>
+        </p:nvSpPr>
+        <p:spPr>
+          <a:xfrm>
+            <a:off x="6519672" y="2258568"/>
+            <a:ext cx="1828800" cy="292608"/>
+          </a:xfrm>
+          <a:prstGeom prst="rect">
+            <a:avLst/>
+          </a:prstGeom>
+          <a:noFill/>
+          <a:ln/>
+        </p:spPr>
+        <p:txBody>
+          <a:bodyPr wrap="square" lIns="0" tIns="0" rIns="0" bIns="0" rtlCol="0" anchor="ctr"/>
+          <a:lstStyle/>
+          <a:p>
+            <a:pPr algn="ctr" indent="0" marL="0">
+              <a:buNone/>
+            </a:pPr>
+            <a:r>
+              <a:rPr lang="en-US" sz="1300" b="1" dirty="0">
+                <a:solidFill>
+                  <a:srgbClr val="9D174D"/>
+                </a:solidFill>
+                <a:latin typeface="Trebuchet MS" pitchFamily="34" charset="0"/>
+                <a:ea typeface="Trebuchet MS" pitchFamily="34" charset="-122"/>
+                <a:cs typeface="Trebuchet MS" pitchFamily="34" charset="-120"/>
+              </a:rPr>
+              <a:t>s</a:t>
+            </a:r>
+            <a:endParaRPr lang="en-US" sz="1300" dirty="0"/>
+          </a:p>
+        </p:txBody>
+      </p:sp>
+      <p:sp>
+        <p:nvSpPr>
+          <p:cNvPr id="24" name="Text 22"/>
+          <p:cNvSpPr/>
+          <p:nvPr/>
+        </p:nvSpPr>
+        <p:spPr>
+          <a:xfrm>
+            <a:off x="6519672" y="2569464"/>
+            <a:ext cx="1828800" cy="201168"/>
+          </a:xfrm>
+          <a:prstGeom prst="rect">
+            <a:avLst/>
+          </a:prstGeom>
+          <a:noFill/>
+          <a:ln/>
+        </p:spPr>
+        <p:txBody>
+          <a:bodyPr wrap="square" lIns="0" tIns="0" rIns="0" bIns="0" rtlCol="0" anchor="t"/>
+          <a:lstStyle/>
+          <a:p>
+            <a:pPr algn="ctr" indent="0" marL="0">
+              <a:buNone/>
+            </a:pPr>
+            <a:r>
+              <a:rPr lang="en-US" sz="850" dirty="0">
+                <a:solidFill>
+                  <a:srgbClr val="475569"/>
+                </a:solidFill>
+                <a:latin typeface="Calibri" pitchFamily="34" charset="0"/>
+                <a:ea typeface="Calibri" pitchFamily="34" charset="-122"/>
+                <a:cs typeface="Calibri" pitchFamily="34" charset="-120"/>
+              </a:rPr>
+              <a:t>plural or present tense</a:t>
+            </a:r>
+            <a:endParaRPr lang="en-US" sz="850" dirty="0"/>
+          </a:p>
+        </p:txBody>
+      </p:sp>
+      <p:sp>
+        <p:nvSpPr>
+          <p:cNvPr id="25" name="Shape 23"/>
           <p:cNvSpPr/>
           <p:nvPr/>
         </p:nvSpPr>
@@ -13605,7 +13961,7 @@
       </p:sp>
       <p:sp>
         <p:nvSpPr>
-          <p:cNvPr id="23" name="Text 21"/>
+          <p:cNvPr id="26" name="Text 24"/>
           <p:cNvSpPr/>
           <p:nvPr/>
         </p:nvSpPr>
@@ -13644,7 +14000,7 @@
       </p:sp>
       <p:sp>
         <p:nvSpPr>
-          <p:cNvPr id="24" name="Shape 22"/>
+          <p:cNvPr id="27" name="Shape 25"/>
           <p:cNvSpPr/>
           <p:nvPr/>
         </p:nvSpPr>
@@ -13671,13 +14027,13 @@
       </p:sp>
       <p:sp>
         <p:nvSpPr>
-          <p:cNvPr id="25" name="Shape 23"/>
-          <p:cNvSpPr/>
-          <p:nvPr/>
-        </p:nvSpPr>
-        <p:spPr>
-          <a:xfrm>
-            <a:off x="2999232" y="3364992"/>
+          <p:cNvPr id="28" name="Shape 26"/>
+          <p:cNvSpPr/>
+          <p:nvPr/>
+        </p:nvSpPr>
+        <p:spPr>
+          <a:xfrm>
+            <a:off x="2313432" y="3364992"/>
             <a:ext cx="1645920" cy="475488"/>
           </a:xfrm>
           <a:prstGeom prst="rect">
@@ -13698,13 +14054,13 @@
       </p:sp>
       <p:sp>
         <p:nvSpPr>
-          <p:cNvPr id="26" name="Text 24"/>
-          <p:cNvSpPr/>
-          <p:nvPr/>
-        </p:nvSpPr>
-        <p:spPr>
-          <a:xfrm>
-            <a:off x="2999232" y="3364992"/>
+          <p:cNvPr id="29" name="Text 27"/>
+          <p:cNvSpPr/>
+          <p:nvPr/>
+        </p:nvSpPr>
+        <p:spPr>
+          <a:xfrm>
+            <a:off x="2313432" y="3364992"/>
             <a:ext cx="1645920" cy="475488"/>
           </a:xfrm>
           <a:prstGeom prst="rect">
@@ -13729,7 +14085,7 @@
                 <a:ea typeface="Trebuchet MS" pitchFamily="34" charset="-122"/>
                 <a:cs typeface="Trebuchet MS" pitchFamily="34" charset="-120"/>
               </a:rPr>
-              <a:t>pro</a:t>
+              <a:t>tel</a:t>
             </a:r>
             <a:endParaRPr lang="en-US" sz="1400" dirty="0"/>
           </a:p>
@@ -13737,14 +14093,14 @@
       </p:sp>
       <p:sp>
         <p:nvSpPr>
-          <p:cNvPr id="27" name="Text 25"/>
-          <p:cNvSpPr/>
-          <p:nvPr/>
-        </p:nvSpPr>
-        <p:spPr>
-          <a:xfrm>
-            <a:off x="4645152" y="3364992"/>
-            <a:ext cx="1097280" cy="475488"/>
+          <p:cNvPr id="30" name="Text 28"/>
+          <p:cNvSpPr/>
+          <p:nvPr/>
+        </p:nvSpPr>
+        <p:spPr>
+          <a:xfrm>
+            <a:off x="3959352" y="3364992"/>
+            <a:ext cx="411480" cy="475488"/>
           </a:xfrm>
           <a:prstGeom prst="rect">
             <a:avLst/>
@@ -13776,13 +14132,13 @@
       </p:sp>
       <p:sp>
         <p:nvSpPr>
-          <p:cNvPr id="28" name="Shape 26"/>
-          <p:cNvSpPr/>
-          <p:nvPr/>
-        </p:nvSpPr>
-        <p:spPr>
-          <a:xfrm>
-            <a:off x="5742432" y="3364992"/>
+          <p:cNvPr id="31" name="Shape 29"/>
+          <p:cNvSpPr/>
+          <p:nvPr/>
+        </p:nvSpPr>
+        <p:spPr>
+          <a:xfrm>
+            <a:off x="4370832" y="3364992"/>
             <a:ext cx="1645920" cy="475488"/>
           </a:xfrm>
           <a:prstGeom prst="rect">
@@ -13803,13 +14159,13 @@
       </p:sp>
       <p:sp>
         <p:nvSpPr>
-          <p:cNvPr id="29" name="Text 27"/>
-          <p:cNvSpPr/>
-          <p:nvPr/>
-        </p:nvSpPr>
-        <p:spPr>
-          <a:xfrm>
-            <a:off x="5742432" y="3364992"/>
+          <p:cNvPr id="32" name="Text 30"/>
+          <p:cNvSpPr/>
+          <p:nvPr/>
+        </p:nvSpPr>
+        <p:spPr>
+          <a:xfrm>
+            <a:off x="4370832" y="3364992"/>
             <a:ext cx="1645920" cy="475488"/>
           </a:xfrm>
           <a:prstGeom prst="rect">
@@ -13834,7 +14190,7 @@
                 <a:ea typeface="Trebuchet MS" pitchFamily="34" charset="-122"/>
                 <a:cs typeface="Trebuchet MS" pitchFamily="34" charset="-120"/>
               </a:rPr>
-              <a:t>gram</a:t>
+              <a:t>e</a:t>
             </a:r>
             <a:endParaRPr lang="en-US" sz="1400" dirty="0"/>
           </a:p>
@@ -13842,7 +14198,112 @@
       </p:sp>
       <p:sp>
         <p:nvSpPr>
-          <p:cNvPr id="30" name="Shape 28"/>
+          <p:cNvPr id="33" name="Text 31"/>
+          <p:cNvSpPr/>
+          <p:nvPr/>
+        </p:nvSpPr>
+        <p:spPr>
+          <a:xfrm>
+            <a:off x="6016752" y="3364992"/>
+            <a:ext cx="411480" cy="475488"/>
+          </a:xfrm>
+          <a:prstGeom prst="rect">
+            <a:avLst/>
+          </a:prstGeom>
+          <a:noFill/>
+          <a:ln/>
+        </p:spPr>
+        <p:txBody>
+          <a:bodyPr wrap="square" lIns="0" tIns="0" rIns="0" bIns="0" rtlCol="0" anchor="ctr"/>
+          <a:lstStyle/>
+          <a:p>
+            <a:pPr algn="ctr" indent="0" marL="0">
+              <a:buNone/>
+            </a:pPr>
+            <a:r>
+              <a:rPr lang="en-US" sz="1600" b="1" dirty="0">
+                <a:solidFill>
+                  <a:srgbClr val="0D9488"/>
+                </a:solidFill>
+                <a:latin typeface="Trebuchet MS" pitchFamily="34" charset="0"/>
+                <a:ea typeface="Trebuchet MS" pitchFamily="34" charset="-122"/>
+                <a:cs typeface="Trebuchet MS" pitchFamily="34" charset="-120"/>
+              </a:rPr>
+              <a:t>·</a:t>
+            </a:r>
+            <a:endParaRPr lang="en-US" sz="1600" dirty="0"/>
+          </a:p>
+        </p:txBody>
+      </p:sp>
+      <p:sp>
+        <p:nvSpPr>
+          <p:cNvPr id="34" name="Shape 32"/>
+          <p:cNvSpPr/>
+          <p:nvPr/>
+        </p:nvSpPr>
+        <p:spPr>
+          <a:xfrm>
+            <a:off x="6428232" y="3364992"/>
+            <a:ext cx="1645920" cy="475488"/>
+          </a:xfrm>
+          <a:prstGeom prst="rect">
+            <a:avLst>
+              <a:gd name="adj" fmla="val 9615"/>
+            </a:avLst>
+          </a:prstGeom>
+          <a:solidFill>
+            <a:srgbClr val="FFFFFF"/>
+          </a:solidFill>
+          <a:ln w="12700">
+            <a:solidFill>
+              <a:srgbClr val="0D9488"/>
+            </a:solidFill>
+            <a:prstDash val="solid"/>
+          </a:ln>
+        </p:spPr>
+      </p:sp>
+      <p:sp>
+        <p:nvSpPr>
+          <p:cNvPr id="35" name="Text 33"/>
+          <p:cNvSpPr/>
+          <p:nvPr/>
+        </p:nvSpPr>
+        <p:spPr>
+          <a:xfrm>
+            <a:off x="6428232" y="3364992"/>
+            <a:ext cx="1645920" cy="475488"/>
+          </a:xfrm>
+          <a:prstGeom prst="rect">
+            <a:avLst/>
+          </a:prstGeom>
+          <a:noFill/>
+          <a:ln/>
+        </p:spPr>
+        <p:txBody>
+          <a:bodyPr wrap="square" lIns="0" tIns="0" rIns="0" bIns="0" rtlCol="0" anchor="ctr"/>
+          <a:lstStyle/>
+          <a:p>
+            <a:pPr algn="ctr" indent="0" marL="0">
+              <a:buNone/>
+            </a:pPr>
+            <a:r>
+              <a:rPr lang="en-US" sz="1400" b="1" dirty="0">
+                <a:solidFill>
+                  <a:srgbClr val="0D9488"/>
+                </a:solidFill>
+                <a:latin typeface="Trebuchet MS" pitchFamily="34" charset="0"/>
+                <a:ea typeface="Trebuchet MS" pitchFamily="34" charset="-122"/>
+                <a:cs typeface="Trebuchet MS" pitchFamily="34" charset="-120"/>
+              </a:rPr>
+              <a:t>grams</a:t>
+            </a:r>
+            <a:endParaRPr lang="en-US" sz="1400" dirty="0"/>
+          </a:p>
+        </p:txBody>
+      </p:sp>
+      <p:sp>
+        <p:nvSpPr>
+          <p:cNvPr id="36" name="Shape 34"/>
           <p:cNvSpPr/>
           <p:nvPr/>
         </p:nvSpPr>
@@ -13869,7 +14330,7 @@
       </p:sp>
       <p:sp>
         <p:nvSpPr>
-          <p:cNvPr id="31" name="Text 29"/>
+          <p:cNvPr id="37" name="Text 35"/>
           <p:cNvSpPr/>
           <p:nvPr/>
         </p:nvSpPr>
@@ -13908,7 +14369,7 @@
       </p:sp>
       <p:sp>
         <p:nvSpPr>
-          <p:cNvPr id="32" name="Shape 30"/>
+          <p:cNvPr id="38" name="Shape 36"/>
           <p:cNvSpPr/>
           <p:nvPr/>
         </p:nvSpPr>
@@ -13935,7 +14396,7 @@
       </p:sp>
       <p:sp>
         <p:nvSpPr>
-          <p:cNvPr id="33" name="Text 31"/>
+          <p:cNvPr id="39" name="Text 37"/>
           <p:cNvSpPr/>
           <p:nvPr/>
         </p:nvSpPr>
@@ -14167,7 +14628,7 @@
                 <a:ea typeface="Calibri" pitchFamily="34" charset="-122"/>
                 <a:cs typeface="Calibri" pitchFamily="34" charset="-120"/>
               </a:rPr>
-              <a:t>Root 'gram' — written, drawn, recorded</a:t>
+              <a:t>Root 'gram' — written; something written</a:t>
             </a:r>
             <a:endParaRPr lang="en-US" sz="1600" dirty="0"/>
           </a:p>
@@ -14523,7 +14984,7 @@
                 <a:ea typeface="Calibri" pitchFamily="34" charset="-122"/>
                 <a:cs typeface="Calibri" pitchFamily="34" charset="-120"/>
               </a:rPr>
-              <a:t>Word Labs  •  wordlabs.app  •  Root: 'gram' = written, drawn, recorded</a:t>
+              <a:t>Word Labs  •  wordlabs.app  •  Root: 'gram' = written; something written</a:t>
             </a:r>
             <a:endParaRPr lang="en-US" sz="800" dirty="0"/>
           </a:p>
@@ -14662,7 +15123,7 @@
                 <a:ea typeface="Trebuchet MS" pitchFamily="34" charset="-122"/>
                 <a:cs typeface="Trebuchet MS" pitchFamily="34" charset="-120"/>
               </a:rPr>
-              <a:t>program</a:t>
+              <a:t>telegrams</a:t>
             </a:r>
             <a:endParaRPr lang="en-US" sz="2800" dirty="0"/>
           </a:p>
@@ -14742,7 +15203,7 @@
         </p:nvSpPr>
         <p:spPr>
           <a:xfrm>
-            <a:off x="2938272" y="2258568"/>
+            <a:off x="2221992" y="2258568"/>
             <a:ext cx="1828800" cy="292608"/>
           </a:xfrm>
           <a:prstGeom prst="rect">
@@ -14776,7 +15237,7 @@
         </p:nvSpPr>
         <p:spPr>
           <a:xfrm>
-            <a:off x="2938272" y="2258568"/>
+            <a:off x="2221992" y="2258568"/>
             <a:ext cx="1828800" cy="292608"/>
           </a:xfrm>
           <a:prstGeom prst="rect">
@@ -14801,7 +15262,7 @@
                 <a:ea typeface="Trebuchet MS" pitchFamily="34" charset="-122"/>
                 <a:cs typeface="Trebuchet MS" pitchFamily="34" charset="-120"/>
               </a:rPr>
-              <a:t>pro</a:t>
+              <a:t>tele</a:t>
             </a:r>
             <a:endParaRPr lang="en-US" sz="1300" dirty="0"/>
           </a:p>
@@ -14815,7 +15276,7 @@
         </p:nvSpPr>
         <p:spPr>
           <a:xfrm>
-            <a:off x="2938272" y="2569464"/>
+            <a:off x="2221992" y="2569464"/>
             <a:ext cx="1828800" cy="201168"/>
           </a:xfrm>
           <a:prstGeom prst="rect">
@@ -14840,7 +15301,7 @@
                 <a:ea typeface="Calibri" pitchFamily="34" charset="-122"/>
                 <a:cs typeface="Calibri" pitchFamily="34" charset="-120"/>
               </a:rPr>
-              <a:t>before, forward</a:t>
+              <a:t>far; at a distance</a:t>
             </a:r>
             <a:endParaRPr lang="en-US" sz="850" dirty="0"/>
           </a:p>
@@ -14854,7 +15315,7 @@
         </p:nvSpPr>
         <p:spPr>
           <a:xfrm>
-            <a:off x="5803392" y="2258568"/>
+            <a:off x="4370832" y="2258568"/>
             <a:ext cx="1828800" cy="292608"/>
           </a:xfrm>
           <a:prstGeom prst="rect">
@@ -14888,7 +15349,7 @@
         </p:nvSpPr>
         <p:spPr>
           <a:xfrm>
-            <a:off x="5803392" y="2258568"/>
+            <a:off x="4370832" y="2258568"/>
             <a:ext cx="1828800" cy="292608"/>
           </a:xfrm>
           <a:prstGeom prst="rect">
@@ -14927,7 +15388,7 @@
         </p:nvSpPr>
         <p:spPr>
           <a:xfrm>
-            <a:off x="5803392" y="2569464"/>
+            <a:off x="4370832" y="2569464"/>
             <a:ext cx="1828800" cy="201168"/>
           </a:xfrm>
           <a:prstGeom prst="rect">
@@ -14952,7 +15413,7 @@
                 <a:ea typeface="Calibri" pitchFamily="34" charset="-122"/>
                 <a:cs typeface="Calibri" pitchFamily="34" charset="-120"/>
               </a:rPr>
-              <a:t>written, recorded</a:t>
+              <a:t>written; something written</a:t>
             </a:r>
             <a:endParaRPr lang="en-US" sz="850" dirty="0"/>
           </a:p>
@@ -14961,6 +15422,118 @@
       <p:sp>
         <p:nvSpPr>
           <p:cNvPr id="22" name="Shape 20"/>
+          <p:cNvSpPr/>
+          <p:nvPr/>
+        </p:nvSpPr>
+        <p:spPr>
+          <a:xfrm>
+            <a:off x="6519672" y="2258568"/>
+            <a:ext cx="1828800" cy="292608"/>
+          </a:xfrm>
+          <a:prstGeom prst="rect">
+            <a:avLst>
+              <a:gd name="adj" fmla="val 25000"/>
+            </a:avLst>
+          </a:prstGeom>
+          <a:solidFill>
+            <a:srgbClr val="FCE7F3"/>
+          </a:solidFill>
+          <a:ln w="19050">
+            <a:solidFill>
+              <a:srgbClr val="DB2777"/>
+            </a:solidFill>
+            <a:prstDash val="solid"/>
+          </a:ln>
+          <a:effectLst>
+            <a:outerShdw sx="100000" sy="100000" kx="0" ky="0" algn="bl" rotWithShape="0" blurRad="101600" dist="38100" dir="8100000">
+              <a:srgbClr val="000000">
+                <a:alpha val="12000"/>
+              </a:srgbClr>
+            </a:outerShdw>
+          </a:effectLst>
+        </p:spPr>
+      </p:sp>
+      <p:sp>
+        <p:nvSpPr>
+          <p:cNvPr id="23" name="Text 21"/>
+          <p:cNvSpPr/>
+          <p:nvPr/>
+        </p:nvSpPr>
+        <p:spPr>
+          <a:xfrm>
+            <a:off x="6519672" y="2258568"/>
+            <a:ext cx="1828800" cy="292608"/>
+          </a:xfrm>
+          <a:prstGeom prst="rect">
+            <a:avLst/>
+          </a:prstGeom>
+          <a:noFill/>
+          <a:ln/>
+        </p:spPr>
+        <p:txBody>
+          <a:bodyPr wrap="square" lIns="0" tIns="0" rIns="0" bIns="0" rtlCol="0" anchor="ctr"/>
+          <a:lstStyle/>
+          <a:p>
+            <a:pPr algn="ctr" indent="0" marL="0">
+              <a:buNone/>
+            </a:pPr>
+            <a:r>
+              <a:rPr lang="en-US" sz="1300" b="1" dirty="0">
+                <a:solidFill>
+                  <a:srgbClr val="9D174D"/>
+                </a:solidFill>
+                <a:latin typeface="Trebuchet MS" pitchFamily="34" charset="0"/>
+                <a:ea typeface="Trebuchet MS" pitchFamily="34" charset="-122"/>
+                <a:cs typeface="Trebuchet MS" pitchFamily="34" charset="-120"/>
+              </a:rPr>
+              <a:t>s</a:t>
+            </a:r>
+            <a:endParaRPr lang="en-US" sz="1300" dirty="0"/>
+          </a:p>
+        </p:txBody>
+      </p:sp>
+      <p:sp>
+        <p:nvSpPr>
+          <p:cNvPr id="24" name="Text 22"/>
+          <p:cNvSpPr/>
+          <p:nvPr/>
+        </p:nvSpPr>
+        <p:spPr>
+          <a:xfrm>
+            <a:off x="6519672" y="2569464"/>
+            <a:ext cx="1828800" cy="201168"/>
+          </a:xfrm>
+          <a:prstGeom prst="rect">
+            <a:avLst/>
+          </a:prstGeom>
+          <a:noFill/>
+          <a:ln/>
+        </p:spPr>
+        <p:txBody>
+          <a:bodyPr wrap="square" lIns="0" tIns="0" rIns="0" bIns="0" rtlCol="0" anchor="t"/>
+          <a:lstStyle/>
+          <a:p>
+            <a:pPr algn="ctr" indent="0" marL="0">
+              <a:buNone/>
+            </a:pPr>
+            <a:r>
+              <a:rPr lang="en-US" sz="850" dirty="0">
+                <a:solidFill>
+                  <a:srgbClr val="475569"/>
+                </a:solidFill>
+                <a:latin typeface="Calibri" pitchFamily="34" charset="0"/>
+                <a:ea typeface="Calibri" pitchFamily="34" charset="-122"/>
+                <a:cs typeface="Calibri" pitchFamily="34" charset="-120"/>
+              </a:rPr>
+              <a:t>plural or present tense</a:t>
+            </a:r>
+            <a:endParaRPr lang="en-US" sz="850" dirty="0"/>
+          </a:p>
+        </p:txBody>
+      </p:sp>
+      <p:sp>
+        <p:nvSpPr>
+          <p:cNvPr id="25" name="Shape 23"/>
           <p:cNvSpPr/>
           <p:nvPr/>
         </p:nvSpPr>
@@ -14987,7 +15560,7 @@
       </p:sp>
       <p:sp>
         <p:nvSpPr>
-          <p:cNvPr id="23" name="Text 21"/>
+          <p:cNvPr id="26" name="Text 24"/>
           <p:cNvSpPr/>
           <p:nvPr/>
         </p:nvSpPr>
@@ -15026,7 +15599,7 @@
       </p:sp>
       <p:sp>
         <p:nvSpPr>
-          <p:cNvPr id="24" name="Shape 22"/>
+          <p:cNvPr id="27" name="Shape 25"/>
           <p:cNvSpPr/>
           <p:nvPr/>
         </p:nvSpPr>
@@ -15053,13 +15626,13 @@
       </p:sp>
       <p:sp>
         <p:nvSpPr>
-          <p:cNvPr id="25" name="Shape 23"/>
-          <p:cNvSpPr/>
-          <p:nvPr/>
-        </p:nvSpPr>
-        <p:spPr>
-          <a:xfrm>
-            <a:off x="2999232" y="3364992"/>
+          <p:cNvPr id="28" name="Shape 26"/>
+          <p:cNvSpPr/>
+          <p:nvPr/>
+        </p:nvSpPr>
+        <p:spPr>
+          <a:xfrm>
+            <a:off x="2313432" y="3364992"/>
             <a:ext cx="1645920" cy="475488"/>
           </a:xfrm>
           <a:prstGeom prst="rect">
@@ -15080,13 +15653,13 @@
       </p:sp>
       <p:sp>
         <p:nvSpPr>
-          <p:cNvPr id="26" name="Text 24"/>
-          <p:cNvSpPr/>
-          <p:nvPr/>
-        </p:nvSpPr>
-        <p:spPr>
-          <a:xfrm>
-            <a:off x="2999232" y="3364992"/>
+          <p:cNvPr id="29" name="Text 27"/>
+          <p:cNvSpPr/>
+          <p:nvPr/>
+        </p:nvSpPr>
+        <p:spPr>
+          <a:xfrm>
+            <a:off x="2313432" y="3364992"/>
             <a:ext cx="1645920" cy="475488"/>
           </a:xfrm>
           <a:prstGeom prst="rect">
@@ -15111,7 +15684,7 @@
                 <a:ea typeface="Trebuchet MS" pitchFamily="34" charset="-122"/>
                 <a:cs typeface="Trebuchet MS" pitchFamily="34" charset="-120"/>
               </a:rPr>
-              <a:t>pro</a:t>
+              <a:t>tel</a:t>
             </a:r>
             <a:endParaRPr lang="en-US" sz="1400" dirty="0"/>
           </a:p>
@@ -15119,14 +15692,14 @@
       </p:sp>
       <p:sp>
         <p:nvSpPr>
-          <p:cNvPr id="27" name="Text 25"/>
-          <p:cNvSpPr/>
-          <p:nvPr/>
-        </p:nvSpPr>
-        <p:spPr>
-          <a:xfrm>
-            <a:off x="4645152" y="3364992"/>
-            <a:ext cx="1097280" cy="475488"/>
+          <p:cNvPr id="30" name="Text 28"/>
+          <p:cNvSpPr/>
+          <p:nvPr/>
+        </p:nvSpPr>
+        <p:spPr>
+          <a:xfrm>
+            <a:off x="3959352" y="3364992"/>
+            <a:ext cx="411480" cy="475488"/>
           </a:xfrm>
           <a:prstGeom prst="rect">
             <a:avLst/>
@@ -15158,13 +15731,13 @@
       </p:sp>
       <p:sp>
         <p:nvSpPr>
-          <p:cNvPr id="28" name="Shape 26"/>
-          <p:cNvSpPr/>
-          <p:nvPr/>
-        </p:nvSpPr>
-        <p:spPr>
-          <a:xfrm>
-            <a:off x="5742432" y="3364992"/>
+          <p:cNvPr id="31" name="Shape 29"/>
+          <p:cNvSpPr/>
+          <p:nvPr/>
+        </p:nvSpPr>
+        <p:spPr>
+          <a:xfrm>
+            <a:off x="4370832" y="3364992"/>
             <a:ext cx="1645920" cy="475488"/>
           </a:xfrm>
           <a:prstGeom prst="rect">
@@ -15185,13 +15758,13 @@
       </p:sp>
       <p:sp>
         <p:nvSpPr>
-          <p:cNvPr id="29" name="Text 27"/>
-          <p:cNvSpPr/>
-          <p:nvPr/>
-        </p:nvSpPr>
-        <p:spPr>
-          <a:xfrm>
-            <a:off x="5742432" y="3364992"/>
+          <p:cNvPr id="32" name="Text 30"/>
+          <p:cNvSpPr/>
+          <p:nvPr/>
+        </p:nvSpPr>
+        <p:spPr>
+          <a:xfrm>
+            <a:off x="4370832" y="3364992"/>
             <a:ext cx="1645920" cy="475488"/>
           </a:xfrm>
           <a:prstGeom prst="rect">
@@ -15216,7 +15789,7 @@
                 <a:ea typeface="Trebuchet MS" pitchFamily="34" charset="-122"/>
                 <a:cs typeface="Trebuchet MS" pitchFamily="34" charset="-120"/>
               </a:rPr>
-              <a:t>gram</a:t>
+              <a:t>e</a:t>
             </a:r>
             <a:endParaRPr lang="en-US" sz="1400" dirty="0"/>
           </a:p>
@@ -15224,7 +15797,112 @@
       </p:sp>
       <p:sp>
         <p:nvSpPr>
-          <p:cNvPr id="30" name="Shape 28"/>
+          <p:cNvPr id="33" name="Text 31"/>
+          <p:cNvSpPr/>
+          <p:nvPr/>
+        </p:nvSpPr>
+        <p:spPr>
+          <a:xfrm>
+            <a:off x="6016752" y="3364992"/>
+            <a:ext cx="411480" cy="475488"/>
+          </a:xfrm>
+          <a:prstGeom prst="rect">
+            <a:avLst/>
+          </a:prstGeom>
+          <a:noFill/>
+          <a:ln/>
+        </p:spPr>
+        <p:txBody>
+          <a:bodyPr wrap="square" lIns="0" tIns="0" rIns="0" bIns="0" rtlCol="0" anchor="ctr"/>
+          <a:lstStyle/>
+          <a:p>
+            <a:pPr algn="ctr" indent="0" marL="0">
+              <a:buNone/>
+            </a:pPr>
+            <a:r>
+              <a:rPr lang="en-US" sz="1600" b="1" dirty="0">
+                <a:solidFill>
+                  <a:srgbClr val="0D9488"/>
+                </a:solidFill>
+                <a:latin typeface="Trebuchet MS" pitchFamily="34" charset="0"/>
+                <a:ea typeface="Trebuchet MS" pitchFamily="34" charset="-122"/>
+                <a:cs typeface="Trebuchet MS" pitchFamily="34" charset="-120"/>
+              </a:rPr>
+              <a:t>·</a:t>
+            </a:r>
+            <a:endParaRPr lang="en-US" sz="1600" dirty="0"/>
+          </a:p>
+        </p:txBody>
+      </p:sp>
+      <p:sp>
+        <p:nvSpPr>
+          <p:cNvPr id="34" name="Shape 32"/>
+          <p:cNvSpPr/>
+          <p:nvPr/>
+        </p:nvSpPr>
+        <p:spPr>
+          <a:xfrm>
+            <a:off x="6428232" y="3364992"/>
+            <a:ext cx="1645920" cy="475488"/>
+          </a:xfrm>
+          <a:prstGeom prst="rect">
+            <a:avLst>
+              <a:gd name="adj" fmla="val 9615"/>
+            </a:avLst>
+          </a:prstGeom>
+          <a:solidFill>
+            <a:srgbClr val="FFFFFF"/>
+          </a:solidFill>
+          <a:ln w="12700">
+            <a:solidFill>
+              <a:srgbClr val="0D9488"/>
+            </a:solidFill>
+            <a:prstDash val="solid"/>
+          </a:ln>
+        </p:spPr>
+      </p:sp>
+      <p:sp>
+        <p:nvSpPr>
+          <p:cNvPr id="35" name="Text 33"/>
+          <p:cNvSpPr/>
+          <p:nvPr/>
+        </p:nvSpPr>
+        <p:spPr>
+          <a:xfrm>
+            <a:off x="6428232" y="3364992"/>
+            <a:ext cx="1645920" cy="475488"/>
+          </a:xfrm>
+          <a:prstGeom prst="rect">
+            <a:avLst/>
+          </a:prstGeom>
+          <a:noFill/>
+          <a:ln/>
+        </p:spPr>
+        <p:txBody>
+          <a:bodyPr wrap="square" lIns="0" tIns="0" rIns="0" bIns="0" rtlCol="0" anchor="ctr"/>
+          <a:lstStyle/>
+          <a:p>
+            <a:pPr algn="ctr" indent="0" marL="0">
+              <a:buNone/>
+            </a:pPr>
+            <a:r>
+              <a:rPr lang="en-US" sz="1400" b="1" dirty="0">
+                <a:solidFill>
+                  <a:srgbClr val="0D9488"/>
+                </a:solidFill>
+                <a:latin typeface="Trebuchet MS" pitchFamily="34" charset="0"/>
+                <a:ea typeface="Trebuchet MS" pitchFamily="34" charset="-122"/>
+                <a:cs typeface="Trebuchet MS" pitchFamily="34" charset="-120"/>
+              </a:rPr>
+              <a:t>grams</a:t>
+            </a:r>
+            <a:endParaRPr lang="en-US" sz="1400" dirty="0"/>
+          </a:p>
+        </p:txBody>
+      </p:sp>
+      <p:sp>
+        <p:nvSpPr>
+          <p:cNvPr id="36" name="Shape 34"/>
           <p:cNvSpPr/>
           <p:nvPr/>
         </p:nvSpPr>
@@ -15251,7 +15929,7 @@
       </p:sp>
       <p:sp>
         <p:nvSpPr>
-          <p:cNvPr id="31" name="Text 29"/>
+          <p:cNvPr id="37" name="Text 35"/>
           <p:cNvSpPr/>
           <p:nvPr/>
         </p:nvSpPr>
@@ -15290,7 +15968,7 @@
       </p:sp>
       <p:sp>
         <p:nvSpPr>
-          <p:cNvPr id="32" name="Shape 30"/>
+          <p:cNvPr id="38" name="Shape 36"/>
           <p:cNvSpPr/>
           <p:nvPr/>
         </p:nvSpPr>
@@ -15317,14 +15995,14 @@
       </p:sp>
       <p:sp>
         <p:nvSpPr>
-          <p:cNvPr id="33" name="Shape 31"/>
-          <p:cNvSpPr/>
-          <p:nvPr/>
-        </p:nvSpPr>
-        <p:spPr>
-          <a:xfrm>
-            <a:off x="2427732" y="4169664"/>
-            <a:ext cx="685800" cy="475488"/>
+          <p:cNvPr id="39" name="Shape 37"/>
+          <p:cNvSpPr/>
+          <p:nvPr/>
+        </p:nvSpPr>
+        <p:spPr>
+          <a:xfrm>
+            <a:off x="1951330" y="4169664"/>
+            <a:ext cx="676656" cy="475488"/>
           </a:xfrm>
           <a:prstGeom prst="rect">
             <a:avLst>
@@ -15344,14 +16022,14 @@
       </p:sp>
       <p:sp>
         <p:nvSpPr>
-          <p:cNvPr id="34" name="Text 32"/>
-          <p:cNvSpPr/>
-          <p:nvPr/>
-        </p:nvSpPr>
-        <p:spPr>
-          <a:xfrm>
-            <a:off x="2427732" y="4169664"/>
-            <a:ext cx="685800" cy="475488"/>
+          <p:cNvPr id="40" name="Text 38"/>
+          <p:cNvSpPr/>
+          <p:nvPr/>
+        </p:nvSpPr>
+        <p:spPr>
+          <a:xfrm>
+            <a:off x="1951330" y="4169664"/>
+            <a:ext cx="676656" cy="475488"/>
           </a:xfrm>
           <a:prstGeom prst="rect">
             <a:avLst/>
@@ -15375,7 +16053,7 @@
                 <a:ea typeface="Trebuchet MS" pitchFamily="34" charset="-122"/>
                 <a:cs typeface="Trebuchet MS" pitchFamily="34" charset="-120"/>
               </a:rPr>
-              <a:t>pr</a:t>
+              <a:t>t</a:t>
             </a:r>
             <a:endParaRPr lang="en-US" sz="900" dirty="0"/>
           </a:p>
@@ -15383,14 +16061,14 @@
       </p:sp>
       <p:sp>
         <p:nvSpPr>
-          <p:cNvPr id="35" name="Shape 33"/>
-          <p:cNvSpPr/>
-          <p:nvPr/>
-        </p:nvSpPr>
-        <p:spPr>
-          <a:xfrm>
-            <a:off x="3639312" y="4169664"/>
-            <a:ext cx="685800" cy="475488"/>
+          <p:cNvPr id="41" name="Shape 39"/>
+          <p:cNvSpPr/>
+          <p:nvPr/>
+        </p:nvSpPr>
+        <p:spPr>
+          <a:xfrm>
+            <a:off x="2677363" y="4169664"/>
+            <a:ext cx="676656" cy="475488"/>
           </a:xfrm>
           <a:prstGeom prst="rect">
             <a:avLst>
@@ -15410,14 +16088,14 @@
       </p:sp>
       <p:sp>
         <p:nvSpPr>
-          <p:cNvPr id="36" name="Text 34"/>
-          <p:cNvSpPr/>
-          <p:nvPr/>
-        </p:nvSpPr>
-        <p:spPr>
-          <a:xfrm>
-            <a:off x="3639312" y="4169664"/>
-            <a:ext cx="685800" cy="475488"/>
+          <p:cNvPr id="42" name="Text 40"/>
+          <p:cNvSpPr/>
+          <p:nvPr/>
+        </p:nvSpPr>
+        <p:spPr>
+          <a:xfrm>
+            <a:off x="2677363" y="4169664"/>
+            <a:ext cx="676656" cy="475488"/>
           </a:xfrm>
           <a:prstGeom prst="rect">
             <a:avLst/>
@@ -15441,7 +16119,7 @@
                 <a:ea typeface="Trebuchet MS" pitchFamily="34" charset="-122"/>
                 <a:cs typeface="Trebuchet MS" pitchFamily="34" charset="-120"/>
               </a:rPr>
-              <a:t>o</a:t>
+              <a:t>e</a:t>
             </a:r>
             <a:endParaRPr lang="en-US" sz="900" dirty="0"/>
           </a:p>
@@ -15449,14 +16127,14 @@
       </p:sp>
       <p:sp>
         <p:nvSpPr>
-          <p:cNvPr id="37" name="Shape 35"/>
-          <p:cNvSpPr/>
-          <p:nvPr/>
-        </p:nvSpPr>
-        <p:spPr>
-          <a:xfrm>
-            <a:off x="4850892" y="4169664"/>
-            <a:ext cx="685800" cy="475488"/>
+          <p:cNvPr id="43" name="Shape 41"/>
+          <p:cNvSpPr/>
+          <p:nvPr/>
+        </p:nvSpPr>
+        <p:spPr>
+          <a:xfrm>
+            <a:off x="3403397" y="4169664"/>
+            <a:ext cx="676656" cy="475488"/>
           </a:xfrm>
           <a:prstGeom prst="rect">
             <a:avLst>
@@ -15476,14 +16154,14 @@
       </p:sp>
       <p:sp>
         <p:nvSpPr>
-          <p:cNvPr id="38" name="Text 36"/>
-          <p:cNvSpPr/>
-          <p:nvPr/>
-        </p:nvSpPr>
-        <p:spPr>
-          <a:xfrm>
-            <a:off x="4850892" y="4169664"/>
-            <a:ext cx="685800" cy="475488"/>
+          <p:cNvPr id="44" name="Text 42"/>
+          <p:cNvSpPr/>
+          <p:nvPr/>
+        </p:nvSpPr>
+        <p:spPr>
+          <a:xfrm>
+            <a:off x="3403397" y="4169664"/>
+            <a:ext cx="676656" cy="475488"/>
           </a:xfrm>
           <a:prstGeom prst="rect">
             <a:avLst/>
@@ -15507,7 +16185,7 @@
                 <a:ea typeface="Trebuchet MS" pitchFamily="34" charset="-122"/>
                 <a:cs typeface="Trebuchet MS" pitchFamily="34" charset="-120"/>
               </a:rPr>
-              <a:t>gr</a:t>
+              <a:t>l</a:t>
             </a:r>
             <a:endParaRPr lang="en-US" sz="900" dirty="0"/>
           </a:p>
@@ -15515,14 +16193,14 @@
       </p:sp>
       <p:sp>
         <p:nvSpPr>
-          <p:cNvPr id="39" name="Shape 37"/>
-          <p:cNvSpPr/>
-          <p:nvPr/>
-        </p:nvSpPr>
-        <p:spPr>
-          <a:xfrm>
-            <a:off x="6062472" y="4169664"/>
-            <a:ext cx="685800" cy="475488"/>
+          <p:cNvPr id="45" name="Shape 43"/>
+          <p:cNvSpPr/>
+          <p:nvPr/>
+        </p:nvSpPr>
+        <p:spPr>
+          <a:xfrm>
+            <a:off x="4129430" y="4169664"/>
+            <a:ext cx="676656" cy="475488"/>
           </a:xfrm>
           <a:prstGeom prst="rect">
             <a:avLst>
@@ -15542,14 +16220,14 @@
       </p:sp>
       <p:sp>
         <p:nvSpPr>
-          <p:cNvPr id="40" name="Text 38"/>
-          <p:cNvSpPr/>
-          <p:nvPr/>
-        </p:nvSpPr>
-        <p:spPr>
-          <a:xfrm>
-            <a:off x="6062472" y="4169664"/>
-            <a:ext cx="685800" cy="475488"/>
+          <p:cNvPr id="46" name="Text 44"/>
+          <p:cNvSpPr/>
+          <p:nvPr/>
+        </p:nvSpPr>
+        <p:spPr>
+          <a:xfrm>
+            <a:off x="4129430" y="4169664"/>
+            <a:ext cx="676656" cy="475488"/>
           </a:xfrm>
           <a:prstGeom prst="rect">
             <a:avLst/>
@@ -15573,7 +16251,7 @@
                 <a:ea typeface="Trebuchet MS" pitchFamily="34" charset="-122"/>
                 <a:cs typeface="Trebuchet MS" pitchFamily="34" charset="-120"/>
               </a:rPr>
-              <a:t>a</a:t>
+              <a:t>e</a:t>
             </a:r>
             <a:endParaRPr lang="en-US" sz="900" dirty="0"/>
           </a:p>
@@ -15581,14 +16259,14 @@
       </p:sp>
       <p:sp>
         <p:nvSpPr>
-          <p:cNvPr id="41" name="Shape 39"/>
-          <p:cNvSpPr/>
-          <p:nvPr/>
-        </p:nvSpPr>
-        <p:spPr>
-          <a:xfrm>
-            <a:off x="7274052" y="4169664"/>
-            <a:ext cx="685800" cy="475488"/>
+          <p:cNvPr id="47" name="Shape 45"/>
+          <p:cNvSpPr/>
+          <p:nvPr/>
+        </p:nvSpPr>
+        <p:spPr>
+          <a:xfrm>
+            <a:off x="4855464" y="4169664"/>
+            <a:ext cx="676656" cy="475488"/>
           </a:xfrm>
           <a:prstGeom prst="rect">
             <a:avLst>
@@ -15608,14 +16286,14 @@
       </p:sp>
       <p:sp>
         <p:nvSpPr>
-          <p:cNvPr id="42" name="Text 40"/>
-          <p:cNvSpPr/>
-          <p:nvPr/>
-        </p:nvSpPr>
-        <p:spPr>
-          <a:xfrm>
-            <a:off x="7274052" y="4169664"/>
-            <a:ext cx="685800" cy="475488"/>
+          <p:cNvPr id="48" name="Text 46"/>
+          <p:cNvSpPr/>
+          <p:nvPr/>
+        </p:nvSpPr>
+        <p:spPr>
+          <a:xfrm>
+            <a:off x="4855464" y="4169664"/>
+            <a:ext cx="676656" cy="475488"/>
           </a:xfrm>
           <a:prstGeom prst="rect">
             <a:avLst/>
@@ -15639,7 +16317,271 @@
                 <a:ea typeface="Trebuchet MS" pitchFamily="34" charset="-122"/>
                 <a:cs typeface="Trebuchet MS" pitchFamily="34" charset="-120"/>
               </a:rPr>
+              <a:t>g</a:t>
+            </a:r>
+            <a:endParaRPr lang="en-US" sz="900" dirty="0"/>
+          </a:p>
+        </p:txBody>
+      </p:sp>
+      <p:sp>
+        <p:nvSpPr>
+          <p:cNvPr id="49" name="Shape 47"/>
+          <p:cNvSpPr/>
+          <p:nvPr/>
+        </p:nvSpPr>
+        <p:spPr>
+          <a:xfrm>
+            <a:off x="5581498" y="4169664"/>
+            <a:ext cx="676656" cy="475488"/>
+          </a:xfrm>
+          <a:prstGeom prst="rect">
+            <a:avLst>
+              <a:gd name="adj" fmla="val 7692"/>
+            </a:avLst>
+          </a:prstGeom>
+          <a:solidFill>
+            <a:srgbClr val="FFFFFF"/>
+          </a:solidFill>
+          <a:ln w="12700">
+            <a:solidFill>
+              <a:srgbClr val="DB2777"/>
+            </a:solidFill>
+            <a:prstDash val="solid"/>
+          </a:ln>
+        </p:spPr>
+      </p:sp>
+      <p:sp>
+        <p:nvSpPr>
+          <p:cNvPr id="50" name="Text 48"/>
+          <p:cNvSpPr/>
+          <p:nvPr/>
+        </p:nvSpPr>
+        <p:spPr>
+          <a:xfrm>
+            <a:off x="5581498" y="4169664"/>
+            <a:ext cx="676656" cy="475488"/>
+          </a:xfrm>
+          <a:prstGeom prst="rect">
+            <a:avLst/>
+          </a:prstGeom>
+          <a:noFill/>
+          <a:ln/>
+        </p:spPr>
+        <p:txBody>
+          <a:bodyPr wrap="square" lIns="0" tIns="0" rIns="0" bIns="0" rtlCol="0" anchor="ctr"/>
+          <a:lstStyle/>
+          <a:p>
+            <a:pPr algn="ctr" indent="0" marL="0">
+              <a:buNone/>
+            </a:pPr>
+            <a:r>
+              <a:rPr lang="en-US" sz="900" b="1" dirty="0">
+                <a:solidFill>
+                  <a:srgbClr val="9D174D"/>
+                </a:solidFill>
+                <a:latin typeface="Trebuchet MS" pitchFamily="34" charset="0"/>
+                <a:ea typeface="Trebuchet MS" pitchFamily="34" charset="-122"/>
+                <a:cs typeface="Trebuchet MS" pitchFamily="34" charset="-120"/>
+              </a:rPr>
+              <a:t>r</a:t>
+            </a:r>
+            <a:endParaRPr lang="en-US" sz="900" dirty="0"/>
+          </a:p>
+        </p:txBody>
+      </p:sp>
+      <p:sp>
+        <p:nvSpPr>
+          <p:cNvPr id="51" name="Shape 49"/>
+          <p:cNvSpPr/>
+          <p:nvPr/>
+        </p:nvSpPr>
+        <p:spPr>
+          <a:xfrm>
+            <a:off x="6307531" y="4169664"/>
+            <a:ext cx="676656" cy="475488"/>
+          </a:xfrm>
+          <a:prstGeom prst="rect">
+            <a:avLst>
+              <a:gd name="adj" fmla="val 7692"/>
+            </a:avLst>
+          </a:prstGeom>
+          <a:solidFill>
+            <a:srgbClr val="FFFFFF"/>
+          </a:solidFill>
+          <a:ln w="12700">
+            <a:solidFill>
+              <a:srgbClr val="DB2777"/>
+            </a:solidFill>
+            <a:prstDash val="solid"/>
+          </a:ln>
+        </p:spPr>
+      </p:sp>
+      <p:sp>
+        <p:nvSpPr>
+          <p:cNvPr id="52" name="Text 50"/>
+          <p:cNvSpPr/>
+          <p:nvPr/>
+        </p:nvSpPr>
+        <p:spPr>
+          <a:xfrm>
+            <a:off x="6307531" y="4169664"/>
+            <a:ext cx="676656" cy="475488"/>
+          </a:xfrm>
+          <a:prstGeom prst="rect">
+            <a:avLst/>
+          </a:prstGeom>
+          <a:noFill/>
+          <a:ln/>
+        </p:spPr>
+        <p:txBody>
+          <a:bodyPr wrap="square" lIns="0" tIns="0" rIns="0" bIns="0" rtlCol="0" anchor="ctr"/>
+          <a:lstStyle/>
+          <a:p>
+            <a:pPr algn="ctr" indent="0" marL="0">
+              <a:buNone/>
+            </a:pPr>
+            <a:r>
+              <a:rPr lang="en-US" sz="900" b="1" dirty="0">
+                <a:solidFill>
+                  <a:srgbClr val="9D174D"/>
+                </a:solidFill>
+                <a:latin typeface="Trebuchet MS" pitchFamily="34" charset="0"/>
+                <a:ea typeface="Trebuchet MS" pitchFamily="34" charset="-122"/>
+                <a:cs typeface="Trebuchet MS" pitchFamily="34" charset="-120"/>
+              </a:rPr>
+              <a:t>a</a:t>
+            </a:r>
+            <a:endParaRPr lang="en-US" sz="900" dirty="0"/>
+          </a:p>
+        </p:txBody>
+      </p:sp>
+      <p:sp>
+        <p:nvSpPr>
+          <p:cNvPr id="53" name="Shape 51"/>
+          <p:cNvSpPr/>
+          <p:nvPr/>
+        </p:nvSpPr>
+        <p:spPr>
+          <a:xfrm>
+            <a:off x="7033565" y="4169664"/>
+            <a:ext cx="676656" cy="475488"/>
+          </a:xfrm>
+          <a:prstGeom prst="rect">
+            <a:avLst>
+              <a:gd name="adj" fmla="val 7692"/>
+            </a:avLst>
+          </a:prstGeom>
+          <a:solidFill>
+            <a:srgbClr val="FFFFFF"/>
+          </a:solidFill>
+          <a:ln w="12700">
+            <a:solidFill>
+              <a:srgbClr val="DB2777"/>
+            </a:solidFill>
+            <a:prstDash val="solid"/>
+          </a:ln>
+        </p:spPr>
+      </p:sp>
+      <p:sp>
+        <p:nvSpPr>
+          <p:cNvPr id="54" name="Text 52"/>
+          <p:cNvSpPr/>
+          <p:nvPr/>
+        </p:nvSpPr>
+        <p:spPr>
+          <a:xfrm>
+            <a:off x="7033565" y="4169664"/>
+            <a:ext cx="676656" cy="475488"/>
+          </a:xfrm>
+          <a:prstGeom prst="rect">
+            <a:avLst/>
+          </a:prstGeom>
+          <a:noFill/>
+          <a:ln/>
+        </p:spPr>
+        <p:txBody>
+          <a:bodyPr wrap="square" lIns="0" tIns="0" rIns="0" bIns="0" rtlCol="0" anchor="ctr"/>
+          <a:lstStyle/>
+          <a:p>
+            <a:pPr algn="ctr" indent="0" marL="0">
+              <a:buNone/>
+            </a:pPr>
+            <a:r>
+              <a:rPr lang="en-US" sz="900" b="1" dirty="0">
+                <a:solidFill>
+                  <a:srgbClr val="9D174D"/>
+                </a:solidFill>
+                <a:latin typeface="Trebuchet MS" pitchFamily="34" charset="0"/>
+                <a:ea typeface="Trebuchet MS" pitchFamily="34" charset="-122"/>
+                <a:cs typeface="Trebuchet MS" pitchFamily="34" charset="-120"/>
+              </a:rPr>
               <a:t>m</a:t>
+            </a:r>
+            <a:endParaRPr lang="en-US" sz="900" dirty="0"/>
+          </a:p>
+        </p:txBody>
+      </p:sp>
+      <p:sp>
+        <p:nvSpPr>
+          <p:cNvPr id="55" name="Shape 53"/>
+          <p:cNvSpPr/>
+          <p:nvPr/>
+        </p:nvSpPr>
+        <p:spPr>
+          <a:xfrm>
+            <a:off x="7759598" y="4169664"/>
+            <a:ext cx="676656" cy="475488"/>
+          </a:xfrm>
+          <a:prstGeom prst="rect">
+            <a:avLst>
+              <a:gd name="adj" fmla="val 7692"/>
+            </a:avLst>
+          </a:prstGeom>
+          <a:solidFill>
+            <a:srgbClr val="FFFFFF"/>
+          </a:solidFill>
+          <a:ln w="12700">
+            <a:solidFill>
+              <a:srgbClr val="DB2777"/>
+            </a:solidFill>
+            <a:prstDash val="solid"/>
+          </a:ln>
+        </p:spPr>
+      </p:sp>
+      <p:sp>
+        <p:nvSpPr>
+          <p:cNvPr id="56" name="Text 54"/>
+          <p:cNvSpPr/>
+          <p:nvPr/>
+        </p:nvSpPr>
+        <p:spPr>
+          <a:xfrm>
+            <a:off x="7759598" y="4169664"/>
+            <a:ext cx="676656" cy="475488"/>
+          </a:xfrm>
+          <a:prstGeom prst="rect">
+            <a:avLst/>
+          </a:prstGeom>
+          <a:noFill/>
+          <a:ln/>
+        </p:spPr>
+        <p:txBody>
+          <a:bodyPr wrap="square" lIns="0" tIns="0" rIns="0" bIns="0" rtlCol="0" anchor="ctr"/>
+          <a:lstStyle/>
+          <a:p>
+            <a:pPr algn="ctr" indent="0" marL="0">
+              <a:buNone/>
+            </a:pPr>
+            <a:r>
+              <a:rPr lang="en-US" sz="900" b="1" dirty="0">
+                <a:solidFill>
+                  <a:srgbClr val="9D174D"/>
+                </a:solidFill>
+                <a:latin typeface="Trebuchet MS" pitchFamily="34" charset="0"/>
+                <a:ea typeface="Trebuchet MS" pitchFamily="34" charset="-122"/>
+                <a:cs typeface="Trebuchet MS" pitchFamily="34" charset="-120"/>
+              </a:rPr>
+              <a:t>s</a:t>
             </a:r>
             <a:endParaRPr lang="en-US" sz="900" dirty="0"/>
           </a:p>
@@ -16213,7 +17155,7 @@
                 <a:ea typeface="Calibri" pitchFamily="34" charset="-122"/>
                 <a:cs typeface="Calibri" pitchFamily="34" charset="-120"/>
               </a:rPr>
-              <a:t>Word Labs  •  wordlabs.app  •  Root: 'gram' = written, drawn, recorded</a:t>
+              <a:t>Word Labs  •  wordlabs.app  •  Root: 'gram' = written; something written</a:t>
             </a:r>
             <a:endParaRPr lang="en-US" sz="800" dirty="0"/>
           </a:p>
@@ -16547,7 +17489,7 @@
                 <a:ea typeface="Trebuchet MS" pitchFamily="34" charset="-122"/>
                 <a:cs typeface="Trebuchet MS" pitchFamily="34" charset="-120"/>
               </a:rPr>
-              <a:t>2</a:t>
+              <a:t>0</a:t>
             </a:r>
             <a:pPr algn="ctr" indent="0" marL="0">
               <a:buNone/>
@@ -16561,7 +17503,7 @@
                 <a:ea typeface="Trebuchet MS" pitchFamily="34" charset="-122"/>
                 <a:cs typeface="Trebuchet MS" pitchFamily="34" charset="-120"/>
               </a:rPr>
-              <a:t>  punctuation marks</a:t>
+              <a:t>  punctuation mark</a:t>
             </a:r>
             <a:endParaRPr lang="en-US" sz="2800" dirty="0"/>
           </a:p>
@@ -16853,7 +17795,7 @@
                 <a:ea typeface="Calibri" pitchFamily="34" charset="-122"/>
                 <a:cs typeface="Calibri" pitchFamily="34" charset="-120"/>
               </a:rPr>
-              <a:t>Word Labs  •  wordlabs.app  •  Root: 'gram' = written, drawn, recorded</a:t>
+              <a:t>Word Labs  •  wordlabs.app  •  Root: 'gram' = written; something written</a:t>
             </a:r>
             <a:endParaRPr lang="en-US" sz="800" dirty="0"/>
           </a:p>
@@ -16965,7 +17907,7 @@
                 <a:ea typeface="Calibri" pitchFamily="34" charset="-122"/>
                 <a:cs typeface="Calibri" pitchFamily="34" charset="-120"/>
               </a:rPr>
-              <a:t>The </a:t>
+              <a:t>The teacher drew a </a:t>
             </a:r>
             <a:pPr algn="l" indent="0" marL="0">
               <a:buNone/>
@@ -16982,7 +17924,7 @@
                 <a:ea typeface="Calibri" pitchFamily="34" charset="-122"/>
                 <a:cs typeface="Calibri" pitchFamily="34" charset="-120"/>
               </a:rPr>
-              <a:t>hologram</a:t>
+              <a:t>diagram</a:t>
             </a:r>
             <a:pPr algn="l" indent="0" marL="0">
               <a:buNone/>
@@ -16996,7 +17938,7 @@
                 <a:ea typeface="Calibri" pitchFamily="34" charset="-122"/>
                 <a:cs typeface="Calibri" pitchFamily="34" charset="-120"/>
               </a:rPr>
-              <a:t> on the card showed a </a:t>
+              <a:t> to explain how the water cycle works. The textbook has </a:t>
             </a:r>
             <a:pPr algn="l" indent="0" marL="0">
               <a:buNone/>
@@ -17013,7 +17955,7 @@
                 <a:ea typeface="Calibri" pitchFamily="34" charset="-122"/>
                 <a:cs typeface="Calibri" pitchFamily="34" charset="-120"/>
               </a:rPr>
-              <a:t>monogram</a:t>
+              <a:t>diagrams</a:t>
             </a:r>
             <a:pPr algn="l" indent="0" marL="0">
               <a:buNone/>
@@ -17027,7 +17969,7 @@
                 <a:ea typeface="Calibri" pitchFamily="34" charset="-122"/>
                 <a:cs typeface="Calibri" pitchFamily="34" charset="-120"/>
               </a:rPr>
-              <a:t>, and the </a:t>
+              <a:t> showing the parts of a plant. Her towels were embroidered with a gold </a:t>
             </a:r>
             <a:pPr algn="l" indent="0" marL="0">
               <a:buNone/>
@@ -17044,7 +17986,7 @@
                 <a:ea typeface="Calibri" pitchFamily="34" charset="-122"/>
                 <a:cs typeface="Calibri" pitchFamily="34" charset="-120"/>
               </a:rPr>
-              <a:t>telegram</a:t>
+              <a:t>monogram</a:t>
             </a:r>
             <a:pPr algn="l" indent="0" marL="0">
               <a:buNone/>
@@ -17058,7 +18000,7 @@
                 <a:ea typeface="Calibri" pitchFamily="34" charset="-122"/>
                 <a:cs typeface="Calibri" pitchFamily="34" charset="-120"/>
               </a:rPr>
-              <a:t> confirmed the order.</a:t>
+              <a:t> of her initials.</a:t>
             </a:r>
             <a:endParaRPr lang="en-US" sz="1800" dirty="0"/>
           </a:p>
@@ -17213,7 +18155,7 @@
                 <a:ea typeface="Trebuchet MS" pitchFamily="34" charset="-122"/>
                 <a:cs typeface="Trebuchet MS" pitchFamily="34" charset="-120"/>
               </a:rPr>
-              <a:t>hologram</a:t>
+              <a:t>diagram</a:t>
             </a:r>
             <a:endParaRPr lang="en-US" sz="1400" dirty="0"/>
           </a:p>
@@ -17341,7 +18283,7 @@
                 <a:ea typeface="Trebuchet MS" pitchFamily="34" charset="-122"/>
                 <a:cs typeface="Trebuchet MS" pitchFamily="34" charset="-120"/>
               </a:rPr>
-              <a:t>monogram</a:t>
+              <a:t>diagrams</a:t>
             </a:r>
             <a:endParaRPr lang="en-US" sz="1400" dirty="0"/>
           </a:p>
@@ -17469,7 +18411,7 @@
                 <a:ea typeface="Trebuchet MS" pitchFamily="34" charset="-122"/>
                 <a:cs typeface="Trebuchet MS" pitchFamily="34" charset="-120"/>
               </a:rPr>
-              <a:t>telegram</a:t>
+              <a:t>monogram</a:t>
             </a:r>
             <a:endParaRPr lang="en-US" sz="1400" dirty="0"/>
           </a:p>
@@ -17800,7 +18742,7 @@
                 <a:ea typeface="Calibri" pitchFamily="34" charset="-122"/>
                 <a:cs typeface="Calibri" pitchFamily="34" charset="-120"/>
               </a:rPr>
-              <a:t>Word Labs  •  wordlabs.app  •  Root: 'gram' = written, drawn, recorded</a:t>
+              <a:t>Word Labs  •  wordlabs.app  •  Root: 'gram' = written; something written</a:t>
             </a:r>
             <a:endParaRPr lang="en-US" sz="800" dirty="0"/>
           </a:p>
@@ -17939,7 +18881,7 @@
                 <a:ea typeface="Trebuchet MS" pitchFamily="34" charset="-122"/>
                 <a:cs typeface="Trebuchet MS" pitchFamily="34" charset="-120"/>
               </a:rPr>
-              <a:t>hologram</a:t>
+              <a:t>diagram</a:t>
             </a:r>
             <a:endParaRPr lang="en-US" sz="2800" dirty="0"/>
           </a:p>
@@ -18627,7 +19569,7 @@
                 <a:ea typeface="Calibri" pitchFamily="34" charset="-122"/>
                 <a:cs typeface="Calibri" pitchFamily="34" charset="-120"/>
               </a:rPr>
-              <a:t>Word Labs  •  wordlabs.app  •  Root: 'gram' = written, drawn, recorded</a:t>
+              <a:t>Word Labs  •  wordlabs.app  •  Root: 'gram' = written; something written</a:t>
             </a:r>
             <a:endParaRPr lang="en-US" sz="800" dirty="0"/>
           </a:p>
@@ -18766,7 +19708,7 @@
                 <a:ea typeface="Trebuchet MS" pitchFamily="34" charset="-122"/>
                 <a:cs typeface="Trebuchet MS" pitchFamily="34" charset="-120"/>
               </a:rPr>
-              <a:t>hologram</a:t>
+              <a:t>diagram</a:t>
             </a:r>
             <a:endParaRPr lang="en-US" sz="2800" dirty="0"/>
           </a:p>
@@ -18905,7 +19847,7 @@
                 <a:ea typeface="Trebuchet MS" pitchFamily="34" charset="-122"/>
                 <a:cs typeface="Trebuchet MS" pitchFamily="34" charset="-120"/>
               </a:rPr>
-              <a:t>holo</a:t>
+              <a:t>dia</a:t>
             </a:r>
             <a:endParaRPr lang="en-US" sz="1300" dirty="0"/>
           </a:p>
@@ -18944,7 +19886,7 @@
                 <a:ea typeface="Calibri" pitchFamily="34" charset="-122"/>
                 <a:cs typeface="Calibri" pitchFamily="34" charset="-120"/>
               </a:rPr>
-              <a:t>whole, entire</a:t>
+              <a:t>through; across</a:t>
             </a:r>
             <a:endParaRPr lang="en-US" sz="850" dirty="0"/>
           </a:p>
@@ -19056,7 +19998,7 @@
                 <a:ea typeface="Calibri" pitchFamily="34" charset="-122"/>
                 <a:cs typeface="Calibri" pitchFamily="34" charset="-120"/>
               </a:rPr>
-              <a:t>written, drawn, recorded</a:t>
+              <a:t>written; something written</a:t>
             </a:r>
             <a:endParaRPr lang="en-US" sz="850" dirty="0"/>
           </a:p>
@@ -19612,7 +20554,7 @@
                 <a:ea typeface="Calibri" pitchFamily="34" charset="-122"/>
                 <a:cs typeface="Calibri" pitchFamily="34" charset="-120"/>
               </a:rPr>
-              <a:t>Word Labs  •  wordlabs.app  •  Root: 'gram' = written, drawn, recorded</a:t>
+              <a:t>Word Labs  •  wordlabs.app  •  Root: 'gram' = written; something written</a:t>
             </a:r>
             <a:endParaRPr lang="en-US" sz="800" dirty="0"/>
           </a:p>
@@ -19751,7 +20693,7 @@
                 <a:ea typeface="Trebuchet MS" pitchFamily="34" charset="-122"/>
                 <a:cs typeface="Trebuchet MS" pitchFamily="34" charset="-120"/>
               </a:rPr>
-              <a:t>hologram</a:t>
+              <a:t>diagram</a:t>
             </a:r>
             <a:endParaRPr lang="en-US" sz="2800" dirty="0"/>
           </a:p>
@@ -19890,7 +20832,7 @@
                 <a:ea typeface="Trebuchet MS" pitchFamily="34" charset="-122"/>
                 <a:cs typeface="Trebuchet MS" pitchFamily="34" charset="-120"/>
               </a:rPr>
-              <a:t>holo</a:t>
+              <a:t>dia</a:t>
             </a:r>
             <a:endParaRPr lang="en-US" sz="1300" dirty="0"/>
           </a:p>
@@ -19929,7 +20871,7 @@
                 <a:ea typeface="Calibri" pitchFamily="34" charset="-122"/>
                 <a:cs typeface="Calibri" pitchFamily="34" charset="-120"/>
               </a:rPr>
-              <a:t>whole, entire</a:t>
+              <a:t>through; across</a:t>
             </a:r>
             <a:endParaRPr lang="en-US" sz="850" dirty="0"/>
           </a:p>
@@ -20041,7 +20983,7 @@
                 <a:ea typeface="Calibri" pitchFamily="34" charset="-122"/>
                 <a:cs typeface="Calibri" pitchFamily="34" charset="-120"/>
               </a:rPr>
-              <a:t>written, drawn, recorded</a:t>
+              <a:t>written; something written</a:t>
             </a:r>
             <a:endParaRPr lang="en-US" sz="850" dirty="0"/>
           </a:p>
@@ -20200,7 +21142,7 @@
                 <a:ea typeface="Trebuchet MS" pitchFamily="34" charset="-122"/>
                 <a:cs typeface="Trebuchet MS" pitchFamily="34" charset="-120"/>
               </a:rPr>
-              <a:t>ho</a:t>
+              <a:t>di</a:t>
             </a:r>
             <a:endParaRPr lang="en-US" sz="1400" dirty="0"/>
           </a:p>
@@ -20305,7 +21247,7 @@
                 <a:ea typeface="Trebuchet MS" pitchFamily="34" charset="-122"/>
                 <a:cs typeface="Trebuchet MS" pitchFamily="34" charset="-120"/>
               </a:rPr>
-              <a:t>lo</a:t>
+              <a:t>a</a:t>
             </a:r>
             <a:endParaRPr lang="en-US" sz="1400" dirty="0"/>
           </a:p>
@@ -20834,7 +21776,7 @@
                 <a:ea typeface="Calibri" pitchFamily="34" charset="-122"/>
                 <a:cs typeface="Calibri" pitchFamily="34" charset="-120"/>
               </a:rPr>
-              <a:t>Word Labs  •  wordlabs.app  •  Root: 'gram' = written, drawn, recorded</a:t>
+              <a:t>Word Labs  •  wordlabs.app  •  Root: 'gram' = written; something written</a:t>
             </a:r>
             <a:endParaRPr lang="en-US" sz="800" dirty="0"/>
           </a:p>
@@ -20973,7 +21915,7 @@
                 <a:ea typeface="Trebuchet MS" pitchFamily="34" charset="-122"/>
                 <a:cs typeface="Trebuchet MS" pitchFamily="34" charset="-120"/>
               </a:rPr>
-              <a:t>hologram</a:t>
+              <a:t>diagram</a:t>
             </a:r>
             <a:endParaRPr lang="en-US" sz="2800" dirty="0"/>
           </a:p>
@@ -21112,7 +22054,7 @@
                 <a:ea typeface="Trebuchet MS" pitchFamily="34" charset="-122"/>
                 <a:cs typeface="Trebuchet MS" pitchFamily="34" charset="-120"/>
               </a:rPr>
-              <a:t>holo</a:t>
+              <a:t>dia</a:t>
             </a:r>
             <a:endParaRPr lang="en-US" sz="1300" dirty="0"/>
           </a:p>
@@ -21151,7 +22093,7 @@
                 <a:ea typeface="Calibri" pitchFamily="34" charset="-122"/>
                 <a:cs typeface="Calibri" pitchFamily="34" charset="-120"/>
               </a:rPr>
-              <a:t>whole, entire</a:t>
+              <a:t>through; across</a:t>
             </a:r>
             <a:endParaRPr lang="en-US" sz="850" dirty="0"/>
           </a:p>
@@ -21263,7 +22205,7 @@
                 <a:ea typeface="Calibri" pitchFamily="34" charset="-122"/>
                 <a:cs typeface="Calibri" pitchFamily="34" charset="-120"/>
               </a:rPr>
-              <a:t>written, drawn, recorded</a:t>
+              <a:t>written; something written</a:t>
             </a:r>
             <a:endParaRPr lang="en-US" sz="850" dirty="0"/>
           </a:p>
@@ -21422,7 +22364,7 @@
                 <a:ea typeface="Trebuchet MS" pitchFamily="34" charset="-122"/>
                 <a:cs typeface="Trebuchet MS" pitchFamily="34" charset="-120"/>
               </a:rPr>
-              <a:t>ho</a:t>
+              <a:t>di</a:t>
             </a:r>
             <a:endParaRPr lang="en-US" sz="1400" dirty="0"/>
           </a:p>
@@ -21527,7 +22469,7 @@
                 <a:ea typeface="Trebuchet MS" pitchFamily="34" charset="-122"/>
                 <a:cs typeface="Trebuchet MS" pitchFamily="34" charset="-120"/>
               </a:rPr>
-              <a:t>lo</a:t>
+              <a:t>a</a:t>
             </a:r>
             <a:endParaRPr lang="en-US" sz="1400" dirty="0"/>
           </a:p>
@@ -21791,7 +22733,7 @@
                 <a:ea typeface="Trebuchet MS" pitchFamily="34" charset="-122"/>
                 <a:cs typeface="Trebuchet MS" pitchFamily="34" charset="-120"/>
               </a:rPr>
-              <a:t>h</a:t>
+              <a:t>d</a:t>
             </a:r>
             <a:endParaRPr lang="en-US" sz="900" dirty="0"/>
           </a:p>
@@ -21857,7 +22799,7 @@
                 <a:ea typeface="Trebuchet MS" pitchFamily="34" charset="-122"/>
                 <a:cs typeface="Trebuchet MS" pitchFamily="34" charset="-120"/>
               </a:rPr>
-              <a:t>o</a:t>
+              <a:t>i</a:t>
             </a:r>
             <a:endParaRPr lang="en-US" sz="900" dirty="0"/>
           </a:p>
@@ -21923,7 +22865,7 @@
                 <a:ea typeface="Trebuchet MS" pitchFamily="34" charset="-122"/>
                 <a:cs typeface="Trebuchet MS" pitchFamily="34" charset="-120"/>
               </a:rPr>
-              <a:t>l</a:t>
+              <a:t>a</a:t>
             </a:r>
             <a:endParaRPr lang="en-US" sz="900" dirty="0"/>
           </a:p>
@@ -21989,7 +22931,7 @@
                 <a:ea typeface="Trebuchet MS" pitchFamily="34" charset="-122"/>
                 <a:cs typeface="Trebuchet MS" pitchFamily="34" charset="-120"/>
               </a:rPr>
-              <a:t>o</a:t>
+              <a:t>g</a:t>
             </a:r>
             <a:endParaRPr lang="en-US" sz="900" dirty="0"/>
           </a:p>
@@ -22055,7 +22997,7 @@
                 <a:ea typeface="Trebuchet MS" pitchFamily="34" charset="-122"/>
                 <a:cs typeface="Trebuchet MS" pitchFamily="34" charset="-120"/>
               </a:rPr>
-              <a:t>gr</a:t>
+              <a:t>r</a:t>
             </a:r>
             <a:endParaRPr lang="en-US" sz="900" dirty="0"/>
           </a:p>
@@ -22479,7 +23421,7 @@
                 <a:ea typeface="Calibri" pitchFamily="34" charset="-122"/>
                 <a:cs typeface="Calibri" pitchFamily="34" charset="-120"/>
               </a:rPr>
-              <a:t>Word Labs  •  wordlabs.app  •  Root: 'gram' = written, drawn, recorded</a:t>
+              <a:t>Word Labs  •  wordlabs.app  •  Root: 'gram' = written; something written</a:t>
             </a:r>
             <a:endParaRPr lang="en-US" sz="800" dirty="0"/>
           </a:p>
@@ -22618,7 +23560,7 @@
                 <a:ea typeface="Trebuchet MS" pitchFamily="34" charset="-122"/>
                 <a:cs typeface="Trebuchet MS" pitchFamily="34" charset="-120"/>
               </a:rPr>
-              <a:t>monogram</a:t>
+              <a:t>diagrams</a:t>
             </a:r>
             <a:endParaRPr lang="en-US" sz="2800" dirty="0"/>
           </a:p>
@@ -23306,7 +24248,7 @@
                 <a:ea typeface="Calibri" pitchFamily="34" charset="-122"/>
                 <a:cs typeface="Calibri" pitchFamily="34" charset="-120"/>
               </a:rPr>
-              <a:t>Word Labs  •  wordlabs.app  •  Root: 'gram' = written, drawn, recorded</a:t>
+              <a:t>Word Labs  •  wordlabs.app  •  Root: 'gram' = written; something written</a:t>
             </a:r>
             <a:endParaRPr lang="en-US" sz="800" dirty="0"/>
           </a:p>
@@ -23445,7 +24387,7 @@
                 <a:ea typeface="Trebuchet MS" pitchFamily="34" charset="-122"/>
                 <a:cs typeface="Trebuchet MS" pitchFamily="34" charset="-120"/>
               </a:rPr>
-              <a:t>monogram</a:t>
+              <a:t>diagrams</a:t>
             </a:r>
             <a:endParaRPr lang="en-US" sz="2800" dirty="0"/>
           </a:p>
@@ -23525,7 +24467,7 @@
         </p:nvSpPr>
         <p:spPr>
           <a:xfrm>
-            <a:off x="2938272" y="2258568"/>
+            <a:off x="2221992" y="2258568"/>
             <a:ext cx="1828800" cy="292608"/>
           </a:xfrm>
           <a:prstGeom prst="rect">
@@ -23559,7 +24501,7 @@
         </p:nvSpPr>
         <p:spPr>
           <a:xfrm>
-            <a:off x="2938272" y="2258568"/>
+            <a:off x="2221992" y="2258568"/>
             <a:ext cx="1828800" cy="292608"/>
           </a:xfrm>
           <a:prstGeom prst="rect">
@@ -23584,7 +24526,7 @@
                 <a:ea typeface="Trebuchet MS" pitchFamily="34" charset="-122"/>
                 <a:cs typeface="Trebuchet MS" pitchFamily="34" charset="-120"/>
               </a:rPr>
-              <a:t>mono</a:t>
+              <a:t>dia</a:t>
             </a:r>
             <a:endParaRPr lang="en-US" sz="1300" dirty="0"/>
           </a:p>
@@ -23598,7 +24540,7 @@
         </p:nvSpPr>
         <p:spPr>
           <a:xfrm>
-            <a:off x="2938272" y="2569464"/>
+            <a:off x="2221992" y="2569464"/>
             <a:ext cx="1828800" cy="201168"/>
           </a:xfrm>
           <a:prstGeom prst="rect">
@@ -23623,7 +24565,7 @@
                 <a:ea typeface="Calibri" pitchFamily="34" charset="-122"/>
                 <a:cs typeface="Calibri" pitchFamily="34" charset="-120"/>
               </a:rPr>
-              <a:t>one, single</a:t>
+              <a:t>through; across</a:t>
             </a:r>
             <a:endParaRPr lang="en-US" sz="850" dirty="0"/>
           </a:p>
@@ -23637,7 +24579,7 @@
         </p:nvSpPr>
         <p:spPr>
           <a:xfrm>
-            <a:off x="5803392" y="2258568"/>
+            <a:off x="4370832" y="2258568"/>
             <a:ext cx="1828800" cy="292608"/>
           </a:xfrm>
           <a:prstGeom prst="rect">
@@ -23671,7 +24613,7 @@
         </p:nvSpPr>
         <p:spPr>
           <a:xfrm>
-            <a:off x="5803392" y="2258568"/>
+            <a:off x="4370832" y="2258568"/>
             <a:ext cx="1828800" cy="292608"/>
           </a:xfrm>
           <a:prstGeom prst="rect">
@@ -23710,7 +24652,7 @@
         </p:nvSpPr>
         <p:spPr>
           <a:xfrm>
-            <a:off x="5803392" y="2569464"/>
+            <a:off x="4370832" y="2569464"/>
             <a:ext cx="1828800" cy="201168"/>
           </a:xfrm>
           <a:prstGeom prst="rect">
@@ -23735,7 +24677,7 @@
                 <a:ea typeface="Calibri" pitchFamily="34" charset="-122"/>
                 <a:cs typeface="Calibri" pitchFamily="34" charset="-120"/>
               </a:rPr>
-              <a:t>written, drawn, recorded</a:t>
+              <a:t>written; something written</a:t>
             </a:r>
             <a:endParaRPr lang="en-US" sz="850" dirty="0"/>
           </a:p>
@@ -23744,6 +24686,118 @@
       <p:sp>
         <p:nvSpPr>
           <p:cNvPr id="22" name="Shape 20"/>
+          <p:cNvSpPr/>
+          <p:nvPr/>
+        </p:nvSpPr>
+        <p:spPr>
+          <a:xfrm>
+            <a:off x="6519672" y="2258568"/>
+            <a:ext cx="1828800" cy="292608"/>
+          </a:xfrm>
+          <a:prstGeom prst="rect">
+            <a:avLst>
+              <a:gd name="adj" fmla="val 25000"/>
+            </a:avLst>
+          </a:prstGeom>
+          <a:solidFill>
+            <a:srgbClr val="FCE7F3"/>
+          </a:solidFill>
+          <a:ln w="19050">
+            <a:solidFill>
+              <a:srgbClr val="DB2777"/>
+            </a:solidFill>
+            <a:prstDash val="solid"/>
+          </a:ln>
+          <a:effectLst>
+            <a:outerShdw sx="100000" sy="100000" kx="0" ky="0" algn="bl" rotWithShape="0" blurRad="101600" dist="38100" dir="8100000">
+              <a:srgbClr val="000000">
+                <a:alpha val="12000"/>
+              </a:srgbClr>
+            </a:outerShdw>
+          </a:effectLst>
+        </p:spPr>
+      </p:sp>
+      <p:sp>
+        <p:nvSpPr>
+          <p:cNvPr id="23" name="Text 21"/>
+          <p:cNvSpPr/>
+          <p:nvPr/>
+        </p:nvSpPr>
+        <p:spPr>
+          <a:xfrm>
+            <a:off x="6519672" y="2258568"/>
+            <a:ext cx="1828800" cy="292608"/>
+          </a:xfrm>
+          <a:prstGeom prst="rect">
+            <a:avLst/>
+          </a:prstGeom>
+          <a:noFill/>
+          <a:ln/>
+        </p:spPr>
+        <p:txBody>
+          <a:bodyPr wrap="square" lIns="0" tIns="0" rIns="0" bIns="0" rtlCol="0" anchor="ctr"/>
+          <a:lstStyle/>
+          <a:p>
+            <a:pPr algn="ctr" indent="0" marL="0">
+              <a:buNone/>
+            </a:pPr>
+            <a:r>
+              <a:rPr lang="en-US" sz="1300" b="1" dirty="0">
+                <a:solidFill>
+                  <a:srgbClr val="9D174D"/>
+                </a:solidFill>
+                <a:latin typeface="Trebuchet MS" pitchFamily="34" charset="0"/>
+                <a:ea typeface="Trebuchet MS" pitchFamily="34" charset="-122"/>
+                <a:cs typeface="Trebuchet MS" pitchFamily="34" charset="-120"/>
+              </a:rPr>
+              <a:t>s</a:t>
+            </a:r>
+            <a:endParaRPr lang="en-US" sz="1300" dirty="0"/>
+          </a:p>
+        </p:txBody>
+      </p:sp>
+      <p:sp>
+        <p:nvSpPr>
+          <p:cNvPr id="24" name="Text 22"/>
+          <p:cNvSpPr/>
+          <p:nvPr/>
+        </p:nvSpPr>
+        <p:spPr>
+          <a:xfrm>
+            <a:off x="6519672" y="2569464"/>
+            <a:ext cx="1828800" cy="201168"/>
+          </a:xfrm>
+          <a:prstGeom prst="rect">
+            <a:avLst/>
+          </a:prstGeom>
+          <a:noFill/>
+          <a:ln/>
+        </p:spPr>
+        <p:txBody>
+          <a:bodyPr wrap="square" lIns="0" tIns="0" rIns="0" bIns="0" rtlCol="0" anchor="t"/>
+          <a:lstStyle/>
+          <a:p>
+            <a:pPr algn="ctr" indent="0" marL="0">
+              <a:buNone/>
+            </a:pPr>
+            <a:r>
+              <a:rPr lang="en-US" sz="850" dirty="0">
+                <a:solidFill>
+                  <a:srgbClr val="475569"/>
+                </a:solidFill>
+                <a:latin typeface="Calibri" pitchFamily="34" charset="0"/>
+                <a:ea typeface="Calibri" pitchFamily="34" charset="-122"/>
+                <a:cs typeface="Calibri" pitchFamily="34" charset="-120"/>
+              </a:rPr>
+              <a:t>plural or present tense</a:t>
+            </a:r>
+            <a:endParaRPr lang="en-US" sz="850" dirty="0"/>
+          </a:p>
+        </p:txBody>
+      </p:sp>
+      <p:sp>
+        <p:nvSpPr>
+          <p:cNvPr id="25" name="Shape 23"/>
           <p:cNvSpPr/>
           <p:nvPr/>
         </p:nvSpPr>
@@ -23770,7 +24824,7 @@
       </p:sp>
       <p:sp>
         <p:nvSpPr>
-          <p:cNvPr id="23" name="Text 21"/>
+          <p:cNvPr id="26" name="Text 24"/>
           <p:cNvSpPr/>
           <p:nvPr/>
         </p:nvSpPr>
@@ -23809,7 +24863,7 @@
       </p:sp>
       <p:sp>
         <p:nvSpPr>
-          <p:cNvPr id="24" name="Shape 22"/>
+          <p:cNvPr id="27" name="Shape 25"/>
           <p:cNvSpPr/>
           <p:nvPr/>
         </p:nvSpPr>
@@ -23836,7 +24890,7 @@
       </p:sp>
       <p:sp>
         <p:nvSpPr>
-          <p:cNvPr id="25" name="Text 23"/>
+          <p:cNvPr id="28" name="Text 26"/>
           <p:cNvSpPr/>
           <p:nvPr/>
         </p:nvSpPr>
@@ -23875,7 +24929,7 @@
       </p:sp>
       <p:sp>
         <p:nvSpPr>
-          <p:cNvPr id="26" name="Shape 24"/>
+          <p:cNvPr id="29" name="Shape 27"/>
           <p:cNvSpPr/>
           <p:nvPr/>
         </p:nvSpPr>
@@ -23902,7 +24956,7 @@
       </p:sp>
       <p:sp>
         <p:nvSpPr>
-          <p:cNvPr id="27" name="Text 25"/>
+          <p:cNvPr id="30" name="Text 28"/>
           <p:cNvSpPr/>
           <p:nvPr/>
         </p:nvSpPr>
@@ -23941,7 +24995,7 @@
       </p:sp>
       <p:sp>
         <p:nvSpPr>
-          <p:cNvPr id="28" name="Shape 26"/>
+          <p:cNvPr id="31" name="Shape 29"/>
           <p:cNvSpPr/>
           <p:nvPr/>
         </p:nvSpPr>
@@ -23968,7 +25022,7 @@
       </p:sp>
       <p:sp>
         <p:nvSpPr>
-          <p:cNvPr id="29" name="Text 27"/>
+          <p:cNvPr id="32" name="Text 30"/>
           <p:cNvSpPr/>
           <p:nvPr/>
         </p:nvSpPr>
@@ -24291,7 +25345,7 @@
                 <a:ea typeface="Calibri" pitchFamily="34" charset="-122"/>
                 <a:cs typeface="Calibri" pitchFamily="34" charset="-120"/>
               </a:rPr>
-              <a:t>Word Labs  •  wordlabs.app  •  Root: 'gram' = written, drawn, recorded</a:t>
+              <a:t>Word Labs  •  wordlabs.app  •  Root: 'gram' = written; something written</a:t>
             </a:r>
             <a:endParaRPr lang="en-US" sz="800" dirty="0"/>
           </a:p>
@@ -24364,7 +25418,7 @@
                 <a:ea typeface="Trebuchet MS" pitchFamily="34" charset="-122"/>
                 <a:cs typeface="Trebuchet MS" pitchFamily="34" charset="-120"/>
               </a:rPr>
-              <a:t>We are learning that the root 'gram' means 'written, drawn, recorded'.</a:t>
+              <a:t>We are learning that the root 'gram' means 'written; something written'.</a:t>
             </a:r>
             <a:endParaRPr lang="en-US" sz="2000" dirty="0"/>
           </a:p>
@@ -25010,7 +26064,7 @@
                 <a:ea typeface="Calibri" pitchFamily="34" charset="-122"/>
                 <a:cs typeface="Calibri" pitchFamily="34" charset="-120"/>
               </a:rPr>
-              <a:t>Word Labs  •  wordlabs.app  •  Root: 'gram' = written, drawn, recorded</a:t>
+              <a:t>Word Labs  •  wordlabs.app  •  Root: 'gram' = written; something written</a:t>
             </a:r>
             <a:endParaRPr lang="en-US" sz="800" dirty="0"/>
           </a:p>
@@ -25149,7 +26203,7 @@
                 <a:ea typeface="Trebuchet MS" pitchFamily="34" charset="-122"/>
                 <a:cs typeface="Trebuchet MS" pitchFamily="34" charset="-120"/>
               </a:rPr>
-              <a:t>monogram</a:t>
+              <a:t>diagrams</a:t>
             </a:r>
             <a:endParaRPr lang="en-US" sz="2800" dirty="0"/>
           </a:p>
@@ -25229,7 +26283,7 @@
         </p:nvSpPr>
         <p:spPr>
           <a:xfrm>
-            <a:off x="2938272" y="2258568"/>
+            <a:off x="2221992" y="2258568"/>
             <a:ext cx="1828800" cy="292608"/>
           </a:xfrm>
           <a:prstGeom prst="rect">
@@ -25263,7 +26317,7 @@
         </p:nvSpPr>
         <p:spPr>
           <a:xfrm>
-            <a:off x="2938272" y="2258568"/>
+            <a:off x="2221992" y="2258568"/>
             <a:ext cx="1828800" cy="292608"/>
           </a:xfrm>
           <a:prstGeom prst="rect">
@@ -25288,7 +26342,7 @@
                 <a:ea typeface="Trebuchet MS" pitchFamily="34" charset="-122"/>
                 <a:cs typeface="Trebuchet MS" pitchFamily="34" charset="-120"/>
               </a:rPr>
-              <a:t>mono</a:t>
+              <a:t>dia</a:t>
             </a:r>
             <a:endParaRPr lang="en-US" sz="1300" dirty="0"/>
           </a:p>
@@ -25302,7 +26356,7 @@
         </p:nvSpPr>
         <p:spPr>
           <a:xfrm>
-            <a:off x="2938272" y="2569464"/>
+            <a:off x="2221992" y="2569464"/>
             <a:ext cx="1828800" cy="201168"/>
           </a:xfrm>
           <a:prstGeom prst="rect">
@@ -25327,7 +26381,7 @@
                 <a:ea typeface="Calibri" pitchFamily="34" charset="-122"/>
                 <a:cs typeface="Calibri" pitchFamily="34" charset="-120"/>
               </a:rPr>
-              <a:t>one, single</a:t>
+              <a:t>through; across</a:t>
             </a:r>
             <a:endParaRPr lang="en-US" sz="850" dirty="0"/>
           </a:p>
@@ -25341,7 +26395,7 @@
         </p:nvSpPr>
         <p:spPr>
           <a:xfrm>
-            <a:off x="5803392" y="2258568"/>
+            <a:off x="4370832" y="2258568"/>
             <a:ext cx="1828800" cy="292608"/>
           </a:xfrm>
           <a:prstGeom prst="rect">
@@ -25375,7 +26429,7 @@
         </p:nvSpPr>
         <p:spPr>
           <a:xfrm>
-            <a:off x="5803392" y="2258568"/>
+            <a:off x="4370832" y="2258568"/>
             <a:ext cx="1828800" cy="292608"/>
           </a:xfrm>
           <a:prstGeom prst="rect">
@@ -25414,7 +26468,7 @@
         </p:nvSpPr>
         <p:spPr>
           <a:xfrm>
-            <a:off x="5803392" y="2569464"/>
+            <a:off x="4370832" y="2569464"/>
             <a:ext cx="1828800" cy="201168"/>
           </a:xfrm>
           <a:prstGeom prst="rect">
@@ -25439,7 +26493,7 @@
                 <a:ea typeface="Calibri" pitchFamily="34" charset="-122"/>
                 <a:cs typeface="Calibri" pitchFamily="34" charset="-120"/>
               </a:rPr>
-              <a:t>written, drawn, recorded</a:t>
+              <a:t>written; something written</a:t>
             </a:r>
             <a:endParaRPr lang="en-US" sz="850" dirty="0"/>
           </a:p>
@@ -25448,6 +26502,118 @@
       <p:sp>
         <p:nvSpPr>
           <p:cNvPr id="22" name="Shape 20"/>
+          <p:cNvSpPr/>
+          <p:nvPr/>
+        </p:nvSpPr>
+        <p:spPr>
+          <a:xfrm>
+            <a:off x="6519672" y="2258568"/>
+            <a:ext cx="1828800" cy="292608"/>
+          </a:xfrm>
+          <a:prstGeom prst="rect">
+            <a:avLst>
+              <a:gd name="adj" fmla="val 25000"/>
+            </a:avLst>
+          </a:prstGeom>
+          <a:solidFill>
+            <a:srgbClr val="FCE7F3"/>
+          </a:solidFill>
+          <a:ln w="19050">
+            <a:solidFill>
+              <a:srgbClr val="DB2777"/>
+            </a:solidFill>
+            <a:prstDash val="solid"/>
+          </a:ln>
+          <a:effectLst>
+            <a:outerShdw sx="100000" sy="100000" kx="0" ky="0" algn="bl" rotWithShape="0" blurRad="101600" dist="38100" dir="8100000">
+              <a:srgbClr val="000000">
+                <a:alpha val="12000"/>
+              </a:srgbClr>
+            </a:outerShdw>
+          </a:effectLst>
+        </p:spPr>
+      </p:sp>
+      <p:sp>
+        <p:nvSpPr>
+          <p:cNvPr id="23" name="Text 21"/>
+          <p:cNvSpPr/>
+          <p:nvPr/>
+        </p:nvSpPr>
+        <p:spPr>
+          <a:xfrm>
+            <a:off x="6519672" y="2258568"/>
+            <a:ext cx="1828800" cy="292608"/>
+          </a:xfrm>
+          <a:prstGeom prst="rect">
+            <a:avLst/>
+          </a:prstGeom>
+          <a:noFill/>
+          <a:ln/>
+        </p:spPr>
+        <p:txBody>
+          <a:bodyPr wrap="square" lIns="0" tIns="0" rIns="0" bIns="0" rtlCol="0" anchor="ctr"/>
+          <a:lstStyle/>
+          <a:p>
+            <a:pPr algn="ctr" indent="0" marL="0">
+              <a:buNone/>
+            </a:pPr>
+            <a:r>
+              <a:rPr lang="en-US" sz="1300" b="1" dirty="0">
+                <a:solidFill>
+                  <a:srgbClr val="9D174D"/>
+                </a:solidFill>
+                <a:latin typeface="Trebuchet MS" pitchFamily="34" charset="0"/>
+                <a:ea typeface="Trebuchet MS" pitchFamily="34" charset="-122"/>
+                <a:cs typeface="Trebuchet MS" pitchFamily="34" charset="-120"/>
+              </a:rPr>
+              <a:t>s</a:t>
+            </a:r>
+            <a:endParaRPr lang="en-US" sz="1300" dirty="0"/>
+          </a:p>
+        </p:txBody>
+      </p:sp>
+      <p:sp>
+        <p:nvSpPr>
+          <p:cNvPr id="24" name="Text 22"/>
+          <p:cNvSpPr/>
+          <p:nvPr/>
+        </p:nvSpPr>
+        <p:spPr>
+          <a:xfrm>
+            <a:off x="6519672" y="2569464"/>
+            <a:ext cx="1828800" cy="201168"/>
+          </a:xfrm>
+          <a:prstGeom prst="rect">
+            <a:avLst/>
+          </a:prstGeom>
+          <a:noFill/>
+          <a:ln/>
+        </p:spPr>
+        <p:txBody>
+          <a:bodyPr wrap="square" lIns="0" tIns="0" rIns="0" bIns="0" rtlCol="0" anchor="t"/>
+          <a:lstStyle/>
+          <a:p>
+            <a:pPr algn="ctr" indent="0" marL="0">
+              <a:buNone/>
+            </a:pPr>
+            <a:r>
+              <a:rPr lang="en-US" sz="850" dirty="0">
+                <a:solidFill>
+                  <a:srgbClr val="475569"/>
+                </a:solidFill>
+                <a:latin typeface="Calibri" pitchFamily="34" charset="0"/>
+                <a:ea typeface="Calibri" pitchFamily="34" charset="-122"/>
+                <a:cs typeface="Calibri" pitchFamily="34" charset="-120"/>
+              </a:rPr>
+              <a:t>plural or present tense</a:t>
+            </a:r>
+            <a:endParaRPr lang="en-US" sz="850" dirty="0"/>
+          </a:p>
+        </p:txBody>
+      </p:sp>
+      <p:sp>
+        <p:nvSpPr>
+          <p:cNvPr id="25" name="Shape 23"/>
           <p:cNvSpPr/>
           <p:nvPr/>
         </p:nvSpPr>
@@ -25474,7 +26640,7 @@
       </p:sp>
       <p:sp>
         <p:nvSpPr>
-          <p:cNvPr id="23" name="Text 21"/>
+          <p:cNvPr id="26" name="Text 24"/>
           <p:cNvSpPr/>
           <p:nvPr/>
         </p:nvSpPr>
@@ -25513,7 +26679,7 @@
       </p:sp>
       <p:sp>
         <p:nvSpPr>
-          <p:cNvPr id="24" name="Shape 22"/>
+          <p:cNvPr id="27" name="Shape 25"/>
           <p:cNvSpPr/>
           <p:nvPr/>
         </p:nvSpPr>
@@ -25540,7 +26706,7 @@
       </p:sp>
       <p:sp>
         <p:nvSpPr>
-          <p:cNvPr id="25" name="Shape 23"/>
+          <p:cNvPr id="28" name="Shape 26"/>
           <p:cNvSpPr/>
           <p:nvPr/>
         </p:nvSpPr>
@@ -25567,7 +26733,7 @@
       </p:sp>
       <p:sp>
         <p:nvSpPr>
-          <p:cNvPr id="26" name="Text 24"/>
+          <p:cNvPr id="29" name="Text 27"/>
           <p:cNvSpPr/>
           <p:nvPr/>
         </p:nvSpPr>
@@ -25598,7 +26764,7 @@
                 <a:ea typeface="Trebuchet MS" pitchFamily="34" charset="-122"/>
                 <a:cs typeface="Trebuchet MS" pitchFamily="34" charset="-120"/>
               </a:rPr>
-              <a:t>mo</a:t>
+              <a:t>di</a:t>
             </a:r>
             <a:endParaRPr lang="en-US" sz="1400" dirty="0"/>
           </a:p>
@@ -25606,7 +26772,7 @@
       </p:sp>
       <p:sp>
         <p:nvSpPr>
-          <p:cNvPr id="27" name="Text 25"/>
+          <p:cNvPr id="30" name="Text 28"/>
           <p:cNvSpPr/>
           <p:nvPr/>
         </p:nvSpPr>
@@ -25645,7 +26811,7 @@
       </p:sp>
       <p:sp>
         <p:nvSpPr>
-          <p:cNvPr id="28" name="Shape 26"/>
+          <p:cNvPr id="31" name="Shape 29"/>
           <p:cNvSpPr/>
           <p:nvPr/>
         </p:nvSpPr>
@@ -25672,7 +26838,7 @@
       </p:sp>
       <p:sp>
         <p:nvSpPr>
-          <p:cNvPr id="29" name="Text 27"/>
+          <p:cNvPr id="32" name="Text 30"/>
           <p:cNvSpPr/>
           <p:nvPr/>
         </p:nvSpPr>
@@ -25703,7 +26869,7 @@
                 <a:ea typeface="Trebuchet MS" pitchFamily="34" charset="-122"/>
                 <a:cs typeface="Trebuchet MS" pitchFamily="34" charset="-120"/>
               </a:rPr>
-              <a:t>no</a:t>
+              <a:t>a</a:t>
             </a:r>
             <a:endParaRPr lang="en-US" sz="1400" dirty="0"/>
           </a:p>
@@ -25711,7 +26877,7 @@
       </p:sp>
       <p:sp>
         <p:nvSpPr>
-          <p:cNvPr id="30" name="Text 28"/>
+          <p:cNvPr id="33" name="Text 31"/>
           <p:cNvSpPr/>
           <p:nvPr/>
         </p:nvSpPr>
@@ -25750,7 +26916,7 @@
       </p:sp>
       <p:sp>
         <p:nvSpPr>
-          <p:cNvPr id="31" name="Shape 29"/>
+          <p:cNvPr id="34" name="Shape 32"/>
           <p:cNvSpPr/>
           <p:nvPr/>
         </p:nvSpPr>
@@ -25777,7 +26943,7 @@
       </p:sp>
       <p:sp>
         <p:nvSpPr>
-          <p:cNvPr id="32" name="Text 30"/>
+          <p:cNvPr id="35" name="Text 33"/>
           <p:cNvSpPr/>
           <p:nvPr/>
         </p:nvSpPr>
@@ -25808,7 +26974,7 @@
                 <a:ea typeface="Trebuchet MS" pitchFamily="34" charset="-122"/>
                 <a:cs typeface="Trebuchet MS" pitchFamily="34" charset="-120"/>
               </a:rPr>
-              <a:t>gram</a:t>
+              <a:t>grams</a:t>
             </a:r>
             <a:endParaRPr lang="en-US" sz="1400" dirty="0"/>
           </a:p>
@@ -25816,7 +26982,7 @@
       </p:sp>
       <p:sp>
         <p:nvSpPr>
-          <p:cNvPr id="33" name="Shape 31"/>
+          <p:cNvPr id="36" name="Shape 34"/>
           <p:cNvSpPr/>
           <p:nvPr/>
         </p:nvSpPr>
@@ -25843,7 +27009,7 @@
       </p:sp>
       <p:sp>
         <p:nvSpPr>
-          <p:cNvPr id="34" name="Text 32"/>
+          <p:cNvPr id="37" name="Text 35"/>
           <p:cNvSpPr/>
           <p:nvPr/>
         </p:nvSpPr>
@@ -25882,7 +27048,7 @@
       </p:sp>
       <p:sp>
         <p:nvSpPr>
-          <p:cNvPr id="35" name="Shape 33"/>
+          <p:cNvPr id="38" name="Shape 36"/>
           <p:cNvSpPr/>
           <p:nvPr/>
         </p:nvSpPr>
@@ -25909,7 +27075,7 @@
       </p:sp>
       <p:sp>
         <p:nvSpPr>
-          <p:cNvPr id="36" name="Text 34"/>
+          <p:cNvPr id="39" name="Text 37"/>
           <p:cNvSpPr/>
           <p:nvPr/>
         </p:nvSpPr>
@@ -26232,7 +27398,7 @@
                 <a:ea typeface="Calibri" pitchFamily="34" charset="-122"/>
                 <a:cs typeface="Calibri" pitchFamily="34" charset="-120"/>
               </a:rPr>
-              <a:t>Word Labs  •  wordlabs.app  •  Root: 'gram' = written, drawn, recorded</a:t>
+              <a:t>Word Labs  •  wordlabs.app  •  Root: 'gram' = written; something written</a:t>
             </a:r>
             <a:endParaRPr lang="en-US" sz="800" dirty="0"/>
           </a:p>
@@ -26371,7 +27537,7 @@
                 <a:ea typeface="Trebuchet MS" pitchFamily="34" charset="-122"/>
                 <a:cs typeface="Trebuchet MS" pitchFamily="34" charset="-120"/>
               </a:rPr>
-              <a:t>monogram</a:t>
+              <a:t>diagrams</a:t>
             </a:r>
             <a:endParaRPr lang="en-US" sz="2800" dirty="0"/>
           </a:p>
@@ -26451,7 +27617,7 @@
         </p:nvSpPr>
         <p:spPr>
           <a:xfrm>
-            <a:off x="2938272" y="2258568"/>
+            <a:off x="2221992" y="2258568"/>
             <a:ext cx="1828800" cy="292608"/>
           </a:xfrm>
           <a:prstGeom prst="rect">
@@ -26485,7 +27651,7 @@
         </p:nvSpPr>
         <p:spPr>
           <a:xfrm>
-            <a:off x="2938272" y="2258568"/>
+            <a:off x="2221992" y="2258568"/>
             <a:ext cx="1828800" cy="292608"/>
           </a:xfrm>
           <a:prstGeom prst="rect">
@@ -26510,7 +27676,7 @@
                 <a:ea typeface="Trebuchet MS" pitchFamily="34" charset="-122"/>
                 <a:cs typeface="Trebuchet MS" pitchFamily="34" charset="-120"/>
               </a:rPr>
-              <a:t>mono</a:t>
+              <a:t>dia</a:t>
             </a:r>
             <a:endParaRPr lang="en-US" sz="1300" dirty="0"/>
           </a:p>
@@ -26524,7 +27690,7 @@
         </p:nvSpPr>
         <p:spPr>
           <a:xfrm>
-            <a:off x="2938272" y="2569464"/>
+            <a:off x="2221992" y="2569464"/>
             <a:ext cx="1828800" cy="201168"/>
           </a:xfrm>
           <a:prstGeom prst="rect">
@@ -26549,7 +27715,7 @@
                 <a:ea typeface="Calibri" pitchFamily="34" charset="-122"/>
                 <a:cs typeface="Calibri" pitchFamily="34" charset="-120"/>
               </a:rPr>
-              <a:t>one, single</a:t>
+              <a:t>through; across</a:t>
             </a:r>
             <a:endParaRPr lang="en-US" sz="850" dirty="0"/>
           </a:p>
@@ -26563,7 +27729,7 @@
         </p:nvSpPr>
         <p:spPr>
           <a:xfrm>
-            <a:off x="5803392" y="2258568"/>
+            <a:off x="4370832" y="2258568"/>
             <a:ext cx="1828800" cy="292608"/>
           </a:xfrm>
           <a:prstGeom prst="rect">
@@ -26597,7 +27763,7 @@
         </p:nvSpPr>
         <p:spPr>
           <a:xfrm>
-            <a:off x="5803392" y="2258568"/>
+            <a:off x="4370832" y="2258568"/>
             <a:ext cx="1828800" cy="292608"/>
           </a:xfrm>
           <a:prstGeom prst="rect">
@@ -26636,7 +27802,7 @@
         </p:nvSpPr>
         <p:spPr>
           <a:xfrm>
-            <a:off x="5803392" y="2569464"/>
+            <a:off x="4370832" y="2569464"/>
             <a:ext cx="1828800" cy="201168"/>
           </a:xfrm>
           <a:prstGeom prst="rect">
@@ -26661,7 +27827,7 @@
                 <a:ea typeface="Calibri" pitchFamily="34" charset="-122"/>
                 <a:cs typeface="Calibri" pitchFamily="34" charset="-120"/>
               </a:rPr>
-              <a:t>written, drawn, recorded</a:t>
+              <a:t>written; something written</a:t>
             </a:r>
             <a:endParaRPr lang="en-US" sz="850" dirty="0"/>
           </a:p>
@@ -26670,6 +27836,118 @@
       <p:sp>
         <p:nvSpPr>
           <p:cNvPr id="22" name="Shape 20"/>
+          <p:cNvSpPr/>
+          <p:nvPr/>
+        </p:nvSpPr>
+        <p:spPr>
+          <a:xfrm>
+            <a:off x="6519672" y="2258568"/>
+            <a:ext cx="1828800" cy="292608"/>
+          </a:xfrm>
+          <a:prstGeom prst="rect">
+            <a:avLst>
+              <a:gd name="adj" fmla="val 25000"/>
+            </a:avLst>
+          </a:prstGeom>
+          <a:solidFill>
+            <a:srgbClr val="FCE7F3"/>
+          </a:solidFill>
+          <a:ln w="19050">
+            <a:solidFill>
+              <a:srgbClr val="DB2777"/>
+            </a:solidFill>
+            <a:prstDash val="solid"/>
+          </a:ln>
+          <a:effectLst>
+            <a:outerShdw sx="100000" sy="100000" kx="0" ky="0" algn="bl" rotWithShape="0" blurRad="101600" dist="38100" dir="8100000">
+              <a:srgbClr val="000000">
+                <a:alpha val="12000"/>
+              </a:srgbClr>
+            </a:outerShdw>
+          </a:effectLst>
+        </p:spPr>
+      </p:sp>
+      <p:sp>
+        <p:nvSpPr>
+          <p:cNvPr id="23" name="Text 21"/>
+          <p:cNvSpPr/>
+          <p:nvPr/>
+        </p:nvSpPr>
+        <p:spPr>
+          <a:xfrm>
+            <a:off x="6519672" y="2258568"/>
+            <a:ext cx="1828800" cy="292608"/>
+          </a:xfrm>
+          <a:prstGeom prst="rect">
+            <a:avLst/>
+          </a:prstGeom>
+          <a:noFill/>
+          <a:ln/>
+        </p:spPr>
+        <p:txBody>
+          <a:bodyPr wrap="square" lIns="0" tIns="0" rIns="0" bIns="0" rtlCol="0" anchor="ctr"/>
+          <a:lstStyle/>
+          <a:p>
+            <a:pPr algn="ctr" indent="0" marL="0">
+              <a:buNone/>
+            </a:pPr>
+            <a:r>
+              <a:rPr lang="en-US" sz="1300" b="1" dirty="0">
+                <a:solidFill>
+                  <a:srgbClr val="9D174D"/>
+                </a:solidFill>
+                <a:latin typeface="Trebuchet MS" pitchFamily="34" charset="0"/>
+                <a:ea typeface="Trebuchet MS" pitchFamily="34" charset="-122"/>
+                <a:cs typeface="Trebuchet MS" pitchFamily="34" charset="-120"/>
+              </a:rPr>
+              <a:t>s</a:t>
+            </a:r>
+            <a:endParaRPr lang="en-US" sz="1300" dirty="0"/>
+          </a:p>
+        </p:txBody>
+      </p:sp>
+      <p:sp>
+        <p:nvSpPr>
+          <p:cNvPr id="24" name="Text 22"/>
+          <p:cNvSpPr/>
+          <p:nvPr/>
+        </p:nvSpPr>
+        <p:spPr>
+          <a:xfrm>
+            <a:off x="6519672" y="2569464"/>
+            <a:ext cx="1828800" cy="201168"/>
+          </a:xfrm>
+          <a:prstGeom prst="rect">
+            <a:avLst/>
+          </a:prstGeom>
+          <a:noFill/>
+          <a:ln/>
+        </p:spPr>
+        <p:txBody>
+          <a:bodyPr wrap="square" lIns="0" tIns="0" rIns="0" bIns="0" rtlCol="0" anchor="t"/>
+          <a:lstStyle/>
+          <a:p>
+            <a:pPr algn="ctr" indent="0" marL="0">
+              <a:buNone/>
+            </a:pPr>
+            <a:r>
+              <a:rPr lang="en-US" sz="850" dirty="0">
+                <a:solidFill>
+                  <a:srgbClr val="475569"/>
+                </a:solidFill>
+                <a:latin typeface="Calibri" pitchFamily="34" charset="0"/>
+                <a:ea typeface="Calibri" pitchFamily="34" charset="-122"/>
+                <a:cs typeface="Calibri" pitchFamily="34" charset="-120"/>
+              </a:rPr>
+              <a:t>plural or present tense</a:t>
+            </a:r>
+            <a:endParaRPr lang="en-US" sz="850" dirty="0"/>
+          </a:p>
+        </p:txBody>
+      </p:sp>
+      <p:sp>
+        <p:nvSpPr>
+          <p:cNvPr id="25" name="Shape 23"/>
           <p:cNvSpPr/>
           <p:nvPr/>
         </p:nvSpPr>
@@ -26696,7 +27974,7 @@
       </p:sp>
       <p:sp>
         <p:nvSpPr>
-          <p:cNvPr id="23" name="Text 21"/>
+          <p:cNvPr id="26" name="Text 24"/>
           <p:cNvSpPr/>
           <p:nvPr/>
         </p:nvSpPr>
@@ -26735,7 +28013,7 @@
       </p:sp>
       <p:sp>
         <p:nvSpPr>
-          <p:cNvPr id="24" name="Shape 22"/>
+          <p:cNvPr id="27" name="Shape 25"/>
           <p:cNvSpPr/>
           <p:nvPr/>
         </p:nvSpPr>
@@ -26762,7 +28040,7 @@
       </p:sp>
       <p:sp>
         <p:nvSpPr>
-          <p:cNvPr id="25" name="Shape 23"/>
+          <p:cNvPr id="28" name="Shape 26"/>
           <p:cNvSpPr/>
           <p:nvPr/>
         </p:nvSpPr>
@@ -26789,7 +28067,7 @@
       </p:sp>
       <p:sp>
         <p:nvSpPr>
-          <p:cNvPr id="26" name="Text 24"/>
+          <p:cNvPr id="29" name="Text 27"/>
           <p:cNvSpPr/>
           <p:nvPr/>
         </p:nvSpPr>
@@ -26820,7 +28098,7 @@
                 <a:ea typeface="Trebuchet MS" pitchFamily="34" charset="-122"/>
                 <a:cs typeface="Trebuchet MS" pitchFamily="34" charset="-120"/>
               </a:rPr>
-              <a:t>mo</a:t>
+              <a:t>di</a:t>
             </a:r>
             <a:endParaRPr lang="en-US" sz="1400" dirty="0"/>
           </a:p>
@@ -26828,7 +28106,7 @@
       </p:sp>
       <p:sp>
         <p:nvSpPr>
-          <p:cNvPr id="27" name="Text 25"/>
+          <p:cNvPr id="30" name="Text 28"/>
           <p:cNvSpPr/>
           <p:nvPr/>
         </p:nvSpPr>
@@ -26867,7 +28145,7 @@
       </p:sp>
       <p:sp>
         <p:nvSpPr>
-          <p:cNvPr id="28" name="Shape 26"/>
+          <p:cNvPr id="31" name="Shape 29"/>
           <p:cNvSpPr/>
           <p:nvPr/>
         </p:nvSpPr>
@@ -26894,7 +28172,7 @@
       </p:sp>
       <p:sp>
         <p:nvSpPr>
-          <p:cNvPr id="29" name="Text 27"/>
+          <p:cNvPr id="32" name="Text 30"/>
           <p:cNvSpPr/>
           <p:nvPr/>
         </p:nvSpPr>
@@ -26925,7 +28203,7 @@
                 <a:ea typeface="Trebuchet MS" pitchFamily="34" charset="-122"/>
                 <a:cs typeface="Trebuchet MS" pitchFamily="34" charset="-120"/>
               </a:rPr>
-              <a:t>no</a:t>
+              <a:t>a</a:t>
             </a:r>
             <a:endParaRPr lang="en-US" sz="1400" dirty="0"/>
           </a:p>
@@ -26933,7 +28211,7 @@
       </p:sp>
       <p:sp>
         <p:nvSpPr>
-          <p:cNvPr id="30" name="Text 28"/>
+          <p:cNvPr id="33" name="Text 31"/>
           <p:cNvSpPr/>
           <p:nvPr/>
         </p:nvSpPr>
@@ -26972,7 +28250,7 @@
       </p:sp>
       <p:sp>
         <p:nvSpPr>
-          <p:cNvPr id="31" name="Shape 29"/>
+          <p:cNvPr id="34" name="Shape 32"/>
           <p:cNvSpPr/>
           <p:nvPr/>
         </p:nvSpPr>
@@ -26999,7 +28277,7 @@
       </p:sp>
       <p:sp>
         <p:nvSpPr>
-          <p:cNvPr id="32" name="Text 30"/>
+          <p:cNvPr id="35" name="Text 33"/>
           <p:cNvSpPr/>
           <p:nvPr/>
         </p:nvSpPr>
@@ -27030,7 +28308,7 @@
                 <a:ea typeface="Trebuchet MS" pitchFamily="34" charset="-122"/>
                 <a:cs typeface="Trebuchet MS" pitchFamily="34" charset="-120"/>
               </a:rPr>
-              <a:t>gram</a:t>
+              <a:t>grams</a:t>
             </a:r>
             <a:endParaRPr lang="en-US" sz="1400" dirty="0"/>
           </a:p>
@@ -27038,7 +28316,7 @@
       </p:sp>
       <p:sp>
         <p:nvSpPr>
-          <p:cNvPr id="33" name="Shape 31"/>
+          <p:cNvPr id="36" name="Shape 34"/>
           <p:cNvSpPr/>
           <p:nvPr/>
         </p:nvSpPr>
@@ -27065,7 +28343,7 @@
       </p:sp>
       <p:sp>
         <p:nvSpPr>
-          <p:cNvPr id="34" name="Text 32"/>
+          <p:cNvPr id="37" name="Text 35"/>
           <p:cNvSpPr/>
           <p:nvPr/>
         </p:nvSpPr>
@@ -27104,7 +28382,7 @@
       </p:sp>
       <p:sp>
         <p:nvSpPr>
-          <p:cNvPr id="35" name="Shape 33"/>
+          <p:cNvPr id="38" name="Shape 36"/>
           <p:cNvSpPr/>
           <p:nvPr/>
         </p:nvSpPr>
@@ -27131,13 +28409,13 @@
       </p:sp>
       <p:sp>
         <p:nvSpPr>
-          <p:cNvPr id="36" name="Shape 34"/>
-          <p:cNvSpPr/>
-          <p:nvPr/>
-        </p:nvSpPr>
-        <p:spPr>
-          <a:xfrm>
-            <a:off x="2124837" y="4169664"/>
+          <p:cNvPr id="39" name="Shape 37"/>
+          <p:cNvSpPr/>
+          <p:nvPr/>
+        </p:nvSpPr>
+        <p:spPr>
+          <a:xfrm>
+            <a:off x="2023872" y="4169664"/>
             <a:ext cx="685800" cy="475488"/>
           </a:xfrm>
           <a:prstGeom prst="rect">
@@ -27158,13 +28436,13 @@
       </p:sp>
       <p:sp>
         <p:nvSpPr>
-          <p:cNvPr id="37" name="Text 35"/>
-          <p:cNvSpPr/>
-          <p:nvPr/>
-        </p:nvSpPr>
-        <p:spPr>
-          <a:xfrm>
-            <a:off x="2124837" y="4169664"/>
+          <p:cNvPr id="40" name="Text 38"/>
+          <p:cNvSpPr/>
+          <p:nvPr/>
+        </p:nvSpPr>
+        <p:spPr>
+          <a:xfrm>
+            <a:off x="2023872" y="4169664"/>
             <a:ext cx="685800" cy="475488"/>
           </a:xfrm>
           <a:prstGeom prst="rect">
@@ -27189,7 +28467,7 @@
                 <a:ea typeface="Trebuchet MS" pitchFamily="34" charset="-122"/>
                 <a:cs typeface="Trebuchet MS" pitchFamily="34" charset="-120"/>
               </a:rPr>
-              <a:t>m</a:t>
+              <a:t>d</a:t>
             </a:r>
             <a:endParaRPr lang="en-US" sz="900" dirty="0"/>
           </a:p>
@@ -27197,13 +28475,13 @@
       </p:sp>
       <p:sp>
         <p:nvSpPr>
-          <p:cNvPr id="38" name="Shape 36"/>
-          <p:cNvSpPr/>
-          <p:nvPr/>
-        </p:nvSpPr>
-        <p:spPr>
-          <a:xfrm>
-            <a:off x="3033522" y="4169664"/>
+          <p:cNvPr id="41" name="Shape 39"/>
+          <p:cNvSpPr/>
+          <p:nvPr/>
+        </p:nvSpPr>
+        <p:spPr>
+          <a:xfrm>
+            <a:off x="2831592" y="4169664"/>
             <a:ext cx="685800" cy="475488"/>
           </a:xfrm>
           <a:prstGeom prst="rect">
@@ -27224,13 +28502,13 @@
       </p:sp>
       <p:sp>
         <p:nvSpPr>
-          <p:cNvPr id="39" name="Text 37"/>
-          <p:cNvSpPr/>
-          <p:nvPr/>
-        </p:nvSpPr>
-        <p:spPr>
-          <a:xfrm>
-            <a:off x="3033522" y="4169664"/>
+          <p:cNvPr id="42" name="Text 40"/>
+          <p:cNvSpPr/>
+          <p:nvPr/>
+        </p:nvSpPr>
+        <p:spPr>
+          <a:xfrm>
+            <a:off x="2831592" y="4169664"/>
             <a:ext cx="685800" cy="475488"/>
           </a:xfrm>
           <a:prstGeom prst="rect">
@@ -27255,7 +28533,7 @@
                 <a:ea typeface="Trebuchet MS" pitchFamily="34" charset="-122"/>
                 <a:cs typeface="Trebuchet MS" pitchFamily="34" charset="-120"/>
               </a:rPr>
-              <a:t>o</a:t>
+              <a:t>i</a:t>
             </a:r>
             <a:endParaRPr lang="en-US" sz="900" dirty="0"/>
           </a:p>
@@ -27263,13 +28541,13 @@
       </p:sp>
       <p:sp>
         <p:nvSpPr>
-          <p:cNvPr id="40" name="Shape 38"/>
-          <p:cNvSpPr/>
-          <p:nvPr/>
-        </p:nvSpPr>
-        <p:spPr>
-          <a:xfrm>
-            <a:off x="3942207" y="4169664"/>
+          <p:cNvPr id="43" name="Shape 41"/>
+          <p:cNvSpPr/>
+          <p:nvPr/>
+        </p:nvSpPr>
+        <p:spPr>
+          <a:xfrm>
+            <a:off x="3639312" y="4169664"/>
             <a:ext cx="685800" cy="475488"/>
           </a:xfrm>
           <a:prstGeom prst="rect">
@@ -27290,13 +28568,13 @@
       </p:sp>
       <p:sp>
         <p:nvSpPr>
-          <p:cNvPr id="41" name="Text 39"/>
-          <p:cNvSpPr/>
-          <p:nvPr/>
-        </p:nvSpPr>
-        <p:spPr>
-          <a:xfrm>
-            <a:off x="3942207" y="4169664"/>
+          <p:cNvPr id="44" name="Text 42"/>
+          <p:cNvSpPr/>
+          <p:nvPr/>
+        </p:nvSpPr>
+        <p:spPr>
+          <a:xfrm>
+            <a:off x="3639312" y="4169664"/>
             <a:ext cx="685800" cy="475488"/>
           </a:xfrm>
           <a:prstGeom prst="rect">
@@ -27321,7 +28599,7 @@
                 <a:ea typeface="Trebuchet MS" pitchFamily="34" charset="-122"/>
                 <a:cs typeface="Trebuchet MS" pitchFamily="34" charset="-120"/>
               </a:rPr>
-              <a:t>n</a:t>
+              <a:t>a</a:t>
             </a:r>
             <a:endParaRPr lang="en-US" sz="900" dirty="0"/>
           </a:p>
@@ -27329,13 +28607,13 @@
       </p:sp>
       <p:sp>
         <p:nvSpPr>
-          <p:cNvPr id="42" name="Shape 40"/>
-          <p:cNvSpPr/>
-          <p:nvPr/>
-        </p:nvSpPr>
-        <p:spPr>
-          <a:xfrm>
-            <a:off x="4850892" y="4169664"/>
+          <p:cNvPr id="45" name="Shape 43"/>
+          <p:cNvSpPr/>
+          <p:nvPr/>
+        </p:nvSpPr>
+        <p:spPr>
+          <a:xfrm>
+            <a:off x="4447032" y="4169664"/>
             <a:ext cx="685800" cy="475488"/>
           </a:xfrm>
           <a:prstGeom prst="rect">
@@ -27356,13 +28634,13 @@
       </p:sp>
       <p:sp>
         <p:nvSpPr>
-          <p:cNvPr id="43" name="Text 41"/>
-          <p:cNvSpPr/>
-          <p:nvPr/>
-        </p:nvSpPr>
-        <p:spPr>
-          <a:xfrm>
-            <a:off x="4850892" y="4169664"/>
+          <p:cNvPr id="46" name="Text 44"/>
+          <p:cNvSpPr/>
+          <p:nvPr/>
+        </p:nvSpPr>
+        <p:spPr>
+          <a:xfrm>
+            <a:off x="4447032" y="4169664"/>
             <a:ext cx="685800" cy="475488"/>
           </a:xfrm>
           <a:prstGeom prst="rect">
@@ -27387,7 +28665,7 @@
                 <a:ea typeface="Trebuchet MS" pitchFamily="34" charset="-122"/>
                 <a:cs typeface="Trebuchet MS" pitchFamily="34" charset="-120"/>
               </a:rPr>
-              <a:t>o</a:t>
+              <a:t>g</a:t>
             </a:r>
             <a:endParaRPr lang="en-US" sz="900" dirty="0"/>
           </a:p>
@@ -27395,13 +28673,13 @@
       </p:sp>
       <p:sp>
         <p:nvSpPr>
-          <p:cNvPr id="44" name="Shape 42"/>
-          <p:cNvSpPr/>
-          <p:nvPr/>
-        </p:nvSpPr>
-        <p:spPr>
-          <a:xfrm>
-            <a:off x="5759577" y="4169664"/>
+          <p:cNvPr id="47" name="Shape 45"/>
+          <p:cNvSpPr/>
+          <p:nvPr/>
+        </p:nvSpPr>
+        <p:spPr>
+          <a:xfrm>
+            <a:off x="5254752" y="4169664"/>
             <a:ext cx="685800" cy="475488"/>
           </a:xfrm>
           <a:prstGeom prst="rect">
@@ -27422,13 +28700,13 @@
       </p:sp>
       <p:sp>
         <p:nvSpPr>
-          <p:cNvPr id="45" name="Text 43"/>
-          <p:cNvSpPr/>
-          <p:nvPr/>
-        </p:nvSpPr>
-        <p:spPr>
-          <a:xfrm>
-            <a:off x="5759577" y="4169664"/>
+          <p:cNvPr id="48" name="Text 46"/>
+          <p:cNvSpPr/>
+          <p:nvPr/>
+        </p:nvSpPr>
+        <p:spPr>
+          <a:xfrm>
+            <a:off x="5254752" y="4169664"/>
             <a:ext cx="685800" cy="475488"/>
           </a:xfrm>
           <a:prstGeom prst="rect">
@@ -27453,7 +28731,7 @@
                 <a:ea typeface="Trebuchet MS" pitchFamily="34" charset="-122"/>
                 <a:cs typeface="Trebuchet MS" pitchFamily="34" charset="-120"/>
               </a:rPr>
-              <a:t>gr</a:t>
+              <a:t>r</a:t>
             </a:r>
             <a:endParaRPr lang="en-US" sz="900" dirty="0"/>
           </a:p>
@@ -27461,13 +28739,13 @@
       </p:sp>
       <p:sp>
         <p:nvSpPr>
-          <p:cNvPr id="46" name="Shape 44"/>
-          <p:cNvSpPr/>
-          <p:nvPr/>
-        </p:nvSpPr>
-        <p:spPr>
-          <a:xfrm>
-            <a:off x="6668262" y="4169664"/>
+          <p:cNvPr id="49" name="Shape 47"/>
+          <p:cNvSpPr/>
+          <p:nvPr/>
+        </p:nvSpPr>
+        <p:spPr>
+          <a:xfrm>
+            <a:off x="6062472" y="4169664"/>
             <a:ext cx="685800" cy="475488"/>
           </a:xfrm>
           <a:prstGeom prst="rect">
@@ -27488,13 +28766,13 @@
       </p:sp>
       <p:sp>
         <p:nvSpPr>
-          <p:cNvPr id="47" name="Text 45"/>
-          <p:cNvSpPr/>
-          <p:nvPr/>
-        </p:nvSpPr>
-        <p:spPr>
-          <a:xfrm>
-            <a:off x="6668262" y="4169664"/>
+          <p:cNvPr id="50" name="Text 48"/>
+          <p:cNvSpPr/>
+          <p:nvPr/>
+        </p:nvSpPr>
+        <p:spPr>
+          <a:xfrm>
+            <a:off x="6062472" y="4169664"/>
             <a:ext cx="685800" cy="475488"/>
           </a:xfrm>
           <a:prstGeom prst="rect">
@@ -27527,13 +28805,13 @@
       </p:sp>
       <p:sp>
         <p:nvSpPr>
-          <p:cNvPr id="48" name="Shape 46"/>
-          <p:cNvSpPr/>
-          <p:nvPr/>
-        </p:nvSpPr>
-        <p:spPr>
-          <a:xfrm>
-            <a:off x="7576947" y="4169664"/>
+          <p:cNvPr id="51" name="Shape 49"/>
+          <p:cNvSpPr/>
+          <p:nvPr/>
+        </p:nvSpPr>
+        <p:spPr>
+          <a:xfrm>
+            <a:off x="6870192" y="4169664"/>
             <a:ext cx="685800" cy="475488"/>
           </a:xfrm>
           <a:prstGeom prst="rect">
@@ -27554,13 +28832,13 @@
       </p:sp>
       <p:sp>
         <p:nvSpPr>
-          <p:cNvPr id="49" name="Text 47"/>
-          <p:cNvSpPr/>
-          <p:nvPr/>
-        </p:nvSpPr>
-        <p:spPr>
-          <a:xfrm>
-            <a:off x="7576947" y="4169664"/>
+          <p:cNvPr id="52" name="Text 50"/>
+          <p:cNvSpPr/>
+          <p:nvPr/>
+        </p:nvSpPr>
+        <p:spPr>
+          <a:xfrm>
+            <a:off x="6870192" y="4169664"/>
             <a:ext cx="685800" cy="475488"/>
           </a:xfrm>
           <a:prstGeom prst="rect">
@@ -27586,6 +28864,72 @@
                 <a:cs typeface="Trebuchet MS" pitchFamily="34" charset="-120"/>
               </a:rPr>
               <a:t>m</a:t>
+            </a:r>
+            <a:endParaRPr lang="en-US" sz="900" dirty="0"/>
+          </a:p>
+        </p:txBody>
+      </p:sp>
+      <p:sp>
+        <p:nvSpPr>
+          <p:cNvPr id="53" name="Shape 51"/>
+          <p:cNvSpPr/>
+          <p:nvPr/>
+        </p:nvSpPr>
+        <p:spPr>
+          <a:xfrm>
+            <a:off x="7677912" y="4169664"/>
+            <a:ext cx="685800" cy="475488"/>
+          </a:xfrm>
+          <a:prstGeom prst="rect">
+            <a:avLst>
+              <a:gd name="adj" fmla="val 7692"/>
+            </a:avLst>
+          </a:prstGeom>
+          <a:solidFill>
+            <a:srgbClr val="FFFFFF"/>
+          </a:solidFill>
+          <a:ln w="12700">
+            <a:solidFill>
+              <a:srgbClr val="DB2777"/>
+            </a:solidFill>
+            <a:prstDash val="solid"/>
+          </a:ln>
+        </p:spPr>
+      </p:sp>
+      <p:sp>
+        <p:nvSpPr>
+          <p:cNvPr id="54" name="Text 52"/>
+          <p:cNvSpPr/>
+          <p:nvPr/>
+        </p:nvSpPr>
+        <p:spPr>
+          <a:xfrm>
+            <a:off x="7677912" y="4169664"/>
+            <a:ext cx="685800" cy="475488"/>
+          </a:xfrm>
+          <a:prstGeom prst="rect">
+            <a:avLst/>
+          </a:prstGeom>
+          <a:noFill/>
+          <a:ln/>
+        </p:spPr>
+        <p:txBody>
+          <a:bodyPr wrap="square" lIns="0" tIns="0" rIns="0" bIns="0" rtlCol="0" anchor="ctr"/>
+          <a:lstStyle/>
+          <a:p>
+            <a:pPr algn="ctr" indent="0" marL="0">
+              <a:buNone/>
+            </a:pPr>
+            <a:r>
+              <a:rPr lang="en-US" sz="900" b="1" dirty="0">
+                <a:solidFill>
+                  <a:srgbClr val="9D174D"/>
+                </a:solidFill>
+                <a:latin typeface="Trebuchet MS" pitchFamily="34" charset="0"/>
+                <a:ea typeface="Trebuchet MS" pitchFamily="34" charset="-122"/>
+                <a:cs typeface="Trebuchet MS" pitchFamily="34" charset="-120"/>
+              </a:rPr>
+              <a:t>s</a:t>
             </a:r>
             <a:endParaRPr lang="en-US" sz="900" dirty="0"/>
           </a:p>
@@ -27877,7 +29221,7 @@
                 <a:ea typeface="Calibri" pitchFamily="34" charset="-122"/>
                 <a:cs typeface="Calibri" pitchFamily="34" charset="-120"/>
               </a:rPr>
-              <a:t>Word Labs  •  wordlabs.app  •  Root: 'gram' = written, drawn, recorded</a:t>
+              <a:t>Word Labs  •  wordlabs.app  •  Root: 'gram' = written; something written</a:t>
             </a:r>
             <a:endParaRPr lang="en-US" sz="800" dirty="0"/>
           </a:p>
@@ -28016,7 +29360,7 @@
                 <a:ea typeface="Trebuchet MS" pitchFamily="34" charset="-122"/>
                 <a:cs typeface="Trebuchet MS" pitchFamily="34" charset="-120"/>
               </a:rPr>
-              <a:t>telegram</a:t>
+              <a:t>monogram</a:t>
             </a:r>
             <a:endParaRPr lang="en-US" sz="2800" dirty="0"/>
           </a:p>
@@ -28704,7 +30048,7 @@
                 <a:ea typeface="Calibri" pitchFamily="34" charset="-122"/>
                 <a:cs typeface="Calibri" pitchFamily="34" charset="-120"/>
               </a:rPr>
-              <a:t>Word Labs  •  wordlabs.app  •  Root: 'gram' = written, drawn, recorded</a:t>
+              <a:t>Word Labs  •  wordlabs.app  •  Root: 'gram' = written; something written</a:t>
             </a:r>
             <a:endParaRPr lang="en-US" sz="800" dirty="0"/>
           </a:p>
@@ -28843,7 +30187,7 @@
                 <a:ea typeface="Trebuchet MS" pitchFamily="34" charset="-122"/>
                 <a:cs typeface="Trebuchet MS" pitchFamily="34" charset="-120"/>
               </a:rPr>
-              <a:t>telegram</a:t>
+              <a:t>monogram</a:t>
             </a:r>
             <a:endParaRPr lang="en-US" sz="2800" dirty="0"/>
           </a:p>
@@ -28982,7 +30326,7 @@
                 <a:ea typeface="Trebuchet MS" pitchFamily="34" charset="-122"/>
                 <a:cs typeface="Trebuchet MS" pitchFamily="34" charset="-120"/>
               </a:rPr>
-              <a:t>tele</a:t>
+              <a:t>mono</a:t>
             </a:r>
             <a:endParaRPr lang="en-US" sz="1300" dirty="0"/>
           </a:p>
@@ -29021,7 +30365,7 @@
                 <a:ea typeface="Calibri" pitchFamily="34" charset="-122"/>
                 <a:cs typeface="Calibri" pitchFamily="34" charset="-120"/>
               </a:rPr>
-              <a:t>far, distant</a:t>
+              <a:t>one; single</a:t>
             </a:r>
             <a:endParaRPr lang="en-US" sz="850" dirty="0"/>
           </a:p>
@@ -29133,7 +30477,7 @@
                 <a:ea typeface="Calibri" pitchFamily="34" charset="-122"/>
                 <a:cs typeface="Calibri" pitchFamily="34" charset="-120"/>
               </a:rPr>
-              <a:t>written, drawn, recorded</a:t>
+              <a:t>written; something written</a:t>
             </a:r>
             <a:endParaRPr lang="en-US" sz="850" dirty="0"/>
           </a:p>
@@ -29689,7 +31033,7 @@
                 <a:ea typeface="Calibri" pitchFamily="34" charset="-122"/>
                 <a:cs typeface="Calibri" pitchFamily="34" charset="-120"/>
               </a:rPr>
-              <a:t>Word Labs  •  wordlabs.app  •  Root: 'gram' = written, drawn, recorded</a:t>
+              <a:t>Word Labs  •  wordlabs.app  •  Root: 'gram' = written; something written</a:t>
             </a:r>
             <a:endParaRPr lang="en-US" sz="800" dirty="0"/>
           </a:p>
@@ -29828,7 +31172,7 @@
                 <a:ea typeface="Trebuchet MS" pitchFamily="34" charset="-122"/>
                 <a:cs typeface="Trebuchet MS" pitchFamily="34" charset="-120"/>
               </a:rPr>
-              <a:t>telegram</a:t>
+              <a:t>monogram</a:t>
             </a:r>
             <a:endParaRPr lang="en-US" sz="2800" dirty="0"/>
           </a:p>
@@ -29967,7 +31311,7 @@
                 <a:ea typeface="Trebuchet MS" pitchFamily="34" charset="-122"/>
                 <a:cs typeface="Trebuchet MS" pitchFamily="34" charset="-120"/>
               </a:rPr>
-              <a:t>tele</a:t>
+              <a:t>mono</a:t>
             </a:r>
             <a:endParaRPr lang="en-US" sz="1300" dirty="0"/>
           </a:p>
@@ -30006,7 +31350,7 @@
                 <a:ea typeface="Calibri" pitchFamily="34" charset="-122"/>
                 <a:cs typeface="Calibri" pitchFamily="34" charset="-120"/>
               </a:rPr>
-              <a:t>far, distant</a:t>
+              <a:t>one; single</a:t>
             </a:r>
             <a:endParaRPr lang="en-US" sz="850" dirty="0"/>
           </a:p>
@@ -30118,7 +31462,7 @@
                 <a:ea typeface="Calibri" pitchFamily="34" charset="-122"/>
                 <a:cs typeface="Calibri" pitchFamily="34" charset="-120"/>
               </a:rPr>
-              <a:t>written, drawn, recorded</a:t>
+              <a:t>written; something written</a:t>
             </a:r>
             <a:endParaRPr lang="en-US" sz="850" dirty="0"/>
           </a:p>
@@ -30277,7 +31621,7 @@
                 <a:ea typeface="Trebuchet MS" pitchFamily="34" charset="-122"/>
                 <a:cs typeface="Trebuchet MS" pitchFamily="34" charset="-120"/>
               </a:rPr>
-              <a:t>te</a:t>
+              <a:t>mon</a:t>
             </a:r>
             <a:endParaRPr lang="en-US" sz="1400" dirty="0"/>
           </a:p>
@@ -30382,7 +31726,7 @@
                 <a:ea typeface="Trebuchet MS" pitchFamily="34" charset="-122"/>
                 <a:cs typeface="Trebuchet MS" pitchFamily="34" charset="-120"/>
               </a:rPr>
-              <a:t>le</a:t>
+              <a:t>o</a:t>
             </a:r>
             <a:endParaRPr lang="en-US" sz="1400" dirty="0"/>
           </a:p>
@@ -30911,7 +32255,7 @@
                 <a:ea typeface="Calibri" pitchFamily="34" charset="-122"/>
                 <a:cs typeface="Calibri" pitchFamily="34" charset="-120"/>
               </a:rPr>
-              <a:t>Word Labs  •  wordlabs.app  •  Root: 'gram' = written, drawn, recorded</a:t>
+              <a:t>Word Labs  •  wordlabs.app  •  Root: 'gram' = written; something written</a:t>
             </a:r>
             <a:endParaRPr lang="en-US" sz="800" dirty="0"/>
           </a:p>
@@ -31050,7 +32394,7 @@
                 <a:ea typeface="Trebuchet MS" pitchFamily="34" charset="-122"/>
                 <a:cs typeface="Trebuchet MS" pitchFamily="34" charset="-120"/>
               </a:rPr>
-              <a:t>telegram</a:t>
+              <a:t>monogram</a:t>
             </a:r>
             <a:endParaRPr lang="en-US" sz="2800" dirty="0"/>
           </a:p>
@@ -31189,7 +32533,7 @@
                 <a:ea typeface="Trebuchet MS" pitchFamily="34" charset="-122"/>
                 <a:cs typeface="Trebuchet MS" pitchFamily="34" charset="-120"/>
               </a:rPr>
-              <a:t>tele</a:t>
+              <a:t>mono</a:t>
             </a:r>
             <a:endParaRPr lang="en-US" sz="1300" dirty="0"/>
           </a:p>
@@ -31228,7 +32572,7 @@
                 <a:ea typeface="Calibri" pitchFamily="34" charset="-122"/>
                 <a:cs typeface="Calibri" pitchFamily="34" charset="-120"/>
               </a:rPr>
-              <a:t>far, distant</a:t>
+              <a:t>one; single</a:t>
             </a:r>
             <a:endParaRPr lang="en-US" sz="850" dirty="0"/>
           </a:p>
@@ -31340,7 +32684,7 @@
                 <a:ea typeface="Calibri" pitchFamily="34" charset="-122"/>
                 <a:cs typeface="Calibri" pitchFamily="34" charset="-120"/>
               </a:rPr>
-              <a:t>written, drawn, recorded</a:t>
+              <a:t>written; something written</a:t>
             </a:r>
             <a:endParaRPr lang="en-US" sz="850" dirty="0"/>
           </a:p>
@@ -31499,7 +32843,7 @@
                 <a:ea typeface="Trebuchet MS" pitchFamily="34" charset="-122"/>
                 <a:cs typeface="Trebuchet MS" pitchFamily="34" charset="-120"/>
               </a:rPr>
-              <a:t>te</a:t>
+              <a:t>mon</a:t>
             </a:r>
             <a:endParaRPr lang="en-US" sz="1400" dirty="0"/>
           </a:p>
@@ -31604,7 +32948,7 @@
                 <a:ea typeface="Trebuchet MS" pitchFamily="34" charset="-122"/>
                 <a:cs typeface="Trebuchet MS" pitchFamily="34" charset="-120"/>
               </a:rPr>
-              <a:t>le</a:t>
+              <a:t>o</a:t>
             </a:r>
             <a:endParaRPr lang="en-US" sz="1400" dirty="0"/>
           </a:p>
@@ -31816,7 +33160,7 @@
         </p:nvSpPr>
         <p:spPr>
           <a:xfrm>
-            <a:off x="2124837" y="4169664"/>
+            <a:off x="2023872" y="4169664"/>
             <a:ext cx="685800" cy="475488"/>
           </a:xfrm>
           <a:prstGeom prst="rect">
@@ -31843,7 +33187,7 @@
         </p:nvSpPr>
         <p:spPr>
           <a:xfrm>
-            <a:off x="2124837" y="4169664"/>
+            <a:off x="2023872" y="4169664"/>
             <a:ext cx="685800" cy="475488"/>
           </a:xfrm>
           <a:prstGeom prst="rect">
@@ -31868,7 +33212,7 @@
                 <a:ea typeface="Trebuchet MS" pitchFamily="34" charset="-122"/>
                 <a:cs typeface="Trebuchet MS" pitchFamily="34" charset="-120"/>
               </a:rPr>
-              <a:t>t</a:t>
+              <a:t>m</a:t>
             </a:r>
             <a:endParaRPr lang="en-US" sz="900" dirty="0"/>
           </a:p>
@@ -31882,7 +33226,7 @@
         </p:nvSpPr>
         <p:spPr>
           <a:xfrm>
-            <a:off x="3033522" y="4169664"/>
+            <a:off x="2831592" y="4169664"/>
             <a:ext cx="685800" cy="475488"/>
           </a:xfrm>
           <a:prstGeom prst="rect">
@@ -31909,7 +33253,7 @@
         </p:nvSpPr>
         <p:spPr>
           <a:xfrm>
-            <a:off x="3033522" y="4169664"/>
+            <a:off x="2831592" y="4169664"/>
             <a:ext cx="685800" cy="475488"/>
           </a:xfrm>
           <a:prstGeom prst="rect">
@@ -31934,7 +33278,7 @@
                 <a:ea typeface="Trebuchet MS" pitchFamily="34" charset="-122"/>
                 <a:cs typeface="Trebuchet MS" pitchFamily="34" charset="-120"/>
               </a:rPr>
-              <a:t>e</a:t>
+              <a:t>o</a:t>
             </a:r>
             <a:endParaRPr lang="en-US" sz="900" dirty="0"/>
           </a:p>
@@ -31948,7 +33292,7 @@
         </p:nvSpPr>
         <p:spPr>
           <a:xfrm>
-            <a:off x="3942207" y="4169664"/>
+            <a:off x="3639312" y="4169664"/>
             <a:ext cx="685800" cy="475488"/>
           </a:xfrm>
           <a:prstGeom prst="rect">
@@ -31975,7 +33319,7 @@
         </p:nvSpPr>
         <p:spPr>
           <a:xfrm>
-            <a:off x="3942207" y="4169664"/>
+            <a:off x="3639312" y="4169664"/>
             <a:ext cx="685800" cy="475488"/>
           </a:xfrm>
           <a:prstGeom prst="rect">
@@ -32000,7 +33344,7 @@
                 <a:ea typeface="Trebuchet MS" pitchFamily="34" charset="-122"/>
                 <a:cs typeface="Trebuchet MS" pitchFamily="34" charset="-120"/>
               </a:rPr>
-              <a:t>l</a:t>
+              <a:t>n</a:t>
             </a:r>
             <a:endParaRPr lang="en-US" sz="900" dirty="0"/>
           </a:p>
@@ -32014,7 +33358,7 @@
         </p:nvSpPr>
         <p:spPr>
           <a:xfrm>
-            <a:off x="4850892" y="4169664"/>
+            <a:off x="4447032" y="4169664"/>
             <a:ext cx="685800" cy="475488"/>
           </a:xfrm>
           <a:prstGeom prst="rect">
@@ -32041,7 +33385,7 @@
         </p:nvSpPr>
         <p:spPr>
           <a:xfrm>
-            <a:off x="4850892" y="4169664"/>
+            <a:off x="4447032" y="4169664"/>
             <a:ext cx="685800" cy="475488"/>
           </a:xfrm>
           <a:prstGeom prst="rect">
@@ -32066,7 +33410,7 @@
                 <a:ea typeface="Trebuchet MS" pitchFamily="34" charset="-122"/>
                 <a:cs typeface="Trebuchet MS" pitchFamily="34" charset="-120"/>
               </a:rPr>
-              <a:t>e</a:t>
+              <a:t>o</a:t>
             </a:r>
             <a:endParaRPr lang="en-US" sz="900" dirty="0"/>
           </a:p>
@@ -32080,7 +33424,7 @@
         </p:nvSpPr>
         <p:spPr>
           <a:xfrm>
-            <a:off x="5759577" y="4169664"/>
+            <a:off x="5254752" y="4169664"/>
             <a:ext cx="685800" cy="475488"/>
           </a:xfrm>
           <a:prstGeom prst="rect">
@@ -32107,7 +33451,7 @@
         </p:nvSpPr>
         <p:spPr>
           <a:xfrm>
-            <a:off x="5759577" y="4169664"/>
+            <a:off x="5254752" y="4169664"/>
             <a:ext cx="685800" cy="475488"/>
           </a:xfrm>
           <a:prstGeom prst="rect">
@@ -32132,7 +33476,7 @@
                 <a:ea typeface="Trebuchet MS" pitchFamily="34" charset="-122"/>
                 <a:cs typeface="Trebuchet MS" pitchFamily="34" charset="-120"/>
               </a:rPr>
-              <a:t>gr</a:t>
+              <a:t>g</a:t>
             </a:r>
             <a:endParaRPr lang="en-US" sz="900" dirty="0"/>
           </a:p>
@@ -32146,7 +33490,7 @@
         </p:nvSpPr>
         <p:spPr>
           <a:xfrm>
-            <a:off x="6668262" y="4169664"/>
+            <a:off x="6062472" y="4169664"/>
             <a:ext cx="685800" cy="475488"/>
           </a:xfrm>
           <a:prstGeom prst="rect">
@@ -32173,7 +33517,7 @@
         </p:nvSpPr>
         <p:spPr>
           <a:xfrm>
-            <a:off x="6668262" y="4169664"/>
+            <a:off x="6062472" y="4169664"/>
             <a:ext cx="685800" cy="475488"/>
           </a:xfrm>
           <a:prstGeom prst="rect">
@@ -32198,7 +33542,7 @@
                 <a:ea typeface="Trebuchet MS" pitchFamily="34" charset="-122"/>
                 <a:cs typeface="Trebuchet MS" pitchFamily="34" charset="-120"/>
               </a:rPr>
-              <a:t>a</a:t>
+              <a:t>r</a:t>
             </a:r>
             <a:endParaRPr lang="en-US" sz="900" dirty="0"/>
           </a:p>
@@ -32212,7 +33556,7 @@
         </p:nvSpPr>
         <p:spPr>
           <a:xfrm>
-            <a:off x="7576947" y="4169664"/>
+            <a:off x="6870192" y="4169664"/>
             <a:ext cx="685800" cy="475488"/>
           </a:xfrm>
           <a:prstGeom prst="rect">
@@ -32239,7 +33583,73 @@
         </p:nvSpPr>
         <p:spPr>
           <a:xfrm>
-            <a:off x="7576947" y="4169664"/>
+            <a:off x="6870192" y="4169664"/>
+            <a:ext cx="685800" cy="475488"/>
+          </a:xfrm>
+          <a:prstGeom prst="rect">
+            <a:avLst/>
+          </a:prstGeom>
+          <a:noFill/>
+          <a:ln/>
+        </p:spPr>
+        <p:txBody>
+          <a:bodyPr wrap="square" lIns="0" tIns="0" rIns="0" bIns="0" rtlCol="0" anchor="ctr"/>
+          <a:lstStyle/>
+          <a:p>
+            <a:pPr algn="ctr" indent="0" marL="0">
+              <a:buNone/>
+            </a:pPr>
+            <a:r>
+              <a:rPr lang="en-US" sz="900" b="1" dirty="0">
+                <a:solidFill>
+                  <a:srgbClr val="9D174D"/>
+                </a:solidFill>
+                <a:latin typeface="Trebuchet MS" pitchFamily="34" charset="0"/>
+                <a:ea typeface="Trebuchet MS" pitchFamily="34" charset="-122"/>
+                <a:cs typeface="Trebuchet MS" pitchFamily="34" charset="-120"/>
+              </a:rPr>
+              <a:t>a</a:t>
+            </a:r>
+            <a:endParaRPr lang="en-US" sz="900" dirty="0"/>
+          </a:p>
+        </p:txBody>
+      </p:sp>
+      <p:sp>
+        <p:nvSpPr>
+          <p:cNvPr id="50" name="Shape 48"/>
+          <p:cNvSpPr/>
+          <p:nvPr/>
+        </p:nvSpPr>
+        <p:spPr>
+          <a:xfrm>
+            <a:off x="7677912" y="4169664"/>
+            <a:ext cx="685800" cy="475488"/>
+          </a:xfrm>
+          <a:prstGeom prst="rect">
+            <a:avLst>
+              <a:gd name="adj" fmla="val 7692"/>
+            </a:avLst>
+          </a:prstGeom>
+          <a:solidFill>
+            <a:srgbClr val="FFFFFF"/>
+          </a:solidFill>
+          <a:ln w="12700">
+            <a:solidFill>
+              <a:srgbClr val="DB2777"/>
+            </a:solidFill>
+            <a:prstDash val="solid"/>
+          </a:ln>
+        </p:spPr>
+      </p:sp>
+      <p:sp>
+        <p:nvSpPr>
+          <p:cNvPr id="51" name="Text 49"/>
+          <p:cNvSpPr/>
+          <p:nvPr/>
+        </p:nvSpPr>
+        <p:spPr>
+          <a:xfrm>
+            <a:off x="7677912" y="4169664"/>
             <a:ext cx="685800" cy="475488"/>
           </a:xfrm>
           <a:prstGeom prst="rect">
@@ -32556,7 +33966,7 @@
                 <a:ea typeface="Calibri" pitchFamily="34" charset="-122"/>
                 <a:cs typeface="Calibri" pitchFamily="34" charset="-120"/>
               </a:rPr>
-              <a:t>Word Labs  •  wordlabs.app  •  Root: 'gram' = written, drawn, recorded</a:t>
+              <a:t>Word Labs  •  wordlabs.app  •  Root: 'gram' = written; something written</a:t>
             </a:r>
             <a:endParaRPr lang="en-US" sz="800" dirty="0"/>
           </a:p>
@@ -33725,7 +35135,7 @@
                 <a:ea typeface="Calibri" pitchFamily="34" charset="-122"/>
                 <a:cs typeface="Calibri" pitchFamily="34" charset="-120"/>
               </a:rPr>
-              <a:t>Word Labs  •  wordlabs.app  •  Root: 'gram' = written, drawn, recorded</a:t>
+              <a:t>Word Labs  •  wordlabs.app  •  Root: 'gram' = written; something written</a:t>
             </a:r>
             <a:endParaRPr lang="en-US" sz="800" dirty="0"/>
           </a:p>
@@ -34026,7 +35436,7 @@
                 <a:ea typeface="Trebuchet MS" pitchFamily="34" charset="-122"/>
                 <a:cs typeface="Trebuchet MS" pitchFamily="34" charset="-120"/>
               </a:rPr>
-              <a:t>tele-</a:t>
+              <a:t>dia-</a:t>
             </a:r>
             <a:endParaRPr lang="en-US" sz="1300" dirty="0"/>
           </a:p>
@@ -34218,7 +35628,7 @@
                 <a:ea typeface="Trebuchet MS" pitchFamily="34" charset="-122"/>
                 <a:cs typeface="Trebuchet MS" pitchFamily="34" charset="-120"/>
               </a:rPr>
-              <a:t>dia-</a:t>
+              <a:t>mono-</a:t>
             </a:r>
             <a:endParaRPr lang="en-US" sz="1300" dirty="0"/>
           </a:p>
@@ -34264,7 +35674,7 @@
             <a:avLst/>
           </a:prstGeom>
           <a:solidFill>
-            <a:srgbClr val="FCE7F3"/>
+            <a:srgbClr val="F1F5F9"/>
           </a:solidFill>
           <a:ln w="12700">
             <a:solidFill>
@@ -34276,14 +35686,39 @@
       </p:sp>
       <p:sp>
         <p:nvSpPr>
-          <p:cNvPr id="27" name="Text 25"/>
-          <p:cNvSpPr/>
-          <p:nvPr/>
-        </p:nvSpPr>
-        <p:spPr>
-          <a:xfrm>
-            <a:off x="5943600" y="1984248"/>
-            <a:ext cx="2834640" cy="402336"/>
+          <p:cNvPr id="27" name="Shape 25"/>
+          <p:cNvSpPr/>
+          <p:nvPr/>
+        </p:nvSpPr>
+        <p:spPr>
+          <a:xfrm>
+            <a:off x="365760" y="2404872"/>
+            <a:ext cx="2468880" cy="402336"/>
+          </a:xfrm>
+          <a:prstGeom prst="rect">
+            <a:avLst/>
+          </a:prstGeom>
+          <a:solidFill>
+            <a:srgbClr val="DDD6FE"/>
+          </a:solidFill>
+          <a:ln w="12700">
+            <a:solidFill>
+              <a:srgbClr val="E2E8F0"/>
+            </a:solidFill>
+            <a:prstDash val="solid"/>
+          </a:ln>
+        </p:spPr>
+      </p:sp>
+      <p:sp>
+        <p:nvSpPr>
+          <p:cNvPr id="28" name="Text 26"/>
+          <p:cNvSpPr/>
+          <p:nvPr/>
+        </p:nvSpPr>
+        <p:spPr>
+          <a:xfrm>
+            <a:off x="365760" y="2404872"/>
+            <a:ext cx="2468880" cy="402336"/>
           </a:xfrm>
           <a:prstGeom prst="rect">
             <a:avLst/>
@@ -34301,13 +35736,13 @@
             <a:r>
               <a:rPr lang="en-US" sz="1300" b="1" dirty="0">
                 <a:solidFill>
-                  <a:srgbClr val="9D174D"/>
+                  <a:srgbClr val="4C1D95"/>
                 </a:solidFill>
                 <a:latin typeface="Trebuchet MS" pitchFamily="34" charset="0"/>
                 <a:ea typeface="Trebuchet MS" pitchFamily="34" charset="-122"/>
                 <a:cs typeface="Trebuchet MS" pitchFamily="34" charset="-120"/>
               </a:rPr>
-              <a:t>-mar</a:t>
+              <a:t>pro-</a:t>
             </a:r>
             <a:endParaRPr lang="en-US" sz="1300" dirty="0"/>
           </a:p>
@@ -34315,13 +35750,63 @@
       </p:sp>
       <p:sp>
         <p:nvSpPr>
-          <p:cNvPr id="28" name="Shape 26"/>
-          <p:cNvSpPr/>
-          <p:nvPr/>
-        </p:nvSpPr>
-        <p:spPr>
-          <a:xfrm>
-            <a:off x="365760" y="2404872"/>
+          <p:cNvPr id="29" name="Shape 27"/>
+          <p:cNvSpPr/>
+          <p:nvPr/>
+        </p:nvSpPr>
+        <p:spPr>
+          <a:xfrm>
+            <a:off x="2971800" y="2404872"/>
+            <a:ext cx="2834640" cy="402336"/>
+          </a:xfrm>
+          <a:prstGeom prst="rect">
+            <a:avLst/>
+          </a:prstGeom>
+          <a:solidFill>
+            <a:srgbClr val="F8FAFC"/>
+          </a:solidFill>
+          <a:ln w="12700">
+            <a:solidFill>
+              <a:srgbClr val="E2E8F0"/>
+            </a:solidFill>
+            <a:prstDash val="solid"/>
+          </a:ln>
+        </p:spPr>
+      </p:sp>
+      <p:sp>
+        <p:nvSpPr>
+          <p:cNvPr id="30" name="Shape 28"/>
+          <p:cNvSpPr/>
+          <p:nvPr/>
+        </p:nvSpPr>
+        <p:spPr>
+          <a:xfrm>
+            <a:off x="5943600" y="2404872"/>
+            <a:ext cx="2834640" cy="402336"/>
+          </a:xfrm>
+          <a:prstGeom prst="rect">
+            <a:avLst/>
+          </a:prstGeom>
+          <a:solidFill>
+            <a:srgbClr val="F8FAFC"/>
+          </a:solidFill>
+          <a:ln w="12700">
+            <a:solidFill>
+              <a:srgbClr val="E2E8F0"/>
+            </a:solidFill>
+            <a:prstDash val="solid"/>
+          </a:ln>
+        </p:spPr>
+      </p:sp>
+      <p:sp>
+        <p:nvSpPr>
+          <p:cNvPr id="31" name="Shape 29"/>
+          <p:cNvSpPr/>
+          <p:nvPr/>
+        </p:nvSpPr>
+        <p:spPr>
+          <a:xfrm>
+            <a:off x="365760" y="2825496"/>
             <a:ext cx="2468880" cy="402336"/>
           </a:xfrm>
           <a:prstGeom prst="rect">
@@ -34340,13 +35825,13 @@
       </p:sp>
       <p:sp>
         <p:nvSpPr>
-          <p:cNvPr id="29" name="Text 27"/>
-          <p:cNvSpPr/>
-          <p:nvPr/>
-        </p:nvSpPr>
-        <p:spPr>
-          <a:xfrm>
-            <a:off x="365760" y="2404872"/>
+          <p:cNvPr id="32" name="Text 30"/>
+          <p:cNvSpPr/>
+          <p:nvPr/>
+        </p:nvSpPr>
+        <p:spPr>
+          <a:xfrm>
+            <a:off x="365760" y="2825496"/>
             <a:ext cx="2468880" cy="402336"/>
           </a:xfrm>
           <a:prstGeom prst="rect">
@@ -34371,7 +35856,7 @@
                 <a:ea typeface="Trebuchet MS" pitchFamily="34" charset="-122"/>
                 <a:cs typeface="Trebuchet MS" pitchFamily="34" charset="-120"/>
               </a:rPr>
-              <a:t>pro-</a:t>
+              <a:t>tele-</a:t>
             </a:r>
             <a:endParaRPr lang="en-US" sz="1300" dirty="0"/>
           </a:p>
@@ -34379,20 +35864,20 @@
       </p:sp>
       <p:sp>
         <p:nvSpPr>
-          <p:cNvPr id="30" name="Shape 28"/>
-          <p:cNvSpPr/>
-          <p:nvPr/>
-        </p:nvSpPr>
-        <p:spPr>
-          <a:xfrm>
-            <a:off x="2971800" y="2404872"/>
+          <p:cNvPr id="33" name="Shape 31"/>
+          <p:cNvSpPr/>
+          <p:nvPr/>
+        </p:nvSpPr>
+        <p:spPr>
+          <a:xfrm>
+            <a:off x="2971800" y="2825496"/>
             <a:ext cx="2834640" cy="402336"/>
           </a:xfrm>
           <a:prstGeom prst="rect">
             <a:avLst/>
           </a:prstGeom>
           <a:solidFill>
-            <a:srgbClr val="F8FAFC"/>
+            <a:srgbClr val="F1F5F9"/>
           </a:solidFill>
           <a:ln w="12700">
             <a:solidFill>
@@ -34404,20 +35889,20 @@
       </p:sp>
       <p:sp>
         <p:nvSpPr>
-          <p:cNvPr id="31" name="Shape 29"/>
-          <p:cNvSpPr/>
-          <p:nvPr/>
-        </p:nvSpPr>
-        <p:spPr>
-          <a:xfrm>
-            <a:off x="5943600" y="2404872"/>
+          <p:cNvPr id="34" name="Shape 32"/>
+          <p:cNvSpPr/>
+          <p:nvPr/>
+        </p:nvSpPr>
+        <p:spPr>
+          <a:xfrm>
+            <a:off x="5943600" y="2825496"/>
             <a:ext cx="2834640" cy="402336"/>
           </a:xfrm>
           <a:prstGeom prst="rect">
             <a:avLst/>
           </a:prstGeom>
           <a:solidFill>
-            <a:srgbClr val="FCE7F3"/>
+            <a:srgbClr val="F1F5F9"/>
           </a:solidFill>
           <a:ln w="12700">
             <a:solidFill>
@@ -34429,911 +35914,302 @@
       </p:sp>
       <p:sp>
         <p:nvSpPr>
-          <p:cNvPr id="32" name="Text 30"/>
-          <p:cNvSpPr/>
-          <p:nvPr/>
-        </p:nvSpPr>
-        <p:spPr>
-          <a:xfrm>
-            <a:off x="5943600" y="2404872"/>
-            <a:ext cx="2834640" cy="402336"/>
-          </a:xfrm>
-          <a:prstGeom prst="rect">
-            <a:avLst/>
-          </a:prstGeom>
-          <a:noFill/>
-          <a:ln/>
-        </p:spPr>
-        <p:txBody>
-          <a:bodyPr wrap="square" lIns="0" tIns="0" rIns="0" bIns="0" rtlCol="0" anchor="ctr"/>
-          <a:lstStyle/>
-          <a:p>
-            <a:pPr algn="ctr" indent="0" marL="0">
-              <a:buNone/>
-            </a:pPr>
-            <a:r>
-              <a:rPr lang="en-US" sz="1300" b="1" dirty="0">
-                <a:solidFill>
-                  <a:srgbClr val="9D174D"/>
+          <p:cNvPr id="35" name="Text 33"/>
+          <p:cNvSpPr/>
+          <p:nvPr/>
+        </p:nvSpPr>
+        <p:spPr>
+          <a:xfrm>
+            <a:off x="365760" y="3611880"/>
+            <a:ext cx="1828800" cy="347472"/>
+          </a:xfrm>
+          <a:prstGeom prst="rect">
+            <a:avLst/>
+          </a:prstGeom>
+          <a:noFill/>
+          <a:ln/>
+        </p:spPr>
+        <p:txBody>
+          <a:bodyPr wrap="square" lIns="0" tIns="0" rIns="0" bIns="0" rtlCol="0" anchor="ctr"/>
+          <a:lstStyle/>
+          <a:p>
+            <a:pPr algn="l" indent="0" marL="0">
+              <a:buNone/>
+            </a:pPr>
+            <a:r>
+              <a:rPr lang="en-US" sz="1200" b="1" dirty="0">
+                <a:solidFill>
+                  <a:srgbClr val="0F172A"/>
                 </a:solidFill>
                 <a:latin typeface="Trebuchet MS" pitchFamily="34" charset="0"/>
                 <a:ea typeface="Trebuchet MS" pitchFamily="34" charset="-122"/>
                 <a:cs typeface="Trebuchet MS" pitchFamily="34" charset="-120"/>
               </a:rPr>
-              <a:t>-ming</a:t>
-            </a:r>
-            <a:endParaRPr lang="en-US" sz="1300" dirty="0"/>
-          </a:p>
-        </p:txBody>
-      </p:sp>
-      <p:sp>
-        <p:nvSpPr>
-          <p:cNvPr id="33" name="Shape 31"/>
-          <p:cNvSpPr/>
-          <p:nvPr/>
-        </p:nvSpPr>
-        <p:spPr>
-          <a:xfrm>
-            <a:off x="365760" y="2825496"/>
-            <a:ext cx="2468880" cy="402336"/>
-          </a:xfrm>
-          <a:prstGeom prst="rect">
-            <a:avLst/>
-          </a:prstGeom>
-          <a:solidFill>
-            <a:srgbClr val="DDD6FE"/>
-          </a:solidFill>
-          <a:ln w="12700">
-            <a:solidFill>
-              <a:srgbClr val="E2E8F0"/>
-            </a:solidFill>
-            <a:prstDash val="solid"/>
-          </a:ln>
-        </p:spPr>
-      </p:sp>
-      <p:sp>
-        <p:nvSpPr>
-          <p:cNvPr id="34" name="Text 32"/>
-          <p:cNvSpPr/>
-          <p:nvPr/>
-        </p:nvSpPr>
-        <p:spPr>
-          <a:xfrm>
-            <a:off x="365760" y="2825496"/>
-            <a:ext cx="2468880" cy="402336"/>
-          </a:xfrm>
-          <a:prstGeom prst="rect">
-            <a:avLst/>
-          </a:prstGeom>
-          <a:noFill/>
-          <a:ln/>
-        </p:spPr>
-        <p:txBody>
-          <a:bodyPr wrap="square" lIns="0" tIns="0" rIns="0" bIns="0" rtlCol="0" anchor="ctr"/>
-          <a:lstStyle/>
-          <a:p>
-            <a:pPr algn="ctr" indent="0" marL="0">
-              <a:buNone/>
-            </a:pPr>
-            <a:r>
-              <a:rPr lang="en-US" sz="1300" b="1" dirty="0">
-                <a:solidFill>
-                  <a:srgbClr val="4C1D95"/>
+              <a:t>Sample words:</a:t>
+            </a:r>
+            <a:endParaRPr lang="en-US" sz="1200" dirty="0"/>
+          </a:p>
+        </p:txBody>
+      </p:sp>
+      <p:sp>
+        <p:nvSpPr>
+          <p:cNvPr id="36" name="Shape 34"/>
+          <p:cNvSpPr/>
+          <p:nvPr/>
+        </p:nvSpPr>
+        <p:spPr>
+          <a:xfrm>
+            <a:off x="365760" y="4023360"/>
+            <a:ext cx="2011680" cy="402336"/>
+          </a:xfrm>
+          <a:prstGeom prst="rect">
+            <a:avLst>
+              <a:gd name="adj" fmla="val 13636"/>
+            </a:avLst>
+          </a:prstGeom>
+          <a:solidFill>
+            <a:srgbClr val="EEF2FF"/>
+          </a:solidFill>
+          <a:ln w="12700">
+            <a:solidFill>
+              <a:srgbClr val="6366F1"/>
+            </a:solidFill>
+            <a:prstDash val="solid"/>
+          </a:ln>
+        </p:spPr>
+      </p:sp>
+      <p:sp>
+        <p:nvSpPr>
+          <p:cNvPr id="37" name="Text 35"/>
+          <p:cNvSpPr/>
+          <p:nvPr/>
+        </p:nvSpPr>
+        <p:spPr>
+          <a:xfrm>
+            <a:off x="365760" y="4023360"/>
+            <a:ext cx="2011680" cy="402336"/>
+          </a:xfrm>
+          <a:prstGeom prst="rect">
+            <a:avLst/>
+          </a:prstGeom>
+          <a:noFill/>
+          <a:ln/>
+        </p:spPr>
+        <p:txBody>
+          <a:bodyPr wrap="square" lIns="0" tIns="0" rIns="0" bIns="0" rtlCol="0" anchor="ctr"/>
+          <a:lstStyle/>
+          <a:p>
+            <a:pPr algn="ctr" indent="0" marL="0">
+              <a:buNone/>
+            </a:pPr>
+            <a:r>
+              <a:rPr lang="en-US" sz="1200" b="1" dirty="0">
+                <a:solidFill>
+                  <a:srgbClr val="4338CA"/>
                 </a:solidFill>
                 <a:latin typeface="Trebuchet MS" pitchFamily="34" charset="0"/>
                 <a:ea typeface="Trebuchet MS" pitchFamily="34" charset="-122"/>
                 <a:cs typeface="Trebuchet MS" pitchFamily="34" charset="-120"/>
               </a:rPr>
-              <a:t>mono-</a:t>
-            </a:r>
-            <a:endParaRPr lang="en-US" sz="1300" dirty="0"/>
-          </a:p>
-        </p:txBody>
-      </p:sp>
-      <p:sp>
-        <p:nvSpPr>
-          <p:cNvPr id="35" name="Shape 33"/>
-          <p:cNvSpPr/>
-          <p:nvPr/>
-        </p:nvSpPr>
-        <p:spPr>
-          <a:xfrm>
-            <a:off x="2971800" y="2825496"/>
-            <a:ext cx="2834640" cy="402336"/>
-          </a:xfrm>
-          <a:prstGeom prst="rect">
-            <a:avLst/>
-          </a:prstGeom>
-          <a:solidFill>
-            <a:srgbClr val="F1F5F9"/>
-          </a:solidFill>
-          <a:ln w="12700">
-            <a:solidFill>
-              <a:srgbClr val="E2E8F0"/>
-            </a:solidFill>
-            <a:prstDash val="solid"/>
-          </a:ln>
-        </p:spPr>
-      </p:sp>
-      <p:sp>
-        <p:nvSpPr>
-          <p:cNvPr id="36" name="Shape 34"/>
-          <p:cNvSpPr/>
-          <p:nvPr/>
-        </p:nvSpPr>
-        <p:spPr>
-          <a:xfrm>
-            <a:off x="5943600" y="2825496"/>
-            <a:ext cx="2834640" cy="402336"/>
-          </a:xfrm>
-          <a:prstGeom prst="rect">
-            <a:avLst/>
-          </a:prstGeom>
-          <a:solidFill>
-            <a:srgbClr val="FCE7F3"/>
-          </a:solidFill>
-          <a:ln w="12700">
-            <a:solidFill>
-              <a:srgbClr val="E2E8F0"/>
-            </a:solidFill>
-            <a:prstDash val="solid"/>
-          </a:ln>
-        </p:spPr>
-      </p:sp>
-      <p:sp>
-        <p:nvSpPr>
-          <p:cNvPr id="37" name="Text 35"/>
-          <p:cNvSpPr/>
-          <p:nvPr/>
-        </p:nvSpPr>
-        <p:spPr>
-          <a:xfrm>
-            <a:off x="5943600" y="2825496"/>
-            <a:ext cx="2834640" cy="402336"/>
-          </a:xfrm>
-          <a:prstGeom prst="rect">
-            <a:avLst/>
-          </a:prstGeom>
-          <a:noFill/>
-          <a:ln/>
-        </p:spPr>
-        <p:txBody>
-          <a:bodyPr wrap="square" lIns="0" tIns="0" rIns="0" bIns="0" rtlCol="0" anchor="ctr"/>
-          <a:lstStyle/>
-          <a:p>
-            <a:pPr algn="ctr" indent="0" marL="0">
-              <a:buNone/>
-            </a:pPr>
-            <a:r>
-              <a:rPr lang="en-US" sz="1300" b="1" dirty="0">
-                <a:solidFill>
-                  <a:srgbClr val="9D174D"/>
+              <a:t>gram</a:t>
+            </a:r>
+            <a:endParaRPr lang="en-US" sz="1200" dirty="0"/>
+          </a:p>
+        </p:txBody>
+      </p:sp>
+      <p:sp>
+        <p:nvSpPr>
+          <p:cNvPr id="38" name="Shape 36"/>
+          <p:cNvSpPr/>
+          <p:nvPr/>
+        </p:nvSpPr>
+        <p:spPr>
+          <a:xfrm>
+            <a:off x="2542032" y="4023360"/>
+            <a:ext cx="2011680" cy="402336"/>
+          </a:xfrm>
+          <a:prstGeom prst="rect">
+            <a:avLst>
+              <a:gd name="adj" fmla="val 13636"/>
+            </a:avLst>
+          </a:prstGeom>
+          <a:solidFill>
+            <a:srgbClr val="EEF2FF"/>
+          </a:solidFill>
+          <a:ln w="12700">
+            <a:solidFill>
+              <a:srgbClr val="6366F1"/>
+            </a:solidFill>
+            <a:prstDash val="solid"/>
+          </a:ln>
+        </p:spPr>
+      </p:sp>
+      <p:sp>
+        <p:nvSpPr>
+          <p:cNvPr id="39" name="Text 37"/>
+          <p:cNvSpPr/>
+          <p:nvPr/>
+        </p:nvSpPr>
+        <p:spPr>
+          <a:xfrm>
+            <a:off x="2542032" y="4023360"/>
+            <a:ext cx="2011680" cy="402336"/>
+          </a:xfrm>
+          <a:prstGeom prst="rect">
+            <a:avLst/>
+          </a:prstGeom>
+          <a:noFill/>
+          <a:ln/>
+        </p:spPr>
+        <p:txBody>
+          <a:bodyPr wrap="square" lIns="0" tIns="0" rIns="0" bIns="0" rtlCol="0" anchor="ctr"/>
+          <a:lstStyle/>
+          <a:p>
+            <a:pPr algn="ctr" indent="0" marL="0">
+              <a:buNone/>
+            </a:pPr>
+            <a:r>
+              <a:rPr lang="en-US" sz="1200" b="1" dirty="0">
+                <a:solidFill>
+                  <a:srgbClr val="4338CA"/>
                 </a:solidFill>
                 <a:latin typeface="Trebuchet MS" pitchFamily="34" charset="0"/>
                 <a:ea typeface="Trebuchet MS" pitchFamily="34" charset="-122"/>
                 <a:cs typeface="Trebuchet MS" pitchFamily="34" charset="-120"/>
               </a:rPr>
-              <a:t>-med</a:t>
-            </a:r>
-            <a:endParaRPr lang="en-US" sz="1300" dirty="0"/>
-          </a:p>
-        </p:txBody>
-      </p:sp>
-      <p:sp>
-        <p:nvSpPr>
-          <p:cNvPr id="38" name="Shape 36"/>
-          <p:cNvSpPr/>
-          <p:nvPr/>
-        </p:nvSpPr>
-        <p:spPr>
-          <a:xfrm>
-            <a:off x="365760" y="3246120"/>
-            <a:ext cx="2468880" cy="402336"/>
-          </a:xfrm>
-          <a:prstGeom prst="rect">
-            <a:avLst/>
-          </a:prstGeom>
-          <a:solidFill>
-            <a:srgbClr val="DDD6FE"/>
-          </a:solidFill>
-          <a:ln w="12700">
-            <a:solidFill>
-              <a:srgbClr val="E2E8F0"/>
-            </a:solidFill>
-            <a:prstDash val="solid"/>
-          </a:ln>
-        </p:spPr>
-      </p:sp>
-      <p:sp>
-        <p:nvSpPr>
-          <p:cNvPr id="39" name="Text 37"/>
-          <p:cNvSpPr/>
-          <p:nvPr/>
-        </p:nvSpPr>
-        <p:spPr>
-          <a:xfrm>
-            <a:off x="365760" y="3246120"/>
-            <a:ext cx="2468880" cy="402336"/>
-          </a:xfrm>
-          <a:prstGeom prst="rect">
-            <a:avLst/>
-          </a:prstGeom>
-          <a:noFill/>
-          <a:ln/>
-        </p:spPr>
-        <p:txBody>
-          <a:bodyPr wrap="square" lIns="0" tIns="0" rIns="0" bIns="0" rtlCol="0" anchor="ctr"/>
-          <a:lstStyle/>
-          <a:p>
-            <a:pPr algn="ctr" indent="0" marL="0">
-              <a:buNone/>
-            </a:pPr>
-            <a:r>
-              <a:rPr lang="en-US" sz="1300" b="1" dirty="0">
-                <a:solidFill>
-                  <a:srgbClr val="4C1D95"/>
+              <a:t>grams</a:t>
+            </a:r>
+            <a:endParaRPr lang="en-US" sz="1200" dirty="0"/>
+          </a:p>
+        </p:txBody>
+      </p:sp>
+      <p:sp>
+        <p:nvSpPr>
+          <p:cNvPr id="40" name="Shape 38"/>
+          <p:cNvSpPr/>
+          <p:nvPr/>
+        </p:nvSpPr>
+        <p:spPr>
+          <a:xfrm>
+            <a:off x="4718304" y="4023360"/>
+            <a:ext cx="2011680" cy="402336"/>
+          </a:xfrm>
+          <a:prstGeom prst="rect">
+            <a:avLst>
+              <a:gd name="adj" fmla="val 13636"/>
+            </a:avLst>
+          </a:prstGeom>
+          <a:solidFill>
+            <a:srgbClr val="EEF2FF"/>
+          </a:solidFill>
+          <a:ln w="12700">
+            <a:solidFill>
+              <a:srgbClr val="6366F1"/>
+            </a:solidFill>
+            <a:prstDash val="solid"/>
+          </a:ln>
+        </p:spPr>
+      </p:sp>
+      <p:sp>
+        <p:nvSpPr>
+          <p:cNvPr id="41" name="Text 39"/>
+          <p:cNvSpPr/>
+          <p:nvPr/>
+        </p:nvSpPr>
+        <p:spPr>
+          <a:xfrm>
+            <a:off x="4718304" y="4023360"/>
+            <a:ext cx="2011680" cy="402336"/>
+          </a:xfrm>
+          <a:prstGeom prst="rect">
+            <a:avLst/>
+          </a:prstGeom>
+          <a:noFill/>
+          <a:ln/>
+        </p:spPr>
+        <p:txBody>
+          <a:bodyPr wrap="square" lIns="0" tIns="0" rIns="0" bIns="0" rtlCol="0" anchor="ctr"/>
+          <a:lstStyle/>
+          <a:p>
+            <a:pPr algn="ctr" indent="0" marL="0">
+              <a:buNone/>
+            </a:pPr>
+            <a:r>
+              <a:rPr lang="en-US" sz="1200" b="1" dirty="0">
+                <a:solidFill>
+                  <a:srgbClr val="4338CA"/>
                 </a:solidFill>
                 <a:latin typeface="Trebuchet MS" pitchFamily="34" charset="0"/>
                 <a:ea typeface="Trebuchet MS" pitchFamily="34" charset="-122"/>
                 <a:cs typeface="Trebuchet MS" pitchFamily="34" charset="-120"/>
               </a:rPr>
-              <a:t>holo-</a:t>
-            </a:r>
-            <a:endParaRPr lang="en-US" sz="1300" dirty="0"/>
-          </a:p>
-        </p:txBody>
-      </p:sp>
-      <p:sp>
-        <p:nvSpPr>
-          <p:cNvPr id="40" name="Shape 38"/>
-          <p:cNvSpPr/>
-          <p:nvPr/>
-        </p:nvSpPr>
-        <p:spPr>
-          <a:xfrm>
-            <a:off x="2971800" y="3246120"/>
-            <a:ext cx="2834640" cy="402336"/>
-          </a:xfrm>
-          <a:prstGeom prst="rect">
-            <a:avLst/>
-          </a:prstGeom>
-          <a:solidFill>
-            <a:srgbClr val="F8FAFC"/>
-          </a:solidFill>
-          <a:ln w="12700">
-            <a:solidFill>
-              <a:srgbClr val="E2E8F0"/>
-            </a:solidFill>
-            <a:prstDash val="solid"/>
-          </a:ln>
-        </p:spPr>
-      </p:sp>
-      <p:sp>
-        <p:nvSpPr>
-          <p:cNvPr id="41" name="Shape 39"/>
-          <p:cNvSpPr/>
-          <p:nvPr/>
-        </p:nvSpPr>
-        <p:spPr>
-          <a:xfrm>
-            <a:off x="5943600" y="3246120"/>
-            <a:ext cx="2834640" cy="402336"/>
-          </a:xfrm>
-          <a:prstGeom prst="rect">
-            <a:avLst/>
-          </a:prstGeom>
-          <a:solidFill>
-            <a:srgbClr val="FCE7F3"/>
-          </a:solidFill>
-          <a:ln w="12700">
-            <a:solidFill>
-              <a:srgbClr val="E2E8F0"/>
-            </a:solidFill>
-            <a:prstDash val="solid"/>
-          </a:ln>
-        </p:spPr>
-      </p:sp>
-      <p:sp>
-        <p:nvSpPr>
-          <p:cNvPr id="42" name="Text 40"/>
-          <p:cNvSpPr/>
-          <p:nvPr/>
-        </p:nvSpPr>
-        <p:spPr>
-          <a:xfrm>
-            <a:off x="5943600" y="3246120"/>
-            <a:ext cx="2834640" cy="402336"/>
-          </a:xfrm>
-          <a:prstGeom prst="rect">
-            <a:avLst/>
-          </a:prstGeom>
-          <a:noFill/>
-          <a:ln/>
-        </p:spPr>
-        <p:txBody>
-          <a:bodyPr wrap="square" lIns="0" tIns="0" rIns="0" bIns="0" rtlCol="0" anchor="ctr"/>
-          <a:lstStyle/>
-          <a:p>
-            <a:pPr algn="ctr" indent="0" marL="0">
-              <a:buNone/>
-            </a:pPr>
-            <a:r>
-              <a:rPr lang="en-US" sz="1300" b="1" dirty="0">
-                <a:solidFill>
-                  <a:srgbClr val="9D174D"/>
+              <a:t>program</a:t>
+            </a:r>
+            <a:endParaRPr lang="en-US" sz="1200" dirty="0"/>
+          </a:p>
+        </p:txBody>
+      </p:sp>
+      <p:sp>
+        <p:nvSpPr>
+          <p:cNvPr id="42" name="Shape 40"/>
+          <p:cNvSpPr/>
+          <p:nvPr/>
+        </p:nvSpPr>
+        <p:spPr>
+          <a:xfrm>
+            <a:off x="6894576" y="4023360"/>
+            <a:ext cx="2011680" cy="402336"/>
+          </a:xfrm>
+          <a:prstGeom prst="rect">
+            <a:avLst>
+              <a:gd name="adj" fmla="val 13636"/>
+            </a:avLst>
+          </a:prstGeom>
+          <a:solidFill>
+            <a:srgbClr val="EEF2FF"/>
+          </a:solidFill>
+          <a:ln w="12700">
+            <a:solidFill>
+              <a:srgbClr val="6366F1"/>
+            </a:solidFill>
+            <a:prstDash val="solid"/>
+          </a:ln>
+        </p:spPr>
+      </p:sp>
+      <p:sp>
+        <p:nvSpPr>
+          <p:cNvPr id="43" name="Text 41"/>
+          <p:cNvSpPr/>
+          <p:nvPr/>
+        </p:nvSpPr>
+        <p:spPr>
+          <a:xfrm>
+            <a:off x="6894576" y="4023360"/>
+            <a:ext cx="2011680" cy="402336"/>
+          </a:xfrm>
+          <a:prstGeom prst="rect">
+            <a:avLst/>
+          </a:prstGeom>
+          <a:noFill/>
+          <a:ln/>
+        </p:spPr>
+        <p:txBody>
+          <a:bodyPr wrap="square" lIns="0" tIns="0" rIns="0" bIns="0" rtlCol="0" anchor="ctr"/>
+          <a:lstStyle/>
+          <a:p>
+            <a:pPr algn="ctr" indent="0" marL="0">
+              <a:buNone/>
+            </a:pPr>
+            <a:r>
+              <a:rPr lang="en-US" sz="1200" b="1" dirty="0">
+                <a:solidFill>
+                  <a:srgbClr val="4338CA"/>
                 </a:solidFill>
                 <a:latin typeface="Trebuchet MS" pitchFamily="34" charset="0"/>
                 <a:ea typeface="Trebuchet MS" pitchFamily="34" charset="-122"/>
                 <a:cs typeface="Trebuchet MS" pitchFamily="34" charset="-120"/>
               </a:rPr>
-              <a:t>-matical</a:t>
-            </a:r>
-            <a:endParaRPr lang="en-US" sz="1300" dirty="0"/>
-          </a:p>
-        </p:txBody>
-      </p:sp>
-      <p:sp>
-        <p:nvSpPr>
-          <p:cNvPr id="43" name="Text 41"/>
-          <p:cNvSpPr/>
-          <p:nvPr/>
-        </p:nvSpPr>
-        <p:spPr>
-          <a:xfrm>
-            <a:off x="365760" y="3611880"/>
-            <a:ext cx="1828800" cy="347472"/>
-          </a:xfrm>
-          <a:prstGeom prst="rect">
-            <a:avLst/>
-          </a:prstGeom>
-          <a:noFill/>
-          <a:ln/>
-        </p:spPr>
-        <p:txBody>
-          <a:bodyPr wrap="square" lIns="0" tIns="0" rIns="0" bIns="0" rtlCol="0" anchor="ctr"/>
-          <a:lstStyle/>
-          <a:p>
-            <a:pPr algn="l" indent="0" marL="0">
-              <a:buNone/>
-            </a:pPr>
-            <a:r>
-              <a:rPr lang="en-US" sz="1200" b="1" dirty="0">
-                <a:solidFill>
-                  <a:srgbClr val="0F172A"/>
-                </a:solidFill>
-                <a:latin typeface="Trebuchet MS" pitchFamily="34" charset="0"/>
-                <a:ea typeface="Trebuchet MS" pitchFamily="34" charset="-122"/>
-                <a:cs typeface="Trebuchet MS" pitchFamily="34" charset="-120"/>
-              </a:rPr>
-              <a:t>Sample words:</a:t>
-            </a:r>
-            <a:endParaRPr lang="en-US" sz="1200" dirty="0"/>
-          </a:p>
-        </p:txBody>
-      </p:sp>
-      <p:sp>
-        <p:nvSpPr>
-          <p:cNvPr id="44" name="Shape 42"/>
-          <p:cNvSpPr/>
-          <p:nvPr/>
-        </p:nvSpPr>
-        <p:spPr>
-          <a:xfrm>
-            <a:off x="365760" y="4023360"/>
-            <a:ext cx="2011680" cy="402336"/>
-          </a:xfrm>
-          <a:prstGeom prst="rect">
-            <a:avLst>
-              <a:gd name="adj" fmla="val 13636"/>
-            </a:avLst>
-          </a:prstGeom>
-          <a:solidFill>
-            <a:srgbClr val="EEF2FF"/>
-          </a:solidFill>
-          <a:ln w="12700">
-            <a:solidFill>
-              <a:srgbClr val="6366F1"/>
-            </a:solidFill>
-            <a:prstDash val="solid"/>
-          </a:ln>
-        </p:spPr>
-      </p:sp>
-      <p:sp>
-        <p:nvSpPr>
-          <p:cNvPr id="45" name="Text 43"/>
-          <p:cNvSpPr/>
-          <p:nvPr/>
-        </p:nvSpPr>
-        <p:spPr>
-          <a:xfrm>
-            <a:off x="365760" y="4023360"/>
-            <a:ext cx="2011680" cy="402336"/>
-          </a:xfrm>
-          <a:prstGeom prst="rect">
-            <a:avLst/>
-          </a:prstGeom>
-          <a:noFill/>
-          <a:ln/>
-        </p:spPr>
-        <p:txBody>
-          <a:bodyPr wrap="square" lIns="0" tIns="0" rIns="0" bIns="0" rtlCol="0" anchor="ctr"/>
-          <a:lstStyle/>
-          <a:p>
-            <a:pPr algn="ctr" indent="0" marL="0">
-              <a:buNone/>
-            </a:pPr>
-            <a:r>
-              <a:rPr lang="en-US" sz="1200" b="1" dirty="0">
-                <a:solidFill>
-                  <a:srgbClr val="4338CA"/>
-                </a:solidFill>
-                <a:latin typeface="Trebuchet MS" pitchFamily="34" charset="0"/>
-                <a:ea typeface="Trebuchet MS" pitchFamily="34" charset="-122"/>
-                <a:cs typeface="Trebuchet MS" pitchFamily="34" charset="-120"/>
-              </a:rPr>
-              <a:t>telegram</a:t>
-            </a:r>
-            <a:endParaRPr lang="en-US" sz="1200" dirty="0"/>
-          </a:p>
-        </p:txBody>
-      </p:sp>
-      <p:sp>
-        <p:nvSpPr>
-          <p:cNvPr id="46" name="Shape 44"/>
-          <p:cNvSpPr/>
-          <p:nvPr/>
-        </p:nvSpPr>
-        <p:spPr>
-          <a:xfrm>
-            <a:off x="2542032" y="4023360"/>
-            <a:ext cx="2011680" cy="402336"/>
-          </a:xfrm>
-          <a:prstGeom prst="rect">
-            <a:avLst>
-              <a:gd name="adj" fmla="val 13636"/>
-            </a:avLst>
-          </a:prstGeom>
-          <a:solidFill>
-            <a:srgbClr val="EEF2FF"/>
-          </a:solidFill>
-          <a:ln w="12700">
-            <a:solidFill>
-              <a:srgbClr val="6366F1"/>
-            </a:solidFill>
-            <a:prstDash val="solid"/>
-          </a:ln>
-        </p:spPr>
-      </p:sp>
-      <p:sp>
-        <p:nvSpPr>
-          <p:cNvPr id="47" name="Text 45"/>
-          <p:cNvSpPr/>
-          <p:nvPr/>
-        </p:nvSpPr>
-        <p:spPr>
-          <a:xfrm>
-            <a:off x="2542032" y="4023360"/>
-            <a:ext cx="2011680" cy="402336"/>
-          </a:xfrm>
-          <a:prstGeom prst="rect">
-            <a:avLst/>
-          </a:prstGeom>
-          <a:noFill/>
-          <a:ln/>
-        </p:spPr>
-        <p:txBody>
-          <a:bodyPr wrap="square" lIns="0" tIns="0" rIns="0" bIns="0" rtlCol="0" anchor="ctr"/>
-          <a:lstStyle/>
-          <a:p>
-            <a:pPr algn="ctr" indent="0" marL="0">
-              <a:buNone/>
-            </a:pPr>
-            <a:r>
-              <a:rPr lang="en-US" sz="1200" b="1" dirty="0">
-                <a:solidFill>
-                  <a:srgbClr val="4338CA"/>
-                </a:solidFill>
-                <a:latin typeface="Trebuchet MS" pitchFamily="34" charset="0"/>
-                <a:ea typeface="Trebuchet MS" pitchFamily="34" charset="-122"/>
-                <a:cs typeface="Trebuchet MS" pitchFamily="34" charset="-120"/>
-              </a:rPr>
-              <a:t>diagram</a:t>
-            </a:r>
-            <a:endParaRPr lang="en-US" sz="1200" dirty="0"/>
-          </a:p>
-        </p:txBody>
-      </p:sp>
-      <p:sp>
-        <p:nvSpPr>
-          <p:cNvPr id="48" name="Shape 46"/>
-          <p:cNvSpPr/>
-          <p:nvPr/>
-        </p:nvSpPr>
-        <p:spPr>
-          <a:xfrm>
-            <a:off x="4718304" y="4023360"/>
-            <a:ext cx="2011680" cy="402336"/>
-          </a:xfrm>
-          <a:prstGeom prst="rect">
-            <a:avLst>
-              <a:gd name="adj" fmla="val 13636"/>
-            </a:avLst>
-          </a:prstGeom>
-          <a:solidFill>
-            <a:srgbClr val="EEF2FF"/>
-          </a:solidFill>
-          <a:ln w="12700">
-            <a:solidFill>
-              <a:srgbClr val="6366F1"/>
-            </a:solidFill>
-            <a:prstDash val="solid"/>
-          </a:ln>
-        </p:spPr>
-      </p:sp>
-      <p:sp>
-        <p:nvSpPr>
-          <p:cNvPr id="49" name="Text 47"/>
-          <p:cNvSpPr/>
-          <p:nvPr/>
-        </p:nvSpPr>
-        <p:spPr>
-          <a:xfrm>
-            <a:off x="4718304" y="4023360"/>
-            <a:ext cx="2011680" cy="402336"/>
-          </a:xfrm>
-          <a:prstGeom prst="rect">
-            <a:avLst/>
-          </a:prstGeom>
-          <a:noFill/>
-          <a:ln/>
-        </p:spPr>
-        <p:txBody>
-          <a:bodyPr wrap="square" lIns="0" tIns="0" rIns="0" bIns="0" rtlCol="0" anchor="ctr"/>
-          <a:lstStyle/>
-          <a:p>
-            <a:pPr algn="ctr" indent="0" marL="0">
-              <a:buNone/>
-            </a:pPr>
-            <a:r>
-              <a:rPr lang="en-US" sz="1200" b="1" dirty="0">
-                <a:solidFill>
-                  <a:srgbClr val="4338CA"/>
-                </a:solidFill>
-                <a:latin typeface="Trebuchet MS" pitchFamily="34" charset="0"/>
-                <a:ea typeface="Trebuchet MS" pitchFamily="34" charset="-122"/>
-                <a:cs typeface="Trebuchet MS" pitchFamily="34" charset="-120"/>
-              </a:rPr>
-              <a:t>program</a:t>
-            </a:r>
-            <a:endParaRPr lang="en-US" sz="1200" dirty="0"/>
-          </a:p>
-        </p:txBody>
-      </p:sp>
-      <p:sp>
-        <p:nvSpPr>
-          <p:cNvPr id="50" name="Shape 48"/>
-          <p:cNvSpPr/>
-          <p:nvPr/>
-        </p:nvSpPr>
-        <p:spPr>
-          <a:xfrm>
-            <a:off x="6894576" y="4023360"/>
-            <a:ext cx="2011680" cy="402336"/>
-          </a:xfrm>
-          <a:prstGeom prst="rect">
-            <a:avLst>
-              <a:gd name="adj" fmla="val 13636"/>
-            </a:avLst>
-          </a:prstGeom>
-          <a:solidFill>
-            <a:srgbClr val="EEF2FF"/>
-          </a:solidFill>
-          <a:ln w="12700">
-            <a:solidFill>
-              <a:srgbClr val="6366F1"/>
-            </a:solidFill>
-            <a:prstDash val="solid"/>
-          </a:ln>
-        </p:spPr>
-      </p:sp>
-      <p:sp>
-        <p:nvSpPr>
-          <p:cNvPr id="51" name="Text 49"/>
-          <p:cNvSpPr/>
-          <p:nvPr/>
-        </p:nvSpPr>
-        <p:spPr>
-          <a:xfrm>
-            <a:off x="6894576" y="4023360"/>
-            <a:ext cx="2011680" cy="402336"/>
-          </a:xfrm>
-          <a:prstGeom prst="rect">
-            <a:avLst/>
-          </a:prstGeom>
-          <a:noFill/>
-          <a:ln/>
-        </p:spPr>
-        <p:txBody>
-          <a:bodyPr wrap="square" lIns="0" tIns="0" rIns="0" bIns="0" rtlCol="0" anchor="ctr"/>
-          <a:lstStyle/>
-          <a:p>
-            <a:pPr algn="ctr" indent="0" marL="0">
-              <a:buNone/>
-            </a:pPr>
-            <a:r>
-              <a:rPr lang="en-US" sz="1200" b="1" dirty="0">
-                <a:solidFill>
-                  <a:srgbClr val="4338CA"/>
-                </a:solidFill>
-                <a:latin typeface="Trebuchet MS" pitchFamily="34" charset="0"/>
-                <a:ea typeface="Trebuchet MS" pitchFamily="34" charset="-122"/>
-                <a:cs typeface="Trebuchet MS" pitchFamily="34" charset="-120"/>
-              </a:rPr>
-              <a:t>monogram</a:t>
-            </a:r>
-            <a:endParaRPr lang="en-US" sz="1200" dirty="0"/>
-          </a:p>
-        </p:txBody>
-      </p:sp>
-      <p:sp>
-        <p:nvSpPr>
-          <p:cNvPr id="52" name="Shape 50"/>
-          <p:cNvSpPr/>
-          <p:nvPr/>
-        </p:nvSpPr>
-        <p:spPr>
-          <a:xfrm>
-            <a:off x="365760" y="4498848"/>
-            <a:ext cx="2011680" cy="402336"/>
-          </a:xfrm>
-          <a:prstGeom prst="rect">
-            <a:avLst>
-              <a:gd name="adj" fmla="val 13636"/>
-            </a:avLst>
-          </a:prstGeom>
-          <a:solidFill>
-            <a:srgbClr val="EEF2FF"/>
-          </a:solidFill>
-          <a:ln w="12700">
-            <a:solidFill>
-              <a:srgbClr val="6366F1"/>
-            </a:solidFill>
-            <a:prstDash val="solid"/>
-          </a:ln>
-        </p:spPr>
-      </p:sp>
-      <p:sp>
-        <p:nvSpPr>
-          <p:cNvPr id="53" name="Text 51"/>
-          <p:cNvSpPr/>
-          <p:nvPr/>
-        </p:nvSpPr>
-        <p:spPr>
-          <a:xfrm>
-            <a:off x="365760" y="4498848"/>
-            <a:ext cx="2011680" cy="402336"/>
-          </a:xfrm>
-          <a:prstGeom prst="rect">
-            <a:avLst/>
-          </a:prstGeom>
-          <a:noFill/>
-          <a:ln/>
-        </p:spPr>
-        <p:txBody>
-          <a:bodyPr wrap="square" lIns="0" tIns="0" rIns="0" bIns="0" rtlCol="0" anchor="ctr"/>
-          <a:lstStyle/>
-          <a:p>
-            <a:pPr algn="ctr" indent="0" marL="0">
-              <a:buNone/>
-            </a:pPr>
-            <a:r>
-              <a:rPr lang="en-US" sz="1200" b="1" dirty="0">
-                <a:solidFill>
-                  <a:srgbClr val="4338CA"/>
-                </a:solidFill>
-                <a:latin typeface="Trebuchet MS" pitchFamily="34" charset="0"/>
-                <a:ea typeface="Trebuchet MS" pitchFamily="34" charset="-122"/>
-                <a:cs typeface="Trebuchet MS" pitchFamily="34" charset="-120"/>
-              </a:rPr>
-              <a:t>hologram</a:t>
-            </a:r>
-            <a:endParaRPr lang="en-US" sz="1200" dirty="0"/>
-          </a:p>
-        </p:txBody>
-      </p:sp>
-      <p:sp>
-        <p:nvSpPr>
-          <p:cNvPr id="54" name="Shape 52"/>
-          <p:cNvSpPr/>
-          <p:nvPr/>
-        </p:nvSpPr>
-        <p:spPr>
-          <a:xfrm>
-            <a:off x="2542032" y="4498848"/>
-            <a:ext cx="2011680" cy="402336"/>
-          </a:xfrm>
-          <a:prstGeom prst="rect">
-            <a:avLst>
-              <a:gd name="adj" fmla="val 13636"/>
-            </a:avLst>
-          </a:prstGeom>
-          <a:solidFill>
-            <a:srgbClr val="EEF2FF"/>
-          </a:solidFill>
-          <a:ln w="12700">
-            <a:solidFill>
-              <a:srgbClr val="6366F1"/>
-            </a:solidFill>
-            <a:prstDash val="solid"/>
-          </a:ln>
-        </p:spPr>
-      </p:sp>
-      <p:sp>
-        <p:nvSpPr>
-          <p:cNvPr id="55" name="Text 53"/>
-          <p:cNvSpPr/>
-          <p:nvPr/>
-        </p:nvSpPr>
-        <p:spPr>
-          <a:xfrm>
-            <a:off x="2542032" y="4498848"/>
-            <a:ext cx="2011680" cy="402336"/>
-          </a:xfrm>
-          <a:prstGeom prst="rect">
-            <a:avLst/>
-          </a:prstGeom>
-          <a:noFill/>
-          <a:ln/>
-        </p:spPr>
-        <p:txBody>
-          <a:bodyPr wrap="square" lIns="0" tIns="0" rIns="0" bIns="0" rtlCol="0" anchor="ctr"/>
-          <a:lstStyle/>
-          <a:p>
-            <a:pPr algn="ctr" indent="0" marL="0">
-              <a:buNone/>
-            </a:pPr>
-            <a:r>
-              <a:rPr lang="en-US" sz="1200" b="1" dirty="0">
-                <a:solidFill>
-                  <a:srgbClr val="4338CA"/>
-                </a:solidFill>
-                <a:latin typeface="Trebuchet MS" pitchFamily="34" charset="0"/>
-                <a:ea typeface="Trebuchet MS" pitchFamily="34" charset="-122"/>
-                <a:cs typeface="Trebuchet MS" pitchFamily="34" charset="-120"/>
-              </a:rPr>
-              <a:t>anagram</a:t>
-            </a:r>
-            <a:endParaRPr lang="en-US" sz="1200" dirty="0"/>
-          </a:p>
-        </p:txBody>
-      </p:sp>
-      <p:sp>
-        <p:nvSpPr>
-          <p:cNvPr id="56" name="Shape 54"/>
-          <p:cNvSpPr/>
-          <p:nvPr/>
-        </p:nvSpPr>
-        <p:spPr>
-          <a:xfrm>
-            <a:off x="4718304" y="4498848"/>
-            <a:ext cx="2011680" cy="402336"/>
-          </a:xfrm>
-          <a:prstGeom prst="rect">
-            <a:avLst>
-              <a:gd name="adj" fmla="val 13636"/>
-            </a:avLst>
-          </a:prstGeom>
-          <a:solidFill>
-            <a:srgbClr val="EEF2FF"/>
-          </a:solidFill>
-          <a:ln w="12700">
-            <a:solidFill>
-              <a:srgbClr val="6366F1"/>
-            </a:solidFill>
-            <a:prstDash val="solid"/>
-          </a:ln>
-        </p:spPr>
-      </p:sp>
-      <p:sp>
-        <p:nvSpPr>
-          <p:cNvPr id="57" name="Text 55"/>
-          <p:cNvSpPr/>
-          <p:nvPr/>
-        </p:nvSpPr>
-        <p:spPr>
-          <a:xfrm>
-            <a:off x="4718304" y="4498848"/>
-            <a:ext cx="2011680" cy="402336"/>
-          </a:xfrm>
-          <a:prstGeom prst="rect">
-            <a:avLst/>
-          </a:prstGeom>
-          <a:noFill/>
-          <a:ln/>
-        </p:spPr>
-        <p:txBody>
-          <a:bodyPr wrap="square" lIns="0" tIns="0" rIns="0" bIns="0" rtlCol="0" anchor="ctr"/>
-          <a:lstStyle/>
-          <a:p>
-            <a:pPr algn="ctr" indent="0" marL="0">
-              <a:buNone/>
-            </a:pPr>
-            <a:r>
-              <a:rPr lang="en-US" sz="1200" b="1" dirty="0">
-                <a:solidFill>
-                  <a:srgbClr val="4338CA"/>
-                </a:solidFill>
-                <a:latin typeface="Trebuchet MS" pitchFamily="34" charset="0"/>
-                <a:ea typeface="Trebuchet MS" pitchFamily="34" charset="-122"/>
-                <a:cs typeface="Trebuchet MS" pitchFamily="34" charset="-120"/>
-              </a:rPr>
-              <a:t>grammar</a:t>
-            </a:r>
-            <a:endParaRPr lang="en-US" sz="1200" dirty="0"/>
-          </a:p>
-        </p:txBody>
-      </p:sp>
-      <p:sp>
-        <p:nvSpPr>
-          <p:cNvPr id="58" name="Shape 56"/>
-          <p:cNvSpPr/>
-          <p:nvPr/>
-        </p:nvSpPr>
-        <p:spPr>
-          <a:xfrm>
-            <a:off x="6894576" y="4498848"/>
-            <a:ext cx="2011680" cy="402336"/>
-          </a:xfrm>
-          <a:prstGeom prst="rect">
-            <a:avLst>
-              <a:gd name="adj" fmla="val 13636"/>
-            </a:avLst>
-          </a:prstGeom>
-          <a:solidFill>
-            <a:srgbClr val="EEF2FF"/>
-          </a:solidFill>
-          <a:ln w="12700">
-            <a:solidFill>
-              <a:srgbClr val="6366F1"/>
-            </a:solidFill>
-            <a:prstDash val="solid"/>
-          </a:ln>
-        </p:spPr>
-      </p:sp>
-      <p:sp>
-        <p:nvSpPr>
-          <p:cNvPr id="59" name="Text 57"/>
-          <p:cNvSpPr/>
-          <p:nvPr/>
-        </p:nvSpPr>
-        <p:spPr>
-          <a:xfrm>
-            <a:off x="6894576" y="4498848"/>
-            <a:ext cx="2011680" cy="402336"/>
-          </a:xfrm>
-          <a:prstGeom prst="rect">
-            <a:avLst/>
-          </a:prstGeom>
-          <a:noFill/>
-          <a:ln/>
-        </p:spPr>
-        <p:txBody>
-          <a:bodyPr wrap="square" lIns="0" tIns="0" rIns="0" bIns="0" rtlCol="0" anchor="ctr"/>
-          <a:lstStyle/>
-          <a:p>
-            <a:pPr algn="ctr" indent="0" marL="0">
-              <a:buNone/>
-            </a:pPr>
-            <a:r>
-              <a:rPr lang="en-US" sz="1200" b="1" dirty="0">
-                <a:solidFill>
-                  <a:srgbClr val="4338CA"/>
-                </a:solidFill>
-                <a:latin typeface="Trebuchet MS" pitchFamily="34" charset="0"/>
-                <a:ea typeface="Trebuchet MS" pitchFamily="34" charset="-122"/>
-                <a:cs typeface="Trebuchet MS" pitchFamily="34" charset="-120"/>
-              </a:rPr>
-              <a:t>cardiogram</a:t>
+              <a:t>programs</a:t>
             </a:r>
             <a:endParaRPr lang="en-US" sz="1200" dirty="0"/>
           </a:p>
@@ -35625,7 +36501,7 @@
                 <a:ea typeface="Calibri" pitchFamily="34" charset="-122"/>
                 <a:cs typeface="Calibri" pitchFamily="34" charset="-120"/>
               </a:rPr>
-              <a:t>Word Labs  •  wordlabs.app  •  Root: 'gram' = written, drawn, recorded</a:t>
+              <a:t>Word Labs  •  wordlabs.app  •  Root: 'gram' = written; something written</a:t>
             </a:r>
             <a:endParaRPr lang="en-US" sz="800" dirty="0"/>
           </a:p>
@@ -35789,7 +36665,7 @@
                 <a:ea typeface="Calibri" pitchFamily="34" charset="-122"/>
                 <a:cs typeface="Calibri" pitchFamily="34" charset="-120"/>
               </a:rPr>
-              <a:t>The core part of a word carrying its basic meaning. For example, 'gram' means 'written, drawn, recorded'.</a:t>
+              <a:t>The core part of a word carrying its basic meaning. For example, 'gram' means 'written; something written'.</a:t>
             </a:r>
             <a:endParaRPr lang="en-US" sz="1350" dirty="0"/>
           </a:p>
@@ -36409,7 +37285,7 @@
                 <a:ea typeface="Calibri" pitchFamily="34" charset="-122"/>
                 <a:cs typeface="Calibri" pitchFamily="34" charset="-120"/>
               </a:rPr>
-              <a:t>Word Labs  •  wordlabs.app  •  Root: 'gram' = written, drawn, recorded</a:t>
+              <a:t>Word Labs  •  wordlabs.app  •  Root: 'gram' = written; something written</a:t>
             </a:r>
             <a:endParaRPr lang="en-US" sz="800" dirty="0"/>
           </a:p>
@@ -36521,7 +37397,7 @@
                 <a:ea typeface="Calibri" pitchFamily="34" charset="-122"/>
                 <a:cs typeface="Calibri" pitchFamily="34" charset="-120"/>
               </a:rPr>
-              <a:t>1.  An anagram is made by rearranging the letters of another word.</a:t>
+              <a:t>1.  'gram' means 'written; something written'.</a:t>
             </a:r>
             <a:endParaRPr lang="en-US" sz="1300" dirty="0"/>
           </a:p>
@@ -36660,7 +37536,7 @@
                 <a:ea typeface="Calibri" pitchFamily="34" charset="-122"/>
                 <a:cs typeface="Calibri" pitchFamily="34" charset="-120"/>
               </a:rPr>
-              <a:t>2.  A hologram is a flat, two-dimensional picture printed on paper.</a:t>
+              <a:t>2.  'grams' means 'small units used for measuring how heavy things are'.</a:t>
             </a:r>
             <a:endParaRPr lang="en-US" sz="1300" dirty="0"/>
           </a:p>
@@ -36683,11 +37559,11 @@
             </a:avLst>
           </a:prstGeom>
           <a:solidFill>
-            <a:srgbClr val="FEE2E2"/>
-          </a:solidFill>
-          <a:ln w="12700">
-            <a:solidFill>
-              <a:srgbClr val="DC2626"/>
+            <a:srgbClr val="DCFCE7"/>
+          </a:solidFill>
+          <a:ln w="12700">
+            <a:solidFill>
+              <a:srgbClr val="16A34A"/>
             </a:solidFill>
             <a:prstDash val="solid"/>
           </a:ln>
@@ -36720,13 +37596,13 @@
             <a:r>
               <a:rPr lang="en-US" sz="1100" b="1" dirty="0">
                 <a:solidFill>
-                  <a:srgbClr val="DC2626"/>
+                  <a:srgbClr val="16A34A"/>
                 </a:solidFill>
                 <a:latin typeface="Trebuchet MS" pitchFamily="34" charset="0"/>
                 <a:ea typeface="Trebuchet MS" pitchFamily="34" charset="-122"/>
                 <a:cs typeface="Trebuchet MS" pitchFamily="34" charset="-120"/>
               </a:rPr>
-              <a:t>FALSE</a:t>
+              <a:t>TRUE</a:t>
             </a:r>
             <a:endParaRPr lang="en-US" sz="1100" dirty="0"/>
           </a:p>
@@ -36799,7 +37675,7 @@
                 <a:ea typeface="Calibri" pitchFamily="34" charset="-122"/>
                 <a:cs typeface="Calibri" pitchFamily="34" charset="-120"/>
               </a:rPr>
-              <a:t>3.  The root 'gram' can be found in the word 'telegram'.</a:t>
+              <a:t>3.  'grams' means 'loud sounds made by thunder'.</a:t>
             </a:r>
             <a:endParaRPr lang="en-US" sz="1300" dirty="0"/>
           </a:p>
@@ -36822,11 +37698,11 @@
             </a:avLst>
           </a:prstGeom>
           <a:solidFill>
-            <a:srgbClr val="DCFCE7"/>
-          </a:solidFill>
-          <a:ln w="12700">
-            <a:solidFill>
-              <a:srgbClr val="16A34A"/>
+            <a:srgbClr val="FEE2E2"/>
+          </a:solidFill>
+          <a:ln w="12700">
+            <a:solidFill>
+              <a:srgbClr val="DC2626"/>
             </a:solidFill>
             <a:prstDash val="solid"/>
           </a:ln>
@@ -36859,13 +37735,13 @@
             <a:r>
               <a:rPr lang="en-US" sz="1100" b="1" dirty="0">
                 <a:solidFill>
-                  <a:srgbClr val="16A34A"/>
+                  <a:srgbClr val="DC2626"/>
                 </a:solidFill>
                 <a:latin typeface="Trebuchet MS" pitchFamily="34" charset="0"/>
                 <a:ea typeface="Trebuchet MS" pitchFamily="34" charset="-122"/>
                 <a:cs typeface="Trebuchet MS" pitchFamily="34" charset="-120"/>
               </a:rPr>
-              <a:t>TRUE</a:t>
+              <a:t>FALSE</a:t>
             </a:r>
             <a:endParaRPr lang="en-US" sz="1100" dirty="0"/>
           </a:p>
@@ -36938,7 +37814,7 @@
                 <a:ea typeface="Calibri" pitchFamily="34" charset="-122"/>
                 <a:cs typeface="Calibri" pitchFamily="34" charset="-120"/>
               </a:rPr>
-              <a:t>4.  The root 'gram' comes from Latin and means 'to speak'.</a:t>
+              <a:t>4.  'gram' means 'a musical note played on a piano'.</a:t>
             </a:r>
             <a:endParaRPr lang="en-US" sz="1300" dirty="0"/>
           </a:p>
@@ -37077,7 +37953,7 @@
                 <a:ea typeface="Calibri" pitchFamily="34" charset="-122"/>
                 <a:cs typeface="Calibri" pitchFamily="34" charset="-120"/>
               </a:rPr>
-              <a:t>5.  A diagram is a type of drawing or plan that explains something.</a:t>
+              <a:t>5.  'gram' means 'a small unit used for measuring how heavy something is'.</a:t>
             </a:r>
             <a:endParaRPr lang="en-US" sz="1300" dirty="0"/>
           </a:p>
@@ -37435,7 +38311,7 @@
                 <a:ea typeface="Calibri" pitchFamily="34" charset="-122"/>
                 <a:cs typeface="Calibri" pitchFamily="34" charset="-120"/>
               </a:rPr>
-              <a:t>Word Labs  •  wordlabs.app  •  Root: 'gram' = written, drawn, recorded</a:t>
+              <a:t>Word Labs  •  wordlabs.app  •  Root: 'gram' = written; something written</a:t>
             </a:r>
             <a:endParaRPr lang="en-US" sz="800" dirty="0"/>
           </a:p>
@@ -37572,7 +38448,7 @@
                 <a:ea typeface="Trebuchet MS" pitchFamily="34" charset="-122"/>
                 <a:cs typeface="Trebuchet MS" pitchFamily="34" charset="-120"/>
               </a:rPr>
-              <a:t>written, drawn, recorded</a:t>
+              <a:t>written; something written</a:t>
             </a:r>
             <a:endParaRPr lang="en-US" sz="2000" dirty="0"/>
           </a:p>
@@ -37611,7 +38487,7 @@
                 <a:ea typeface="Calibri" pitchFamily="34" charset="-122"/>
                 <a:cs typeface="Calibri" pitchFamily="34" charset="-120"/>
               </a:rPr>
-              <a:t>Origin: Greek: gramma</a:t>
+              <a:t>Origin: Greek root</a:t>
             </a:r>
             <a:endParaRPr lang="en-US" sz="1100" dirty="0"/>
           </a:p>
@@ -37716,7 +38592,7 @@
                 <a:ea typeface="Trebuchet MS" pitchFamily="34" charset="-122"/>
                 <a:cs typeface="Trebuchet MS" pitchFamily="34" charset="-120"/>
               </a:rPr>
-              <a:t>telegram</a:t>
+              <a:t>gram</a:t>
             </a:r>
             <a:endParaRPr lang="en-US" sz="1300" dirty="0"/>
           </a:p>
@@ -37782,7 +38658,7 @@
                 <a:ea typeface="Trebuchet MS" pitchFamily="34" charset="-122"/>
                 <a:cs typeface="Trebuchet MS" pitchFamily="34" charset="-120"/>
               </a:rPr>
-              <a:t>diagram</a:t>
+              <a:t>grams</a:t>
             </a:r>
             <a:endParaRPr lang="en-US" sz="1300" dirty="0"/>
           </a:p>
@@ -37914,205 +38790,7 @@
                 <a:ea typeface="Trebuchet MS" pitchFamily="34" charset="-122"/>
                 <a:cs typeface="Trebuchet MS" pitchFamily="34" charset="-120"/>
               </a:rPr>
-              <a:t>monogram</a:t>
-            </a:r>
-            <a:endParaRPr lang="en-US" sz="1300" dirty="0"/>
-          </a:p>
-        </p:txBody>
-      </p:sp>
-      <p:sp>
-        <p:nvSpPr>
-          <p:cNvPr id="24" name="Shape 22"/>
-          <p:cNvSpPr/>
-          <p:nvPr/>
-        </p:nvSpPr>
-        <p:spPr>
-          <a:xfrm>
-            <a:off x="365760" y="3401568"/>
-            <a:ext cx="2011680" cy="502920"/>
-          </a:xfrm>
-          <a:prstGeom prst="rect">
-            <a:avLst>
-              <a:gd name="adj" fmla="val 14545"/>
-            </a:avLst>
-          </a:prstGeom>
-          <a:solidFill>
-            <a:srgbClr val="EEF2FF"/>
-          </a:solidFill>
-          <a:ln w="12700">
-            <a:solidFill>
-              <a:srgbClr val="6366F1"/>
-            </a:solidFill>
-            <a:prstDash val="solid"/>
-          </a:ln>
-        </p:spPr>
-      </p:sp>
-      <p:sp>
-        <p:nvSpPr>
-          <p:cNvPr id="25" name="Text 23"/>
-          <p:cNvSpPr/>
-          <p:nvPr/>
-        </p:nvSpPr>
-        <p:spPr>
-          <a:xfrm>
-            <a:off x="365760" y="3401568"/>
-            <a:ext cx="2011680" cy="502920"/>
-          </a:xfrm>
-          <a:prstGeom prst="rect">
-            <a:avLst/>
-          </a:prstGeom>
-          <a:noFill/>
-          <a:ln/>
-        </p:spPr>
-        <p:txBody>
-          <a:bodyPr wrap="square" lIns="0" tIns="0" rIns="0" bIns="0" rtlCol="0" anchor="ctr"/>
-          <a:lstStyle/>
-          <a:p>
-            <a:pPr algn="ctr" indent="0" marL="0">
-              <a:buNone/>
-            </a:pPr>
-            <a:r>
-              <a:rPr lang="en-US" sz="1300" b="1" dirty="0">
-                <a:solidFill>
-                  <a:srgbClr val="4338CA"/>
-                </a:solidFill>
-                <a:latin typeface="Trebuchet MS" pitchFamily="34" charset="0"/>
-                <a:ea typeface="Trebuchet MS" pitchFamily="34" charset="-122"/>
-                <a:cs typeface="Trebuchet MS" pitchFamily="34" charset="-120"/>
-              </a:rPr>
-              <a:t>hologram</a:t>
-            </a:r>
-            <a:endParaRPr lang="en-US" sz="1300" dirty="0"/>
-          </a:p>
-        </p:txBody>
-      </p:sp>
-      <p:sp>
-        <p:nvSpPr>
-          <p:cNvPr id="26" name="Shape 24"/>
-          <p:cNvSpPr/>
-          <p:nvPr/>
-        </p:nvSpPr>
-        <p:spPr>
-          <a:xfrm>
-            <a:off x="2514600" y="3401568"/>
-            <a:ext cx="2011680" cy="502920"/>
-          </a:xfrm>
-          <a:prstGeom prst="rect">
-            <a:avLst>
-              <a:gd name="adj" fmla="val 14545"/>
-            </a:avLst>
-          </a:prstGeom>
-          <a:solidFill>
-            <a:srgbClr val="EEF2FF"/>
-          </a:solidFill>
-          <a:ln w="12700">
-            <a:solidFill>
-              <a:srgbClr val="6366F1"/>
-            </a:solidFill>
-            <a:prstDash val="solid"/>
-          </a:ln>
-        </p:spPr>
-      </p:sp>
-      <p:sp>
-        <p:nvSpPr>
-          <p:cNvPr id="27" name="Text 25"/>
-          <p:cNvSpPr/>
-          <p:nvPr/>
-        </p:nvSpPr>
-        <p:spPr>
-          <a:xfrm>
-            <a:off x="2514600" y="3401568"/>
-            <a:ext cx="2011680" cy="502920"/>
-          </a:xfrm>
-          <a:prstGeom prst="rect">
-            <a:avLst/>
-          </a:prstGeom>
-          <a:noFill/>
-          <a:ln/>
-        </p:spPr>
-        <p:txBody>
-          <a:bodyPr wrap="square" lIns="0" tIns="0" rIns="0" bIns="0" rtlCol="0" anchor="ctr"/>
-          <a:lstStyle/>
-          <a:p>
-            <a:pPr algn="ctr" indent="0" marL="0">
-              <a:buNone/>
-            </a:pPr>
-            <a:r>
-              <a:rPr lang="en-US" sz="1300" b="1" dirty="0">
-                <a:solidFill>
-                  <a:srgbClr val="4338CA"/>
-                </a:solidFill>
-                <a:latin typeface="Trebuchet MS" pitchFamily="34" charset="0"/>
-                <a:ea typeface="Trebuchet MS" pitchFamily="34" charset="-122"/>
-                <a:cs typeface="Trebuchet MS" pitchFamily="34" charset="-120"/>
-              </a:rPr>
-              <a:t>anagram</a:t>
-            </a:r>
-            <a:endParaRPr lang="en-US" sz="1300" dirty="0"/>
-          </a:p>
-        </p:txBody>
-      </p:sp>
-      <p:sp>
-        <p:nvSpPr>
-          <p:cNvPr id="28" name="Shape 26"/>
-          <p:cNvSpPr/>
-          <p:nvPr/>
-        </p:nvSpPr>
-        <p:spPr>
-          <a:xfrm>
-            <a:off x="4663440" y="3401568"/>
-            <a:ext cx="2011680" cy="502920"/>
-          </a:xfrm>
-          <a:prstGeom prst="rect">
-            <a:avLst>
-              <a:gd name="adj" fmla="val 14545"/>
-            </a:avLst>
-          </a:prstGeom>
-          <a:solidFill>
-            <a:srgbClr val="EEF2FF"/>
-          </a:solidFill>
-          <a:ln w="12700">
-            <a:solidFill>
-              <a:srgbClr val="6366F1"/>
-            </a:solidFill>
-            <a:prstDash val="solid"/>
-          </a:ln>
-        </p:spPr>
-      </p:sp>
-      <p:sp>
-        <p:nvSpPr>
-          <p:cNvPr id="29" name="Text 27"/>
-          <p:cNvSpPr/>
-          <p:nvPr/>
-        </p:nvSpPr>
-        <p:spPr>
-          <a:xfrm>
-            <a:off x="4663440" y="3401568"/>
-            <a:ext cx="2011680" cy="502920"/>
-          </a:xfrm>
-          <a:prstGeom prst="rect">
-            <a:avLst/>
-          </a:prstGeom>
-          <a:noFill/>
-          <a:ln/>
-        </p:spPr>
-        <p:txBody>
-          <a:bodyPr wrap="square" lIns="0" tIns="0" rIns="0" bIns="0" rtlCol="0" anchor="ctr"/>
-          <a:lstStyle/>
-          <a:p>
-            <a:pPr algn="ctr" indent="0" marL="0">
-              <a:buNone/>
-            </a:pPr>
-            <a:r>
-              <a:rPr lang="en-US" sz="1300" b="1" dirty="0">
-                <a:solidFill>
-                  <a:srgbClr val="4338CA"/>
-                </a:solidFill>
-                <a:latin typeface="Trebuchet MS" pitchFamily="34" charset="0"/>
-                <a:ea typeface="Trebuchet MS" pitchFamily="34" charset="-122"/>
-                <a:cs typeface="Trebuchet MS" pitchFamily="34" charset="-120"/>
-              </a:rPr>
-              <a:t>grammar</a:t>
+              <a:t>programs</a:t>
             </a:r>
             <a:endParaRPr lang="en-US" sz="1300" dirty="0"/>
           </a:p>
@@ -38404,7 +39082,7 @@
                 <a:ea typeface="Calibri" pitchFamily="34" charset="-122"/>
                 <a:cs typeface="Calibri" pitchFamily="34" charset="-120"/>
               </a:rPr>
-              <a:t>Word Labs  •  wordlabs.app  •  Root: 'gram' = written, drawn, recorded</a:t>
+              <a:t>Word Labs  •  wordlabs.app  •  Root: 'gram' = written; something written</a:t>
             </a:r>
             <a:endParaRPr lang="en-US" sz="800" dirty="0"/>
           </a:p>
@@ -38705,7 +39383,7 @@
                 <a:ea typeface="Trebuchet MS" pitchFamily="34" charset="-122"/>
                 <a:cs typeface="Trebuchet MS" pitchFamily="34" charset="-120"/>
               </a:rPr>
-              <a:t>tele-</a:t>
+              <a:t>dia-</a:t>
             </a:r>
             <a:endParaRPr lang="en-US" sz="1300" dirty="0"/>
           </a:p>
@@ -38897,7 +39575,7 @@
                 <a:ea typeface="Trebuchet MS" pitchFamily="34" charset="-122"/>
                 <a:cs typeface="Trebuchet MS" pitchFamily="34" charset="-120"/>
               </a:rPr>
-              <a:t>dia-</a:t>
+              <a:t>mono-</a:t>
             </a:r>
             <a:endParaRPr lang="en-US" sz="1300" dirty="0"/>
           </a:p>
@@ -38943,7 +39621,7 @@
             <a:avLst/>
           </a:prstGeom>
           <a:solidFill>
-            <a:srgbClr val="FCE7F3"/>
+            <a:srgbClr val="F1F5F9"/>
           </a:solidFill>
           <a:ln w="12700">
             <a:solidFill>
@@ -38955,18 +39633,43 @@
       </p:sp>
       <p:sp>
         <p:nvSpPr>
-          <p:cNvPr id="27" name="Text 25"/>
-          <p:cNvSpPr/>
-          <p:nvPr/>
-        </p:nvSpPr>
-        <p:spPr>
-          <a:xfrm>
-            <a:off x="5943600" y="2212848"/>
+          <p:cNvPr id="27" name="Shape 25"/>
+          <p:cNvSpPr/>
+          <p:nvPr/>
+        </p:nvSpPr>
+        <p:spPr>
+          <a:xfrm>
+            <a:off x="640080" y="2670048"/>
             <a:ext cx="1463040" cy="420624"/>
           </a:xfrm>
           <a:prstGeom prst="rect">
             <a:avLst/>
           </a:prstGeom>
+          <a:solidFill>
+            <a:srgbClr val="DDD6FE"/>
+          </a:solidFill>
+          <a:ln w="12700">
+            <a:solidFill>
+              <a:srgbClr val="E5E7EB"/>
+            </a:solidFill>
+            <a:prstDash val="solid"/>
+          </a:ln>
+        </p:spPr>
+      </p:sp>
+      <p:sp>
+        <p:nvSpPr>
+          <p:cNvPr id="28" name="Text 26"/>
+          <p:cNvSpPr/>
+          <p:nvPr/>
+        </p:nvSpPr>
+        <p:spPr>
+          <a:xfrm>
+            <a:off x="640080" y="2670048"/>
+            <a:ext cx="1463040" cy="420624"/>
+          </a:xfrm>
+          <a:prstGeom prst="rect">
+            <a:avLst/>
+          </a:prstGeom>
           <a:noFill/>
           <a:ln/>
         </p:spPr>
@@ -38980,13 +39683,13 @@
             <a:r>
               <a:rPr lang="en-US" sz="1300" b="1" dirty="0">
                 <a:solidFill>
-                  <a:srgbClr val="9D174D"/>
+                  <a:srgbClr val="4C1D95"/>
                 </a:solidFill>
                 <a:latin typeface="Trebuchet MS" pitchFamily="34" charset="0"/>
                 <a:ea typeface="Trebuchet MS" pitchFamily="34" charset="-122"/>
                 <a:cs typeface="Trebuchet MS" pitchFamily="34" charset="-120"/>
               </a:rPr>
-              <a:t>-mar</a:t>
+              <a:t>pro-</a:t>
             </a:r>
             <a:endParaRPr lang="en-US" sz="1300" dirty="0"/>
           </a:p>
@@ -38994,19 +39697,69 @@
       </p:sp>
       <p:sp>
         <p:nvSpPr>
-          <p:cNvPr id="28" name="Shape 26"/>
-          <p:cNvSpPr/>
-          <p:nvPr/>
-        </p:nvSpPr>
-        <p:spPr>
-          <a:xfrm>
-            <a:off x="640080" y="2670048"/>
+          <p:cNvPr id="29" name="Shape 27"/>
+          <p:cNvSpPr/>
+          <p:nvPr/>
+        </p:nvSpPr>
+        <p:spPr>
+          <a:xfrm>
+            <a:off x="3291840" y="2670048"/>
+            <a:ext cx="1645920" cy="420624"/>
+          </a:xfrm>
+          <a:prstGeom prst="rect">
+            <a:avLst/>
+          </a:prstGeom>
+          <a:solidFill>
+            <a:srgbClr val="F8FAFC"/>
+          </a:solidFill>
+          <a:ln w="12700">
+            <a:solidFill>
+              <a:srgbClr val="E5E7EB"/>
+            </a:solidFill>
+            <a:prstDash val="solid"/>
+          </a:ln>
+        </p:spPr>
+      </p:sp>
+      <p:sp>
+        <p:nvSpPr>
+          <p:cNvPr id="30" name="Shape 28"/>
+          <p:cNvSpPr/>
+          <p:nvPr/>
+        </p:nvSpPr>
+        <p:spPr>
+          <a:xfrm>
+            <a:off x="5943600" y="2670048"/>
             <a:ext cx="1463040" cy="420624"/>
           </a:xfrm>
           <a:prstGeom prst="rect">
             <a:avLst/>
           </a:prstGeom>
           <a:solidFill>
+            <a:srgbClr val="F8FAFC"/>
+          </a:solidFill>
+          <a:ln w="12700">
+            <a:solidFill>
+              <a:srgbClr val="E5E7EB"/>
+            </a:solidFill>
+            <a:prstDash val="solid"/>
+          </a:ln>
+        </p:spPr>
+      </p:sp>
+      <p:sp>
+        <p:nvSpPr>
+          <p:cNvPr id="31" name="Shape 29"/>
+          <p:cNvSpPr/>
+          <p:nvPr/>
+        </p:nvSpPr>
+        <p:spPr>
+          <a:xfrm>
+            <a:off x="640080" y="3127248"/>
+            <a:ext cx="1463040" cy="420624"/>
+          </a:xfrm>
+          <a:prstGeom prst="rect">
+            <a:avLst/>
+          </a:prstGeom>
+          <a:solidFill>
             <a:srgbClr val="DDD6FE"/>
           </a:solidFill>
           <a:ln w="12700">
@@ -39019,13 +39772,13 @@
       </p:sp>
       <p:sp>
         <p:nvSpPr>
-          <p:cNvPr id="29" name="Text 27"/>
-          <p:cNvSpPr/>
-          <p:nvPr/>
-        </p:nvSpPr>
-        <p:spPr>
-          <a:xfrm>
-            <a:off x="640080" y="2670048"/>
+          <p:cNvPr id="32" name="Text 30"/>
+          <p:cNvSpPr/>
+          <p:nvPr/>
+        </p:nvSpPr>
+        <p:spPr>
+          <a:xfrm>
+            <a:off x="640080" y="3127248"/>
             <a:ext cx="1463040" cy="420624"/>
           </a:xfrm>
           <a:prstGeom prst="rect">
@@ -39050,7 +39803,7 @@
                 <a:ea typeface="Trebuchet MS" pitchFamily="34" charset="-122"/>
                 <a:cs typeface="Trebuchet MS" pitchFamily="34" charset="-120"/>
               </a:rPr>
-              <a:t>pro-</a:t>
+              <a:t>tele-</a:t>
             </a:r>
             <a:endParaRPr lang="en-US" sz="1300" dirty="0"/>
           </a:p>
@@ -39058,160 +39811,7 @@
       </p:sp>
       <p:sp>
         <p:nvSpPr>
-          <p:cNvPr id="30" name="Shape 28"/>
-          <p:cNvSpPr/>
-          <p:nvPr/>
-        </p:nvSpPr>
-        <p:spPr>
-          <a:xfrm>
-            <a:off x="3291840" y="2670048"/>
-            <a:ext cx="1645920" cy="420624"/>
-          </a:xfrm>
-          <a:prstGeom prst="rect">
-            <a:avLst/>
-          </a:prstGeom>
-          <a:solidFill>
-            <a:srgbClr val="F8FAFC"/>
-          </a:solidFill>
-          <a:ln w="12700">
-            <a:solidFill>
-              <a:srgbClr val="E5E7EB"/>
-            </a:solidFill>
-            <a:prstDash val="solid"/>
-          </a:ln>
-        </p:spPr>
-      </p:sp>
-      <p:sp>
-        <p:nvSpPr>
-          <p:cNvPr id="31" name="Shape 29"/>
-          <p:cNvSpPr/>
-          <p:nvPr/>
-        </p:nvSpPr>
-        <p:spPr>
-          <a:xfrm>
-            <a:off x="5943600" y="2670048"/>
-            <a:ext cx="1463040" cy="420624"/>
-          </a:xfrm>
-          <a:prstGeom prst="rect">
-            <a:avLst/>
-          </a:prstGeom>
-          <a:solidFill>
-            <a:srgbClr val="FCE7F3"/>
-          </a:solidFill>
-          <a:ln w="12700">
-            <a:solidFill>
-              <a:srgbClr val="E5E7EB"/>
-            </a:solidFill>
-            <a:prstDash val="solid"/>
-          </a:ln>
-        </p:spPr>
-      </p:sp>
-      <p:sp>
-        <p:nvSpPr>
-          <p:cNvPr id="32" name="Text 30"/>
-          <p:cNvSpPr/>
-          <p:nvPr/>
-        </p:nvSpPr>
-        <p:spPr>
-          <a:xfrm>
-            <a:off x="5943600" y="2670048"/>
-            <a:ext cx="1463040" cy="420624"/>
-          </a:xfrm>
-          <a:prstGeom prst="rect">
-            <a:avLst/>
-          </a:prstGeom>
-          <a:noFill/>
-          <a:ln/>
-        </p:spPr>
-        <p:txBody>
-          <a:bodyPr wrap="square" lIns="0" tIns="0" rIns="0" bIns="0" rtlCol="0" anchor="ctr"/>
-          <a:lstStyle/>
-          <a:p>
-            <a:pPr algn="ctr" indent="0" marL="0">
-              <a:buNone/>
-            </a:pPr>
-            <a:r>
-              <a:rPr lang="en-US" sz="1300" b="1" dirty="0">
-                <a:solidFill>
-                  <a:srgbClr val="9D174D"/>
-                </a:solidFill>
-                <a:latin typeface="Trebuchet MS" pitchFamily="34" charset="0"/>
-                <a:ea typeface="Trebuchet MS" pitchFamily="34" charset="-122"/>
-                <a:cs typeface="Trebuchet MS" pitchFamily="34" charset="-120"/>
-              </a:rPr>
-              <a:t>-ming</a:t>
-            </a:r>
-            <a:endParaRPr lang="en-US" sz="1300" dirty="0"/>
-          </a:p>
-        </p:txBody>
-      </p:sp>
-      <p:sp>
-        <p:nvSpPr>
           <p:cNvPr id="33" name="Shape 31"/>
-          <p:cNvSpPr/>
-          <p:nvPr/>
-        </p:nvSpPr>
-        <p:spPr>
-          <a:xfrm>
-            <a:off x="640080" y="3127248"/>
-            <a:ext cx="1463040" cy="420624"/>
-          </a:xfrm>
-          <a:prstGeom prst="rect">
-            <a:avLst/>
-          </a:prstGeom>
-          <a:solidFill>
-            <a:srgbClr val="DDD6FE"/>
-          </a:solidFill>
-          <a:ln w="12700">
-            <a:solidFill>
-              <a:srgbClr val="E5E7EB"/>
-            </a:solidFill>
-            <a:prstDash val="solid"/>
-          </a:ln>
-        </p:spPr>
-      </p:sp>
-      <p:sp>
-        <p:nvSpPr>
-          <p:cNvPr id="34" name="Text 32"/>
-          <p:cNvSpPr/>
-          <p:nvPr/>
-        </p:nvSpPr>
-        <p:spPr>
-          <a:xfrm>
-            <a:off x="640080" y="3127248"/>
-            <a:ext cx="1463040" cy="420624"/>
-          </a:xfrm>
-          <a:prstGeom prst="rect">
-            <a:avLst/>
-          </a:prstGeom>
-          <a:noFill/>
-          <a:ln/>
-        </p:spPr>
-        <p:txBody>
-          <a:bodyPr wrap="square" lIns="0" tIns="0" rIns="0" bIns="0" rtlCol="0" anchor="ctr"/>
-          <a:lstStyle/>
-          <a:p>
-            <a:pPr algn="ctr" indent="0" marL="0">
-              <a:buNone/>
-            </a:pPr>
-            <a:r>
-              <a:rPr lang="en-US" sz="1300" b="1" dirty="0">
-                <a:solidFill>
-                  <a:srgbClr val="4C1D95"/>
-                </a:solidFill>
-                <a:latin typeface="Trebuchet MS" pitchFamily="34" charset="0"/>
-                <a:ea typeface="Trebuchet MS" pitchFamily="34" charset="-122"/>
-                <a:cs typeface="Trebuchet MS" pitchFamily="34" charset="-120"/>
-              </a:rPr>
-              <a:t>mono-</a:t>
-            </a:r>
-            <a:endParaRPr lang="en-US" sz="1300" dirty="0"/>
-          </a:p>
-        </p:txBody>
-      </p:sp>
-      <p:sp>
-        <p:nvSpPr>
-          <p:cNvPr id="35" name="Shape 33"/>
           <p:cNvSpPr/>
           <p:nvPr/>
         </p:nvSpPr>
@@ -39236,7 +39836,7 @@
       </p:sp>
       <p:sp>
         <p:nvSpPr>
-          <p:cNvPr id="36" name="Shape 34"/>
+          <p:cNvPr id="34" name="Shape 32"/>
           <p:cNvSpPr/>
           <p:nvPr/>
         </p:nvSpPr>
@@ -39249,7 +39849,7 @@
             <a:avLst/>
           </a:prstGeom>
           <a:solidFill>
-            <a:srgbClr val="FCE7F3"/>
+            <a:srgbClr val="F1F5F9"/>
           </a:solidFill>
           <a:ln w="12700">
             <a:solidFill>
@@ -39261,205 +39861,13 @@
       </p:sp>
       <p:sp>
         <p:nvSpPr>
-          <p:cNvPr id="37" name="Text 35"/>
-          <p:cNvSpPr/>
-          <p:nvPr/>
-        </p:nvSpPr>
-        <p:spPr>
-          <a:xfrm>
-            <a:off x="5943600" y="3127248"/>
-            <a:ext cx="1463040" cy="420624"/>
-          </a:xfrm>
-          <a:prstGeom prst="rect">
-            <a:avLst/>
-          </a:prstGeom>
-          <a:noFill/>
-          <a:ln/>
-        </p:spPr>
-        <p:txBody>
-          <a:bodyPr wrap="square" lIns="0" tIns="0" rIns="0" bIns="0" rtlCol="0" anchor="ctr"/>
-          <a:lstStyle/>
-          <a:p>
-            <a:pPr algn="ctr" indent="0" marL="0">
-              <a:buNone/>
-            </a:pPr>
-            <a:r>
-              <a:rPr lang="en-US" sz="1300" b="1" dirty="0">
-                <a:solidFill>
-                  <a:srgbClr val="9D174D"/>
-                </a:solidFill>
-                <a:latin typeface="Trebuchet MS" pitchFamily="34" charset="0"/>
-                <a:ea typeface="Trebuchet MS" pitchFamily="34" charset="-122"/>
-                <a:cs typeface="Trebuchet MS" pitchFamily="34" charset="-120"/>
-              </a:rPr>
-              <a:t>-med</a:t>
-            </a:r>
-            <a:endParaRPr lang="en-US" sz="1300" dirty="0"/>
-          </a:p>
-        </p:txBody>
-      </p:sp>
-      <p:sp>
-        <p:nvSpPr>
-          <p:cNvPr id="38" name="Shape 36"/>
-          <p:cNvSpPr/>
-          <p:nvPr/>
-        </p:nvSpPr>
-        <p:spPr>
-          <a:xfrm>
-            <a:off x="640080" y="3584448"/>
-            <a:ext cx="1463040" cy="420624"/>
-          </a:xfrm>
-          <a:prstGeom prst="rect">
-            <a:avLst/>
-          </a:prstGeom>
-          <a:solidFill>
-            <a:srgbClr val="DDD6FE"/>
-          </a:solidFill>
-          <a:ln w="12700">
-            <a:solidFill>
-              <a:srgbClr val="E5E7EB"/>
-            </a:solidFill>
-            <a:prstDash val="solid"/>
-          </a:ln>
-        </p:spPr>
-      </p:sp>
-      <p:sp>
-        <p:nvSpPr>
-          <p:cNvPr id="39" name="Text 37"/>
-          <p:cNvSpPr/>
-          <p:nvPr/>
-        </p:nvSpPr>
-        <p:spPr>
-          <a:xfrm>
-            <a:off x="640080" y="3584448"/>
-            <a:ext cx="1463040" cy="420624"/>
-          </a:xfrm>
-          <a:prstGeom prst="rect">
-            <a:avLst/>
-          </a:prstGeom>
-          <a:noFill/>
-          <a:ln/>
-        </p:spPr>
-        <p:txBody>
-          <a:bodyPr wrap="square" lIns="0" tIns="0" rIns="0" bIns="0" rtlCol="0" anchor="ctr"/>
-          <a:lstStyle/>
-          <a:p>
-            <a:pPr algn="ctr" indent="0" marL="0">
-              <a:buNone/>
-            </a:pPr>
-            <a:r>
-              <a:rPr lang="en-US" sz="1300" b="1" dirty="0">
-                <a:solidFill>
-                  <a:srgbClr val="4C1D95"/>
-                </a:solidFill>
-                <a:latin typeface="Trebuchet MS" pitchFamily="34" charset="0"/>
-                <a:ea typeface="Trebuchet MS" pitchFamily="34" charset="-122"/>
-                <a:cs typeface="Trebuchet MS" pitchFamily="34" charset="-120"/>
-              </a:rPr>
-              <a:t>holo-</a:t>
-            </a:r>
-            <a:endParaRPr lang="en-US" sz="1300" dirty="0"/>
-          </a:p>
-        </p:txBody>
-      </p:sp>
-      <p:sp>
-        <p:nvSpPr>
-          <p:cNvPr id="40" name="Shape 38"/>
-          <p:cNvSpPr/>
-          <p:nvPr/>
-        </p:nvSpPr>
-        <p:spPr>
-          <a:xfrm>
-            <a:off x="3291840" y="3584448"/>
-            <a:ext cx="1645920" cy="420624"/>
-          </a:xfrm>
-          <a:prstGeom prst="rect">
-            <a:avLst/>
-          </a:prstGeom>
-          <a:solidFill>
-            <a:srgbClr val="F8FAFC"/>
-          </a:solidFill>
-          <a:ln w="12700">
-            <a:solidFill>
-              <a:srgbClr val="E5E7EB"/>
-            </a:solidFill>
-            <a:prstDash val="solid"/>
-          </a:ln>
-        </p:spPr>
-      </p:sp>
-      <p:sp>
-        <p:nvSpPr>
-          <p:cNvPr id="41" name="Shape 39"/>
-          <p:cNvSpPr/>
-          <p:nvPr/>
-        </p:nvSpPr>
-        <p:spPr>
-          <a:xfrm>
-            <a:off x="5943600" y="3584448"/>
-            <a:ext cx="1463040" cy="420624"/>
-          </a:xfrm>
-          <a:prstGeom prst="rect">
-            <a:avLst/>
-          </a:prstGeom>
-          <a:solidFill>
-            <a:srgbClr val="FCE7F3"/>
-          </a:solidFill>
-          <a:ln w="12700">
-            <a:solidFill>
-              <a:srgbClr val="E5E7EB"/>
-            </a:solidFill>
-            <a:prstDash val="solid"/>
-          </a:ln>
-        </p:spPr>
-      </p:sp>
-      <p:sp>
-        <p:nvSpPr>
-          <p:cNvPr id="42" name="Text 40"/>
-          <p:cNvSpPr/>
-          <p:nvPr/>
-        </p:nvSpPr>
-        <p:spPr>
-          <a:xfrm>
-            <a:off x="5943600" y="3584448"/>
-            <a:ext cx="1463040" cy="420624"/>
-          </a:xfrm>
-          <a:prstGeom prst="rect">
-            <a:avLst/>
-          </a:prstGeom>
-          <a:noFill/>
-          <a:ln/>
-        </p:spPr>
-        <p:txBody>
-          <a:bodyPr wrap="square" lIns="0" tIns="0" rIns="0" bIns="0" rtlCol="0" anchor="ctr"/>
-          <a:lstStyle/>
-          <a:p>
-            <a:pPr algn="ctr" indent="0" marL="0">
-              <a:buNone/>
-            </a:pPr>
-            <a:r>
-              <a:rPr lang="en-US" sz="1300" b="1" dirty="0">
-                <a:solidFill>
-                  <a:srgbClr val="9D174D"/>
-                </a:solidFill>
-                <a:latin typeface="Trebuchet MS" pitchFamily="34" charset="0"/>
-                <a:ea typeface="Trebuchet MS" pitchFamily="34" charset="-122"/>
-                <a:cs typeface="Trebuchet MS" pitchFamily="34" charset="-120"/>
-              </a:rPr>
-              <a:t>-matical</a:t>
-            </a:r>
-            <a:endParaRPr lang="en-US" sz="1300" dirty="0"/>
-          </a:p>
-        </p:txBody>
-      </p:sp>
-      <p:sp>
-        <p:nvSpPr>
-          <p:cNvPr id="43" name="Text 41"/>
-          <p:cNvSpPr/>
-          <p:nvPr/>
-        </p:nvSpPr>
-        <p:spPr>
-          <a:xfrm>
-            <a:off x="365760" y="4178808"/>
+          <p:cNvPr id="35" name="Text 33"/>
+          <p:cNvSpPr/>
+          <p:nvPr/>
+        </p:nvSpPr>
+        <p:spPr>
+          <a:xfrm>
+            <a:off x="365760" y="3721608"/>
             <a:ext cx="1097280" cy="420624"/>
           </a:xfrm>
           <a:prstGeom prst="rect">
@@ -39492,14 +39900,14 @@
       </p:sp>
       <p:sp>
         <p:nvSpPr>
-          <p:cNvPr id="44" name="Shape 42"/>
-          <p:cNvSpPr/>
-          <p:nvPr/>
-        </p:nvSpPr>
-        <p:spPr>
-          <a:xfrm>
-            <a:off x="1508760" y="4178808"/>
-            <a:ext cx="1097280" cy="420624"/>
+          <p:cNvPr id="36" name="Shape 34"/>
+          <p:cNvSpPr/>
+          <p:nvPr/>
+        </p:nvSpPr>
+        <p:spPr>
+          <a:xfrm>
+            <a:off x="1508760" y="3721608"/>
+            <a:ext cx="950976" cy="420624"/>
           </a:xfrm>
           <a:prstGeom prst="rect">
             <a:avLst>
@@ -39526,14 +39934,14 @@
       </p:sp>
       <p:sp>
         <p:nvSpPr>
-          <p:cNvPr id="45" name="Text 43"/>
-          <p:cNvSpPr/>
-          <p:nvPr/>
-        </p:nvSpPr>
-        <p:spPr>
-          <a:xfrm>
-            <a:off x="1508760" y="4178808"/>
-            <a:ext cx="1097280" cy="420624"/>
+          <p:cNvPr id="37" name="Text 35"/>
+          <p:cNvSpPr/>
+          <p:nvPr/>
+        </p:nvSpPr>
+        <p:spPr>
+          <a:xfrm>
+            <a:off x="1508760" y="3721608"/>
+            <a:ext cx="950976" cy="420624"/>
           </a:xfrm>
           <a:prstGeom prst="rect">
             <a:avLst/>
@@ -39557,7 +39965,7 @@
                 <a:ea typeface="Trebuchet MS" pitchFamily="34" charset="-122"/>
                 <a:cs typeface="Trebuchet MS" pitchFamily="34" charset="-120"/>
               </a:rPr>
-              <a:t>tele-</a:t>
+              <a:t>dia-</a:t>
             </a:r>
             <a:endParaRPr lang="en-US" sz="1300" dirty="0"/>
           </a:p>
@@ -39565,13 +39973,13 @@
       </p:sp>
       <p:sp>
         <p:nvSpPr>
-          <p:cNvPr id="46" name="Text 44"/>
-          <p:cNvSpPr/>
-          <p:nvPr/>
-        </p:nvSpPr>
-        <p:spPr>
-          <a:xfrm>
-            <a:off x="2633472" y="4178808"/>
+          <p:cNvPr id="38" name="Text 36"/>
+          <p:cNvSpPr/>
+          <p:nvPr/>
+        </p:nvSpPr>
+        <p:spPr>
+          <a:xfrm>
+            <a:off x="2487168" y="3721608"/>
             <a:ext cx="320040" cy="420624"/>
           </a:xfrm>
           <a:prstGeom prst="rect">
@@ -39604,13 +40012,13 @@
       </p:sp>
       <p:sp>
         <p:nvSpPr>
-          <p:cNvPr id="47" name="Shape 45"/>
-          <p:cNvSpPr/>
-          <p:nvPr/>
-        </p:nvSpPr>
-        <p:spPr>
-          <a:xfrm>
-            <a:off x="2980944" y="4178808"/>
+          <p:cNvPr id="39" name="Shape 37"/>
+          <p:cNvSpPr/>
+          <p:nvPr/>
+        </p:nvSpPr>
+        <p:spPr>
+          <a:xfrm>
+            <a:off x="2834640" y="3721608"/>
             <a:ext cx="1243584" cy="420624"/>
           </a:xfrm>
           <a:prstGeom prst="rect">
@@ -39638,13 +40046,13 @@
       </p:sp>
       <p:sp>
         <p:nvSpPr>
-          <p:cNvPr id="48" name="Text 46"/>
-          <p:cNvSpPr/>
-          <p:nvPr/>
-        </p:nvSpPr>
-        <p:spPr>
-          <a:xfrm>
-            <a:off x="2980944" y="4178808"/>
+          <p:cNvPr id="40" name="Text 38"/>
+          <p:cNvSpPr/>
+          <p:nvPr/>
+        </p:nvSpPr>
+        <p:spPr>
+          <a:xfrm>
+            <a:off x="2834640" y="3721608"/>
             <a:ext cx="1243584" cy="420624"/>
           </a:xfrm>
           <a:prstGeom prst="rect">
@@ -39677,13 +40085,13 @@
       </p:sp>
       <p:sp>
         <p:nvSpPr>
-          <p:cNvPr id="49" name="Text 47"/>
-          <p:cNvSpPr/>
-          <p:nvPr/>
-        </p:nvSpPr>
-        <p:spPr>
-          <a:xfrm>
-            <a:off x="4251960" y="4178808"/>
+          <p:cNvPr id="41" name="Text 39"/>
+          <p:cNvSpPr/>
+          <p:nvPr/>
+        </p:nvSpPr>
+        <p:spPr>
+          <a:xfrm>
+            <a:off x="4105656" y="3721608"/>
             <a:ext cx="320040" cy="420624"/>
           </a:xfrm>
           <a:prstGeom prst="rect">
@@ -39716,13 +40124,13 @@
       </p:sp>
       <p:sp>
         <p:nvSpPr>
-          <p:cNvPr id="50" name="Shape 48"/>
-          <p:cNvSpPr/>
-          <p:nvPr/>
-        </p:nvSpPr>
-        <p:spPr>
-          <a:xfrm>
-            <a:off x="4599432" y="4178808"/>
+          <p:cNvPr id="42" name="Shape 40"/>
+          <p:cNvSpPr/>
+          <p:nvPr/>
+        </p:nvSpPr>
+        <p:spPr>
+          <a:xfrm>
+            <a:off x="4453128" y="3721608"/>
             <a:ext cx="822960" cy="420624"/>
           </a:xfrm>
           <a:prstGeom prst="rect">
@@ -39750,13 +40158,13 @@
       </p:sp>
       <p:sp>
         <p:nvSpPr>
-          <p:cNvPr id="51" name="Text 49"/>
-          <p:cNvSpPr/>
-          <p:nvPr/>
-        </p:nvSpPr>
-        <p:spPr>
-          <a:xfrm>
-            <a:off x="4599432" y="4178808"/>
+          <p:cNvPr id="43" name="Text 41"/>
+          <p:cNvSpPr/>
+          <p:nvPr/>
+        </p:nvSpPr>
+        <p:spPr>
+          <a:xfrm>
+            <a:off x="4453128" y="3721608"/>
             <a:ext cx="822960" cy="420624"/>
           </a:xfrm>
           <a:prstGeom prst="rect">
@@ -39789,13 +40197,13 @@
       </p:sp>
       <p:sp>
         <p:nvSpPr>
-          <p:cNvPr id="52" name="Text 50"/>
-          <p:cNvSpPr/>
-          <p:nvPr/>
-        </p:nvSpPr>
-        <p:spPr>
-          <a:xfrm>
-            <a:off x="5495544" y="4178808"/>
+          <p:cNvPr id="44" name="Text 42"/>
+          <p:cNvSpPr/>
+          <p:nvPr/>
+        </p:nvSpPr>
+        <p:spPr>
+          <a:xfrm>
+            <a:off x="5349240" y="3721608"/>
             <a:ext cx="365760" cy="420624"/>
           </a:xfrm>
           <a:prstGeom prst="rect">
@@ -39828,13 +40236,13 @@
       </p:sp>
       <p:sp>
         <p:nvSpPr>
-          <p:cNvPr id="53" name="Shape 51"/>
-          <p:cNvSpPr/>
-          <p:nvPr/>
-        </p:nvSpPr>
-        <p:spPr>
-          <a:xfrm>
-            <a:off x="5907024" y="4178808"/>
+          <p:cNvPr id="45" name="Shape 43"/>
+          <p:cNvSpPr/>
+          <p:nvPr/>
+        </p:nvSpPr>
+        <p:spPr>
+          <a:xfrm>
+            <a:off x="5760720" y="3721608"/>
             <a:ext cx="2194560" cy="420624"/>
           </a:xfrm>
           <a:prstGeom prst="rect">
@@ -39855,13 +40263,13 @@
       </p:sp>
       <p:sp>
         <p:nvSpPr>
-          <p:cNvPr id="54" name="Text 52"/>
-          <p:cNvSpPr/>
-          <p:nvPr/>
-        </p:nvSpPr>
-        <p:spPr>
-          <a:xfrm>
-            <a:off x="5907024" y="4178808"/>
+          <p:cNvPr id="46" name="Text 44"/>
+          <p:cNvSpPr/>
+          <p:nvPr/>
+        </p:nvSpPr>
+        <p:spPr>
+          <a:xfrm>
+            <a:off x="5760720" y="3721608"/>
             <a:ext cx="2194560" cy="420624"/>
           </a:xfrm>
           <a:prstGeom prst="rect">
@@ -39886,7 +40294,7 @@
                 <a:ea typeface="Trebuchet MS" pitchFamily="34" charset="-122"/>
                 <a:cs typeface="Trebuchet MS" pitchFamily="34" charset="-120"/>
               </a:rPr>
-              <a:t>telegram</a:t>
+              <a:t>gram</a:t>
             </a:r>
             <a:endParaRPr lang="en-US" sz="1400" dirty="0"/>
           </a:p>
@@ -40178,7 +40586,7 @@
                 <a:ea typeface="Calibri" pitchFamily="34" charset="-122"/>
                 <a:cs typeface="Calibri" pitchFamily="34" charset="-120"/>
               </a:rPr>
-              <a:t>Word Labs  •  wordlabs.app  •  Root: 'gram' = written, drawn, recorded</a:t>
+              <a:t>Word Labs  •  wordlabs.app  •  Root: 'gram' = written; something written</a:t>
             </a:r>
             <a:endParaRPr lang="en-US" sz="800" dirty="0"/>
           </a:p>
@@ -40290,7 +40698,7 @@
                 <a:ea typeface="Trebuchet MS" pitchFamily="34" charset="-122"/>
                 <a:cs typeface="Trebuchet MS" pitchFamily="34" charset="-120"/>
               </a:rPr>
-              <a:t>telegram</a:t>
+              <a:t>gram</a:t>
             </a:r>
             <a:endParaRPr lang="en-US" sz="1200" dirty="0"/>
           </a:p>
@@ -40356,7 +40764,7 @@
                 <a:ea typeface="Calibri" pitchFamily="34" charset="-122"/>
                 <a:cs typeface="Calibri" pitchFamily="34" charset="-120"/>
               </a:rPr>
-              <a:t>The set of rules that explain how words are put together to make sentences.</a:t>
+              <a:t>small units used for measuring how heavy things are</a:t>
             </a:r>
             <a:endParaRPr lang="en-US" sz="1200" dirty="0"/>
           </a:p>
@@ -40429,7 +40837,7 @@
                 <a:ea typeface="Trebuchet MS" pitchFamily="34" charset="-122"/>
                 <a:cs typeface="Trebuchet MS" pitchFamily="34" charset="-120"/>
               </a:rPr>
-              <a:t>diagram</a:t>
+              <a:t>grams</a:t>
             </a:r>
             <a:endParaRPr lang="en-US" sz="1200" dirty="0"/>
           </a:p>
@@ -40495,7 +40903,7 @@
                 <a:ea typeface="Calibri" pitchFamily="34" charset="-122"/>
                 <a:cs typeface="Calibri" pitchFamily="34" charset="-120"/>
               </a:rPr>
-              <a:t>A set of instructions for a computer, or a plan of activities for an event.</a:t>
+              <a:t>a set of planned activities, events, or computer instructions</a:t>
             </a:r>
             <a:endParaRPr lang="en-US" sz="1200" dirty="0"/>
           </a:p>
@@ -40634,7 +41042,7 @@
                 <a:ea typeface="Calibri" pitchFamily="34" charset="-122"/>
                 <a:cs typeface="Calibri" pitchFamily="34" charset="-120"/>
               </a:rPr>
-              <a:t>A 3D image made using lasers that seems to float in the air.</a:t>
+              <a:t>sets of planned activities or computer instructions</a:t>
             </a:r>
             <a:endParaRPr lang="en-US" sz="1200" dirty="0"/>
           </a:p>
@@ -40707,7 +41115,7 @@
                 <a:ea typeface="Trebuchet MS" pitchFamily="34" charset="-122"/>
                 <a:cs typeface="Trebuchet MS" pitchFamily="34" charset="-120"/>
               </a:rPr>
-              <a:t>monogram</a:t>
+              <a:t>programs</a:t>
             </a:r>
             <a:endParaRPr lang="en-US" sz="1200" dirty="0"/>
           </a:p>
@@ -40773,424 +41181,7 @@
                 <a:ea typeface="Calibri" pitchFamily="34" charset="-122"/>
                 <a:cs typeface="Calibri" pitchFamily="34" charset="-120"/>
               </a:rPr>
-              <a:t>A word made by rearranging the letters of another word, like 'team' and 'mate'.</a:t>
-            </a:r>
-            <a:endParaRPr lang="en-US" sz="1200" dirty="0"/>
-          </a:p>
-        </p:txBody>
-      </p:sp>
-      <p:sp>
-        <p:nvSpPr>
-          <p:cNvPr id="27" name="Shape 25"/>
-          <p:cNvSpPr/>
-          <p:nvPr/>
-        </p:nvSpPr>
-        <p:spPr>
-          <a:xfrm>
-            <a:off x="365760" y="3310128"/>
-            <a:ext cx="2011680" cy="457200"/>
-          </a:xfrm>
-          <a:prstGeom prst="rect">
-            <a:avLst>
-              <a:gd name="adj" fmla="val 12000"/>
-            </a:avLst>
-          </a:prstGeom>
-          <a:solidFill>
-            <a:srgbClr val="EEF2FF"/>
-          </a:solidFill>
-          <a:ln w="12700">
-            <a:solidFill>
-              <a:srgbClr val="6366F1"/>
-            </a:solidFill>
-            <a:prstDash val="solid"/>
-          </a:ln>
-          <a:effectLst>
-            <a:outerShdw sx="100000" sy="100000" kx="0" ky="0" algn="bl" rotWithShape="0" blurRad="101600" dist="38100" dir="8100000">
-              <a:srgbClr val="000000">
-                <a:alpha val="12000"/>
-              </a:srgbClr>
-            </a:outerShdw>
-          </a:effectLst>
-        </p:spPr>
-      </p:sp>
-      <p:sp>
-        <p:nvSpPr>
-          <p:cNvPr id="28" name="Text 26"/>
-          <p:cNvSpPr/>
-          <p:nvPr/>
-        </p:nvSpPr>
-        <p:spPr>
-          <a:xfrm>
-            <a:off x="365760" y="3310128"/>
-            <a:ext cx="2011680" cy="457200"/>
-          </a:xfrm>
-          <a:prstGeom prst="rect">
-            <a:avLst/>
-          </a:prstGeom>
-          <a:noFill/>
-          <a:ln/>
-        </p:spPr>
-        <p:txBody>
-          <a:bodyPr wrap="square" lIns="0" tIns="0" rIns="0" bIns="0" rtlCol="0" anchor="ctr"/>
-          <a:lstStyle/>
-          <a:p>
-            <a:pPr algn="ctr" indent="0" marL="0">
-              <a:buNone/>
-            </a:pPr>
-            <a:r>
-              <a:rPr lang="en-US" sz="1200" b="1" dirty="0">
-                <a:solidFill>
-                  <a:srgbClr val="4338CA"/>
-                </a:solidFill>
-                <a:latin typeface="Trebuchet MS" pitchFamily="34" charset="0"/>
-                <a:ea typeface="Trebuchet MS" pitchFamily="34" charset="-122"/>
-                <a:cs typeface="Trebuchet MS" pitchFamily="34" charset="-120"/>
-              </a:rPr>
-              <a:t>hologram</a:t>
-            </a:r>
-            <a:endParaRPr lang="en-US" sz="1200" dirty="0"/>
-          </a:p>
-        </p:txBody>
-      </p:sp>
-      <p:sp>
-        <p:nvSpPr>
-          <p:cNvPr id="29" name="Shape 27"/>
-          <p:cNvSpPr/>
-          <p:nvPr/>
-        </p:nvSpPr>
-        <p:spPr>
-          <a:xfrm>
-            <a:off x="2514600" y="3310128"/>
-            <a:ext cx="6263640" cy="457200"/>
-          </a:xfrm>
-          <a:prstGeom prst="rect">
-            <a:avLst>
-              <a:gd name="adj" fmla="val 12000"/>
-            </a:avLst>
-          </a:prstGeom>
-          <a:solidFill>
-            <a:srgbClr val="F8FAFC"/>
-          </a:solidFill>
-          <a:ln w="12700">
-            <a:solidFill>
-              <a:srgbClr val="E2E8F0"/>
-            </a:solidFill>
-            <a:prstDash val="solid"/>
-          </a:ln>
-        </p:spPr>
-      </p:sp>
-      <p:sp>
-        <p:nvSpPr>
-          <p:cNvPr id="30" name="Text 28"/>
-          <p:cNvSpPr/>
-          <p:nvPr/>
-        </p:nvSpPr>
-        <p:spPr>
-          <a:xfrm>
-            <a:off x="2651760" y="3310128"/>
-            <a:ext cx="6035040" cy="457200"/>
-          </a:xfrm>
-          <a:prstGeom prst="rect">
-            <a:avLst/>
-          </a:prstGeom>
-          <a:noFill/>
-          <a:ln/>
-        </p:spPr>
-        <p:txBody>
-          <a:bodyPr wrap="square" rtlCol="0" anchor="ctr"/>
-          <a:lstStyle/>
-          <a:p>
-            <a:pPr algn="l" indent="0" marL="0">
-              <a:buNone/>
-            </a:pPr>
-            <a:r>
-              <a:rPr lang="en-US" sz="1200" dirty="0">
-                <a:solidFill>
-                  <a:srgbClr val="0F172A"/>
-                </a:solidFill>
-                <a:latin typeface="Calibri" pitchFamily="34" charset="0"/>
-                <a:ea typeface="Calibri" pitchFamily="34" charset="-122"/>
-                <a:cs typeface="Calibri" pitchFamily="34" charset="-120"/>
-              </a:rPr>
-              <a:t>A design made from a person's initials, often used on clothing or stationery.</a:t>
-            </a:r>
-            <a:endParaRPr lang="en-US" sz="1200" dirty="0"/>
-          </a:p>
-        </p:txBody>
-      </p:sp>
-      <p:sp>
-        <p:nvSpPr>
-          <p:cNvPr id="31" name="Shape 29"/>
-          <p:cNvSpPr/>
-          <p:nvPr/>
-        </p:nvSpPr>
-        <p:spPr>
-          <a:xfrm>
-            <a:off x="365760" y="3840480"/>
-            <a:ext cx="2011680" cy="457200"/>
-          </a:xfrm>
-          <a:prstGeom prst="rect">
-            <a:avLst>
-              <a:gd name="adj" fmla="val 12000"/>
-            </a:avLst>
-          </a:prstGeom>
-          <a:solidFill>
-            <a:srgbClr val="EEF2FF"/>
-          </a:solidFill>
-          <a:ln w="12700">
-            <a:solidFill>
-              <a:srgbClr val="6366F1"/>
-            </a:solidFill>
-            <a:prstDash val="solid"/>
-          </a:ln>
-          <a:effectLst>
-            <a:outerShdw sx="100000" sy="100000" kx="0" ky="0" algn="bl" rotWithShape="0" blurRad="101600" dist="38100" dir="8100000">
-              <a:srgbClr val="000000">
-                <a:alpha val="12000"/>
-              </a:srgbClr>
-            </a:outerShdw>
-          </a:effectLst>
-        </p:spPr>
-      </p:sp>
-      <p:sp>
-        <p:nvSpPr>
-          <p:cNvPr id="32" name="Text 30"/>
-          <p:cNvSpPr/>
-          <p:nvPr/>
-        </p:nvSpPr>
-        <p:spPr>
-          <a:xfrm>
-            <a:off x="365760" y="3840480"/>
-            <a:ext cx="2011680" cy="457200"/>
-          </a:xfrm>
-          <a:prstGeom prst="rect">
-            <a:avLst/>
-          </a:prstGeom>
-          <a:noFill/>
-          <a:ln/>
-        </p:spPr>
-        <p:txBody>
-          <a:bodyPr wrap="square" lIns="0" tIns="0" rIns="0" bIns="0" rtlCol="0" anchor="ctr"/>
-          <a:lstStyle/>
-          <a:p>
-            <a:pPr algn="ctr" indent="0" marL="0">
-              <a:buNone/>
-            </a:pPr>
-            <a:r>
-              <a:rPr lang="en-US" sz="1200" b="1" dirty="0">
-                <a:solidFill>
-                  <a:srgbClr val="4338CA"/>
-                </a:solidFill>
-                <a:latin typeface="Trebuchet MS" pitchFamily="34" charset="0"/>
-                <a:ea typeface="Trebuchet MS" pitchFamily="34" charset="-122"/>
-                <a:cs typeface="Trebuchet MS" pitchFamily="34" charset="-120"/>
-              </a:rPr>
-              <a:t>anagram</a:t>
-            </a:r>
-            <a:endParaRPr lang="en-US" sz="1200" dirty="0"/>
-          </a:p>
-        </p:txBody>
-      </p:sp>
-      <p:sp>
-        <p:nvSpPr>
-          <p:cNvPr id="33" name="Shape 31"/>
-          <p:cNvSpPr/>
-          <p:nvPr/>
-        </p:nvSpPr>
-        <p:spPr>
-          <a:xfrm>
-            <a:off x="2514600" y="3840480"/>
-            <a:ext cx="6263640" cy="457200"/>
-          </a:xfrm>
-          <a:prstGeom prst="rect">
-            <a:avLst>
-              <a:gd name="adj" fmla="val 12000"/>
-            </a:avLst>
-          </a:prstGeom>
-          <a:solidFill>
-            <a:srgbClr val="F8FAFC"/>
-          </a:solidFill>
-          <a:ln w="12700">
-            <a:solidFill>
-              <a:srgbClr val="E2E8F0"/>
-            </a:solidFill>
-            <a:prstDash val="solid"/>
-          </a:ln>
-        </p:spPr>
-      </p:sp>
-      <p:sp>
-        <p:nvSpPr>
-          <p:cNvPr id="34" name="Text 32"/>
-          <p:cNvSpPr/>
-          <p:nvPr/>
-        </p:nvSpPr>
-        <p:spPr>
-          <a:xfrm>
-            <a:off x="2651760" y="3840480"/>
-            <a:ext cx="6035040" cy="457200"/>
-          </a:xfrm>
-          <a:prstGeom prst="rect">
-            <a:avLst/>
-          </a:prstGeom>
-          <a:noFill/>
-          <a:ln/>
-        </p:spPr>
-        <p:txBody>
-          <a:bodyPr wrap="square" rtlCol="0" anchor="ctr"/>
-          <a:lstStyle/>
-          <a:p>
-            <a:pPr algn="l" indent="0" marL="0">
-              <a:buNone/>
-            </a:pPr>
-            <a:r>
-              <a:rPr lang="en-US" sz="1200" dirty="0">
-                <a:solidFill>
-                  <a:srgbClr val="0F172A"/>
-                </a:solidFill>
-                <a:latin typeface="Calibri" pitchFamily="34" charset="0"/>
-                <a:ea typeface="Calibri" pitchFamily="34" charset="-122"/>
-                <a:cs typeface="Calibri" pitchFamily="34" charset="-120"/>
-              </a:rPr>
-              <a:t>A short message sent quickly over long distances using electrical signals.</a:t>
-            </a:r>
-            <a:endParaRPr lang="en-US" sz="1200" dirty="0"/>
-          </a:p>
-        </p:txBody>
-      </p:sp>
-      <p:sp>
-        <p:nvSpPr>
-          <p:cNvPr id="35" name="Shape 33"/>
-          <p:cNvSpPr/>
-          <p:nvPr/>
-        </p:nvSpPr>
-        <p:spPr>
-          <a:xfrm>
-            <a:off x="365760" y="4370832"/>
-            <a:ext cx="2011680" cy="457200"/>
-          </a:xfrm>
-          <a:prstGeom prst="rect">
-            <a:avLst>
-              <a:gd name="adj" fmla="val 12000"/>
-            </a:avLst>
-          </a:prstGeom>
-          <a:solidFill>
-            <a:srgbClr val="EEF2FF"/>
-          </a:solidFill>
-          <a:ln w="12700">
-            <a:solidFill>
-              <a:srgbClr val="6366F1"/>
-            </a:solidFill>
-            <a:prstDash val="solid"/>
-          </a:ln>
-          <a:effectLst>
-            <a:outerShdw sx="100000" sy="100000" kx="0" ky="0" algn="bl" rotWithShape="0" blurRad="101600" dist="38100" dir="8100000">
-              <a:srgbClr val="000000">
-                <a:alpha val="12000"/>
-              </a:srgbClr>
-            </a:outerShdw>
-          </a:effectLst>
-        </p:spPr>
-      </p:sp>
-      <p:sp>
-        <p:nvSpPr>
-          <p:cNvPr id="36" name="Text 34"/>
-          <p:cNvSpPr/>
-          <p:nvPr/>
-        </p:nvSpPr>
-        <p:spPr>
-          <a:xfrm>
-            <a:off x="365760" y="4370832"/>
-            <a:ext cx="2011680" cy="457200"/>
-          </a:xfrm>
-          <a:prstGeom prst="rect">
-            <a:avLst/>
-          </a:prstGeom>
-          <a:noFill/>
-          <a:ln/>
-        </p:spPr>
-        <p:txBody>
-          <a:bodyPr wrap="square" lIns="0" tIns="0" rIns="0" bIns="0" rtlCol="0" anchor="ctr"/>
-          <a:lstStyle/>
-          <a:p>
-            <a:pPr algn="ctr" indent="0" marL="0">
-              <a:buNone/>
-            </a:pPr>
-            <a:r>
-              <a:rPr lang="en-US" sz="1200" b="1" dirty="0">
-                <a:solidFill>
-                  <a:srgbClr val="4338CA"/>
-                </a:solidFill>
-                <a:latin typeface="Trebuchet MS" pitchFamily="34" charset="0"/>
-                <a:ea typeface="Trebuchet MS" pitchFamily="34" charset="-122"/>
-                <a:cs typeface="Trebuchet MS" pitchFamily="34" charset="-120"/>
-              </a:rPr>
-              <a:t>grammar</a:t>
-            </a:r>
-            <a:endParaRPr lang="en-US" sz="1200" dirty="0"/>
-          </a:p>
-        </p:txBody>
-      </p:sp>
-      <p:sp>
-        <p:nvSpPr>
-          <p:cNvPr id="37" name="Shape 35"/>
-          <p:cNvSpPr/>
-          <p:nvPr/>
-        </p:nvSpPr>
-        <p:spPr>
-          <a:xfrm>
-            <a:off x="2514600" y="4370832"/>
-            <a:ext cx="6263640" cy="457200"/>
-          </a:xfrm>
-          <a:prstGeom prst="rect">
-            <a:avLst>
-              <a:gd name="adj" fmla="val 12000"/>
-            </a:avLst>
-          </a:prstGeom>
-          <a:solidFill>
-            <a:srgbClr val="F8FAFC"/>
-          </a:solidFill>
-          <a:ln w="12700">
-            <a:solidFill>
-              <a:srgbClr val="E2E8F0"/>
-            </a:solidFill>
-            <a:prstDash val="solid"/>
-          </a:ln>
-        </p:spPr>
-      </p:sp>
-      <p:sp>
-        <p:nvSpPr>
-          <p:cNvPr id="38" name="Text 36"/>
-          <p:cNvSpPr/>
-          <p:nvPr/>
-        </p:nvSpPr>
-        <p:spPr>
-          <a:xfrm>
-            <a:off x="2651760" y="4370832"/>
-            <a:ext cx="6035040" cy="457200"/>
-          </a:xfrm>
-          <a:prstGeom prst="rect">
-            <a:avLst/>
-          </a:prstGeom>
-          <a:noFill/>
-          <a:ln/>
-        </p:spPr>
-        <p:txBody>
-          <a:bodyPr wrap="square" rtlCol="0" anchor="ctr"/>
-          <a:lstStyle/>
-          <a:p>
-            <a:pPr algn="l" indent="0" marL="0">
-              <a:buNone/>
-            </a:pPr>
-            <a:r>
-              <a:rPr lang="en-US" sz="1200" dirty="0">
-                <a:solidFill>
-                  <a:srgbClr val="0F172A"/>
-                </a:solidFill>
-                <a:latin typeface="Calibri" pitchFamily="34" charset="0"/>
-                <a:ea typeface="Calibri" pitchFamily="34" charset="-122"/>
-                <a:cs typeface="Calibri" pitchFamily="34" charset="-120"/>
-              </a:rPr>
-              <a:t>A drawing or plan that explains how something works or what something looks like.</a:t>
+              <a:t>a small unit used for measuring how heavy something is</a:t>
             </a:r>
             <a:endParaRPr lang="en-US" sz="1200" dirty="0"/>
           </a:p>
@@ -41482,7 +41473,7 @@
                 <a:ea typeface="Calibri" pitchFamily="34" charset="-122"/>
                 <a:cs typeface="Calibri" pitchFamily="34" charset="-120"/>
               </a:rPr>
-              <a:t>Word Labs  •  wordlabs.app  •  Root: 'gram' = written, drawn, recorded</a:t>
+              <a:t>Word Labs  •  wordlabs.app  •  Root: 'gram' = written; something written</a:t>
             </a:r>
             <a:endParaRPr lang="en-US" sz="800" dirty="0"/>
           </a:p>
@@ -41685,7 +41676,7 @@
                 <a:ea typeface="Calibri" pitchFamily="34" charset="-122"/>
                 <a:cs typeface="Calibri" pitchFamily="34" charset="-120"/>
               </a:rPr>
-              <a:t>The scientist drew a clear diagram to show how the water cycle works.</a:t>
+              <a:t>The recipe needed one gram of yeast to make the bread rise.</a:t>
             </a:r>
             <a:endParaRPr lang="en-US" sz="1500" dirty="0"/>
           </a:p>
@@ -41849,7 +41840,7 @@
                 <a:ea typeface="Calibri" pitchFamily="34" charset="-122"/>
                 <a:cs typeface="Calibri" pitchFamily="34" charset="-120"/>
               </a:rPr>
-              <a:t>We sent a telegram to our grandparents to let them know we had arrived safely.</a:t>
+              <a:t>The scale showed the apple weighed two hundred grams.</a:t>
             </a:r>
             <a:endParaRPr lang="en-US" sz="1500" dirty="0"/>
           </a:p>
@@ -42013,7 +42004,7 @@
                 <a:ea typeface="Calibri" pitchFamily="34" charset="-122"/>
                 <a:cs typeface="Calibri" pitchFamily="34" charset="-120"/>
               </a:rPr>
-              <a:t>The computer program helped the students practise their multiplication facts.</a:t>
+              <a:t>The new fitness program starts on Monday.</a:t>
             </a:r>
             <a:endParaRPr lang="en-US" sz="1500" dirty="0"/>
           </a:p>
